--- a/downloads/presentations/modules/lesson-02-natural-language-processing-for-public-health.pptx
+++ b/downloads/presentations/modules/lesson-02-natural-language-processing-for-public-health.pptx
@@ -25,9 +25,11 @@
     <p:sldId id="273" r:id="rId19"/>
     <p:sldId id="274" r:id="rId20"/>
     <p:sldId id="275" r:id="rId21"/>
+    <p:sldId id="276" r:id="rId22"/>
+    <p:sldId id="277" r:id="rId23"/>
   </p:sldIdLst>
   <p:notesMasterIdLst>
-    <p:notesMasterId r:id="rId22"/>
+    <p:notesMasterId r:id="rId24"/>
   </p:notesMasterIdLst>
   <p:sldSz cx="12192000" cy="6858000"/>
   <p:notesSz cx="6858000" cy="12192000"/>
@@ -610,10 +612,9 @@
           <a:p>
             <a:r>
               <a:rPr lang="en-US" dirty="0"/>
-              <a:t>Risks, Failure Modes, and Guardrails
-Unsupported summaries. NLP tools may omit, distort, or invent information. Guardrails include source review, citations, factuality checks, and human approval.
-Language and accessibility gaps. Models may perform differently across languages, dialects, literacy levels, or disability-related communication needs. Guardrails include multilingual evaluation, accessibility review, and community context.
-Privacy exposure. Free text may contain sensitive or unexpected personal information. Guardrails include approved environments, de-identification when appropriate, access controls, and retention rules.</a:t>
+              <a:t>Public Health Example
+A contact center may receive hundreds of public inquiries during an outbreak. NLP could classify messages by topic, identify urgent issues, and draft response summaries for staff review. This can improve timeliness, but messages may contain sensitive information, emotional language, misinformation, or ambiguous requests. Staff need review procedures and escalation criteria.
+An environmental health program may use NLP to classify complaints about food safety, housing, water, pests, or nuisance conditions. The tool may help route complaints, but errors can affect response time and enforcement. The program should validate classification accuracy and ensure that original complaint text remains available to reviewers.</a:t>
             </a:r>
             <a:endParaRPr lang="en-US" dirty="0"/>
           </a:p>
@@ -701,8 +702,10 @@
           <a:p>
             <a:r>
               <a:rPr lang="en-US" dirty="0"/>
-              <a:t>Risks, Failure Modes, and Guardrails
-Misclassification. Incorrect labels can affect routing or priority. Guardrails include validation, confidence thresholds, review queues, and monitoring of overrides.</a:t>
+              <a:t>Technical Deep Dive
+NLP implementation begins with task definition. Extraction, classification, summarization, translation, topic modeling, and question answering are different tasks with different evaluation methods. A tool that performs well at summarization may perform poorly at extracting dates or classifying urgency. Staff should define the task narrowly before selecting or testing a tool.
+Evaluation should use representative source text. Test examples should include common language, uncommon language, abbreviations, misspellings, multilingual text, ambiguous statements, negation, sensitive information, and edge cases. Performance should be reviewed by people who understand the public health workflow, not only by technical staff.
+Privacy and source traceability are central. NLP may process sensitive case notes, complaints, or community feedback. The agency must define whether the data can be used, where processing occurs, how outputs are stored, who can access them, and how source text is preserved. For consequential uses, users should be able to trace extracted facts or summaries back to the original text.</a:t>
             </a:r>
             <a:endParaRPr lang="en-US" dirty="0"/>
           </a:p>
@@ -790,8 +793,10 @@
           <a:p>
             <a:r>
               <a:rPr lang="en-US" dirty="0"/>
-              <a:t>Application to AI-Supported Workflows
-Generative AI is often used for summarization, drafting, and question answering, but outputs must be checked against source material. Predictive analytics may use NLP-derived features, so extraction quality affects model performance. RAG systems use NLP to retrieve and summarize documents, which requires document governance and source citation. Agentic AI using NLP to trigger actions should require clear thresholds and human approval for consequential steps.</a:t>
+              <a:t>Risks, Failure Modes, and Guardrails
+Unsupported summaries. NLP tools may omit, distort, or invent information. Guardrails include source review, citations, factuality checks, and human approval.
+Language and accessibility gaps. Models may perform differently across languages, dialects, literacy levels, or disability-related communication needs. Guardrails include multilingual evaluation, accessibility review, and community context.
+Privacy exposure. Free text may contain sensitive or unexpected personal information. Guardrails include approved environments, de-identification when appropriate, access controls, and retention rules.</a:t>
             </a:r>
             <a:endParaRPr lang="en-US" dirty="0"/>
           </a:p>
@@ -879,10 +884,8 @@
           <a:p>
             <a:r>
               <a:rPr lang="en-US" dirty="0"/>
-              <a:t>Reflection Questions
-Which public health workflows involve large volumes of free text?
-What task would NLP support: extraction, classification, summarization, translation, or topic detection?
-What errors would be most harmful?</a:t>
+              <a:t>Risks, Failure Modes, and Guardrails
+Misclassification. Incorrect labels can affect routing or priority. Guardrails include validation, confidence thresholds, review queues, and monitoring of overrides.</a:t>
             </a:r>
             <a:endParaRPr lang="en-US" dirty="0"/>
           </a:p>
@@ -970,9 +973,8 @@
           <a:p>
             <a:r>
               <a:rPr lang="en-US" dirty="0"/>
-              <a:t>Reflection Questions
-What source material must be retained for human review?
-How will staff evaluate accuracy across languages, populations, and program areas?</a:t>
+              <a:t>Application to AI-Supported Workflows
+Generative AI is often used for summarization, drafting, and question answering, but outputs must be checked against source material. Predictive analytics may use NLP-derived features, so extraction quality affects model performance. RAG systems use NLP to retrieve and summarize documents, which requires document governance and source citation. Agentic AI using NLP to trigger actions should require clear thresholds and human approval for consequential steps.</a:t>
             </a:r>
             <a:endParaRPr lang="en-US" dirty="0"/>
           </a:p>
@@ -1060,8 +1062,10 @@
           <a:p>
             <a:r>
               <a:rPr lang="en-US" dirty="0"/>
-              <a:t>Practical Exercise
-Create an NLP evaluation plan for one public health workflow. Include the text source, NLP task, intended use, prohibited use, required human review, accuracy measures, bias or subgroup review, privacy safeguards, source citation or traceability expectations, and escalation process.</a:t>
+              <a:t>Reflection Questions
+Which public health workflows involve large volumes of free text?
+What task would NLP support: extraction, classification, summarization, translation, or topic detection?
+What errors would be most harmful?</a:t>
             </a:r>
             <a:endParaRPr lang="en-US" dirty="0"/>
           </a:p>
@@ -1149,10 +1153,9 @@
           <a:p>
             <a:r>
               <a:rPr lang="en-US" dirty="0"/>
-              <a:t>Expected Artifact or Evidence
-NLP use case description
-NLP evaluation plan
-Human review checklist</a:t>
+              <a:t>Reflection Questions
+What source material must be retained for human review?
+How will staff evaluate accuracy across languages, populations, and program areas?</a:t>
             </a:r>
             <a:endParaRPr lang="en-US" dirty="0"/>
           </a:p>
@@ -1240,8 +1243,8 @@
           <a:p>
             <a:r>
               <a:rPr lang="en-US" dirty="0"/>
-              <a:t>Expected Artifact or Evidence
-Source verification and privacy safeguards</a:t>
+              <a:t>Practical Exercise
+Create an NLP evaluation plan for one public health workflow. Include the text source, NLP task, intended use, prohibited use, required human review, accuracy measures, bias or subgroup review, privacy safeguards, source citation or traceability expectations, and escalation process.</a:t>
             </a:r>
             <a:endParaRPr lang="en-US" dirty="0"/>
           </a:p>
@@ -1329,11 +1332,10 @@
           <a:p>
             <a:r>
               <a:rPr lang="en-US" dirty="0"/>
-              <a:t>Expected Assignment
+              <a:t>Expected Artifact or Evidence
 NLP use case description
 NLP evaluation plan
-Human review checklist
-Source verification and privacy safeguards</a:t>
+Human review checklist</a:t>
             </a:r>
             <a:endParaRPr lang="en-US" dirty="0"/>
           </a:p>
@@ -1421,12 +1423,8 @@
           <a:p>
             <a:r>
               <a:rPr lang="en-US" dirty="0"/>
-              <a:t>Knowledge Check
-1. What is NLP?
-2. Which task is an example of information extraction?
-3. Why is source verification important for NLP outputs?
-4. Which NLP use requires strong safeguards?
-5. What is strong completion evidence for this module?</a:t>
+              <a:t>Expected Artifact or Evidence
+Source verification and privacy safeguards</a:t>
             </a:r>
             <a:endParaRPr lang="en-US" dirty="0"/>
           </a:p>
@@ -1606,12 +1604,11 @@
           <a:p>
             <a:r>
               <a:rPr lang="en-US" dirty="0"/>
-              <a:t>References and Resources
-NIST Artificial Intelligence Risk Management Framework: https://www.nist.gov/itl/ai-risk-management-framework
-NIST AI RMF Generative AI Profile: https://www.nist.gov/publications/artificial-intelligence-risk-management-framework-generative-artificial-intelligence
-WHO Guidance on Large Multi-Modal Models: https://www.who.int/publications/i/item/9789240084759
-CDC Public Health Data Strategy: https://www.cdc.gov/public-health-data-strategy/php/about/index.html
-Agency privacy, records, data governance, and program policies</a:t>
+              <a:t>Expected Assignment
+NLP use case description
+NLP evaluation plan
+Human review checklist
+Source verification and privacy safeguards</a:t>
             </a:r>
             <a:endParaRPr lang="en-US" dirty="0"/>
           </a:p>
@@ -1635,6 +1632,192 @@
             <a:fld id="{F7021451-1387-4CA6-816F-3879F97B5CBC}" type="slidenum">
               <a:rPr lang="en-US"/>
               <a:t>20</a:t>
+            </a:fld>
+            <a:endParaRPr lang="en-US"/>
+          </a:p>
+        </p:txBody>
+      </p:sp>
+    </p:spTree>
+    <p:extLst>
+      <p:ext uri="{BB962C8B-B14F-4D97-AF65-F5344CB8AC3E}">
+        <p14:creationId xmlns:p14="http://schemas.microsoft.com/office/powerpoint/2010/main" val="1024086991"/>
+      </p:ext>
+    </p:extLst>
+  </p:cSld>
+  <p:clrMapOvr>
+    <a:masterClrMapping/>
+  </p:clrMapOvr>
+</p:notes>
+</file>
+
+<file path=ppt/notesSlides/notesSlide21.xml><?xml version="1.0" encoding="utf-8"?>
+<p:notes xmlns:a="http://schemas.openxmlformats.org/drawingml/2006/main" xmlns:r="http://schemas.openxmlformats.org/officeDocument/2006/relationships" xmlns:p="http://schemas.openxmlformats.org/presentationml/2006/main">
+  <p:cSld>
+    <p:spTree>
+      <p:nvGrpSpPr>
+        <p:cNvPr id="1" name=""/>
+        <p:cNvGrpSpPr/>
+        <p:nvPr/>
+      </p:nvGrpSpPr>
+      <p:grpSpPr>
+        <a:xfrm>
+          <a:off x="0" y="0"/>
+          <a:ext cx="0" cy="0"/>
+          <a:chOff x="0" y="0"/>
+          <a:chExt cx="0" cy="0"/>
+        </a:xfrm>
+      </p:grpSpPr>
+      <p:sp>
+        <p:nvSpPr>
+          <p:cNvPr id="2" name="Slide Image Placeholder 1"/>
+          <p:cNvSpPr>
+            <a:spLocks noGrp="1" noRot="1" noChangeAspect="1"/>
+          </p:cNvSpPr>
+          <p:nvPr>
+            <p:ph type="sldImg"/>
+          </p:nvPr>
+        </p:nvSpPr>
+        <p:spPr/>
+      </p:sp>
+      <p:sp>
+        <p:nvSpPr>
+          <p:cNvPr id="3" name="Notes Placeholder 2"/>
+          <p:cNvSpPr>
+            <a:spLocks noGrp="1"/>
+          </p:cNvSpPr>
+          <p:nvPr>
+            <p:ph type="body" idx="1"/>
+          </p:nvPr>
+        </p:nvSpPr>
+        <p:spPr/>
+        <p:txBody>
+          <a:bodyPr/>
+          <a:lstStyle/>
+          <a:p>
+            <a:r>
+              <a:rPr lang="en-US" dirty="0"/>
+              <a:t>Knowledge Check
+1. What is NLP?
+2. Which task is an example of information extraction?
+3. Why is source verification important for NLP outputs?
+4. Which NLP use requires strong safeguards?
+5. What is strong completion evidence for this module?</a:t>
+            </a:r>
+            <a:endParaRPr lang="en-US" dirty="0"/>
+          </a:p>
+        </p:txBody>
+      </p:sp>
+      <p:sp>
+        <p:nvSpPr>
+          <p:cNvPr id="4" name="Slide Number Placeholder 3"/>
+          <p:cNvSpPr>
+            <a:spLocks noGrp="1"/>
+          </p:cNvSpPr>
+          <p:nvPr>
+            <p:ph type="sldNum" sz="quarter" idx="10"/>
+          </p:nvPr>
+        </p:nvSpPr>
+        <p:spPr/>
+        <p:txBody>
+          <a:bodyPr/>
+          <a:lstStyle/>
+          <a:p>
+            <a:fld id="{F7021451-1387-4CA6-816F-3879F97B5CBC}" type="slidenum">
+              <a:rPr lang="en-US"/>
+              <a:t>21</a:t>
+            </a:fld>
+            <a:endParaRPr lang="en-US"/>
+          </a:p>
+        </p:txBody>
+      </p:sp>
+    </p:spTree>
+    <p:extLst>
+      <p:ext uri="{BB962C8B-B14F-4D97-AF65-F5344CB8AC3E}">
+        <p14:creationId xmlns:p14="http://schemas.microsoft.com/office/powerpoint/2010/main" val="1024086991"/>
+      </p:ext>
+    </p:extLst>
+  </p:cSld>
+  <p:clrMapOvr>
+    <a:masterClrMapping/>
+  </p:clrMapOvr>
+</p:notes>
+</file>
+
+<file path=ppt/notesSlides/notesSlide22.xml><?xml version="1.0" encoding="utf-8"?>
+<p:notes xmlns:a="http://schemas.openxmlformats.org/drawingml/2006/main" xmlns:r="http://schemas.openxmlformats.org/officeDocument/2006/relationships" xmlns:p="http://schemas.openxmlformats.org/presentationml/2006/main">
+  <p:cSld>
+    <p:spTree>
+      <p:nvGrpSpPr>
+        <p:cNvPr id="1" name=""/>
+        <p:cNvGrpSpPr/>
+        <p:nvPr/>
+      </p:nvGrpSpPr>
+      <p:grpSpPr>
+        <a:xfrm>
+          <a:off x="0" y="0"/>
+          <a:ext cx="0" cy="0"/>
+          <a:chOff x="0" y="0"/>
+          <a:chExt cx="0" cy="0"/>
+        </a:xfrm>
+      </p:grpSpPr>
+      <p:sp>
+        <p:nvSpPr>
+          <p:cNvPr id="2" name="Slide Image Placeholder 1"/>
+          <p:cNvSpPr>
+            <a:spLocks noGrp="1" noRot="1" noChangeAspect="1"/>
+          </p:cNvSpPr>
+          <p:nvPr>
+            <p:ph type="sldImg"/>
+          </p:nvPr>
+        </p:nvSpPr>
+        <p:spPr/>
+      </p:sp>
+      <p:sp>
+        <p:nvSpPr>
+          <p:cNvPr id="3" name="Notes Placeholder 2"/>
+          <p:cNvSpPr>
+            <a:spLocks noGrp="1"/>
+          </p:cNvSpPr>
+          <p:nvPr>
+            <p:ph type="body" idx="1"/>
+          </p:nvPr>
+        </p:nvSpPr>
+        <p:spPr/>
+        <p:txBody>
+          <a:bodyPr/>
+          <a:lstStyle/>
+          <a:p>
+            <a:r>
+              <a:rPr lang="en-US" dirty="0"/>
+              <a:t>References and Resources
+NIST Artificial Intelligence Risk Management Framework: https://www.nist.gov/itl/ai-risk-management-framework
+NIST AI RMF Generative AI Profile: https://www.nist.gov/publications/artificial-intelligence-risk-management-framework-generative-artificial-intelligence
+WHO Guidance on Large Multi-Modal Models: https://www.who.int/publications/i/item/9789240084759
+CDC Public Health Data Strategy: https://www.cdc.gov/public-health-data-strategy/php/about/index.html
+Agency privacy, records, data governance, and program policies</a:t>
+            </a:r>
+            <a:endParaRPr lang="en-US" dirty="0"/>
+          </a:p>
+        </p:txBody>
+      </p:sp>
+      <p:sp>
+        <p:nvSpPr>
+          <p:cNvPr id="4" name="Slide Number Placeholder 3"/>
+          <p:cNvSpPr>
+            <a:spLocks noGrp="1"/>
+          </p:cNvSpPr>
+          <p:nvPr>
+            <p:ph type="sldNum" sz="quarter" idx="10"/>
+          </p:nvPr>
+        </p:nvSpPr>
+        <p:spPr/>
+        <p:txBody>
+          <a:bodyPr/>
+          <a:lstStyle/>
+          <a:p>
+            <a:fld id="{F7021451-1387-4CA6-816F-3879F97B5CBC}" type="slidenum">
+              <a:rPr lang="en-US"/>
+              <a:t>22</a:t>
             </a:fld>
             <a:endParaRPr lang="en-US"/>
           </a:p>
@@ -1699,12 +1882,11 @@
           <a:p>
             <a:r>
               <a:rPr lang="en-US" dirty="0"/>
-              <a:t>Learning Objectives
-Define NLP in plain language and distinguish common NLP tasks.
-Identify public health workflows where NLP may be useful.
-Assess risks related to accuracy, bias, privacy, hallucination, language, and missing context.
-Define source verification and human review requirements for NLP outputs.
-Produce an NLP evaluation plan for one public health workflow.</a:t>
+              <a:t>Related Playbook Plays
+Play 11: Build and Deploy AI Solutions - This lesson informs Play 11 by helping learners connect the lesson topic to build and deploy ai solutions work in the AI Playbook.
+Play 2: Readiness Assessment - This lesson informs Play 2 by helping learners connect the lesson topic to readiness assessment work in the AI Playbook sequence.
+Play 7: Prioritize Use Cases - This lesson informs Play 7 by helping learners connect the lesson topic to prioritize use cases work in the AI Playbook sequence.
+Play 1: Vision &amp; Guardrails - This lesson informs Play 1 by helping learners connect the lesson topic to vision &amp; guardrails work in the AI Playbook sequence.</a:t>
             </a:r>
             <a:endParaRPr lang="en-US" dirty="0"/>
           </a:p>
@@ -1792,8 +1974,13 @@
           <a:p>
             <a:r>
               <a:rPr lang="en-US" dirty="0"/>
-              <a:t>Module Overview
-Natural language processing is a branch of AI that works with human language. Public health agencies often hold important information in free-text sources, including clinical notes, case narratives, call center logs, inspection reports, complaints, death certificate text, public comments, and community feedback. This module teaches learners how NLP can support public health work and how to evaluate its risks.</a:t>
+              <a:t>Related Toolkit Resources
+Tool 4: AI Policy Landscape Scan (Worksheet) - Use AI Policy Landscape Scan to translate this lesson into a documented public health AI planning, governance, implementation,.
+Tool 5: AI Environmental and Resource Impact Review (Checklist) - Use AI Environmental and Resource Impact Review to translate this lesson into a documented public health AI planning,.
+Tool 6: Human-Centered AI Decision Rule Checklist (Checklist) - Use Human-Centered AI Decision Rule Checklist to translate this lesson into a documented public health AI planning, governance,.
+Tool 8: AI Project Charter (Planning) - Use AI Project Charter to translate this lesson into a documented public health AI planning, governance, implementation, or.
+Tool 9: Data Quality Assessment Checklist (Checklist) - Use this tool to complete or strengthen the practical exercise for the module using fictional, de-identified, or generalized.
+Tool 10: Tiered Data Classification for AI Use (Worksheet) - Use this tool to complete or strengthen the practical exercise for the module using fictional, de-identified, or generalized.</a:t>
             </a:r>
             <a:endParaRPr lang="en-US" dirty="0"/>
           </a:p>
@@ -1881,10 +2068,12 @@
           <a:p>
             <a:r>
               <a:rPr lang="en-US" dirty="0"/>
-              <a:t>Why This Topic Matters for Public Health AI
-NLP can reduce burden by helping staff find, organize, classify, extract, translate, or summarize information from large volumes of text. It can support case investigation, environmental health complaint triage, syndromic surveillance, public inquiry response, community engagement analysis, and policy review. However, text is often ambiguous, incomplete, sensitive, and context-dependent.
-NLP outputs should not be treated as facts without review. A tool may omit important details, misread abbreviations, misunderstand negation, translate poorly, or generate a summary that sounds correct but is not supported by the source. Public health text may also include legal, clinical, cultural, or community context that a model does not understand.
-For technical staff, NLP evaluation requires more than checking whether outputs sound fluent. The agency should define the task, intended use, prohibited use, source material, review process, performance measures, subgroup considerations, privacy safeguards, and escalation pathway.</a:t>
+              <a:t>Learning Objectives
+Define NLP in plain language and distinguish common NLP tasks.
+Identify public health workflows where NLP may be useful.
+Assess risks related to accuracy, bias, privacy, hallucination, language, and missing context.
+Define source verification and human review requirements for NLP outputs.
+Produce an NLP evaluation plan for one public health workflow.</a:t>
             </a:r>
             <a:endParaRPr lang="en-US" dirty="0"/>
           </a:p>
@@ -1972,10 +2161,8 @@
           <a:p>
             <a:r>
               <a:rPr lang="en-US" dirty="0"/>
-              <a:t>Core Concepts
-Natural language processing. NLP refers to AI methods that process, analyze, classify, summarize, extract, translate, or generate human language. It can work with structured prompts, free-text notes, documents, emails, calls, complaints, or reports.
-Information extraction. Information extraction pulls specific facts from text, such as symptoms, dates, locations, exposures, risk factors, facility names, or requested services. Extraction should be validated against source text.
-Text classification. Text classification assigns text to categories, such as complaint type, urgency, topic, likely condition, or program area. Classification requires labeled examples, clear categories, and evaluation.</a:t>
+              <a:t>Module Overview
+Natural language processing is a branch of AI that works with human language. Public health agencies often hold important information in free-text sources, including clinical notes, case narratives, call center logs, inspection reports, complaints, death certificate text, public comments, and community feedback. This module teaches learners how NLP can support public health work and how to evaluate its risks.</a:t>
             </a:r>
             <a:endParaRPr lang="en-US" dirty="0"/>
           </a:p>
@@ -2063,9 +2250,10 @@
           <a:p>
             <a:r>
               <a:rPr lang="en-US" dirty="0"/>
-              <a:t>Core Concepts
-Summarization. Summarization creates a shorter version of longer text. Public health summarization should preserve uncertainty, cite sources when possible, and avoid adding unsupported claims.
-Hallucination. A hallucination is an AI-generated statement that is false, unsupported, or not present in the source material. Hallucination risk is especially important when summaries influence public health decisions or communications.</a:t>
+              <a:t>Why This Topic Matters for Public Health AI
+NLP can reduce burden by helping staff find, organize, classify, extract, translate, or summarize information from large volumes of text. It can support case investigation, environmental health complaint triage, syndromic surveillance, public inquiry response, community engagement analysis, and policy review. However, text is often ambiguous, incomplete, sensitive, and context-dependent.
+NLP outputs should not be treated as facts without review. A tool may omit important details, misread abbreviations, misunderstand negation, translate poorly, or generate a summary that sounds correct but is not supported by the source. Public health text may also include legal, clinical, cultural, or community context that a model does not understand.
+For technical staff, NLP evaluation requires more than checking whether outputs sound fluent. The agency should define the task, intended use, prohibited use, source material, review process, performance measures, subgroup considerations, privacy safeguards, and escalation pathway.</a:t>
             </a:r>
             <a:endParaRPr lang="en-US" dirty="0"/>
           </a:p>
@@ -2153,9 +2341,10 @@
           <a:p>
             <a:r>
               <a:rPr lang="en-US" dirty="0"/>
-              <a:t>Public Health Example
-A contact center may receive hundreds of public inquiries during an outbreak. NLP could classify messages by topic, identify urgent issues, and draft response summaries for staff review. This can improve timeliness, but messages may contain sensitive information, emotional language, misinformation, or ambiguous requests. Staff need review procedures and escalation criteria.
-An environmental health program may use NLP to classify complaints about food safety, housing, water, pests, or nuisance conditions. The tool may help route complaints, but errors can affect response time and enforcement. The program should validate classification accuracy and ensure that original complaint text remains available to reviewers.</a:t>
+              <a:t>Core Concepts
+Natural language processing. NLP refers to AI methods that process, analyze, classify, summarize, extract, translate, or generate human language. It can work with structured prompts, free-text notes, documents, emails, calls, complaints, or reports.
+Information extraction. Information extraction pulls specific facts from text, such as symptoms, dates, locations, exposures, risk factors, facility names, or requested services. Extraction should be validated against source text.
+Text classification. Text classification assigns text to categories, such as complaint type, urgency, topic, likely condition, or program area. Classification requires labeled examples, clear categories, and evaluation.</a:t>
             </a:r>
             <a:endParaRPr lang="en-US" dirty="0"/>
           </a:p>
@@ -2243,10 +2432,9 @@
           <a:p>
             <a:r>
               <a:rPr lang="en-US" dirty="0"/>
-              <a:t>Technical Deep Dive
-NLP implementation begins with task definition. Extraction, classification, summarization, translation, topic modeling, and question answering are different tasks with different evaluation methods. A tool that performs well at summarization may perform poorly at extracting dates or classifying urgency. Staff should define the task narrowly before selecting or testing a tool.
-Evaluation should use representative source text. Test examples should include common language, uncommon language, abbreviations, misspellings, multilingual text, ambiguous statements, negation, sensitive information, and edge cases. Performance should be reviewed by people who understand the public health workflow, not only by technical staff.
-Privacy and source traceability are central. NLP may process sensitive case notes, complaints, or community feedback. The agency must define whether the data can be used, where processing occurs, how outputs are stored, who can access them, and how source text is preserved. For consequential uses, users should be able to trace extracted facts or summaries back to the original text.</a:t>
+              <a:t>Core Concepts
+Summarization. Summarization creates a shorter version of longer text. Public health summarization should preserve uncertainty, cite sources when possible, and avoid adding unsupported claims.
+Hallucination. A hallucination is an AI-generated statement that is false, unsupported, or not present in the source material. Hallucination risk is especially important when summaries influence public health decisions or communications.</a:t>
             </a:r>
             <a:endParaRPr lang="en-US" dirty="0"/>
           </a:p>
@@ -2869,7 +3057,32 @@
       </p:sp>
       <p:sp>
         <p:nvSpPr>
-          <p:cNvPr id="3" name="Text 1"/>
+          <p:cNvPr id="3" name="Shape 1"/>
+          <p:cNvSpPr/>
+          <p:nvPr/>
+        </p:nvSpPr>
+        <p:spPr>
+          <a:xfrm>
+            <a:off x="0" y="164592"/>
+            <a:ext cx="146304" cy="6693408"/>
+          </a:xfrm>
+          <a:prstGeom prst="rect">
+            <a:avLst/>
+          </a:prstGeom>
+          <a:solidFill>
+            <a:srgbClr val="2F8A28"/>
+          </a:solidFill>
+          <a:ln w="12700">
+            <a:solidFill>
+              <a:srgbClr val="2F8A28"/>
+            </a:solidFill>
+            <a:prstDash val="solid"/>
+          </a:ln>
+        </p:spPr>
+      </p:sp>
+      <p:sp>
+        <p:nvSpPr>
+          <p:cNvPr id="4" name="Text 2"/>
           <p:cNvSpPr/>
           <p:nvPr/>
         </p:nvSpPr>
@@ -2908,7 +3121,7 @@
       </p:sp>
       <p:sp>
         <p:nvSpPr>
-          <p:cNvPr id="4" name="Text 2"/>
+          <p:cNvPr id="5" name="Text 3"/>
           <p:cNvSpPr/>
           <p:nvPr/>
         </p:nvSpPr>
@@ -2947,7 +3160,7 @@
       </p:sp>
       <p:sp>
         <p:nvSpPr>
-          <p:cNvPr id="5" name="Text 3"/>
+          <p:cNvPr id="6" name="Text 4"/>
           <p:cNvSpPr/>
           <p:nvPr/>
         </p:nvSpPr>
@@ -2986,13 +3199,77 @@
       </p:sp>
       <p:sp>
         <p:nvSpPr>
-          <p:cNvPr id="6" name="Text 4"/>
+          <p:cNvPr id="7" name="Shape 5"/>
           <p:cNvSpPr/>
           <p:nvPr/>
         </p:nvSpPr>
         <p:spPr>
           <a:xfrm>
             <a:off x="640080" y="658368"/>
+            <a:ext cx="420624" cy="420624"/>
+          </a:xfrm>
+          <a:prstGeom prst="ellipse">
+            <a:avLst/>
+          </a:prstGeom>
+          <a:solidFill>
+            <a:srgbClr val="0068B7"/>
+          </a:solidFill>
+          <a:ln w="12700">
+            <a:solidFill>
+              <a:srgbClr val="0068B7"/>
+            </a:solidFill>
+            <a:prstDash val="solid"/>
+          </a:ln>
+        </p:spPr>
+      </p:sp>
+      <p:sp>
+        <p:nvSpPr>
+          <p:cNvPr id="8" name="Text 6"/>
+          <p:cNvSpPr/>
+          <p:nvPr/>
+        </p:nvSpPr>
+        <p:spPr>
+          <a:xfrm>
+            <a:off x="640080" y="731520"/>
+            <a:ext cx="420624" cy="164592"/>
+          </a:xfrm>
+          <a:prstGeom prst="rect">
+            <a:avLst/>
+          </a:prstGeom>
+          <a:noFill/>
+          <a:ln/>
+        </p:spPr>
+        <p:txBody>
+          <a:bodyPr wrap="square" lIns="0" tIns="0" rIns="0" bIns="0" rtlCol="0" anchor="ctr"/>
+          <a:lstStyle/>
+          <a:p>
+            <a:pPr algn="ctr" indent="0" marL="0">
+              <a:buNone/>
+            </a:pPr>
+            <a:r>
+              <a:rPr lang="en-US" sz="1100" b="1" dirty="0">
+                <a:solidFill>
+                  <a:srgbClr val="FFFFFF"/>
+                </a:solidFill>
+                <a:latin typeface="Aptos" pitchFamily="34" charset="0"/>
+                <a:ea typeface="Aptos" pitchFamily="34" charset="-122"/>
+                <a:cs typeface="Aptos" pitchFamily="34" charset="-120"/>
+              </a:rPr>
+              <a:t>5</a:t>
+            </a:r>
+            <a:endParaRPr lang="en-US" sz="1100" dirty="0"/>
+          </a:p>
+        </p:txBody>
+      </p:sp>
+      <p:sp>
+        <p:nvSpPr>
+          <p:cNvPr id="9" name="Text 7"/>
+          <p:cNvSpPr/>
+          <p:nvPr/>
+        </p:nvSpPr>
+        <p:spPr>
+          <a:xfrm>
+            <a:off x="640080" y="621792"/>
             <a:ext cx="10881360" cy="566928"/>
           </a:xfrm>
           <a:prstGeom prst="rect">
@@ -3019,7 +3296,7 @@
                 <a:ea typeface="Aptos Display" pitchFamily="34" charset="-122"/>
                 <a:cs typeface="Aptos Display" pitchFamily="34" charset="-120"/>
               </a:rPr>
-              <a:t>Risks, Failure Modes, and Guardrails</a:t>
+              <a:t>Public Health Example</a:t>
             </a:r>
             <a:endParaRPr lang="en-US" sz="2700" dirty="0"/>
           </a:p>
@@ -3027,32 +3304,178 @@
       </p:sp>
       <p:sp>
         <p:nvSpPr>
-          <p:cNvPr id="7" name="Text 5"/>
-          <p:cNvSpPr/>
-          <p:nvPr/>
-        </p:nvSpPr>
-        <p:spPr>
-          <a:xfrm>
-            <a:off x="822960" y="1325880"/>
-            <a:ext cx="10378440" cy="4800600"/>
-          </a:xfrm>
-          <a:prstGeom prst="rect">
-            <a:avLst/>
-          </a:prstGeom>
-          <a:noFill/>
-          <a:ln/>
-        </p:spPr>
-        <p:txBody>
-          <a:bodyPr wrap="square" lIns="1016" tIns="1016" rIns="1016" bIns="1016" rtlCol="0" anchor="t">
+          <p:cNvPr id="10" name="Text 8"/>
+          <p:cNvSpPr/>
+          <p:nvPr/>
+        </p:nvSpPr>
+        <p:spPr>
+          <a:xfrm>
+            <a:off x="868680" y="1417320"/>
+            <a:ext cx="6675120" cy="4434840"/>
+          </a:xfrm>
+          <a:prstGeom prst="rect">
+            <a:avLst/>
+          </a:prstGeom>
+          <a:noFill/>
+          <a:ln/>
+        </p:spPr>
+        <p:txBody>
+          <a:bodyPr wrap="square" lIns="635" tIns="635" rIns="635" bIns="635" rtlCol="0" anchor="t">
             <a:normAutofit/>
           </a:bodyPr>
           <a:lstStyle/>
           <a:p>
+            <a:r>
+              <a:rPr lang="en-US" sz="1700" dirty="0">
+                <a:solidFill>
+                  <a:srgbClr val="17364A"/>
+                </a:solidFill>
+                <a:latin typeface="Aptos" pitchFamily="34" charset="0"/>
+                <a:ea typeface="Aptos" pitchFamily="34" charset="-122"/>
+                <a:cs typeface="Aptos" pitchFamily="34" charset="-120"/>
+              </a:rPr>
+              <a:t>A contact center may receive hundreds of public inquiries during an outbreak.</a:t>
+            </a:r>
+            <a:endParaRPr lang="en-US" sz="1700" dirty="0"/>
+          </a:p>
+          <a:p>
+            <a:r>
+              <a:rPr lang="en-US" sz="1700" dirty="0">
+                <a:solidFill>
+                  <a:srgbClr val="17364A"/>
+                </a:solidFill>
+                <a:latin typeface="Aptos" pitchFamily="34" charset="0"/>
+                <a:ea typeface="Aptos" pitchFamily="34" charset="-122"/>
+                <a:cs typeface="Aptos" pitchFamily="34" charset="-120"/>
+              </a:rPr>
+              <a:t>NLP could classify messages by topic, identify urgent issues, and draft response summaries for staff review.</a:t>
+            </a:r>
+            <a:endParaRPr lang="en-US" sz="1700" dirty="0"/>
+          </a:p>
+          <a:p>
+            <a:r>
+              <a:rPr lang="en-US" sz="1700" dirty="0">
+                <a:solidFill>
+                  <a:srgbClr val="17364A"/>
+                </a:solidFill>
+                <a:latin typeface="Aptos" pitchFamily="34" charset="0"/>
+                <a:ea typeface="Aptos" pitchFamily="34" charset="-122"/>
+                <a:cs typeface="Aptos" pitchFamily="34" charset="-120"/>
+              </a:rPr>
+              <a:t>This can improve timeliness, but messages may contain sensitive information, emotional language, misinformation, or.</a:t>
+            </a:r>
+            <a:endParaRPr lang="en-US" sz="1700" dirty="0"/>
+          </a:p>
+          <a:p>
+            <a:r>
+              <a:rPr lang="en-US" sz="1700" dirty="0">
+                <a:solidFill>
+                  <a:srgbClr val="17364A"/>
+                </a:solidFill>
+                <a:latin typeface="Aptos" pitchFamily="34" charset="0"/>
+                <a:ea typeface="Aptos" pitchFamily="34" charset="-122"/>
+                <a:cs typeface="Aptos" pitchFamily="34" charset="-120"/>
+              </a:rPr>
+              <a:t>Staff need review procedures and escalation criteria.</a:t>
+            </a:r>
+            <a:endParaRPr lang="en-US" sz="1700" dirty="0"/>
+          </a:p>
+        </p:txBody>
+      </p:sp>
+      <p:sp>
+        <p:nvSpPr>
+          <p:cNvPr id="11" name="Shape 9"/>
+          <p:cNvSpPr/>
+          <p:nvPr/>
+        </p:nvSpPr>
+        <p:spPr>
+          <a:xfrm>
+            <a:off x="7909560" y="1417320"/>
+            <a:ext cx="3154680" cy="1828800"/>
+          </a:xfrm>
+          <a:prstGeom prst="roundRect">
+            <a:avLst>
+              <a:gd name="adj" fmla="val 6000"/>
+            </a:avLst>
+          </a:prstGeom>
+          <a:solidFill>
+            <a:srgbClr val="EEF8ED"/>
+          </a:solidFill>
+          <a:ln w="12700">
+            <a:solidFill>
+              <a:srgbClr val="B9D7E6"/>
+            </a:solidFill>
+            <a:prstDash val="solid"/>
+          </a:ln>
+        </p:spPr>
+      </p:sp>
+      <p:sp>
+        <p:nvSpPr>
+          <p:cNvPr id="12" name="Text 10"/>
+          <p:cNvSpPr/>
+          <p:nvPr/>
+        </p:nvSpPr>
+        <p:spPr>
+          <a:xfrm>
+            <a:off x="8074152" y="1563624"/>
+            <a:ext cx="2825496" cy="201168"/>
+          </a:xfrm>
+          <a:prstGeom prst="rect">
+            <a:avLst/>
+          </a:prstGeom>
+          <a:noFill/>
+          <a:ln/>
+        </p:spPr>
+        <p:txBody>
+          <a:bodyPr wrap="square" lIns="0" tIns="0" rIns="0" bIns="0" rtlCol="0" anchor="ctr"/>
+          <a:lstStyle/>
+          <a:p>
             <a:pPr indent="0" marL="0">
               <a:buNone/>
             </a:pPr>
             <a:r>
-              <a:rPr lang="en-US" sz="1420" dirty="0">
+              <a:rPr lang="en-US" sz="950" b="1" dirty="0">
+                <a:solidFill>
+                  <a:srgbClr val="0068B7"/>
+                </a:solidFill>
+                <a:latin typeface="Aptos" pitchFamily="34" charset="0"/>
+                <a:ea typeface="Aptos" pitchFamily="34" charset="-122"/>
+                <a:cs typeface="Aptos" pitchFamily="34" charset="-120"/>
+              </a:rPr>
+              <a:t>Key idea</a:t>
+            </a:r>
+            <a:endParaRPr lang="en-US" sz="950" dirty="0"/>
+          </a:p>
+        </p:txBody>
+      </p:sp>
+      <p:sp>
+        <p:nvSpPr>
+          <p:cNvPr id="13" name="Text 11"/>
+          <p:cNvSpPr/>
+          <p:nvPr/>
+        </p:nvSpPr>
+        <p:spPr>
+          <a:xfrm>
+            <a:off x="8074152" y="1856232"/>
+            <a:ext cx="2825496" cy="1261872"/>
+          </a:xfrm>
+          <a:prstGeom prst="rect">
+            <a:avLst/>
+          </a:prstGeom>
+          <a:noFill/>
+          <a:ln/>
+        </p:spPr>
+        <p:txBody>
+          <a:bodyPr wrap="square" lIns="0" tIns="0" rIns="0" bIns="0" rtlCol="0" anchor="t">
+            <a:normAutofit/>
+          </a:bodyPr>
+          <a:lstStyle/>
+          <a:p>
+            <a:pPr indent="0" marL="0">
+              <a:buNone/>
+            </a:pPr>
+            <a:r>
+              <a:rPr lang="en-US" sz="1250" dirty="0">
                 <a:solidFill>
                   <a:srgbClr val="17364A"/>
                 </a:solidFill>
@@ -3060,9 +3483,116 @@
                 <a:ea typeface="Aptos" pitchFamily="34" charset="-122"/>
                 <a:cs typeface="Aptos" pitchFamily="34" charset="-120"/>
               </a:rPr>
-              <a:t>Unsupported summaries. NLP tools may omit, distort, or invent information. Guardrails include source review, citations, factuality checks, and human approval. Language and accessibility gaps. Models may perform differently across languages, dialects, literacy levels, or disability-related communication needs. Guardrails include multilingual evaluation, accessibility review, and community context. Privacy exposure. Free text may contain sensitive or unexpected personal information. Guardrails include approved environments, de-identification when appropriate, access controls, and retention rules.</a:t>
-            </a:r>
-            <a:endParaRPr lang="en-US" sz="1420" dirty="0"/>
+              <a:t>A contact center may receive hundreds of public inquiries during an outbreak.</a:t>
+            </a:r>
+            <a:endParaRPr lang="en-US" sz="1250" dirty="0"/>
+          </a:p>
+        </p:txBody>
+      </p:sp>
+      <p:sp>
+        <p:nvSpPr>
+          <p:cNvPr id="14" name="Shape 12"/>
+          <p:cNvSpPr/>
+          <p:nvPr/>
+        </p:nvSpPr>
+        <p:spPr>
+          <a:xfrm>
+            <a:off x="7909560" y="3520440"/>
+            <a:ext cx="3154680" cy="1737360"/>
+          </a:xfrm>
+          <a:prstGeom prst="roundRect">
+            <a:avLst>
+              <a:gd name="adj" fmla="val 6316"/>
+            </a:avLst>
+          </a:prstGeom>
+          <a:solidFill>
+            <a:srgbClr val="EAF6F8"/>
+          </a:solidFill>
+          <a:ln w="12700">
+            <a:solidFill>
+              <a:srgbClr val="B9D7E6"/>
+            </a:solidFill>
+            <a:prstDash val="solid"/>
+          </a:ln>
+        </p:spPr>
+      </p:sp>
+      <p:sp>
+        <p:nvSpPr>
+          <p:cNvPr id="15" name="Text 13"/>
+          <p:cNvSpPr/>
+          <p:nvPr/>
+        </p:nvSpPr>
+        <p:spPr>
+          <a:xfrm>
+            <a:off x="8074152" y="3666744"/>
+            <a:ext cx="2825496" cy="201168"/>
+          </a:xfrm>
+          <a:prstGeom prst="rect">
+            <a:avLst/>
+          </a:prstGeom>
+          <a:noFill/>
+          <a:ln/>
+        </p:spPr>
+        <p:txBody>
+          <a:bodyPr wrap="square" lIns="0" tIns="0" rIns="0" bIns="0" rtlCol="0" anchor="ctr"/>
+          <a:lstStyle/>
+          <a:p>
+            <a:pPr indent="0" marL="0">
+              <a:buNone/>
+            </a:pPr>
+            <a:r>
+              <a:rPr lang="en-US" sz="950" b="1" dirty="0">
+                <a:solidFill>
+                  <a:srgbClr val="0068B7"/>
+                </a:solidFill>
+                <a:latin typeface="Aptos" pitchFamily="34" charset="0"/>
+                <a:ea typeface="Aptos" pitchFamily="34" charset="-122"/>
+                <a:cs typeface="Aptos" pitchFamily="34" charset="-120"/>
+              </a:rPr>
+              <a:t>Use this for</a:t>
+            </a:r>
+            <a:endParaRPr lang="en-US" sz="950" dirty="0"/>
+          </a:p>
+        </p:txBody>
+      </p:sp>
+      <p:sp>
+        <p:nvSpPr>
+          <p:cNvPr id="16" name="Text 14"/>
+          <p:cNvSpPr/>
+          <p:nvPr/>
+        </p:nvSpPr>
+        <p:spPr>
+          <a:xfrm>
+            <a:off x="8074152" y="3959352"/>
+            <a:ext cx="2825496" cy="1170432"/>
+          </a:xfrm>
+          <a:prstGeom prst="rect">
+            <a:avLst/>
+          </a:prstGeom>
+          <a:noFill/>
+          <a:ln/>
+        </p:spPr>
+        <p:txBody>
+          <a:bodyPr wrap="square" lIns="0" tIns="0" rIns="0" bIns="0" rtlCol="0" anchor="t">
+            <a:normAutofit/>
+          </a:bodyPr>
+          <a:lstStyle/>
+          <a:p>
+            <a:pPr indent="0" marL="0">
+              <a:buNone/>
+            </a:pPr>
+            <a:r>
+              <a:rPr lang="en-US" sz="1250" dirty="0">
+                <a:solidFill>
+                  <a:srgbClr val="17364A"/>
+                </a:solidFill>
+                <a:latin typeface="Aptos" pitchFamily="34" charset="0"/>
+                <a:ea typeface="Aptos" pitchFamily="34" charset="-122"/>
+                <a:cs typeface="Aptos" pitchFamily="34" charset="-120"/>
+              </a:rPr>
+              <a:t>Connect the concept to public health decisions, safeguards, documentation, or implementation work.</a:t>
+            </a:r>
+            <a:endParaRPr lang="en-US" sz="1250" dirty="0"/>
           </a:p>
         </p:txBody>
       </p:sp>
@@ -3125,7 +3655,32 @@
       </p:sp>
       <p:sp>
         <p:nvSpPr>
-          <p:cNvPr id="3" name="Text 1"/>
+          <p:cNvPr id="3" name="Shape 1"/>
+          <p:cNvSpPr/>
+          <p:nvPr/>
+        </p:nvSpPr>
+        <p:spPr>
+          <a:xfrm>
+            <a:off x="0" y="164592"/>
+            <a:ext cx="146304" cy="6693408"/>
+          </a:xfrm>
+          <a:prstGeom prst="rect">
+            <a:avLst/>
+          </a:prstGeom>
+          <a:solidFill>
+            <a:srgbClr val="2F8A28"/>
+          </a:solidFill>
+          <a:ln w="12700">
+            <a:solidFill>
+              <a:srgbClr val="2F8A28"/>
+            </a:solidFill>
+            <a:prstDash val="solid"/>
+          </a:ln>
+        </p:spPr>
+      </p:sp>
+      <p:sp>
+        <p:nvSpPr>
+          <p:cNvPr id="4" name="Text 2"/>
           <p:cNvSpPr/>
           <p:nvPr/>
         </p:nvSpPr>
@@ -3164,7 +3719,7 @@
       </p:sp>
       <p:sp>
         <p:nvSpPr>
-          <p:cNvPr id="4" name="Text 2"/>
+          <p:cNvPr id="5" name="Text 3"/>
           <p:cNvSpPr/>
           <p:nvPr/>
         </p:nvSpPr>
@@ -3203,7 +3758,7 @@
       </p:sp>
       <p:sp>
         <p:nvSpPr>
-          <p:cNvPr id="5" name="Text 3"/>
+          <p:cNvPr id="6" name="Text 4"/>
           <p:cNvSpPr/>
           <p:nvPr/>
         </p:nvSpPr>
@@ -3242,13 +3797,77 @@
       </p:sp>
       <p:sp>
         <p:nvSpPr>
-          <p:cNvPr id="6" name="Text 4"/>
+          <p:cNvPr id="7" name="Shape 5"/>
           <p:cNvSpPr/>
           <p:nvPr/>
         </p:nvSpPr>
         <p:spPr>
           <a:xfrm>
             <a:off x="640080" y="658368"/>
+            <a:ext cx="420624" cy="420624"/>
+          </a:xfrm>
+          <a:prstGeom prst="ellipse">
+            <a:avLst/>
+          </a:prstGeom>
+          <a:solidFill>
+            <a:srgbClr val="0068B7"/>
+          </a:solidFill>
+          <a:ln w="12700">
+            <a:solidFill>
+              <a:srgbClr val="0068B7"/>
+            </a:solidFill>
+            <a:prstDash val="solid"/>
+          </a:ln>
+        </p:spPr>
+      </p:sp>
+      <p:sp>
+        <p:nvSpPr>
+          <p:cNvPr id="8" name="Text 6"/>
+          <p:cNvSpPr/>
+          <p:nvPr/>
+        </p:nvSpPr>
+        <p:spPr>
+          <a:xfrm>
+            <a:off x="640080" y="731520"/>
+            <a:ext cx="420624" cy="164592"/>
+          </a:xfrm>
+          <a:prstGeom prst="rect">
+            <a:avLst/>
+          </a:prstGeom>
+          <a:noFill/>
+          <a:ln/>
+        </p:spPr>
+        <p:txBody>
+          <a:bodyPr wrap="square" lIns="0" tIns="0" rIns="0" bIns="0" rtlCol="0" anchor="ctr"/>
+          <a:lstStyle/>
+          <a:p>
+            <a:pPr algn="ctr" indent="0" marL="0">
+              <a:buNone/>
+            </a:pPr>
+            <a:r>
+              <a:rPr lang="en-US" sz="1100" b="1" dirty="0">
+                <a:solidFill>
+                  <a:srgbClr val="FFFFFF"/>
+                </a:solidFill>
+                <a:latin typeface="Aptos" pitchFamily="34" charset="0"/>
+                <a:ea typeface="Aptos" pitchFamily="34" charset="-122"/>
+                <a:cs typeface="Aptos" pitchFamily="34" charset="-120"/>
+              </a:rPr>
+              <a:t>6</a:t>
+            </a:r>
+            <a:endParaRPr lang="en-US" sz="1100" dirty="0"/>
+          </a:p>
+        </p:txBody>
+      </p:sp>
+      <p:sp>
+        <p:nvSpPr>
+          <p:cNvPr id="9" name="Text 7"/>
+          <p:cNvSpPr/>
+          <p:nvPr/>
+        </p:nvSpPr>
+        <p:spPr>
+          <a:xfrm>
+            <a:off x="640080" y="621792"/>
             <a:ext cx="10881360" cy="566928"/>
           </a:xfrm>
           <a:prstGeom prst="rect">
@@ -3275,7 +3894,7 @@
                 <a:ea typeface="Aptos Display" pitchFamily="34" charset="-122"/>
                 <a:cs typeface="Aptos Display" pitchFamily="34" charset="-120"/>
               </a:rPr>
-              <a:t>Risks, Failure Modes, and Guardrails Continued</a:t>
+              <a:t>Technical Deep Dive</a:t>
             </a:r>
             <a:endParaRPr lang="en-US" sz="2700" dirty="0"/>
           </a:p>
@@ -3283,32 +3902,178 @@
       </p:sp>
       <p:sp>
         <p:nvSpPr>
-          <p:cNvPr id="7" name="Text 5"/>
-          <p:cNvSpPr/>
-          <p:nvPr/>
-        </p:nvSpPr>
-        <p:spPr>
-          <a:xfrm>
-            <a:off x="822960" y="1325880"/>
-            <a:ext cx="10378440" cy="4800600"/>
-          </a:xfrm>
-          <a:prstGeom prst="rect">
-            <a:avLst/>
-          </a:prstGeom>
-          <a:noFill/>
-          <a:ln/>
-        </p:spPr>
-        <p:txBody>
-          <a:bodyPr wrap="square" lIns="1016" tIns="1016" rIns="1016" bIns="1016" rtlCol="0" anchor="t">
+          <p:cNvPr id="10" name="Text 8"/>
+          <p:cNvSpPr/>
+          <p:nvPr/>
+        </p:nvSpPr>
+        <p:spPr>
+          <a:xfrm>
+            <a:off x="868680" y="1417320"/>
+            <a:ext cx="6675120" cy="4434840"/>
+          </a:xfrm>
+          <a:prstGeom prst="rect">
+            <a:avLst/>
+          </a:prstGeom>
+          <a:noFill/>
+          <a:ln/>
+        </p:spPr>
+        <p:txBody>
+          <a:bodyPr wrap="square" lIns="635" tIns="635" rIns="635" bIns="635" rtlCol="0" anchor="t">
             <a:normAutofit/>
           </a:bodyPr>
           <a:lstStyle/>
           <a:p>
+            <a:r>
+              <a:rPr lang="en-US" sz="1700" dirty="0">
+                <a:solidFill>
+                  <a:srgbClr val="17364A"/>
+                </a:solidFill>
+                <a:latin typeface="Aptos" pitchFamily="34" charset="0"/>
+                <a:ea typeface="Aptos" pitchFamily="34" charset="-122"/>
+                <a:cs typeface="Aptos" pitchFamily="34" charset="-120"/>
+              </a:rPr>
+              <a:t>NLP implementation begins with task definition.</a:t>
+            </a:r>
+            <a:endParaRPr lang="en-US" sz="1700" dirty="0"/>
+          </a:p>
+          <a:p>
+            <a:r>
+              <a:rPr lang="en-US" sz="1700" dirty="0">
+                <a:solidFill>
+                  <a:srgbClr val="17364A"/>
+                </a:solidFill>
+                <a:latin typeface="Aptos" pitchFamily="34" charset="0"/>
+                <a:ea typeface="Aptos" pitchFamily="34" charset="-122"/>
+                <a:cs typeface="Aptos" pitchFamily="34" charset="-120"/>
+              </a:rPr>
+              <a:t>Extraction, classification, summarization, translation, topic modeling, and question answering are different tasks with.</a:t>
+            </a:r>
+            <a:endParaRPr lang="en-US" sz="1700" dirty="0"/>
+          </a:p>
+          <a:p>
+            <a:r>
+              <a:rPr lang="en-US" sz="1700" dirty="0">
+                <a:solidFill>
+                  <a:srgbClr val="17364A"/>
+                </a:solidFill>
+                <a:latin typeface="Aptos" pitchFamily="34" charset="0"/>
+                <a:ea typeface="Aptos" pitchFamily="34" charset="-122"/>
+                <a:cs typeface="Aptos" pitchFamily="34" charset="-120"/>
+              </a:rPr>
+              <a:t>A tool that performs well at summarization may perform poorly at extracting dates or classifying urgency.</a:t>
+            </a:r>
+            <a:endParaRPr lang="en-US" sz="1700" dirty="0"/>
+          </a:p>
+          <a:p>
+            <a:r>
+              <a:rPr lang="en-US" sz="1700" dirty="0">
+                <a:solidFill>
+                  <a:srgbClr val="17364A"/>
+                </a:solidFill>
+                <a:latin typeface="Aptos" pitchFamily="34" charset="0"/>
+                <a:ea typeface="Aptos" pitchFamily="34" charset="-122"/>
+                <a:cs typeface="Aptos" pitchFamily="34" charset="-120"/>
+              </a:rPr>
+              <a:t>Staff should define the task narrowly before selecting or testing a tool.</a:t>
+            </a:r>
+            <a:endParaRPr lang="en-US" sz="1700" dirty="0"/>
+          </a:p>
+        </p:txBody>
+      </p:sp>
+      <p:sp>
+        <p:nvSpPr>
+          <p:cNvPr id="11" name="Shape 9"/>
+          <p:cNvSpPr/>
+          <p:nvPr/>
+        </p:nvSpPr>
+        <p:spPr>
+          <a:xfrm>
+            <a:off x="7909560" y="1417320"/>
+            <a:ext cx="3154680" cy="1828800"/>
+          </a:xfrm>
+          <a:prstGeom prst="roundRect">
+            <a:avLst>
+              <a:gd name="adj" fmla="val 6000"/>
+            </a:avLst>
+          </a:prstGeom>
+          <a:solidFill>
+            <a:srgbClr val="EEF8ED"/>
+          </a:solidFill>
+          <a:ln w="12700">
+            <a:solidFill>
+              <a:srgbClr val="B9D7E6"/>
+            </a:solidFill>
+            <a:prstDash val="solid"/>
+          </a:ln>
+        </p:spPr>
+      </p:sp>
+      <p:sp>
+        <p:nvSpPr>
+          <p:cNvPr id="12" name="Text 10"/>
+          <p:cNvSpPr/>
+          <p:nvPr/>
+        </p:nvSpPr>
+        <p:spPr>
+          <a:xfrm>
+            <a:off x="8074152" y="1563624"/>
+            <a:ext cx="2825496" cy="201168"/>
+          </a:xfrm>
+          <a:prstGeom prst="rect">
+            <a:avLst/>
+          </a:prstGeom>
+          <a:noFill/>
+          <a:ln/>
+        </p:spPr>
+        <p:txBody>
+          <a:bodyPr wrap="square" lIns="0" tIns="0" rIns="0" bIns="0" rtlCol="0" anchor="ctr"/>
+          <a:lstStyle/>
+          <a:p>
             <a:pPr indent="0" marL="0">
               <a:buNone/>
             </a:pPr>
             <a:r>
-              <a:rPr lang="en-US" sz="1420" dirty="0">
+              <a:rPr lang="en-US" sz="950" b="1" dirty="0">
+                <a:solidFill>
+                  <a:srgbClr val="0068B7"/>
+                </a:solidFill>
+                <a:latin typeface="Aptos" pitchFamily="34" charset="0"/>
+                <a:ea typeface="Aptos" pitchFamily="34" charset="-122"/>
+                <a:cs typeface="Aptos" pitchFamily="34" charset="-120"/>
+              </a:rPr>
+              <a:t>Key idea</a:t>
+            </a:r>
+            <a:endParaRPr lang="en-US" sz="950" dirty="0"/>
+          </a:p>
+        </p:txBody>
+      </p:sp>
+      <p:sp>
+        <p:nvSpPr>
+          <p:cNvPr id="13" name="Text 11"/>
+          <p:cNvSpPr/>
+          <p:nvPr/>
+        </p:nvSpPr>
+        <p:spPr>
+          <a:xfrm>
+            <a:off x="8074152" y="1856232"/>
+            <a:ext cx="2825496" cy="1261872"/>
+          </a:xfrm>
+          <a:prstGeom prst="rect">
+            <a:avLst/>
+          </a:prstGeom>
+          <a:noFill/>
+          <a:ln/>
+        </p:spPr>
+        <p:txBody>
+          <a:bodyPr wrap="square" lIns="0" tIns="0" rIns="0" bIns="0" rtlCol="0" anchor="t">
+            <a:normAutofit/>
+          </a:bodyPr>
+          <a:lstStyle/>
+          <a:p>
+            <a:pPr indent="0" marL="0">
+              <a:buNone/>
+            </a:pPr>
+            <a:r>
+              <a:rPr lang="en-US" sz="1250" dirty="0">
                 <a:solidFill>
                   <a:srgbClr val="17364A"/>
                 </a:solidFill>
@@ -3316,9 +4081,116 @@
                 <a:ea typeface="Aptos" pitchFamily="34" charset="-122"/>
                 <a:cs typeface="Aptos" pitchFamily="34" charset="-120"/>
               </a:rPr>
-              <a:t>Misclassification. Incorrect labels can affect routing or priority. Guardrails include validation, confidence thresholds, review queues, and monitoring of overrides.</a:t>
-            </a:r>
-            <a:endParaRPr lang="en-US" sz="1420" dirty="0"/>
+              <a:t>NLP implementation begins with task definition.</a:t>
+            </a:r>
+            <a:endParaRPr lang="en-US" sz="1250" dirty="0"/>
+          </a:p>
+        </p:txBody>
+      </p:sp>
+      <p:sp>
+        <p:nvSpPr>
+          <p:cNvPr id="14" name="Shape 12"/>
+          <p:cNvSpPr/>
+          <p:nvPr/>
+        </p:nvSpPr>
+        <p:spPr>
+          <a:xfrm>
+            <a:off x="7909560" y="3520440"/>
+            <a:ext cx="3154680" cy="1737360"/>
+          </a:xfrm>
+          <a:prstGeom prst="roundRect">
+            <a:avLst>
+              <a:gd name="adj" fmla="val 6316"/>
+            </a:avLst>
+          </a:prstGeom>
+          <a:solidFill>
+            <a:srgbClr val="EAF6F8"/>
+          </a:solidFill>
+          <a:ln w="12700">
+            <a:solidFill>
+              <a:srgbClr val="B9D7E6"/>
+            </a:solidFill>
+            <a:prstDash val="solid"/>
+          </a:ln>
+        </p:spPr>
+      </p:sp>
+      <p:sp>
+        <p:nvSpPr>
+          <p:cNvPr id="15" name="Text 13"/>
+          <p:cNvSpPr/>
+          <p:nvPr/>
+        </p:nvSpPr>
+        <p:spPr>
+          <a:xfrm>
+            <a:off x="8074152" y="3666744"/>
+            <a:ext cx="2825496" cy="201168"/>
+          </a:xfrm>
+          <a:prstGeom prst="rect">
+            <a:avLst/>
+          </a:prstGeom>
+          <a:noFill/>
+          <a:ln/>
+        </p:spPr>
+        <p:txBody>
+          <a:bodyPr wrap="square" lIns="0" tIns="0" rIns="0" bIns="0" rtlCol="0" anchor="ctr"/>
+          <a:lstStyle/>
+          <a:p>
+            <a:pPr indent="0" marL="0">
+              <a:buNone/>
+            </a:pPr>
+            <a:r>
+              <a:rPr lang="en-US" sz="950" b="1" dirty="0">
+                <a:solidFill>
+                  <a:srgbClr val="0068B7"/>
+                </a:solidFill>
+                <a:latin typeface="Aptos" pitchFamily="34" charset="0"/>
+                <a:ea typeface="Aptos" pitchFamily="34" charset="-122"/>
+                <a:cs typeface="Aptos" pitchFamily="34" charset="-120"/>
+              </a:rPr>
+              <a:t>Use this for</a:t>
+            </a:r>
+            <a:endParaRPr lang="en-US" sz="950" dirty="0"/>
+          </a:p>
+        </p:txBody>
+      </p:sp>
+      <p:sp>
+        <p:nvSpPr>
+          <p:cNvPr id="16" name="Text 14"/>
+          <p:cNvSpPr/>
+          <p:nvPr/>
+        </p:nvSpPr>
+        <p:spPr>
+          <a:xfrm>
+            <a:off x="8074152" y="3959352"/>
+            <a:ext cx="2825496" cy="1170432"/>
+          </a:xfrm>
+          <a:prstGeom prst="rect">
+            <a:avLst/>
+          </a:prstGeom>
+          <a:noFill/>
+          <a:ln/>
+        </p:spPr>
+        <p:txBody>
+          <a:bodyPr wrap="square" lIns="0" tIns="0" rIns="0" bIns="0" rtlCol="0" anchor="t">
+            <a:normAutofit/>
+          </a:bodyPr>
+          <a:lstStyle/>
+          <a:p>
+            <a:pPr indent="0" marL="0">
+              <a:buNone/>
+            </a:pPr>
+            <a:r>
+              <a:rPr lang="en-US" sz="1250" dirty="0">
+                <a:solidFill>
+                  <a:srgbClr val="17364A"/>
+                </a:solidFill>
+                <a:latin typeface="Aptos" pitchFamily="34" charset="0"/>
+                <a:ea typeface="Aptos" pitchFamily="34" charset="-122"/>
+                <a:cs typeface="Aptos" pitchFamily="34" charset="-120"/>
+              </a:rPr>
+              <a:t>Connect the concept to public health decisions, safeguards, documentation, or implementation work.</a:t>
+            </a:r>
+            <a:endParaRPr lang="en-US" sz="1250" dirty="0"/>
           </a:p>
         </p:txBody>
       </p:sp>
@@ -3381,7 +4253,32 @@
       </p:sp>
       <p:sp>
         <p:nvSpPr>
-          <p:cNvPr id="3" name="Text 1"/>
+          <p:cNvPr id="3" name="Shape 1"/>
+          <p:cNvSpPr/>
+          <p:nvPr/>
+        </p:nvSpPr>
+        <p:spPr>
+          <a:xfrm>
+            <a:off x="0" y="164592"/>
+            <a:ext cx="146304" cy="6693408"/>
+          </a:xfrm>
+          <a:prstGeom prst="rect">
+            <a:avLst/>
+          </a:prstGeom>
+          <a:solidFill>
+            <a:srgbClr val="2F8A28"/>
+          </a:solidFill>
+          <a:ln w="12700">
+            <a:solidFill>
+              <a:srgbClr val="2F8A28"/>
+            </a:solidFill>
+            <a:prstDash val="solid"/>
+          </a:ln>
+        </p:spPr>
+      </p:sp>
+      <p:sp>
+        <p:nvSpPr>
+          <p:cNvPr id="4" name="Text 2"/>
           <p:cNvSpPr/>
           <p:nvPr/>
         </p:nvSpPr>
@@ -3420,7 +4317,7 @@
       </p:sp>
       <p:sp>
         <p:nvSpPr>
-          <p:cNvPr id="4" name="Text 2"/>
+          <p:cNvPr id="5" name="Text 3"/>
           <p:cNvSpPr/>
           <p:nvPr/>
         </p:nvSpPr>
@@ -3459,7 +4356,7 @@
       </p:sp>
       <p:sp>
         <p:nvSpPr>
-          <p:cNvPr id="5" name="Text 3"/>
+          <p:cNvPr id="6" name="Text 4"/>
           <p:cNvSpPr/>
           <p:nvPr/>
         </p:nvSpPr>
@@ -3498,13 +4395,77 @@
       </p:sp>
       <p:sp>
         <p:nvSpPr>
-          <p:cNvPr id="6" name="Text 4"/>
+          <p:cNvPr id="7" name="Shape 5"/>
           <p:cNvSpPr/>
           <p:nvPr/>
         </p:nvSpPr>
         <p:spPr>
           <a:xfrm>
             <a:off x="640080" y="658368"/>
+            <a:ext cx="420624" cy="420624"/>
+          </a:xfrm>
+          <a:prstGeom prst="ellipse">
+            <a:avLst/>
+          </a:prstGeom>
+          <a:solidFill>
+            <a:srgbClr val="0068B7"/>
+          </a:solidFill>
+          <a:ln w="12700">
+            <a:solidFill>
+              <a:srgbClr val="0068B7"/>
+            </a:solidFill>
+            <a:prstDash val="solid"/>
+          </a:ln>
+        </p:spPr>
+      </p:sp>
+      <p:sp>
+        <p:nvSpPr>
+          <p:cNvPr id="8" name="Text 6"/>
+          <p:cNvSpPr/>
+          <p:nvPr/>
+        </p:nvSpPr>
+        <p:spPr>
+          <a:xfrm>
+            <a:off x="640080" y="731520"/>
+            <a:ext cx="420624" cy="164592"/>
+          </a:xfrm>
+          <a:prstGeom prst="rect">
+            <a:avLst/>
+          </a:prstGeom>
+          <a:noFill/>
+          <a:ln/>
+        </p:spPr>
+        <p:txBody>
+          <a:bodyPr wrap="square" lIns="0" tIns="0" rIns="0" bIns="0" rtlCol="0" anchor="ctr"/>
+          <a:lstStyle/>
+          <a:p>
+            <a:pPr algn="ctr" indent="0" marL="0">
+              <a:buNone/>
+            </a:pPr>
+            <a:r>
+              <a:rPr lang="en-US" sz="1100" b="1" dirty="0">
+                <a:solidFill>
+                  <a:srgbClr val="FFFFFF"/>
+                </a:solidFill>
+                <a:latin typeface="Aptos" pitchFamily="34" charset="0"/>
+                <a:ea typeface="Aptos" pitchFamily="34" charset="-122"/>
+                <a:cs typeface="Aptos" pitchFamily="34" charset="-120"/>
+              </a:rPr>
+              <a:t>7</a:t>
+            </a:r>
+            <a:endParaRPr lang="en-US" sz="1100" dirty="0"/>
+          </a:p>
+        </p:txBody>
+      </p:sp>
+      <p:sp>
+        <p:nvSpPr>
+          <p:cNvPr id="9" name="Text 7"/>
+          <p:cNvSpPr/>
+          <p:nvPr/>
+        </p:nvSpPr>
+        <p:spPr>
+          <a:xfrm>
+            <a:off x="640080" y="621792"/>
             <a:ext cx="10881360" cy="566928"/>
           </a:xfrm>
           <a:prstGeom prst="rect">
@@ -3531,7 +4492,7 @@
                 <a:ea typeface="Aptos Display" pitchFamily="34" charset="-122"/>
                 <a:cs typeface="Aptos Display" pitchFamily="34" charset="-120"/>
               </a:rPr>
-              <a:t>Application to AI-Supported Workflows</a:t>
+              <a:t>Risks, Failure Modes, and Guardrails</a:t>
             </a:r>
             <a:endParaRPr lang="en-US" sz="2700" dirty="0"/>
           </a:p>
@@ -3539,32 +4500,178 @@
       </p:sp>
       <p:sp>
         <p:nvSpPr>
-          <p:cNvPr id="7" name="Text 5"/>
-          <p:cNvSpPr/>
-          <p:nvPr/>
-        </p:nvSpPr>
-        <p:spPr>
-          <a:xfrm>
-            <a:off x="822960" y="1325880"/>
-            <a:ext cx="10378440" cy="4800600"/>
-          </a:xfrm>
-          <a:prstGeom prst="rect">
-            <a:avLst/>
-          </a:prstGeom>
-          <a:noFill/>
-          <a:ln/>
-        </p:spPr>
-        <p:txBody>
-          <a:bodyPr wrap="square" lIns="1016" tIns="1016" rIns="1016" bIns="1016" rtlCol="0" anchor="t">
+          <p:cNvPr id="10" name="Text 8"/>
+          <p:cNvSpPr/>
+          <p:nvPr/>
+        </p:nvSpPr>
+        <p:spPr>
+          <a:xfrm>
+            <a:off x="868680" y="1417320"/>
+            <a:ext cx="6675120" cy="4434840"/>
+          </a:xfrm>
+          <a:prstGeom prst="rect">
+            <a:avLst/>
+          </a:prstGeom>
+          <a:noFill/>
+          <a:ln/>
+        </p:spPr>
+        <p:txBody>
+          <a:bodyPr wrap="square" lIns="635" tIns="635" rIns="635" bIns="635" rtlCol="0" anchor="t">
             <a:normAutofit/>
           </a:bodyPr>
           <a:lstStyle/>
           <a:p>
+            <a:r>
+              <a:rPr lang="en-US" sz="1700" dirty="0">
+                <a:solidFill>
+                  <a:srgbClr val="17364A"/>
+                </a:solidFill>
+                <a:latin typeface="Aptos" pitchFamily="34" charset="0"/>
+                <a:ea typeface="Aptos" pitchFamily="34" charset="-122"/>
+                <a:cs typeface="Aptos" pitchFamily="34" charset="-120"/>
+              </a:rPr>
+              <a:t>Unsupported summaries.</a:t>
+            </a:r>
+            <a:endParaRPr lang="en-US" sz="1700" dirty="0"/>
+          </a:p>
+          <a:p>
+            <a:r>
+              <a:rPr lang="en-US" sz="1700" dirty="0">
+                <a:solidFill>
+                  <a:srgbClr val="17364A"/>
+                </a:solidFill>
+                <a:latin typeface="Aptos" pitchFamily="34" charset="0"/>
+                <a:ea typeface="Aptos" pitchFamily="34" charset="-122"/>
+                <a:cs typeface="Aptos" pitchFamily="34" charset="-120"/>
+              </a:rPr>
+              <a:t>NLP tools may omit, distort, or invent information.</a:t>
+            </a:r>
+            <a:endParaRPr lang="en-US" sz="1700" dirty="0"/>
+          </a:p>
+          <a:p>
+            <a:r>
+              <a:rPr lang="en-US" sz="1700" dirty="0">
+                <a:solidFill>
+                  <a:srgbClr val="17364A"/>
+                </a:solidFill>
+                <a:latin typeface="Aptos" pitchFamily="34" charset="0"/>
+                <a:ea typeface="Aptos" pitchFamily="34" charset="-122"/>
+                <a:cs typeface="Aptos" pitchFamily="34" charset="-120"/>
+              </a:rPr>
+              <a:t>Guardrails include source review, citations, factuality checks, and human approval.</a:t>
+            </a:r>
+            <a:endParaRPr lang="en-US" sz="1700" dirty="0"/>
+          </a:p>
+          <a:p>
+            <a:r>
+              <a:rPr lang="en-US" sz="1700" dirty="0">
+                <a:solidFill>
+                  <a:srgbClr val="17364A"/>
+                </a:solidFill>
+                <a:latin typeface="Aptos" pitchFamily="34" charset="0"/>
+                <a:ea typeface="Aptos" pitchFamily="34" charset="-122"/>
+                <a:cs typeface="Aptos" pitchFamily="34" charset="-120"/>
+              </a:rPr>
+              <a:t>Language and accessibility gaps.</a:t>
+            </a:r>
+            <a:endParaRPr lang="en-US" sz="1700" dirty="0"/>
+          </a:p>
+        </p:txBody>
+      </p:sp>
+      <p:sp>
+        <p:nvSpPr>
+          <p:cNvPr id="11" name="Shape 9"/>
+          <p:cNvSpPr/>
+          <p:nvPr/>
+        </p:nvSpPr>
+        <p:spPr>
+          <a:xfrm>
+            <a:off x="7909560" y="1417320"/>
+            <a:ext cx="3154680" cy="1828800"/>
+          </a:xfrm>
+          <a:prstGeom prst="roundRect">
+            <a:avLst>
+              <a:gd name="adj" fmla="val 6000"/>
+            </a:avLst>
+          </a:prstGeom>
+          <a:solidFill>
+            <a:srgbClr val="EEF8ED"/>
+          </a:solidFill>
+          <a:ln w="12700">
+            <a:solidFill>
+              <a:srgbClr val="B9D7E6"/>
+            </a:solidFill>
+            <a:prstDash val="solid"/>
+          </a:ln>
+        </p:spPr>
+      </p:sp>
+      <p:sp>
+        <p:nvSpPr>
+          <p:cNvPr id="12" name="Text 10"/>
+          <p:cNvSpPr/>
+          <p:nvPr/>
+        </p:nvSpPr>
+        <p:spPr>
+          <a:xfrm>
+            <a:off x="8074152" y="1563624"/>
+            <a:ext cx="2825496" cy="201168"/>
+          </a:xfrm>
+          <a:prstGeom prst="rect">
+            <a:avLst/>
+          </a:prstGeom>
+          <a:noFill/>
+          <a:ln/>
+        </p:spPr>
+        <p:txBody>
+          <a:bodyPr wrap="square" lIns="0" tIns="0" rIns="0" bIns="0" rtlCol="0" anchor="ctr"/>
+          <a:lstStyle/>
+          <a:p>
             <a:pPr indent="0" marL="0">
               <a:buNone/>
             </a:pPr>
             <a:r>
-              <a:rPr lang="en-US" sz="1420" dirty="0">
+              <a:rPr lang="en-US" sz="950" b="1" dirty="0">
+                <a:solidFill>
+                  <a:srgbClr val="0068B7"/>
+                </a:solidFill>
+                <a:latin typeface="Aptos" pitchFamily="34" charset="0"/>
+                <a:ea typeface="Aptos" pitchFamily="34" charset="-122"/>
+                <a:cs typeface="Aptos" pitchFamily="34" charset="-120"/>
+              </a:rPr>
+              <a:t>Key idea</a:t>
+            </a:r>
+            <a:endParaRPr lang="en-US" sz="950" dirty="0"/>
+          </a:p>
+        </p:txBody>
+      </p:sp>
+      <p:sp>
+        <p:nvSpPr>
+          <p:cNvPr id="13" name="Text 11"/>
+          <p:cNvSpPr/>
+          <p:nvPr/>
+        </p:nvSpPr>
+        <p:spPr>
+          <a:xfrm>
+            <a:off x="8074152" y="1856232"/>
+            <a:ext cx="2825496" cy="1261872"/>
+          </a:xfrm>
+          <a:prstGeom prst="rect">
+            <a:avLst/>
+          </a:prstGeom>
+          <a:noFill/>
+          <a:ln/>
+        </p:spPr>
+        <p:txBody>
+          <a:bodyPr wrap="square" lIns="0" tIns="0" rIns="0" bIns="0" rtlCol="0" anchor="t">
+            <a:normAutofit/>
+          </a:bodyPr>
+          <a:lstStyle/>
+          <a:p>
+            <a:pPr indent="0" marL="0">
+              <a:buNone/>
+            </a:pPr>
+            <a:r>
+              <a:rPr lang="en-US" sz="1250" dirty="0">
                 <a:solidFill>
                   <a:srgbClr val="17364A"/>
                 </a:solidFill>
@@ -3572,9 +4679,116 @@
                 <a:ea typeface="Aptos" pitchFamily="34" charset="-122"/>
                 <a:cs typeface="Aptos" pitchFamily="34" charset="-120"/>
               </a:rPr>
-              <a:t>Generative AI is often used for summarization, drafting, and question answering, but outputs must be checked against source material. Predictive analytics may use NLP-derived features, so extraction quality affects model performance. RAG systems use NLP to retrieve and summarize documents, which requires document governance and source citation. Agentic AI using NLP to trigger actions should require clear thresholds and human approval for consequential steps.</a:t>
-            </a:r>
-            <a:endParaRPr lang="en-US" sz="1420" dirty="0"/>
+              <a:t>Unsupported summaries.</a:t>
+            </a:r>
+            <a:endParaRPr lang="en-US" sz="1250" dirty="0"/>
+          </a:p>
+        </p:txBody>
+      </p:sp>
+      <p:sp>
+        <p:nvSpPr>
+          <p:cNvPr id="14" name="Shape 12"/>
+          <p:cNvSpPr/>
+          <p:nvPr/>
+        </p:nvSpPr>
+        <p:spPr>
+          <a:xfrm>
+            <a:off x="7909560" y="3520440"/>
+            <a:ext cx="3154680" cy="1737360"/>
+          </a:xfrm>
+          <a:prstGeom prst="roundRect">
+            <a:avLst>
+              <a:gd name="adj" fmla="val 6316"/>
+            </a:avLst>
+          </a:prstGeom>
+          <a:solidFill>
+            <a:srgbClr val="EAF6F8"/>
+          </a:solidFill>
+          <a:ln w="12700">
+            <a:solidFill>
+              <a:srgbClr val="B9D7E6"/>
+            </a:solidFill>
+            <a:prstDash val="solid"/>
+          </a:ln>
+        </p:spPr>
+      </p:sp>
+      <p:sp>
+        <p:nvSpPr>
+          <p:cNvPr id="15" name="Text 13"/>
+          <p:cNvSpPr/>
+          <p:nvPr/>
+        </p:nvSpPr>
+        <p:spPr>
+          <a:xfrm>
+            <a:off x="8074152" y="3666744"/>
+            <a:ext cx="2825496" cy="201168"/>
+          </a:xfrm>
+          <a:prstGeom prst="rect">
+            <a:avLst/>
+          </a:prstGeom>
+          <a:noFill/>
+          <a:ln/>
+        </p:spPr>
+        <p:txBody>
+          <a:bodyPr wrap="square" lIns="0" tIns="0" rIns="0" bIns="0" rtlCol="0" anchor="ctr"/>
+          <a:lstStyle/>
+          <a:p>
+            <a:pPr indent="0" marL="0">
+              <a:buNone/>
+            </a:pPr>
+            <a:r>
+              <a:rPr lang="en-US" sz="950" b="1" dirty="0">
+                <a:solidFill>
+                  <a:srgbClr val="0068B7"/>
+                </a:solidFill>
+                <a:latin typeface="Aptos" pitchFamily="34" charset="0"/>
+                <a:ea typeface="Aptos" pitchFamily="34" charset="-122"/>
+                <a:cs typeface="Aptos" pitchFamily="34" charset="-120"/>
+              </a:rPr>
+              <a:t>Use this for</a:t>
+            </a:r>
+            <a:endParaRPr lang="en-US" sz="950" dirty="0"/>
+          </a:p>
+        </p:txBody>
+      </p:sp>
+      <p:sp>
+        <p:nvSpPr>
+          <p:cNvPr id="16" name="Text 14"/>
+          <p:cNvSpPr/>
+          <p:nvPr/>
+        </p:nvSpPr>
+        <p:spPr>
+          <a:xfrm>
+            <a:off x="8074152" y="3959352"/>
+            <a:ext cx="2825496" cy="1170432"/>
+          </a:xfrm>
+          <a:prstGeom prst="rect">
+            <a:avLst/>
+          </a:prstGeom>
+          <a:noFill/>
+          <a:ln/>
+        </p:spPr>
+        <p:txBody>
+          <a:bodyPr wrap="square" lIns="0" tIns="0" rIns="0" bIns="0" rtlCol="0" anchor="t">
+            <a:normAutofit/>
+          </a:bodyPr>
+          <a:lstStyle/>
+          <a:p>
+            <a:pPr indent="0" marL="0">
+              <a:buNone/>
+            </a:pPr>
+            <a:r>
+              <a:rPr lang="en-US" sz="1250" dirty="0">
+                <a:solidFill>
+                  <a:srgbClr val="17364A"/>
+                </a:solidFill>
+                <a:latin typeface="Aptos" pitchFamily="34" charset="0"/>
+                <a:ea typeface="Aptos" pitchFamily="34" charset="-122"/>
+                <a:cs typeface="Aptos" pitchFamily="34" charset="-120"/>
+              </a:rPr>
+              <a:t>Connect the concept to public health decisions, safeguards, documentation, or implementation work.</a:t>
+            </a:r>
+            <a:endParaRPr lang="en-US" sz="1250" dirty="0"/>
           </a:p>
         </p:txBody>
       </p:sp>
@@ -3637,7 +4851,32 @@
       </p:sp>
       <p:sp>
         <p:nvSpPr>
-          <p:cNvPr id="3" name="Text 1"/>
+          <p:cNvPr id="3" name="Shape 1"/>
+          <p:cNvSpPr/>
+          <p:nvPr/>
+        </p:nvSpPr>
+        <p:spPr>
+          <a:xfrm>
+            <a:off x="0" y="164592"/>
+            <a:ext cx="146304" cy="6693408"/>
+          </a:xfrm>
+          <a:prstGeom prst="rect">
+            <a:avLst/>
+          </a:prstGeom>
+          <a:solidFill>
+            <a:srgbClr val="2F8A28"/>
+          </a:solidFill>
+          <a:ln w="12700">
+            <a:solidFill>
+              <a:srgbClr val="2F8A28"/>
+            </a:solidFill>
+            <a:prstDash val="solid"/>
+          </a:ln>
+        </p:spPr>
+      </p:sp>
+      <p:sp>
+        <p:nvSpPr>
+          <p:cNvPr id="4" name="Text 2"/>
           <p:cNvSpPr/>
           <p:nvPr/>
         </p:nvSpPr>
@@ -3676,7 +4915,7 @@
       </p:sp>
       <p:sp>
         <p:nvSpPr>
-          <p:cNvPr id="4" name="Text 2"/>
+          <p:cNvPr id="5" name="Text 3"/>
           <p:cNvSpPr/>
           <p:nvPr/>
         </p:nvSpPr>
@@ -3715,7 +4954,7 @@
       </p:sp>
       <p:sp>
         <p:nvSpPr>
-          <p:cNvPr id="5" name="Text 3"/>
+          <p:cNvPr id="6" name="Text 4"/>
           <p:cNvSpPr/>
           <p:nvPr/>
         </p:nvSpPr>
@@ -3754,7 +4993,7 @@
       </p:sp>
       <p:sp>
         <p:nvSpPr>
-          <p:cNvPr id="6" name="Text 4"/>
+          <p:cNvPr id="7" name="Text 5"/>
           <p:cNvSpPr/>
           <p:nvPr/>
         </p:nvSpPr>
@@ -3787,7 +5026,7 @@
                 <a:ea typeface="Aptos Display" pitchFamily="34" charset="-122"/>
                 <a:cs typeface="Aptos Display" pitchFamily="34" charset="-120"/>
               </a:rPr>
-              <a:t>Reflection Questions</a:t>
+              <a:t>Risks, Failure Modes, and Guardrails Continued</a:t>
             </a:r>
             <a:endParaRPr lang="en-US" sz="2700" dirty="0"/>
           </a:p>
@@ -3795,32 +5034,164 @@
       </p:sp>
       <p:sp>
         <p:nvSpPr>
-          <p:cNvPr id="7" name="Text 5"/>
-          <p:cNvSpPr/>
-          <p:nvPr/>
-        </p:nvSpPr>
-        <p:spPr>
-          <a:xfrm>
-            <a:off x="822960" y="1325880"/>
-            <a:ext cx="10378440" cy="4800600"/>
-          </a:xfrm>
-          <a:prstGeom prst="rect">
-            <a:avLst/>
-          </a:prstGeom>
-          <a:noFill/>
-          <a:ln/>
-        </p:spPr>
-        <p:txBody>
-          <a:bodyPr wrap="square" lIns="1016" tIns="1016" rIns="1016" bIns="1016" rtlCol="0" anchor="t">
+          <p:cNvPr id="8" name="Text 6"/>
+          <p:cNvSpPr/>
+          <p:nvPr/>
+        </p:nvSpPr>
+        <p:spPr>
+          <a:xfrm>
+            <a:off x="868680" y="1417320"/>
+            <a:ext cx="6675120" cy="4434840"/>
+          </a:xfrm>
+          <a:prstGeom prst="rect">
+            <a:avLst/>
+          </a:prstGeom>
+          <a:noFill/>
+          <a:ln/>
+        </p:spPr>
+        <p:txBody>
+          <a:bodyPr wrap="square" lIns="635" tIns="635" rIns="635" bIns="635" rtlCol="0" anchor="t">
             <a:normAutofit/>
           </a:bodyPr>
           <a:lstStyle/>
           <a:p>
+            <a:r>
+              <a:rPr lang="en-US" sz="1700" dirty="0">
+                <a:solidFill>
+                  <a:srgbClr val="17364A"/>
+                </a:solidFill>
+                <a:latin typeface="Aptos" pitchFamily="34" charset="0"/>
+                <a:ea typeface="Aptos" pitchFamily="34" charset="-122"/>
+                <a:cs typeface="Aptos" pitchFamily="34" charset="-120"/>
+              </a:rPr>
+              <a:t>Misclassification.</a:t>
+            </a:r>
+            <a:endParaRPr lang="en-US" sz="1700" dirty="0"/>
+          </a:p>
+          <a:p>
+            <a:r>
+              <a:rPr lang="en-US" sz="1700" dirty="0">
+                <a:solidFill>
+                  <a:srgbClr val="17364A"/>
+                </a:solidFill>
+                <a:latin typeface="Aptos" pitchFamily="34" charset="0"/>
+                <a:ea typeface="Aptos" pitchFamily="34" charset="-122"/>
+                <a:cs typeface="Aptos" pitchFamily="34" charset="-120"/>
+              </a:rPr>
+              <a:t>Incorrect labels can affect routing or priority.</a:t>
+            </a:r>
+            <a:endParaRPr lang="en-US" sz="1700" dirty="0"/>
+          </a:p>
+          <a:p>
+            <a:r>
+              <a:rPr lang="en-US" sz="1700" dirty="0">
+                <a:solidFill>
+                  <a:srgbClr val="17364A"/>
+                </a:solidFill>
+                <a:latin typeface="Aptos" pitchFamily="34" charset="0"/>
+                <a:ea typeface="Aptos" pitchFamily="34" charset="-122"/>
+                <a:cs typeface="Aptos" pitchFamily="34" charset="-120"/>
+              </a:rPr>
+              <a:t>Guardrails include validation, confidence thresholds, review queues, and monitoring of overrides.</a:t>
+            </a:r>
+            <a:endParaRPr lang="en-US" sz="1700" dirty="0"/>
+          </a:p>
+        </p:txBody>
+      </p:sp>
+      <p:sp>
+        <p:nvSpPr>
+          <p:cNvPr id="9" name="Shape 7"/>
+          <p:cNvSpPr/>
+          <p:nvPr/>
+        </p:nvSpPr>
+        <p:spPr>
+          <a:xfrm>
+            <a:off x="7909560" y="1417320"/>
+            <a:ext cx="3154680" cy="1828800"/>
+          </a:xfrm>
+          <a:prstGeom prst="roundRect">
+            <a:avLst>
+              <a:gd name="adj" fmla="val 6000"/>
+            </a:avLst>
+          </a:prstGeom>
+          <a:solidFill>
+            <a:srgbClr val="EEF8ED"/>
+          </a:solidFill>
+          <a:ln w="12700">
+            <a:solidFill>
+              <a:srgbClr val="B9D7E6"/>
+            </a:solidFill>
+            <a:prstDash val="solid"/>
+          </a:ln>
+        </p:spPr>
+      </p:sp>
+      <p:sp>
+        <p:nvSpPr>
+          <p:cNvPr id="10" name="Text 8"/>
+          <p:cNvSpPr/>
+          <p:nvPr/>
+        </p:nvSpPr>
+        <p:spPr>
+          <a:xfrm>
+            <a:off x="8074152" y="1563624"/>
+            <a:ext cx="2825496" cy="201168"/>
+          </a:xfrm>
+          <a:prstGeom prst="rect">
+            <a:avLst/>
+          </a:prstGeom>
+          <a:noFill/>
+          <a:ln/>
+        </p:spPr>
+        <p:txBody>
+          <a:bodyPr wrap="square" lIns="0" tIns="0" rIns="0" bIns="0" rtlCol="0" anchor="ctr"/>
+          <a:lstStyle/>
+          <a:p>
             <a:pPr indent="0" marL="0">
               <a:buNone/>
             </a:pPr>
             <a:r>
-              <a:rPr lang="en-US" sz="1420" dirty="0">
+              <a:rPr lang="en-US" sz="950" b="1" dirty="0">
+                <a:solidFill>
+                  <a:srgbClr val="0068B7"/>
+                </a:solidFill>
+                <a:latin typeface="Aptos" pitchFamily="34" charset="0"/>
+                <a:ea typeface="Aptos" pitchFamily="34" charset="-122"/>
+                <a:cs typeface="Aptos" pitchFamily="34" charset="-120"/>
+              </a:rPr>
+              <a:t>Key idea</a:t>
+            </a:r>
+            <a:endParaRPr lang="en-US" sz="950" dirty="0"/>
+          </a:p>
+        </p:txBody>
+      </p:sp>
+      <p:sp>
+        <p:nvSpPr>
+          <p:cNvPr id="11" name="Text 9"/>
+          <p:cNvSpPr/>
+          <p:nvPr/>
+        </p:nvSpPr>
+        <p:spPr>
+          <a:xfrm>
+            <a:off x="8074152" y="1856232"/>
+            <a:ext cx="2825496" cy="1261872"/>
+          </a:xfrm>
+          <a:prstGeom prst="rect">
+            <a:avLst/>
+          </a:prstGeom>
+          <a:noFill/>
+          <a:ln/>
+        </p:spPr>
+        <p:txBody>
+          <a:bodyPr wrap="square" lIns="0" tIns="0" rIns="0" bIns="0" rtlCol="0" anchor="t">
+            <a:normAutofit/>
+          </a:bodyPr>
+          <a:lstStyle/>
+          <a:p>
+            <a:pPr indent="0" marL="0">
+              <a:buNone/>
+            </a:pPr>
+            <a:r>
+              <a:rPr lang="en-US" sz="1250" dirty="0">
                 <a:solidFill>
                   <a:srgbClr val="17364A"/>
                 </a:solidFill>
@@ -3828,9 +5199,116 @@
                 <a:ea typeface="Aptos" pitchFamily="34" charset="-122"/>
                 <a:cs typeface="Aptos" pitchFamily="34" charset="-120"/>
               </a:rPr>
-              <a:t>Which public health workflows involve large volumes of free text? What task would NLP support: extraction, classification, summarization, translation, or topic detection? What errors would be most harmful?</a:t>
-            </a:r>
-            <a:endParaRPr lang="en-US" sz="1420" dirty="0"/>
+              <a:t>Misclassification.</a:t>
+            </a:r>
+            <a:endParaRPr lang="en-US" sz="1250" dirty="0"/>
+          </a:p>
+        </p:txBody>
+      </p:sp>
+      <p:sp>
+        <p:nvSpPr>
+          <p:cNvPr id="12" name="Shape 10"/>
+          <p:cNvSpPr/>
+          <p:nvPr/>
+        </p:nvSpPr>
+        <p:spPr>
+          <a:xfrm>
+            <a:off x="7909560" y="3520440"/>
+            <a:ext cx="3154680" cy="1737360"/>
+          </a:xfrm>
+          <a:prstGeom prst="roundRect">
+            <a:avLst>
+              <a:gd name="adj" fmla="val 6316"/>
+            </a:avLst>
+          </a:prstGeom>
+          <a:solidFill>
+            <a:srgbClr val="EAF6F8"/>
+          </a:solidFill>
+          <a:ln w="12700">
+            <a:solidFill>
+              <a:srgbClr val="B9D7E6"/>
+            </a:solidFill>
+            <a:prstDash val="solid"/>
+          </a:ln>
+        </p:spPr>
+      </p:sp>
+      <p:sp>
+        <p:nvSpPr>
+          <p:cNvPr id="13" name="Text 11"/>
+          <p:cNvSpPr/>
+          <p:nvPr/>
+        </p:nvSpPr>
+        <p:spPr>
+          <a:xfrm>
+            <a:off x="8074152" y="3666744"/>
+            <a:ext cx="2825496" cy="201168"/>
+          </a:xfrm>
+          <a:prstGeom prst="rect">
+            <a:avLst/>
+          </a:prstGeom>
+          <a:noFill/>
+          <a:ln/>
+        </p:spPr>
+        <p:txBody>
+          <a:bodyPr wrap="square" lIns="0" tIns="0" rIns="0" bIns="0" rtlCol="0" anchor="ctr"/>
+          <a:lstStyle/>
+          <a:p>
+            <a:pPr indent="0" marL="0">
+              <a:buNone/>
+            </a:pPr>
+            <a:r>
+              <a:rPr lang="en-US" sz="950" b="1" dirty="0">
+                <a:solidFill>
+                  <a:srgbClr val="0068B7"/>
+                </a:solidFill>
+                <a:latin typeface="Aptos" pitchFamily="34" charset="0"/>
+                <a:ea typeface="Aptos" pitchFamily="34" charset="-122"/>
+                <a:cs typeface="Aptos" pitchFamily="34" charset="-120"/>
+              </a:rPr>
+              <a:t>Use this for</a:t>
+            </a:r>
+            <a:endParaRPr lang="en-US" sz="950" dirty="0"/>
+          </a:p>
+        </p:txBody>
+      </p:sp>
+      <p:sp>
+        <p:nvSpPr>
+          <p:cNvPr id="14" name="Text 12"/>
+          <p:cNvSpPr/>
+          <p:nvPr/>
+        </p:nvSpPr>
+        <p:spPr>
+          <a:xfrm>
+            <a:off x="8074152" y="3959352"/>
+            <a:ext cx="2825496" cy="1170432"/>
+          </a:xfrm>
+          <a:prstGeom prst="rect">
+            <a:avLst/>
+          </a:prstGeom>
+          <a:noFill/>
+          <a:ln/>
+        </p:spPr>
+        <p:txBody>
+          <a:bodyPr wrap="square" lIns="0" tIns="0" rIns="0" bIns="0" rtlCol="0" anchor="t">
+            <a:normAutofit/>
+          </a:bodyPr>
+          <a:lstStyle/>
+          <a:p>
+            <a:pPr indent="0" marL="0">
+              <a:buNone/>
+            </a:pPr>
+            <a:r>
+              <a:rPr lang="en-US" sz="1250" dirty="0">
+                <a:solidFill>
+                  <a:srgbClr val="17364A"/>
+                </a:solidFill>
+                <a:latin typeface="Aptos" pitchFamily="34" charset="0"/>
+                <a:ea typeface="Aptos" pitchFamily="34" charset="-122"/>
+                <a:cs typeface="Aptos" pitchFamily="34" charset="-120"/>
+              </a:rPr>
+              <a:t>Connect the concept to public health decisions, safeguards, documentation, or implementation work.</a:t>
+            </a:r>
+            <a:endParaRPr lang="en-US" sz="1250" dirty="0"/>
           </a:p>
         </p:txBody>
       </p:sp>
@@ -3893,7 +5371,32 @@
       </p:sp>
       <p:sp>
         <p:nvSpPr>
-          <p:cNvPr id="3" name="Text 1"/>
+          <p:cNvPr id="3" name="Shape 1"/>
+          <p:cNvSpPr/>
+          <p:nvPr/>
+        </p:nvSpPr>
+        <p:spPr>
+          <a:xfrm>
+            <a:off x="0" y="164592"/>
+            <a:ext cx="146304" cy="6693408"/>
+          </a:xfrm>
+          <a:prstGeom prst="rect">
+            <a:avLst/>
+          </a:prstGeom>
+          <a:solidFill>
+            <a:srgbClr val="2F8A28"/>
+          </a:solidFill>
+          <a:ln w="12700">
+            <a:solidFill>
+              <a:srgbClr val="2F8A28"/>
+            </a:solidFill>
+            <a:prstDash val="solid"/>
+          </a:ln>
+        </p:spPr>
+      </p:sp>
+      <p:sp>
+        <p:nvSpPr>
+          <p:cNvPr id="4" name="Text 2"/>
           <p:cNvSpPr/>
           <p:nvPr/>
         </p:nvSpPr>
@@ -3932,7 +5435,7 @@
       </p:sp>
       <p:sp>
         <p:nvSpPr>
-          <p:cNvPr id="4" name="Text 2"/>
+          <p:cNvPr id="5" name="Text 3"/>
           <p:cNvSpPr/>
           <p:nvPr/>
         </p:nvSpPr>
@@ -3971,7 +5474,7 @@
       </p:sp>
       <p:sp>
         <p:nvSpPr>
-          <p:cNvPr id="5" name="Text 3"/>
+          <p:cNvPr id="6" name="Text 4"/>
           <p:cNvSpPr/>
           <p:nvPr/>
         </p:nvSpPr>
@@ -4010,13 +5513,77 @@
       </p:sp>
       <p:sp>
         <p:nvSpPr>
-          <p:cNvPr id="6" name="Text 4"/>
+          <p:cNvPr id="7" name="Shape 5"/>
           <p:cNvSpPr/>
           <p:nvPr/>
         </p:nvSpPr>
         <p:spPr>
           <a:xfrm>
             <a:off x="640080" y="658368"/>
+            <a:ext cx="420624" cy="420624"/>
+          </a:xfrm>
+          <a:prstGeom prst="ellipse">
+            <a:avLst/>
+          </a:prstGeom>
+          <a:solidFill>
+            <a:srgbClr val="0068B7"/>
+          </a:solidFill>
+          <a:ln w="12700">
+            <a:solidFill>
+              <a:srgbClr val="0068B7"/>
+            </a:solidFill>
+            <a:prstDash val="solid"/>
+          </a:ln>
+        </p:spPr>
+      </p:sp>
+      <p:sp>
+        <p:nvSpPr>
+          <p:cNvPr id="8" name="Text 6"/>
+          <p:cNvSpPr/>
+          <p:nvPr/>
+        </p:nvSpPr>
+        <p:spPr>
+          <a:xfrm>
+            <a:off x="640080" y="731520"/>
+            <a:ext cx="420624" cy="164592"/>
+          </a:xfrm>
+          <a:prstGeom prst="rect">
+            <a:avLst/>
+          </a:prstGeom>
+          <a:noFill/>
+          <a:ln/>
+        </p:spPr>
+        <p:txBody>
+          <a:bodyPr wrap="square" lIns="0" tIns="0" rIns="0" bIns="0" rtlCol="0" anchor="ctr"/>
+          <a:lstStyle/>
+          <a:p>
+            <a:pPr algn="ctr" indent="0" marL="0">
+              <a:buNone/>
+            </a:pPr>
+            <a:r>
+              <a:rPr lang="en-US" sz="1100" b="1" dirty="0">
+                <a:solidFill>
+                  <a:srgbClr val="FFFFFF"/>
+                </a:solidFill>
+                <a:latin typeface="Aptos" pitchFamily="34" charset="0"/>
+                <a:ea typeface="Aptos" pitchFamily="34" charset="-122"/>
+                <a:cs typeface="Aptos" pitchFamily="34" charset="-120"/>
+              </a:rPr>
+              <a:t>8</a:t>
+            </a:r>
+            <a:endParaRPr lang="en-US" sz="1100" dirty="0"/>
+          </a:p>
+        </p:txBody>
+      </p:sp>
+      <p:sp>
+        <p:nvSpPr>
+          <p:cNvPr id="9" name="Text 7"/>
+          <p:cNvSpPr/>
+          <p:nvPr/>
+        </p:nvSpPr>
+        <p:spPr>
+          <a:xfrm>
+            <a:off x="640080" y="621792"/>
             <a:ext cx="10881360" cy="566928"/>
           </a:xfrm>
           <a:prstGeom prst="rect">
@@ -4043,7 +5610,7 @@
                 <a:ea typeface="Aptos Display" pitchFamily="34" charset="-122"/>
                 <a:cs typeface="Aptos Display" pitchFamily="34" charset="-120"/>
               </a:rPr>
-              <a:t>Reflection Questions Continued</a:t>
+              <a:t>Application to AI-Supported Workflows</a:t>
             </a:r>
             <a:endParaRPr lang="en-US" sz="2700" dirty="0"/>
           </a:p>
@@ -4051,32 +5618,178 @@
       </p:sp>
       <p:sp>
         <p:nvSpPr>
-          <p:cNvPr id="7" name="Text 5"/>
-          <p:cNvSpPr/>
-          <p:nvPr/>
-        </p:nvSpPr>
-        <p:spPr>
-          <a:xfrm>
-            <a:off x="822960" y="1325880"/>
-            <a:ext cx="10378440" cy="4800600"/>
-          </a:xfrm>
-          <a:prstGeom prst="rect">
-            <a:avLst/>
-          </a:prstGeom>
-          <a:noFill/>
-          <a:ln/>
-        </p:spPr>
-        <p:txBody>
-          <a:bodyPr wrap="square" lIns="1016" tIns="1016" rIns="1016" bIns="1016" rtlCol="0" anchor="t">
+          <p:cNvPr id="10" name="Text 8"/>
+          <p:cNvSpPr/>
+          <p:nvPr/>
+        </p:nvSpPr>
+        <p:spPr>
+          <a:xfrm>
+            <a:off x="868680" y="1417320"/>
+            <a:ext cx="6675120" cy="4434840"/>
+          </a:xfrm>
+          <a:prstGeom prst="rect">
+            <a:avLst/>
+          </a:prstGeom>
+          <a:noFill/>
+          <a:ln/>
+        </p:spPr>
+        <p:txBody>
+          <a:bodyPr wrap="square" lIns="635" tIns="635" rIns="635" bIns="635" rtlCol="0" anchor="t">
             <a:normAutofit/>
           </a:bodyPr>
           <a:lstStyle/>
           <a:p>
+            <a:r>
+              <a:rPr lang="en-US" sz="1700" dirty="0">
+                <a:solidFill>
+                  <a:srgbClr val="17364A"/>
+                </a:solidFill>
+                <a:latin typeface="Aptos" pitchFamily="34" charset="0"/>
+                <a:ea typeface="Aptos" pitchFamily="34" charset="-122"/>
+                <a:cs typeface="Aptos" pitchFamily="34" charset="-120"/>
+              </a:rPr>
+              <a:t>Generative AI is often used for summarization, drafting, and question answering, but outputs must be checked against source.</a:t>
+            </a:r>
+            <a:endParaRPr lang="en-US" sz="1700" dirty="0"/>
+          </a:p>
+          <a:p>
+            <a:r>
+              <a:rPr lang="en-US" sz="1700" dirty="0">
+                <a:solidFill>
+                  <a:srgbClr val="17364A"/>
+                </a:solidFill>
+                <a:latin typeface="Aptos" pitchFamily="34" charset="0"/>
+                <a:ea typeface="Aptos" pitchFamily="34" charset="-122"/>
+                <a:cs typeface="Aptos" pitchFamily="34" charset="-120"/>
+              </a:rPr>
+              <a:t>Predictive analytics may use NLP-derived features, so extraction quality affects model performance.</a:t>
+            </a:r>
+            <a:endParaRPr lang="en-US" sz="1700" dirty="0"/>
+          </a:p>
+          <a:p>
+            <a:r>
+              <a:rPr lang="en-US" sz="1700" dirty="0">
+                <a:solidFill>
+                  <a:srgbClr val="17364A"/>
+                </a:solidFill>
+                <a:latin typeface="Aptos" pitchFamily="34" charset="0"/>
+                <a:ea typeface="Aptos" pitchFamily="34" charset="-122"/>
+                <a:cs typeface="Aptos" pitchFamily="34" charset="-120"/>
+              </a:rPr>
+              <a:t>RAG systems use NLP to retrieve and summarize documents, which requires document governance and source citation.</a:t>
+            </a:r>
+            <a:endParaRPr lang="en-US" sz="1700" dirty="0"/>
+          </a:p>
+          <a:p>
+            <a:r>
+              <a:rPr lang="en-US" sz="1700" dirty="0">
+                <a:solidFill>
+                  <a:srgbClr val="17364A"/>
+                </a:solidFill>
+                <a:latin typeface="Aptos" pitchFamily="34" charset="0"/>
+                <a:ea typeface="Aptos" pitchFamily="34" charset="-122"/>
+                <a:cs typeface="Aptos" pitchFamily="34" charset="-120"/>
+              </a:rPr>
+              <a:t>Agentic AI using NLP to trigger actions should require clear thresholds and human approval for consequential steps.</a:t>
+            </a:r>
+            <a:endParaRPr lang="en-US" sz="1700" dirty="0"/>
+          </a:p>
+        </p:txBody>
+      </p:sp>
+      <p:sp>
+        <p:nvSpPr>
+          <p:cNvPr id="11" name="Shape 9"/>
+          <p:cNvSpPr/>
+          <p:nvPr/>
+        </p:nvSpPr>
+        <p:spPr>
+          <a:xfrm>
+            <a:off x="7909560" y="1417320"/>
+            <a:ext cx="3154680" cy="1828800"/>
+          </a:xfrm>
+          <a:prstGeom prst="roundRect">
+            <a:avLst>
+              <a:gd name="adj" fmla="val 6000"/>
+            </a:avLst>
+          </a:prstGeom>
+          <a:solidFill>
+            <a:srgbClr val="EEF8ED"/>
+          </a:solidFill>
+          <a:ln w="12700">
+            <a:solidFill>
+              <a:srgbClr val="B9D7E6"/>
+            </a:solidFill>
+            <a:prstDash val="solid"/>
+          </a:ln>
+        </p:spPr>
+      </p:sp>
+      <p:sp>
+        <p:nvSpPr>
+          <p:cNvPr id="12" name="Text 10"/>
+          <p:cNvSpPr/>
+          <p:nvPr/>
+        </p:nvSpPr>
+        <p:spPr>
+          <a:xfrm>
+            <a:off x="8074152" y="1563624"/>
+            <a:ext cx="2825496" cy="201168"/>
+          </a:xfrm>
+          <a:prstGeom prst="rect">
+            <a:avLst/>
+          </a:prstGeom>
+          <a:noFill/>
+          <a:ln/>
+        </p:spPr>
+        <p:txBody>
+          <a:bodyPr wrap="square" lIns="0" tIns="0" rIns="0" bIns="0" rtlCol="0" anchor="ctr"/>
+          <a:lstStyle/>
+          <a:p>
             <a:pPr indent="0" marL="0">
               <a:buNone/>
             </a:pPr>
             <a:r>
-              <a:rPr lang="en-US" sz="1420" dirty="0">
+              <a:rPr lang="en-US" sz="950" b="1" dirty="0">
+                <a:solidFill>
+                  <a:srgbClr val="0068B7"/>
+                </a:solidFill>
+                <a:latin typeface="Aptos" pitchFamily="34" charset="0"/>
+                <a:ea typeface="Aptos" pitchFamily="34" charset="-122"/>
+                <a:cs typeface="Aptos" pitchFamily="34" charset="-120"/>
+              </a:rPr>
+              <a:t>Key idea</a:t>
+            </a:r>
+            <a:endParaRPr lang="en-US" sz="950" dirty="0"/>
+          </a:p>
+        </p:txBody>
+      </p:sp>
+      <p:sp>
+        <p:nvSpPr>
+          <p:cNvPr id="13" name="Text 11"/>
+          <p:cNvSpPr/>
+          <p:nvPr/>
+        </p:nvSpPr>
+        <p:spPr>
+          <a:xfrm>
+            <a:off x="8074152" y="1856232"/>
+            <a:ext cx="2825496" cy="1261872"/>
+          </a:xfrm>
+          <a:prstGeom prst="rect">
+            <a:avLst/>
+          </a:prstGeom>
+          <a:noFill/>
+          <a:ln/>
+        </p:spPr>
+        <p:txBody>
+          <a:bodyPr wrap="square" lIns="0" tIns="0" rIns="0" bIns="0" rtlCol="0" anchor="t">
+            <a:normAutofit/>
+          </a:bodyPr>
+          <a:lstStyle/>
+          <a:p>
+            <a:pPr indent="0" marL="0">
+              <a:buNone/>
+            </a:pPr>
+            <a:r>
+              <a:rPr lang="en-US" sz="1250" dirty="0">
                 <a:solidFill>
                   <a:srgbClr val="17364A"/>
                 </a:solidFill>
@@ -4084,9 +5797,116 @@
                 <a:ea typeface="Aptos" pitchFamily="34" charset="-122"/>
                 <a:cs typeface="Aptos" pitchFamily="34" charset="-120"/>
               </a:rPr>
-              <a:t>What source material must be retained for human review? How will staff evaluate accuracy across languages, populations, and program areas?</a:t>
-            </a:r>
-            <a:endParaRPr lang="en-US" sz="1420" dirty="0"/>
+              <a:t>Generative AI is often used for summarization, drafting, and question answering, but outputs must be checked against source.</a:t>
+            </a:r>
+            <a:endParaRPr lang="en-US" sz="1250" dirty="0"/>
+          </a:p>
+        </p:txBody>
+      </p:sp>
+      <p:sp>
+        <p:nvSpPr>
+          <p:cNvPr id="14" name="Shape 12"/>
+          <p:cNvSpPr/>
+          <p:nvPr/>
+        </p:nvSpPr>
+        <p:spPr>
+          <a:xfrm>
+            <a:off x="7909560" y="3520440"/>
+            <a:ext cx="3154680" cy="1737360"/>
+          </a:xfrm>
+          <a:prstGeom prst="roundRect">
+            <a:avLst>
+              <a:gd name="adj" fmla="val 6316"/>
+            </a:avLst>
+          </a:prstGeom>
+          <a:solidFill>
+            <a:srgbClr val="EAF6F8"/>
+          </a:solidFill>
+          <a:ln w="12700">
+            <a:solidFill>
+              <a:srgbClr val="B9D7E6"/>
+            </a:solidFill>
+            <a:prstDash val="solid"/>
+          </a:ln>
+        </p:spPr>
+      </p:sp>
+      <p:sp>
+        <p:nvSpPr>
+          <p:cNvPr id="15" name="Text 13"/>
+          <p:cNvSpPr/>
+          <p:nvPr/>
+        </p:nvSpPr>
+        <p:spPr>
+          <a:xfrm>
+            <a:off x="8074152" y="3666744"/>
+            <a:ext cx="2825496" cy="201168"/>
+          </a:xfrm>
+          <a:prstGeom prst="rect">
+            <a:avLst/>
+          </a:prstGeom>
+          <a:noFill/>
+          <a:ln/>
+        </p:spPr>
+        <p:txBody>
+          <a:bodyPr wrap="square" lIns="0" tIns="0" rIns="0" bIns="0" rtlCol="0" anchor="ctr"/>
+          <a:lstStyle/>
+          <a:p>
+            <a:pPr indent="0" marL="0">
+              <a:buNone/>
+            </a:pPr>
+            <a:r>
+              <a:rPr lang="en-US" sz="950" b="1" dirty="0">
+                <a:solidFill>
+                  <a:srgbClr val="0068B7"/>
+                </a:solidFill>
+                <a:latin typeface="Aptos" pitchFamily="34" charset="0"/>
+                <a:ea typeface="Aptos" pitchFamily="34" charset="-122"/>
+                <a:cs typeface="Aptos" pitchFamily="34" charset="-120"/>
+              </a:rPr>
+              <a:t>Use this for</a:t>
+            </a:r>
+            <a:endParaRPr lang="en-US" sz="950" dirty="0"/>
+          </a:p>
+        </p:txBody>
+      </p:sp>
+      <p:sp>
+        <p:nvSpPr>
+          <p:cNvPr id="16" name="Text 14"/>
+          <p:cNvSpPr/>
+          <p:nvPr/>
+        </p:nvSpPr>
+        <p:spPr>
+          <a:xfrm>
+            <a:off x="8074152" y="3959352"/>
+            <a:ext cx="2825496" cy="1170432"/>
+          </a:xfrm>
+          <a:prstGeom prst="rect">
+            <a:avLst/>
+          </a:prstGeom>
+          <a:noFill/>
+          <a:ln/>
+        </p:spPr>
+        <p:txBody>
+          <a:bodyPr wrap="square" lIns="0" tIns="0" rIns="0" bIns="0" rtlCol="0" anchor="t">
+            <a:normAutofit/>
+          </a:bodyPr>
+          <a:lstStyle/>
+          <a:p>
+            <a:pPr indent="0" marL="0">
+              <a:buNone/>
+            </a:pPr>
+            <a:r>
+              <a:rPr lang="en-US" sz="1250" dirty="0">
+                <a:solidFill>
+                  <a:srgbClr val="17364A"/>
+                </a:solidFill>
+                <a:latin typeface="Aptos" pitchFamily="34" charset="0"/>
+                <a:ea typeface="Aptos" pitchFamily="34" charset="-122"/>
+                <a:cs typeface="Aptos" pitchFamily="34" charset="-120"/>
+              </a:rPr>
+              <a:t>Connect the concept to public health decisions, safeguards, documentation, or implementation work.</a:t>
+            </a:r>
+            <a:endParaRPr lang="en-US" sz="1250" dirty="0"/>
           </a:p>
         </p:txBody>
       </p:sp>
@@ -4149,7 +5969,32 @@
       </p:sp>
       <p:sp>
         <p:nvSpPr>
-          <p:cNvPr id="3" name="Text 1"/>
+          <p:cNvPr id="3" name="Shape 1"/>
+          <p:cNvSpPr/>
+          <p:nvPr/>
+        </p:nvSpPr>
+        <p:spPr>
+          <a:xfrm>
+            <a:off x="0" y="164592"/>
+            <a:ext cx="146304" cy="6693408"/>
+          </a:xfrm>
+          <a:prstGeom prst="rect">
+            <a:avLst/>
+          </a:prstGeom>
+          <a:solidFill>
+            <a:srgbClr val="2F8A28"/>
+          </a:solidFill>
+          <a:ln w="12700">
+            <a:solidFill>
+              <a:srgbClr val="2F8A28"/>
+            </a:solidFill>
+            <a:prstDash val="solid"/>
+          </a:ln>
+        </p:spPr>
+      </p:sp>
+      <p:sp>
+        <p:nvSpPr>
+          <p:cNvPr id="4" name="Text 2"/>
           <p:cNvSpPr/>
           <p:nvPr/>
         </p:nvSpPr>
@@ -4188,7 +6033,7 @@
       </p:sp>
       <p:sp>
         <p:nvSpPr>
-          <p:cNvPr id="4" name="Text 2"/>
+          <p:cNvPr id="5" name="Text 3"/>
           <p:cNvSpPr/>
           <p:nvPr/>
         </p:nvSpPr>
@@ -4227,7 +6072,7 @@
       </p:sp>
       <p:sp>
         <p:nvSpPr>
-          <p:cNvPr id="5" name="Text 3"/>
+          <p:cNvPr id="6" name="Text 4"/>
           <p:cNvSpPr/>
           <p:nvPr/>
         </p:nvSpPr>
@@ -4266,13 +6111,77 @@
       </p:sp>
       <p:sp>
         <p:nvSpPr>
-          <p:cNvPr id="6" name="Text 4"/>
+          <p:cNvPr id="7" name="Shape 5"/>
           <p:cNvSpPr/>
           <p:nvPr/>
         </p:nvSpPr>
         <p:spPr>
           <a:xfrm>
             <a:off x="640080" y="658368"/>
+            <a:ext cx="420624" cy="420624"/>
+          </a:xfrm>
+          <a:prstGeom prst="ellipse">
+            <a:avLst/>
+          </a:prstGeom>
+          <a:solidFill>
+            <a:srgbClr val="0068B7"/>
+          </a:solidFill>
+          <a:ln w="12700">
+            <a:solidFill>
+              <a:srgbClr val="0068B7"/>
+            </a:solidFill>
+            <a:prstDash val="solid"/>
+          </a:ln>
+        </p:spPr>
+      </p:sp>
+      <p:sp>
+        <p:nvSpPr>
+          <p:cNvPr id="8" name="Text 6"/>
+          <p:cNvSpPr/>
+          <p:nvPr/>
+        </p:nvSpPr>
+        <p:spPr>
+          <a:xfrm>
+            <a:off x="640080" y="731520"/>
+            <a:ext cx="420624" cy="164592"/>
+          </a:xfrm>
+          <a:prstGeom prst="rect">
+            <a:avLst/>
+          </a:prstGeom>
+          <a:noFill/>
+          <a:ln/>
+        </p:spPr>
+        <p:txBody>
+          <a:bodyPr wrap="square" lIns="0" tIns="0" rIns="0" bIns="0" rtlCol="0" anchor="ctr"/>
+          <a:lstStyle/>
+          <a:p>
+            <a:pPr algn="ctr" indent="0" marL="0">
+              <a:buNone/>
+            </a:pPr>
+            <a:r>
+              <a:rPr lang="en-US" sz="1100" b="1" dirty="0">
+                <a:solidFill>
+                  <a:srgbClr val="FFFFFF"/>
+                </a:solidFill>
+                <a:latin typeface="Aptos" pitchFamily="34" charset="0"/>
+                <a:ea typeface="Aptos" pitchFamily="34" charset="-122"/>
+                <a:cs typeface="Aptos" pitchFamily="34" charset="-120"/>
+              </a:rPr>
+              <a:t>9</a:t>
+            </a:r>
+            <a:endParaRPr lang="en-US" sz="1100" dirty="0"/>
+          </a:p>
+        </p:txBody>
+      </p:sp>
+      <p:sp>
+        <p:nvSpPr>
+          <p:cNvPr id="9" name="Text 7"/>
+          <p:cNvSpPr/>
+          <p:nvPr/>
+        </p:nvSpPr>
+        <p:spPr>
+          <a:xfrm>
+            <a:off x="640080" y="621792"/>
             <a:ext cx="10881360" cy="566928"/>
           </a:xfrm>
           <a:prstGeom prst="rect">
@@ -4299,7 +6208,7 @@
                 <a:ea typeface="Aptos Display" pitchFamily="34" charset="-122"/>
                 <a:cs typeface="Aptos Display" pitchFamily="34" charset="-120"/>
               </a:rPr>
-              <a:t>Practical Exercise</a:t>
+              <a:t>Reflection Questions</a:t>
             </a:r>
             <a:endParaRPr lang="en-US" sz="2700" dirty="0"/>
           </a:p>
@@ -4307,32 +6216,164 @@
       </p:sp>
       <p:sp>
         <p:nvSpPr>
-          <p:cNvPr id="7" name="Text 5"/>
-          <p:cNvSpPr/>
-          <p:nvPr/>
-        </p:nvSpPr>
-        <p:spPr>
-          <a:xfrm>
-            <a:off x="822960" y="1325880"/>
-            <a:ext cx="10378440" cy="4800600"/>
-          </a:xfrm>
-          <a:prstGeom prst="rect">
-            <a:avLst/>
-          </a:prstGeom>
-          <a:noFill/>
-          <a:ln/>
-        </p:spPr>
-        <p:txBody>
-          <a:bodyPr wrap="square" lIns="1016" tIns="1016" rIns="1016" bIns="1016" rtlCol="0" anchor="t">
+          <p:cNvPr id="10" name="Text 8"/>
+          <p:cNvSpPr/>
+          <p:nvPr/>
+        </p:nvSpPr>
+        <p:spPr>
+          <a:xfrm>
+            <a:off x="868680" y="1417320"/>
+            <a:ext cx="6675120" cy="4434840"/>
+          </a:xfrm>
+          <a:prstGeom prst="rect">
+            <a:avLst/>
+          </a:prstGeom>
+          <a:noFill/>
+          <a:ln/>
+        </p:spPr>
+        <p:txBody>
+          <a:bodyPr wrap="square" lIns="635" tIns="635" rIns="635" bIns="635" rtlCol="0" anchor="t">
             <a:normAutofit/>
           </a:bodyPr>
           <a:lstStyle/>
           <a:p>
+            <a:r>
+              <a:rPr lang="en-US" sz="1700" dirty="0">
+                <a:solidFill>
+                  <a:srgbClr val="17364A"/>
+                </a:solidFill>
+                <a:latin typeface="Aptos" pitchFamily="34" charset="0"/>
+                <a:ea typeface="Aptos" pitchFamily="34" charset="-122"/>
+                <a:cs typeface="Aptos" pitchFamily="34" charset="-120"/>
+              </a:rPr>
+              <a:t>Which public health workflows involve large volumes of free text?</a:t>
+            </a:r>
+            <a:endParaRPr lang="en-US" sz="1700" dirty="0"/>
+          </a:p>
+          <a:p>
+            <a:r>
+              <a:rPr lang="en-US" sz="1700" dirty="0">
+                <a:solidFill>
+                  <a:srgbClr val="17364A"/>
+                </a:solidFill>
+                <a:latin typeface="Aptos" pitchFamily="34" charset="0"/>
+                <a:ea typeface="Aptos" pitchFamily="34" charset="-122"/>
+                <a:cs typeface="Aptos" pitchFamily="34" charset="-120"/>
+              </a:rPr>
+              <a:t>What task would NLP support: extraction, classification, summarization, translation, or topic detection?</a:t>
+            </a:r>
+            <a:endParaRPr lang="en-US" sz="1700" dirty="0"/>
+          </a:p>
+          <a:p>
+            <a:r>
+              <a:rPr lang="en-US" sz="1700" dirty="0">
+                <a:solidFill>
+                  <a:srgbClr val="17364A"/>
+                </a:solidFill>
+                <a:latin typeface="Aptos" pitchFamily="34" charset="0"/>
+                <a:ea typeface="Aptos" pitchFamily="34" charset="-122"/>
+                <a:cs typeface="Aptos" pitchFamily="34" charset="-120"/>
+              </a:rPr>
+              <a:t>What errors would be most harmful?</a:t>
+            </a:r>
+            <a:endParaRPr lang="en-US" sz="1700" dirty="0"/>
+          </a:p>
+        </p:txBody>
+      </p:sp>
+      <p:sp>
+        <p:nvSpPr>
+          <p:cNvPr id="11" name="Shape 9"/>
+          <p:cNvSpPr/>
+          <p:nvPr/>
+        </p:nvSpPr>
+        <p:spPr>
+          <a:xfrm>
+            <a:off x="7909560" y="1417320"/>
+            <a:ext cx="3154680" cy="1828800"/>
+          </a:xfrm>
+          <a:prstGeom prst="roundRect">
+            <a:avLst>
+              <a:gd name="adj" fmla="val 6000"/>
+            </a:avLst>
+          </a:prstGeom>
+          <a:solidFill>
+            <a:srgbClr val="EEF8ED"/>
+          </a:solidFill>
+          <a:ln w="12700">
+            <a:solidFill>
+              <a:srgbClr val="B9D7E6"/>
+            </a:solidFill>
+            <a:prstDash val="solid"/>
+          </a:ln>
+        </p:spPr>
+      </p:sp>
+      <p:sp>
+        <p:nvSpPr>
+          <p:cNvPr id="12" name="Text 10"/>
+          <p:cNvSpPr/>
+          <p:nvPr/>
+        </p:nvSpPr>
+        <p:spPr>
+          <a:xfrm>
+            <a:off x="8074152" y="1563624"/>
+            <a:ext cx="2825496" cy="201168"/>
+          </a:xfrm>
+          <a:prstGeom prst="rect">
+            <a:avLst/>
+          </a:prstGeom>
+          <a:noFill/>
+          <a:ln/>
+        </p:spPr>
+        <p:txBody>
+          <a:bodyPr wrap="square" lIns="0" tIns="0" rIns="0" bIns="0" rtlCol="0" anchor="ctr"/>
+          <a:lstStyle/>
+          <a:p>
             <a:pPr indent="0" marL="0">
               <a:buNone/>
             </a:pPr>
             <a:r>
-              <a:rPr lang="en-US" sz="1420" dirty="0">
+              <a:rPr lang="en-US" sz="950" b="1" dirty="0">
+                <a:solidFill>
+                  <a:srgbClr val="0068B7"/>
+                </a:solidFill>
+                <a:latin typeface="Aptos" pitchFamily="34" charset="0"/>
+                <a:ea typeface="Aptos" pitchFamily="34" charset="-122"/>
+                <a:cs typeface="Aptos" pitchFamily="34" charset="-120"/>
+              </a:rPr>
+              <a:t>Key idea</a:t>
+            </a:r>
+            <a:endParaRPr lang="en-US" sz="950" dirty="0"/>
+          </a:p>
+        </p:txBody>
+      </p:sp>
+      <p:sp>
+        <p:nvSpPr>
+          <p:cNvPr id="13" name="Text 11"/>
+          <p:cNvSpPr/>
+          <p:nvPr/>
+        </p:nvSpPr>
+        <p:spPr>
+          <a:xfrm>
+            <a:off x="8074152" y="1856232"/>
+            <a:ext cx="2825496" cy="1261872"/>
+          </a:xfrm>
+          <a:prstGeom prst="rect">
+            <a:avLst/>
+          </a:prstGeom>
+          <a:noFill/>
+          <a:ln/>
+        </p:spPr>
+        <p:txBody>
+          <a:bodyPr wrap="square" lIns="0" tIns="0" rIns="0" bIns="0" rtlCol="0" anchor="t">
+            <a:normAutofit/>
+          </a:bodyPr>
+          <a:lstStyle/>
+          <a:p>
+            <a:pPr indent="0" marL="0">
+              <a:buNone/>
+            </a:pPr>
+            <a:r>
+              <a:rPr lang="en-US" sz="1250" dirty="0">
                 <a:solidFill>
                   <a:srgbClr val="17364A"/>
                 </a:solidFill>
@@ -4340,9 +6381,116 @@
                 <a:ea typeface="Aptos" pitchFamily="34" charset="-122"/>
                 <a:cs typeface="Aptos" pitchFamily="34" charset="-120"/>
               </a:rPr>
-              <a:t>Create an NLP evaluation plan for one public health workflow. Include the text source, NLP task, intended use, prohibited use, required human review, accuracy measures, bias or subgroup review, privacy safeguards, source citation or traceability expectations, and escalation process.</a:t>
-            </a:r>
-            <a:endParaRPr lang="en-US" sz="1420" dirty="0"/>
+              <a:t>Which public health workflows involve large volumes of free text?</a:t>
+            </a:r>
+            <a:endParaRPr lang="en-US" sz="1250" dirty="0"/>
+          </a:p>
+        </p:txBody>
+      </p:sp>
+      <p:sp>
+        <p:nvSpPr>
+          <p:cNvPr id="14" name="Shape 12"/>
+          <p:cNvSpPr/>
+          <p:nvPr/>
+        </p:nvSpPr>
+        <p:spPr>
+          <a:xfrm>
+            <a:off x="7909560" y="3520440"/>
+            <a:ext cx="3154680" cy="1737360"/>
+          </a:xfrm>
+          <a:prstGeom prst="roundRect">
+            <a:avLst>
+              <a:gd name="adj" fmla="val 6316"/>
+            </a:avLst>
+          </a:prstGeom>
+          <a:solidFill>
+            <a:srgbClr val="EAF6F8"/>
+          </a:solidFill>
+          <a:ln w="12700">
+            <a:solidFill>
+              <a:srgbClr val="B9D7E6"/>
+            </a:solidFill>
+            <a:prstDash val="solid"/>
+          </a:ln>
+        </p:spPr>
+      </p:sp>
+      <p:sp>
+        <p:nvSpPr>
+          <p:cNvPr id="15" name="Text 13"/>
+          <p:cNvSpPr/>
+          <p:nvPr/>
+        </p:nvSpPr>
+        <p:spPr>
+          <a:xfrm>
+            <a:off x="8074152" y="3666744"/>
+            <a:ext cx="2825496" cy="201168"/>
+          </a:xfrm>
+          <a:prstGeom prst="rect">
+            <a:avLst/>
+          </a:prstGeom>
+          <a:noFill/>
+          <a:ln/>
+        </p:spPr>
+        <p:txBody>
+          <a:bodyPr wrap="square" lIns="0" tIns="0" rIns="0" bIns="0" rtlCol="0" anchor="ctr"/>
+          <a:lstStyle/>
+          <a:p>
+            <a:pPr indent="0" marL="0">
+              <a:buNone/>
+            </a:pPr>
+            <a:r>
+              <a:rPr lang="en-US" sz="950" b="1" dirty="0">
+                <a:solidFill>
+                  <a:srgbClr val="0068B7"/>
+                </a:solidFill>
+                <a:latin typeface="Aptos" pitchFamily="34" charset="0"/>
+                <a:ea typeface="Aptos" pitchFamily="34" charset="-122"/>
+                <a:cs typeface="Aptos" pitchFamily="34" charset="-120"/>
+              </a:rPr>
+              <a:t>Use this for</a:t>
+            </a:r>
+            <a:endParaRPr lang="en-US" sz="950" dirty="0"/>
+          </a:p>
+        </p:txBody>
+      </p:sp>
+      <p:sp>
+        <p:nvSpPr>
+          <p:cNvPr id="16" name="Text 14"/>
+          <p:cNvSpPr/>
+          <p:nvPr/>
+        </p:nvSpPr>
+        <p:spPr>
+          <a:xfrm>
+            <a:off x="8074152" y="3959352"/>
+            <a:ext cx="2825496" cy="1170432"/>
+          </a:xfrm>
+          <a:prstGeom prst="rect">
+            <a:avLst/>
+          </a:prstGeom>
+          <a:noFill/>
+          <a:ln/>
+        </p:spPr>
+        <p:txBody>
+          <a:bodyPr wrap="square" lIns="0" tIns="0" rIns="0" bIns="0" rtlCol="0" anchor="t">
+            <a:normAutofit/>
+          </a:bodyPr>
+          <a:lstStyle/>
+          <a:p>
+            <a:pPr indent="0" marL="0">
+              <a:buNone/>
+            </a:pPr>
+            <a:r>
+              <a:rPr lang="en-US" sz="1250" dirty="0">
+                <a:solidFill>
+                  <a:srgbClr val="17364A"/>
+                </a:solidFill>
+                <a:latin typeface="Aptos" pitchFamily="34" charset="0"/>
+                <a:ea typeface="Aptos" pitchFamily="34" charset="-122"/>
+                <a:cs typeface="Aptos" pitchFamily="34" charset="-120"/>
+              </a:rPr>
+              <a:t>Connect the concept to public health decisions, safeguards, documentation, or implementation work.</a:t>
+            </a:r>
+            <a:endParaRPr lang="en-US" sz="1250" dirty="0"/>
           </a:p>
         </p:txBody>
       </p:sp>
@@ -4405,7 +6553,32 @@
       </p:sp>
       <p:sp>
         <p:nvSpPr>
-          <p:cNvPr id="3" name="Text 1"/>
+          <p:cNvPr id="3" name="Shape 1"/>
+          <p:cNvSpPr/>
+          <p:nvPr/>
+        </p:nvSpPr>
+        <p:spPr>
+          <a:xfrm>
+            <a:off x="0" y="164592"/>
+            <a:ext cx="146304" cy="6693408"/>
+          </a:xfrm>
+          <a:prstGeom prst="rect">
+            <a:avLst/>
+          </a:prstGeom>
+          <a:solidFill>
+            <a:srgbClr val="2F8A28"/>
+          </a:solidFill>
+          <a:ln w="12700">
+            <a:solidFill>
+              <a:srgbClr val="2F8A28"/>
+            </a:solidFill>
+            <a:prstDash val="solid"/>
+          </a:ln>
+        </p:spPr>
+      </p:sp>
+      <p:sp>
+        <p:nvSpPr>
+          <p:cNvPr id="4" name="Text 2"/>
           <p:cNvSpPr/>
           <p:nvPr/>
         </p:nvSpPr>
@@ -4444,7 +6617,7 @@
       </p:sp>
       <p:sp>
         <p:nvSpPr>
-          <p:cNvPr id="4" name="Text 2"/>
+          <p:cNvPr id="5" name="Text 3"/>
           <p:cNvSpPr/>
           <p:nvPr/>
         </p:nvSpPr>
@@ -4483,7 +6656,7 @@
       </p:sp>
       <p:sp>
         <p:nvSpPr>
-          <p:cNvPr id="5" name="Text 3"/>
+          <p:cNvPr id="6" name="Text 4"/>
           <p:cNvSpPr/>
           <p:nvPr/>
         </p:nvSpPr>
@@ -4522,7 +6695,7 @@
       </p:sp>
       <p:sp>
         <p:nvSpPr>
-          <p:cNvPr id="6" name="Text 4"/>
+          <p:cNvPr id="7" name="Text 5"/>
           <p:cNvSpPr/>
           <p:nvPr/>
         </p:nvSpPr>
@@ -4555,7 +6728,7 @@
                 <a:ea typeface="Aptos Display" pitchFamily="34" charset="-122"/>
                 <a:cs typeface="Aptos Display" pitchFamily="34" charset="-120"/>
               </a:rPr>
-              <a:t>Expected Artifact or Evidence</a:t>
+              <a:t>Reflection Questions Continued</a:t>
             </a:r>
             <a:endParaRPr lang="en-US" sz="2700" dirty="0"/>
           </a:p>
@@ -4563,32 +6736,150 @@
       </p:sp>
       <p:sp>
         <p:nvSpPr>
-          <p:cNvPr id="7" name="Text 5"/>
-          <p:cNvSpPr/>
-          <p:nvPr/>
-        </p:nvSpPr>
-        <p:spPr>
-          <a:xfrm>
-            <a:off x="822960" y="1325880"/>
-            <a:ext cx="10378440" cy="4800600"/>
-          </a:xfrm>
-          <a:prstGeom prst="rect">
-            <a:avLst/>
-          </a:prstGeom>
-          <a:noFill/>
-          <a:ln/>
-        </p:spPr>
-        <p:txBody>
-          <a:bodyPr wrap="square" lIns="1016" tIns="1016" rIns="1016" bIns="1016" rtlCol="0" anchor="t">
+          <p:cNvPr id="8" name="Text 6"/>
+          <p:cNvSpPr/>
+          <p:nvPr/>
+        </p:nvSpPr>
+        <p:spPr>
+          <a:xfrm>
+            <a:off x="868680" y="1417320"/>
+            <a:ext cx="6675120" cy="4434840"/>
+          </a:xfrm>
+          <a:prstGeom prst="rect">
+            <a:avLst/>
+          </a:prstGeom>
+          <a:noFill/>
+          <a:ln/>
+        </p:spPr>
+        <p:txBody>
+          <a:bodyPr wrap="square" lIns="635" tIns="635" rIns="635" bIns="635" rtlCol="0" anchor="t">
             <a:normAutofit/>
           </a:bodyPr>
           <a:lstStyle/>
           <a:p>
+            <a:r>
+              <a:rPr lang="en-US" sz="1700" dirty="0">
+                <a:solidFill>
+                  <a:srgbClr val="17364A"/>
+                </a:solidFill>
+                <a:latin typeface="Aptos" pitchFamily="34" charset="0"/>
+                <a:ea typeface="Aptos" pitchFamily="34" charset="-122"/>
+                <a:cs typeface="Aptos" pitchFamily="34" charset="-120"/>
+              </a:rPr>
+              <a:t>What source material must be retained for human review?</a:t>
+            </a:r>
+            <a:endParaRPr lang="en-US" sz="1700" dirty="0"/>
+          </a:p>
+          <a:p>
+            <a:r>
+              <a:rPr lang="en-US" sz="1700" dirty="0">
+                <a:solidFill>
+                  <a:srgbClr val="17364A"/>
+                </a:solidFill>
+                <a:latin typeface="Aptos" pitchFamily="34" charset="0"/>
+                <a:ea typeface="Aptos" pitchFamily="34" charset="-122"/>
+                <a:cs typeface="Aptos" pitchFamily="34" charset="-120"/>
+              </a:rPr>
+              <a:t>How will staff evaluate accuracy across languages, populations, and program areas?</a:t>
+            </a:r>
+            <a:endParaRPr lang="en-US" sz="1700" dirty="0"/>
+          </a:p>
+        </p:txBody>
+      </p:sp>
+      <p:sp>
+        <p:nvSpPr>
+          <p:cNvPr id="9" name="Shape 7"/>
+          <p:cNvSpPr/>
+          <p:nvPr/>
+        </p:nvSpPr>
+        <p:spPr>
+          <a:xfrm>
+            <a:off x="7909560" y="1417320"/>
+            <a:ext cx="3154680" cy="1828800"/>
+          </a:xfrm>
+          <a:prstGeom prst="roundRect">
+            <a:avLst>
+              <a:gd name="adj" fmla="val 6000"/>
+            </a:avLst>
+          </a:prstGeom>
+          <a:solidFill>
+            <a:srgbClr val="EEF8ED"/>
+          </a:solidFill>
+          <a:ln w="12700">
+            <a:solidFill>
+              <a:srgbClr val="B9D7E6"/>
+            </a:solidFill>
+            <a:prstDash val="solid"/>
+          </a:ln>
+        </p:spPr>
+      </p:sp>
+      <p:sp>
+        <p:nvSpPr>
+          <p:cNvPr id="10" name="Text 8"/>
+          <p:cNvSpPr/>
+          <p:nvPr/>
+        </p:nvSpPr>
+        <p:spPr>
+          <a:xfrm>
+            <a:off x="8074152" y="1563624"/>
+            <a:ext cx="2825496" cy="201168"/>
+          </a:xfrm>
+          <a:prstGeom prst="rect">
+            <a:avLst/>
+          </a:prstGeom>
+          <a:noFill/>
+          <a:ln/>
+        </p:spPr>
+        <p:txBody>
+          <a:bodyPr wrap="square" lIns="0" tIns="0" rIns="0" bIns="0" rtlCol="0" anchor="ctr"/>
+          <a:lstStyle/>
+          <a:p>
             <a:pPr indent="0" marL="0">
               <a:buNone/>
             </a:pPr>
             <a:r>
-              <a:rPr lang="en-US" sz="1420" dirty="0">
+              <a:rPr lang="en-US" sz="950" b="1" dirty="0">
+                <a:solidFill>
+                  <a:srgbClr val="0068B7"/>
+                </a:solidFill>
+                <a:latin typeface="Aptos" pitchFamily="34" charset="0"/>
+                <a:ea typeface="Aptos" pitchFamily="34" charset="-122"/>
+                <a:cs typeface="Aptos" pitchFamily="34" charset="-120"/>
+              </a:rPr>
+              <a:t>Key idea</a:t>
+            </a:r>
+            <a:endParaRPr lang="en-US" sz="950" dirty="0"/>
+          </a:p>
+        </p:txBody>
+      </p:sp>
+      <p:sp>
+        <p:nvSpPr>
+          <p:cNvPr id="11" name="Text 9"/>
+          <p:cNvSpPr/>
+          <p:nvPr/>
+        </p:nvSpPr>
+        <p:spPr>
+          <a:xfrm>
+            <a:off x="8074152" y="1856232"/>
+            <a:ext cx="2825496" cy="1261872"/>
+          </a:xfrm>
+          <a:prstGeom prst="rect">
+            <a:avLst/>
+          </a:prstGeom>
+          <a:noFill/>
+          <a:ln/>
+        </p:spPr>
+        <p:txBody>
+          <a:bodyPr wrap="square" lIns="0" tIns="0" rIns="0" bIns="0" rtlCol="0" anchor="t">
+            <a:normAutofit/>
+          </a:bodyPr>
+          <a:lstStyle/>
+          <a:p>
+            <a:pPr indent="0" marL="0">
+              <a:buNone/>
+            </a:pPr>
+            <a:r>
+              <a:rPr lang="en-US" sz="1250" dirty="0">
                 <a:solidFill>
                   <a:srgbClr val="17364A"/>
                 </a:solidFill>
@@ -4596,9 +6887,116 @@
                 <a:ea typeface="Aptos" pitchFamily="34" charset="-122"/>
                 <a:cs typeface="Aptos" pitchFamily="34" charset="-120"/>
               </a:rPr>
-              <a:t>NLP use case description NLP evaluation plan Human review checklist</a:t>
-            </a:r>
-            <a:endParaRPr lang="en-US" sz="1420" dirty="0"/>
+              <a:t>What source material must be retained for human review?</a:t>
+            </a:r>
+            <a:endParaRPr lang="en-US" sz="1250" dirty="0"/>
+          </a:p>
+        </p:txBody>
+      </p:sp>
+      <p:sp>
+        <p:nvSpPr>
+          <p:cNvPr id="12" name="Shape 10"/>
+          <p:cNvSpPr/>
+          <p:nvPr/>
+        </p:nvSpPr>
+        <p:spPr>
+          <a:xfrm>
+            <a:off x="7909560" y="3520440"/>
+            <a:ext cx="3154680" cy="1737360"/>
+          </a:xfrm>
+          <a:prstGeom prst="roundRect">
+            <a:avLst>
+              <a:gd name="adj" fmla="val 6316"/>
+            </a:avLst>
+          </a:prstGeom>
+          <a:solidFill>
+            <a:srgbClr val="EAF6F8"/>
+          </a:solidFill>
+          <a:ln w="12700">
+            <a:solidFill>
+              <a:srgbClr val="B9D7E6"/>
+            </a:solidFill>
+            <a:prstDash val="solid"/>
+          </a:ln>
+        </p:spPr>
+      </p:sp>
+      <p:sp>
+        <p:nvSpPr>
+          <p:cNvPr id="13" name="Text 11"/>
+          <p:cNvSpPr/>
+          <p:nvPr/>
+        </p:nvSpPr>
+        <p:spPr>
+          <a:xfrm>
+            <a:off x="8074152" y="3666744"/>
+            <a:ext cx="2825496" cy="201168"/>
+          </a:xfrm>
+          <a:prstGeom prst="rect">
+            <a:avLst/>
+          </a:prstGeom>
+          <a:noFill/>
+          <a:ln/>
+        </p:spPr>
+        <p:txBody>
+          <a:bodyPr wrap="square" lIns="0" tIns="0" rIns="0" bIns="0" rtlCol="0" anchor="ctr"/>
+          <a:lstStyle/>
+          <a:p>
+            <a:pPr indent="0" marL="0">
+              <a:buNone/>
+            </a:pPr>
+            <a:r>
+              <a:rPr lang="en-US" sz="950" b="1" dirty="0">
+                <a:solidFill>
+                  <a:srgbClr val="0068B7"/>
+                </a:solidFill>
+                <a:latin typeface="Aptos" pitchFamily="34" charset="0"/>
+                <a:ea typeface="Aptos" pitchFamily="34" charset="-122"/>
+                <a:cs typeface="Aptos" pitchFamily="34" charset="-120"/>
+              </a:rPr>
+              <a:t>Use this for</a:t>
+            </a:r>
+            <a:endParaRPr lang="en-US" sz="950" dirty="0"/>
+          </a:p>
+        </p:txBody>
+      </p:sp>
+      <p:sp>
+        <p:nvSpPr>
+          <p:cNvPr id="14" name="Text 12"/>
+          <p:cNvSpPr/>
+          <p:nvPr/>
+        </p:nvSpPr>
+        <p:spPr>
+          <a:xfrm>
+            <a:off x="8074152" y="3959352"/>
+            <a:ext cx="2825496" cy="1170432"/>
+          </a:xfrm>
+          <a:prstGeom prst="rect">
+            <a:avLst/>
+          </a:prstGeom>
+          <a:noFill/>
+          <a:ln/>
+        </p:spPr>
+        <p:txBody>
+          <a:bodyPr wrap="square" lIns="0" tIns="0" rIns="0" bIns="0" rtlCol="0" anchor="t">
+            <a:normAutofit/>
+          </a:bodyPr>
+          <a:lstStyle/>
+          <a:p>
+            <a:pPr indent="0" marL="0">
+              <a:buNone/>
+            </a:pPr>
+            <a:r>
+              <a:rPr lang="en-US" sz="1250" dirty="0">
+                <a:solidFill>
+                  <a:srgbClr val="17364A"/>
+                </a:solidFill>
+                <a:latin typeface="Aptos" pitchFamily="34" charset="0"/>
+                <a:ea typeface="Aptos" pitchFamily="34" charset="-122"/>
+                <a:cs typeface="Aptos" pitchFamily="34" charset="-120"/>
+              </a:rPr>
+              <a:t>Connect the concept to public health decisions, safeguards, documentation, or implementation work.</a:t>
+            </a:r>
+            <a:endParaRPr lang="en-US" sz="1250" dirty="0"/>
           </a:p>
         </p:txBody>
       </p:sp>
@@ -4661,7 +7059,32 @@
       </p:sp>
       <p:sp>
         <p:nvSpPr>
-          <p:cNvPr id="3" name="Text 1"/>
+          <p:cNvPr id="3" name="Shape 1"/>
+          <p:cNvSpPr/>
+          <p:nvPr/>
+        </p:nvSpPr>
+        <p:spPr>
+          <a:xfrm>
+            <a:off x="0" y="164592"/>
+            <a:ext cx="146304" cy="6693408"/>
+          </a:xfrm>
+          <a:prstGeom prst="rect">
+            <a:avLst/>
+          </a:prstGeom>
+          <a:solidFill>
+            <a:srgbClr val="2F8A28"/>
+          </a:solidFill>
+          <a:ln w="12700">
+            <a:solidFill>
+              <a:srgbClr val="2F8A28"/>
+            </a:solidFill>
+            <a:prstDash val="solid"/>
+          </a:ln>
+        </p:spPr>
+      </p:sp>
+      <p:sp>
+        <p:nvSpPr>
+          <p:cNvPr id="4" name="Text 2"/>
           <p:cNvSpPr/>
           <p:nvPr/>
         </p:nvSpPr>
@@ -4700,7 +7123,7 @@
       </p:sp>
       <p:sp>
         <p:nvSpPr>
-          <p:cNvPr id="4" name="Text 2"/>
+          <p:cNvPr id="5" name="Text 3"/>
           <p:cNvSpPr/>
           <p:nvPr/>
         </p:nvSpPr>
@@ -4739,7 +7162,7 @@
       </p:sp>
       <p:sp>
         <p:nvSpPr>
-          <p:cNvPr id="5" name="Text 3"/>
+          <p:cNvPr id="6" name="Text 4"/>
           <p:cNvSpPr/>
           <p:nvPr/>
         </p:nvSpPr>
@@ -4778,13 +7201,77 @@
       </p:sp>
       <p:sp>
         <p:nvSpPr>
-          <p:cNvPr id="6" name="Text 4"/>
+          <p:cNvPr id="7" name="Shape 5"/>
           <p:cNvSpPr/>
           <p:nvPr/>
         </p:nvSpPr>
         <p:spPr>
           <a:xfrm>
             <a:off x="640080" y="658368"/>
+            <a:ext cx="420624" cy="420624"/>
+          </a:xfrm>
+          <a:prstGeom prst="ellipse">
+            <a:avLst/>
+          </a:prstGeom>
+          <a:solidFill>
+            <a:srgbClr val="0068B7"/>
+          </a:solidFill>
+          <a:ln w="12700">
+            <a:solidFill>
+              <a:srgbClr val="0068B7"/>
+            </a:solidFill>
+            <a:prstDash val="solid"/>
+          </a:ln>
+        </p:spPr>
+      </p:sp>
+      <p:sp>
+        <p:nvSpPr>
+          <p:cNvPr id="8" name="Text 6"/>
+          <p:cNvSpPr/>
+          <p:nvPr/>
+        </p:nvSpPr>
+        <p:spPr>
+          <a:xfrm>
+            <a:off x="640080" y="731520"/>
+            <a:ext cx="420624" cy="164592"/>
+          </a:xfrm>
+          <a:prstGeom prst="rect">
+            <a:avLst/>
+          </a:prstGeom>
+          <a:noFill/>
+          <a:ln/>
+        </p:spPr>
+        <p:txBody>
+          <a:bodyPr wrap="square" lIns="0" tIns="0" rIns="0" bIns="0" rtlCol="0" anchor="ctr"/>
+          <a:lstStyle/>
+          <a:p>
+            <a:pPr algn="ctr" indent="0" marL="0">
+              <a:buNone/>
+            </a:pPr>
+            <a:r>
+              <a:rPr lang="en-US" sz="1100" b="1" dirty="0">
+                <a:solidFill>
+                  <a:srgbClr val="FFFFFF"/>
+                </a:solidFill>
+                <a:latin typeface="Aptos" pitchFamily="34" charset="0"/>
+                <a:ea typeface="Aptos" pitchFamily="34" charset="-122"/>
+                <a:cs typeface="Aptos" pitchFamily="34" charset="-120"/>
+              </a:rPr>
+              <a:t>10</a:t>
+            </a:r>
+            <a:endParaRPr lang="en-US" sz="1100" dirty="0"/>
+          </a:p>
+        </p:txBody>
+      </p:sp>
+      <p:sp>
+        <p:nvSpPr>
+          <p:cNvPr id="9" name="Text 7"/>
+          <p:cNvSpPr/>
+          <p:nvPr/>
+        </p:nvSpPr>
+        <p:spPr>
+          <a:xfrm>
+            <a:off x="640080" y="621792"/>
             <a:ext cx="10881360" cy="566928"/>
           </a:xfrm>
           <a:prstGeom prst="rect">
@@ -4811,7 +7298,7 @@
                 <a:ea typeface="Aptos Display" pitchFamily="34" charset="-122"/>
                 <a:cs typeface="Aptos Display" pitchFamily="34" charset="-120"/>
               </a:rPr>
-              <a:t>Expected Artifact or Evidence Continued</a:t>
+              <a:t>Practical Exercise</a:t>
             </a:r>
             <a:endParaRPr lang="en-US" sz="2700" dirty="0"/>
           </a:p>
@@ -4819,32 +7306,150 @@
       </p:sp>
       <p:sp>
         <p:nvSpPr>
-          <p:cNvPr id="7" name="Text 5"/>
-          <p:cNvSpPr/>
-          <p:nvPr/>
-        </p:nvSpPr>
-        <p:spPr>
-          <a:xfrm>
-            <a:off x="822960" y="1325880"/>
-            <a:ext cx="10378440" cy="4800600"/>
-          </a:xfrm>
-          <a:prstGeom prst="rect">
-            <a:avLst/>
-          </a:prstGeom>
-          <a:noFill/>
-          <a:ln/>
-        </p:spPr>
-        <p:txBody>
-          <a:bodyPr wrap="square" lIns="1016" tIns="1016" rIns="1016" bIns="1016" rtlCol="0" anchor="t">
+          <p:cNvPr id="10" name="Text 8"/>
+          <p:cNvSpPr/>
+          <p:nvPr/>
+        </p:nvSpPr>
+        <p:spPr>
+          <a:xfrm>
+            <a:off x="868680" y="1417320"/>
+            <a:ext cx="6675120" cy="4434840"/>
+          </a:xfrm>
+          <a:prstGeom prst="rect">
+            <a:avLst/>
+          </a:prstGeom>
+          <a:noFill/>
+          <a:ln/>
+        </p:spPr>
+        <p:txBody>
+          <a:bodyPr wrap="square" lIns="635" tIns="635" rIns="635" bIns="635" rtlCol="0" anchor="t">
             <a:normAutofit/>
           </a:bodyPr>
           <a:lstStyle/>
           <a:p>
+            <a:r>
+              <a:rPr lang="en-US" sz="1700" dirty="0">
+                <a:solidFill>
+                  <a:srgbClr val="17364A"/>
+                </a:solidFill>
+                <a:latin typeface="Aptos" pitchFamily="34" charset="0"/>
+                <a:ea typeface="Aptos" pitchFamily="34" charset="-122"/>
+                <a:cs typeface="Aptos" pitchFamily="34" charset="-120"/>
+              </a:rPr>
+              <a:t>Create an NLP evaluation plan for one public health workflow.</a:t>
+            </a:r>
+            <a:endParaRPr lang="en-US" sz="1700" dirty="0"/>
+          </a:p>
+          <a:p>
+            <a:r>
+              <a:rPr lang="en-US" sz="1700" dirty="0">
+                <a:solidFill>
+                  <a:srgbClr val="17364A"/>
+                </a:solidFill>
+                <a:latin typeface="Aptos" pitchFamily="34" charset="0"/>
+                <a:ea typeface="Aptos" pitchFamily="34" charset="-122"/>
+                <a:cs typeface="Aptos" pitchFamily="34" charset="-120"/>
+              </a:rPr>
+              <a:t>Include the text source, NLP task, intended use, prohibited use, required human review, accuracy measures, bias or subgroup.</a:t>
+            </a:r>
+            <a:endParaRPr lang="en-US" sz="1700" dirty="0"/>
+          </a:p>
+        </p:txBody>
+      </p:sp>
+      <p:sp>
+        <p:nvSpPr>
+          <p:cNvPr id="11" name="Shape 9"/>
+          <p:cNvSpPr/>
+          <p:nvPr/>
+        </p:nvSpPr>
+        <p:spPr>
+          <a:xfrm>
+            <a:off x="7909560" y="1417320"/>
+            <a:ext cx="3154680" cy="1828800"/>
+          </a:xfrm>
+          <a:prstGeom prst="roundRect">
+            <a:avLst>
+              <a:gd name="adj" fmla="val 6000"/>
+            </a:avLst>
+          </a:prstGeom>
+          <a:solidFill>
+            <a:srgbClr val="EEF8ED"/>
+          </a:solidFill>
+          <a:ln w="12700">
+            <a:solidFill>
+              <a:srgbClr val="B9D7E6"/>
+            </a:solidFill>
+            <a:prstDash val="solid"/>
+          </a:ln>
+        </p:spPr>
+      </p:sp>
+      <p:sp>
+        <p:nvSpPr>
+          <p:cNvPr id="12" name="Text 10"/>
+          <p:cNvSpPr/>
+          <p:nvPr/>
+        </p:nvSpPr>
+        <p:spPr>
+          <a:xfrm>
+            <a:off x="8074152" y="1563624"/>
+            <a:ext cx="2825496" cy="201168"/>
+          </a:xfrm>
+          <a:prstGeom prst="rect">
+            <a:avLst/>
+          </a:prstGeom>
+          <a:noFill/>
+          <a:ln/>
+        </p:spPr>
+        <p:txBody>
+          <a:bodyPr wrap="square" lIns="0" tIns="0" rIns="0" bIns="0" rtlCol="0" anchor="ctr"/>
+          <a:lstStyle/>
+          <a:p>
             <a:pPr indent="0" marL="0">
               <a:buNone/>
             </a:pPr>
             <a:r>
-              <a:rPr lang="en-US" sz="1420" dirty="0">
+              <a:rPr lang="en-US" sz="950" b="1" dirty="0">
+                <a:solidFill>
+                  <a:srgbClr val="0068B7"/>
+                </a:solidFill>
+                <a:latin typeface="Aptos" pitchFamily="34" charset="0"/>
+                <a:ea typeface="Aptos" pitchFamily="34" charset="-122"/>
+                <a:cs typeface="Aptos" pitchFamily="34" charset="-120"/>
+              </a:rPr>
+              <a:t>Key idea</a:t>
+            </a:r>
+            <a:endParaRPr lang="en-US" sz="950" dirty="0"/>
+          </a:p>
+        </p:txBody>
+      </p:sp>
+      <p:sp>
+        <p:nvSpPr>
+          <p:cNvPr id="13" name="Text 11"/>
+          <p:cNvSpPr/>
+          <p:nvPr/>
+        </p:nvSpPr>
+        <p:spPr>
+          <a:xfrm>
+            <a:off x="8074152" y="1856232"/>
+            <a:ext cx="2825496" cy="1261872"/>
+          </a:xfrm>
+          <a:prstGeom prst="rect">
+            <a:avLst/>
+          </a:prstGeom>
+          <a:noFill/>
+          <a:ln/>
+        </p:spPr>
+        <p:txBody>
+          <a:bodyPr wrap="square" lIns="0" tIns="0" rIns="0" bIns="0" rtlCol="0" anchor="t">
+            <a:normAutofit/>
+          </a:bodyPr>
+          <a:lstStyle/>
+          <a:p>
+            <a:pPr indent="0" marL="0">
+              <a:buNone/>
+            </a:pPr>
+            <a:r>
+              <a:rPr lang="en-US" sz="1250" dirty="0">
                 <a:solidFill>
                   <a:srgbClr val="17364A"/>
                 </a:solidFill>
@@ -4852,9 +7457,116 @@
                 <a:ea typeface="Aptos" pitchFamily="34" charset="-122"/>
                 <a:cs typeface="Aptos" pitchFamily="34" charset="-120"/>
               </a:rPr>
-              <a:t>Source verification and privacy safeguards</a:t>
-            </a:r>
-            <a:endParaRPr lang="en-US" sz="1420" dirty="0"/>
+              <a:t>Create an NLP evaluation plan for one public health workflow.</a:t>
+            </a:r>
+            <a:endParaRPr lang="en-US" sz="1250" dirty="0"/>
+          </a:p>
+        </p:txBody>
+      </p:sp>
+      <p:sp>
+        <p:nvSpPr>
+          <p:cNvPr id="14" name="Shape 12"/>
+          <p:cNvSpPr/>
+          <p:nvPr/>
+        </p:nvSpPr>
+        <p:spPr>
+          <a:xfrm>
+            <a:off x="7909560" y="3520440"/>
+            <a:ext cx="3154680" cy="1737360"/>
+          </a:xfrm>
+          <a:prstGeom prst="roundRect">
+            <a:avLst>
+              <a:gd name="adj" fmla="val 6316"/>
+            </a:avLst>
+          </a:prstGeom>
+          <a:solidFill>
+            <a:srgbClr val="EAF6F8"/>
+          </a:solidFill>
+          <a:ln w="12700">
+            <a:solidFill>
+              <a:srgbClr val="B9D7E6"/>
+            </a:solidFill>
+            <a:prstDash val="solid"/>
+          </a:ln>
+        </p:spPr>
+      </p:sp>
+      <p:sp>
+        <p:nvSpPr>
+          <p:cNvPr id="15" name="Text 13"/>
+          <p:cNvSpPr/>
+          <p:nvPr/>
+        </p:nvSpPr>
+        <p:spPr>
+          <a:xfrm>
+            <a:off x="8074152" y="3666744"/>
+            <a:ext cx="2825496" cy="201168"/>
+          </a:xfrm>
+          <a:prstGeom prst="rect">
+            <a:avLst/>
+          </a:prstGeom>
+          <a:noFill/>
+          <a:ln/>
+        </p:spPr>
+        <p:txBody>
+          <a:bodyPr wrap="square" lIns="0" tIns="0" rIns="0" bIns="0" rtlCol="0" anchor="ctr"/>
+          <a:lstStyle/>
+          <a:p>
+            <a:pPr indent="0" marL="0">
+              <a:buNone/>
+            </a:pPr>
+            <a:r>
+              <a:rPr lang="en-US" sz="950" b="1" dirty="0">
+                <a:solidFill>
+                  <a:srgbClr val="0068B7"/>
+                </a:solidFill>
+                <a:latin typeface="Aptos" pitchFamily="34" charset="0"/>
+                <a:ea typeface="Aptos" pitchFamily="34" charset="-122"/>
+                <a:cs typeface="Aptos" pitchFamily="34" charset="-120"/>
+              </a:rPr>
+              <a:t>Use this for</a:t>
+            </a:r>
+            <a:endParaRPr lang="en-US" sz="950" dirty="0"/>
+          </a:p>
+        </p:txBody>
+      </p:sp>
+      <p:sp>
+        <p:nvSpPr>
+          <p:cNvPr id="16" name="Text 14"/>
+          <p:cNvSpPr/>
+          <p:nvPr/>
+        </p:nvSpPr>
+        <p:spPr>
+          <a:xfrm>
+            <a:off x="8074152" y="3959352"/>
+            <a:ext cx="2825496" cy="1170432"/>
+          </a:xfrm>
+          <a:prstGeom prst="rect">
+            <a:avLst/>
+          </a:prstGeom>
+          <a:noFill/>
+          <a:ln/>
+        </p:spPr>
+        <p:txBody>
+          <a:bodyPr wrap="square" lIns="0" tIns="0" rIns="0" bIns="0" rtlCol="0" anchor="t">
+            <a:normAutofit/>
+          </a:bodyPr>
+          <a:lstStyle/>
+          <a:p>
+            <a:pPr indent="0" marL="0">
+              <a:buNone/>
+            </a:pPr>
+            <a:r>
+              <a:rPr lang="en-US" sz="1250" dirty="0">
+                <a:solidFill>
+                  <a:srgbClr val="17364A"/>
+                </a:solidFill>
+                <a:latin typeface="Aptos" pitchFamily="34" charset="0"/>
+                <a:ea typeface="Aptos" pitchFamily="34" charset="-122"/>
+                <a:cs typeface="Aptos" pitchFamily="34" charset="-120"/>
+              </a:rPr>
+              <a:t>Connect the concept to public health decisions, safeguards, documentation, or implementation work.</a:t>
+            </a:r>
+            <a:endParaRPr lang="en-US" sz="1250" dirty="0"/>
           </a:p>
         </p:txBody>
       </p:sp>
@@ -4917,7 +7629,32 @@
       </p:sp>
       <p:sp>
         <p:nvSpPr>
-          <p:cNvPr id="3" name="Text 1"/>
+          <p:cNvPr id="3" name="Shape 1"/>
+          <p:cNvSpPr/>
+          <p:nvPr/>
+        </p:nvSpPr>
+        <p:spPr>
+          <a:xfrm>
+            <a:off x="0" y="164592"/>
+            <a:ext cx="146304" cy="6693408"/>
+          </a:xfrm>
+          <a:prstGeom prst="rect">
+            <a:avLst/>
+          </a:prstGeom>
+          <a:solidFill>
+            <a:srgbClr val="2F8A28"/>
+          </a:solidFill>
+          <a:ln w="12700">
+            <a:solidFill>
+              <a:srgbClr val="2F8A28"/>
+            </a:solidFill>
+            <a:prstDash val="solid"/>
+          </a:ln>
+        </p:spPr>
+      </p:sp>
+      <p:sp>
+        <p:nvSpPr>
+          <p:cNvPr id="4" name="Text 2"/>
           <p:cNvSpPr/>
           <p:nvPr/>
         </p:nvSpPr>
@@ -4956,7 +7693,7 @@
       </p:sp>
       <p:sp>
         <p:nvSpPr>
-          <p:cNvPr id="4" name="Text 2"/>
+          <p:cNvPr id="5" name="Text 3"/>
           <p:cNvSpPr/>
           <p:nvPr/>
         </p:nvSpPr>
@@ -4995,7 +7732,7 @@
       </p:sp>
       <p:sp>
         <p:nvSpPr>
-          <p:cNvPr id="5" name="Text 3"/>
+          <p:cNvPr id="6" name="Text 4"/>
           <p:cNvSpPr/>
           <p:nvPr/>
         </p:nvSpPr>
@@ -5034,13 +7771,77 @@
       </p:sp>
       <p:sp>
         <p:nvSpPr>
-          <p:cNvPr id="6" name="Text 4"/>
+          <p:cNvPr id="7" name="Shape 5"/>
           <p:cNvSpPr/>
           <p:nvPr/>
         </p:nvSpPr>
         <p:spPr>
           <a:xfrm>
             <a:off x="640080" y="658368"/>
+            <a:ext cx="420624" cy="420624"/>
+          </a:xfrm>
+          <a:prstGeom prst="ellipse">
+            <a:avLst/>
+          </a:prstGeom>
+          <a:solidFill>
+            <a:srgbClr val="0068B7"/>
+          </a:solidFill>
+          <a:ln w="12700">
+            <a:solidFill>
+              <a:srgbClr val="0068B7"/>
+            </a:solidFill>
+            <a:prstDash val="solid"/>
+          </a:ln>
+        </p:spPr>
+      </p:sp>
+      <p:sp>
+        <p:nvSpPr>
+          <p:cNvPr id="8" name="Text 6"/>
+          <p:cNvSpPr/>
+          <p:nvPr/>
+        </p:nvSpPr>
+        <p:spPr>
+          <a:xfrm>
+            <a:off x="640080" y="731520"/>
+            <a:ext cx="420624" cy="164592"/>
+          </a:xfrm>
+          <a:prstGeom prst="rect">
+            <a:avLst/>
+          </a:prstGeom>
+          <a:noFill/>
+          <a:ln/>
+        </p:spPr>
+        <p:txBody>
+          <a:bodyPr wrap="square" lIns="0" tIns="0" rIns="0" bIns="0" rtlCol="0" anchor="ctr"/>
+          <a:lstStyle/>
+          <a:p>
+            <a:pPr algn="ctr" indent="0" marL="0">
+              <a:buNone/>
+            </a:pPr>
+            <a:r>
+              <a:rPr lang="en-US" sz="1100" b="1" dirty="0">
+                <a:solidFill>
+                  <a:srgbClr val="FFFFFF"/>
+                </a:solidFill>
+                <a:latin typeface="Aptos" pitchFamily="34" charset="0"/>
+                <a:ea typeface="Aptos" pitchFamily="34" charset="-122"/>
+                <a:cs typeface="Aptos" pitchFamily="34" charset="-120"/>
+              </a:rPr>
+              <a:t>11</a:t>
+            </a:r>
+            <a:endParaRPr lang="en-US" sz="1100" dirty="0"/>
+          </a:p>
+        </p:txBody>
+      </p:sp>
+      <p:sp>
+        <p:nvSpPr>
+          <p:cNvPr id="9" name="Text 7"/>
+          <p:cNvSpPr/>
+          <p:nvPr/>
+        </p:nvSpPr>
+        <p:spPr>
+          <a:xfrm>
+            <a:off x="640080" y="621792"/>
             <a:ext cx="10881360" cy="566928"/>
           </a:xfrm>
           <a:prstGeom prst="rect">
@@ -5067,7 +7868,7 @@
                 <a:ea typeface="Aptos Display" pitchFamily="34" charset="-122"/>
                 <a:cs typeface="Aptos Display" pitchFamily="34" charset="-120"/>
               </a:rPr>
-              <a:t>Expected Assignment</a:t>
+              <a:t>Expected Artifact or Evidence</a:t>
             </a:r>
             <a:endParaRPr lang="en-US" sz="2700" dirty="0"/>
           </a:p>
@@ -5075,14 +7876,14 @@
       </p:sp>
       <p:sp>
         <p:nvSpPr>
-          <p:cNvPr id="7" name="Text 5"/>
-          <p:cNvSpPr/>
-          <p:nvPr/>
-        </p:nvSpPr>
-        <p:spPr>
-          <a:xfrm>
-            <a:off x="822960" y="1325880"/>
-            <a:ext cx="10378440" cy="4800600"/>
+          <p:cNvPr id="10" name="Text 8"/>
+          <p:cNvSpPr/>
+          <p:nvPr/>
+        </p:nvSpPr>
+        <p:spPr>
+          <a:xfrm>
+            <a:off x="868680" y="1417320"/>
+            <a:ext cx="6675120" cy="4434840"/>
           </a:xfrm>
           <a:prstGeom prst="rect">
             <a:avLst/>
@@ -5097,7 +7898,7 @@
           <a:lstStyle/>
           <a:p>
             <a:r>
-              <a:rPr lang="en-US" sz="1450" dirty="0">
+              <a:rPr lang="en-US" sz="1700" dirty="0">
                 <a:solidFill>
                   <a:srgbClr val="17364A"/>
                 </a:solidFill>
@@ -5107,11 +7908,11 @@
               </a:rPr>
               <a:t>NLP use case description</a:t>
             </a:r>
-            <a:endParaRPr lang="en-US" sz="1450" dirty="0"/>
-          </a:p>
-          <a:p>
-            <a:r>
-              <a:rPr lang="en-US" sz="1450" dirty="0">
+            <a:endParaRPr lang="en-US" sz="1700" dirty="0"/>
+          </a:p>
+          <a:p>
+            <a:r>
+              <a:rPr lang="en-US" sz="1700" dirty="0">
                 <a:solidFill>
                   <a:srgbClr val="17364A"/>
                 </a:solidFill>
@@ -5121,11 +7922,11 @@
               </a:rPr>
               <a:t>NLP evaluation plan</a:t>
             </a:r>
-            <a:endParaRPr lang="en-US" sz="1450" dirty="0"/>
-          </a:p>
-          <a:p>
-            <a:r>
-              <a:rPr lang="en-US" sz="1450" dirty="0">
+            <a:endParaRPr lang="en-US" sz="1700" dirty="0"/>
+          </a:p>
+          <a:p>
+            <a:r>
+              <a:rPr lang="en-US" sz="1700" dirty="0">
                 <a:solidFill>
                   <a:srgbClr val="17364A"/>
                 </a:solidFill>
@@ -5135,11 +7936,104 @@
               </a:rPr>
               <a:t>Human review checklist</a:t>
             </a:r>
-            <a:endParaRPr lang="en-US" sz="1450" dirty="0"/>
-          </a:p>
-          <a:p>
-            <a:r>
-              <a:rPr lang="en-US" sz="1450" dirty="0">
+            <a:endParaRPr lang="en-US" sz="1700" dirty="0"/>
+          </a:p>
+        </p:txBody>
+      </p:sp>
+      <p:sp>
+        <p:nvSpPr>
+          <p:cNvPr id="11" name="Shape 9"/>
+          <p:cNvSpPr/>
+          <p:nvPr/>
+        </p:nvSpPr>
+        <p:spPr>
+          <a:xfrm>
+            <a:off x="7909560" y="1417320"/>
+            <a:ext cx="3154680" cy="1828800"/>
+          </a:xfrm>
+          <a:prstGeom prst="roundRect">
+            <a:avLst>
+              <a:gd name="adj" fmla="val 6000"/>
+            </a:avLst>
+          </a:prstGeom>
+          <a:solidFill>
+            <a:srgbClr val="EEF8ED"/>
+          </a:solidFill>
+          <a:ln w="12700">
+            <a:solidFill>
+              <a:srgbClr val="B9D7E6"/>
+            </a:solidFill>
+            <a:prstDash val="solid"/>
+          </a:ln>
+        </p:spPr>
+      </p:sp>
+      <p:sp>
+        <p:nvSpPr>
+          <p:cNvPr id="12" name="Text 10"/>
+          <p:cNvSpPr/>
+          <p:nvPr/>
+        </p:nvSpPr>
+        <p:spPr>
+          <a:xfrm>
+            <a:off x="8074152" y="1563624"/>
+            <a:ext cx="2825496" cy="201168"/>
+          </a:xfrm>
+          <a:prstGeom prst="rect">
+            <a:avLst/>
+          </a:prstGeom>
+          <a:noFill/>
+          <a:ln/>
+        </p:spPr>
+        <p:txBody>
+          <a:bodyPr wrap="square" lIns="0" tIns="0" rIns="0" bIns="0" rtlCol="0" anchor="ctr"/>
+          <a:lstStyle/>
+          <a:p>
+            <a:pPr indent="0" marL="0">
+              <a:buNone/>
+            </a:pPr>
+            <a:r>
+              <a:rPr lang="en-US" sz="950" b="1" dirty="0">
+                <a:solidFill>
+                  <a:srgbClr val="0068B7"/>
+                </a:solidFill>
+                <a:latin typeface="Aptos" pitchFamily="34" charset="0"/>
+                <a:ea typeface="Aptos" pitchFamily="34" charset="-122"/>
+                <a:cs typeface="Aptos" pitchFamily="34" charset="-120"/>
+              </a:rPr>
+              <a:t>Key idea</a:t>
+            </a:r>
+            <a:endParaRPr lang="en-US" sz="950" dirty="0"/>
+          </a:p>
+        </p:txBody>
+      </p:sp>
+      <p:sp>
+        <p:nvSpPr>
+          <p:cNvPr id="13" name="Text 11"/>
+          <p:cNvSpPr/>
+          <p:nvPr/>
+        </p:nvSpPr>
+        <p:spPr>
+          <a:xfrm>
+            <a:off x="8074152" y="1856232"/>
+            <a:ext cx="2825496" cy="1261872"/>
+          </a:xfrm>
+          <a:prstGeom prst="rect">
+            <a:avLst/>
+          </a:prstGeom>
+          <a:noFill/>
+          <a:ln/>
+        </p:spPr>
+        <p:txBody>
+          <a:bodyPr wrap="square" lIns="0" tIns="0" rIns="0" bIns="0" rtlCol="0" anchor="t">
+            <a:normAutofit/>
+          </a:bodyPr>
+          <a:lstStyle/>
+          <a:p>
+            <a:pPr indent="0" marL="0">
+              <a:buNone/>
+            </a:pPr>
+            <a:r>
+              <a:rPr lang="en-US" sz="1250" dirty="0">
                 <a:solidFill>
                   <a:srgbClr val="17364A"/>
                 </a:solidFill>
@@ -5147,9 +8041,116 @@
                 <a:ea typeface="Aptos" pitchFamily="34" charset="-122"/>
                 <a:cs typeface="Aptos" pitchFamily="34" charset="-120"/>
               </a:rPr>
-              <a:t>Source verification and privacy safeguards</a:t>
-            </a:r>
-            <a:endParaRPr lang="en-US" sz="1450" dirty="0"/>
+              <a:t>NLP use case description</a:t>
+            </a:r>
+            <a:endParaRPr lang="en-US" sz="1250" dirty="0"/>
+          </a:p>
+        </p:txBody>
+      </p:sp>
+      <p:sp>
+        <p:nvSpPr>
+          <p:cNvPr id="14" name="Shape 12"/>
+          <p:cNvSpPr/>
+          <p:nvPr/>
+        </p:nvSpPr>
+        <p:spPr>
+          <a:xfrm>
+            <a:off x="7909560" y="3520440"/>
+            <a:ext cx="3154680" cy="1737360"/>
+          </a:xfrm>
+          <a:prstGeom prst="roundRect">
+            <a:avLst>
+              <a:gd name="adj" fmla="val 6316"/>
+            </a:avLst>
+          </a:prstGeom>
+          <a:solidFill>
+            <a:srgbClr val="EAF6F8"/>
+          </a:solidFill>
+          <a:ln w="12700">
+            <a:solidFill>
+              <a:srgbClr val="B9D7E6"/>
+            </a:solidFill>
+            <a:prstDash val="solid"/>
+          </a:ln>
+        </p:spPr>
+      </p:sp>
+      <p:sp>
+        <p:nvSpPr>
+          <p:cNvPr id="15" name="Text 13"/>
+          <p:cNvSpPr/>
+          <p:nvPr/>
+        </p:nvSpPr>
+        <p:spPr>
+          <a:xfrm>
+            <a:off x="8074152" y="3666744"/>
+            <a:ext cx="2825496" cy="201168"/>
+          </a:xfrm>
+          <a:prstGeom prst="rect">
+            <a:avLst/>
+          </a:prstGeom>
+          <a:noFill/>
+          <a:ln/>
+        </p:spPr>
+        <p:txBody>
+          <a:bodyPr wrap="square" lIns="0" tIns="0" rIns="0" bIns="0" rtlCol="0" anchor="ctr"/>
+          <a:lstStyle/>
+          <a:p>
+            <a:pPr indent="0" marL="0">
+              <a:buNone/>
+            </a:pPr>
+            <a:r>
+              <a:rPr lang="en-US" sz="950" b="1" dirty="0">
+                <a:solidFill>
+                  <a:srgbClr val="0068B7"/>
+                </a:solidFill>
+                <a:latin typeface="Aptos" pitchFamily="34" charset="0"/>
+                <a:ea typeface="Aptos" pitchFamily="34" charset="-122"/>
+                <a:cs typeface="Aptos" pitchFamily="34" charset="-120"/>
+              </a:rPr>
+              <a:t>Use this for</a:t>
+            </a:r>
+            <a:endParaRPr lang="en-US" sz="950" dirty="0"/>
+          </a:p>
+        </p:txBody>
+      </p:sp>
+      <p:sp>
+        <p:nvSpPr>
+          <p:cNvPr id="16" name="Text 14"/>
+          <p:cNvSpPr/>
+          <p:nvPr/>
+        </p:nvSpPr>
+        <p:spPr>
+          <a:xfrm>
+            <a:off x="8074152" y="3959352"/>
+            <a:ext cx="2825496" cy="1170432"/>
+          </a:xfrm>
+          <a:prstGeom prst="rect">
+            <a:avLst/>
+          </a:prstGeom>
+          <a:noFill/>
+          <a:ln/>
+        </p:spPr>
+        <p:txBody>
+          <a:bodyPr wrap="square" lIns="0" tIns="0" rIns="0" bIns="0" rtlCol="0" anchor="t">
+            <a:normAutofit/>
+          </a:bodyPr>
+          <a:lstStyle/>
+          <a:p>
+            <a:pPr indent="0" marL="0">
+              <a:buNone/>
+            </a:pPr>
+            <a:r>
+              <a:rPr lang="en-US" sz="1250" dirty="0">
+                <a:solidFill>
+                  <a:srgbClr val="17364A"/>
+                </a:solidFill>
+                <a:latin typeface="Aptos" pitchFamily="34" charset="0"/>
+                <a:ea typeface="Aptos" pitchFamily="34" charset="-122"/>
+                <a:cs typeface="Aptos" pitchFamily="34" charset="-120"/>
+              </a:rPr>
+              <a:t>Connect the concept to public health decisions, safeguards, documentation, or implementation work.</a:t>
+            </a:r>
+            <a:endParaRPr lang="en-US" sz="1250" dirty="0"/>
           </a:p>
         </p:txBody>
       </p:sp>
@@ -5212,7 +8213,32 @@
       </p:sp>
       <p:sp>
         <p:nvSpPr>
-          <p:cNvPr id="3" name="Text 1"/>
+          <p:cNvPr id="3" name="Shape 1"/>
+          <p:cNvSpPr/>
+          <p:nvPr/>
+        </p:nvSpPr>
+        <p:spPr>
+          <a:xfrm>
+            <a:off x="0" y="164592"/>
+            <a:ext cx="146304" cy="6693408"/>
+          </a:xfrm>
+          <a:prstGeom prst="rect">
+            <a:avLst/>
+          </a:prstGeom>
+          <a:solidFill>
+            <a:srgbClr val="2F8A28"/>
+          </a:solidFill>
+          <a:ln w="12700">
+            <a:solidFill>
+              <a:srgbClr val="2F8A28"/>
+            </a:solidFill>
+            <a:prstDash val="solid"/>
+          </a:ln>
+        </p:spPr>
+      </p:sp>
+      <p:sp>
+        <p:nvSpPr>
+          <p:cNvPr id="4" name="Text 2"/>
           <p:cNvSpPr/>
           <p:nvPr/>
         </p:nvSpPr>
@@ -5251,7 +8277,7 @@
       </p:sp>
       <p:sp>
         <p:nvSpPr>
-          <p:cNvPr id="4" name="Text 2"/>
+          <p:cNvPr id="5" name="Text 3"/>
           <p:cNvSpPr/>
           <p:nvPr/>
         </p:nvSpPr>
@@ -5290,7 +8316,7 @@
       </p:sp>
       <p:sp>
         <p:nvSpPr>
-          <p:cNvPr id="5" name="Text 3"/>
+          <p:cNvPr id="6" name="Text 4"/>
           <p:cNvSpPr/>
           <p:nvPr/>
         </p:nvSpPr>
@@ -5329,7 +8355,7 @@
       </p:sp>
       <p:sp>
         <p:nvSpPr>
-          <p:cNvPr id="6" name="Text 4"/>
+          <p:cNvPr id="7" name="Text 5"/>
           <p:cNvSpPr/>
           <p:nvPr/>
         </p:nvSpPr>
@@ -5362,7 +8388,7 @@
                 <a:ea typeface="Aptos Display" pitchFamily="34" charset="-122"/>
                 <a:cs typeface="Aptos Display" pitchFamily="34" charset="-120"/>
               </a:rPr>
-              <a:t>Knowledge Check</a:t>
+              <a:t>Expected Artifact or Evidence Continued</a:t>
             </a:r>
             <a:endParaRPr lang="en-US" sz="2700" dirty="0"/>
           </a:p>
@@ -5370,14 +8396,14 @@
       </p:sp>
       <p:sp>
         <p:nvSpPr>
-          <p:cNvPr id="7" name="Text 5"/>
-          <p:cNvSpPr/>
-          <p:nvPr/>
-        </p:nvSpPr>
-        <p:spPr>
-          <a:xfrm>
-            <a:off x="822960" y="1325880"/>
-            <a:ext cx="10378440" cy="4800600"/>
+          <p:cNvPr id="8" name="Text 6"/>
+          <p:cNvSpPr/>
+          <p:nvPr/>
+        </p:nvSpPr>
+        <p:spPr>
+          <a:xfrm>
+            <a:off x="868680" y="1417320"/>
+            <a:ext cx="6675120" cy="4434840"/>
           </a:xfrm>
           <a:prstGeom prst="rect">
             <a:avLst/>
@@ -5392,7 +8418,7 @@
           <a:lstStyle/>
           <a:p>
             <a:r>
-              <a:rPr lang="en-US" sz="1450" dirty="0">
+              <a:rPr lang="en-US" sz="1700" dirty="0">
                 <a:solidFill>
                   <a:srgbClr val="17364A"/>
                 </a:solidFill>
@@ -5400,13 +8426,106 @@
                 <a:ea typeface="Aptos" pitchFamily="34" charset="-122"/>
                 <a:cs typeface="Aptos" pitchFamily="34" charset="-120"/>
               </a:rPr>
-              <a:t>1. What is NLP?</a:t>
-            </a:r>
-            <a:endParaRPr lang="en-US" sz="1450" dirty="0"/>
-          </a:p>
-          <a:p>
-            <a:r>
-              <a:rPr lang="en-US" sz="1450" dirty="0">
+              <a:t>Source verification and privacy safeguards</a:t>
+            </a:r>
+            <a:endParaRPr lang="en-US" sz="1700" dirty="0"/>
+          </a:p>
+        </p:txBody>
+      </p:sp>
+      <p:sp>
+        <p:nvSpPr>
+          <p:cNvPr id="9" name="Shape 7"/>
+          <p:cNvSpPr/>
+          <p:nvPr/>
+        </p:nvSpPr>
+        <p:spPr>
+          <a:xfrm>
+            <a:off x="7909560" y="1417320"/>
+            <a:ext cx="3154680" cy="1828800"/>
+          </a:xfrm>
+          <a:prstGeom prst="roundRect">
+            <a:avLst>
+              <a:gd name="adj" fmla="val 6000"/>
+            </a:avLst>
+          </a:prstGeom>
+          <a:solidFill>
+            <a:srgbClr val="EEF8ED"/>
+          </a:solidFill>
+          <a:ln w="12700">
+            <a:solidFill>
+              <a:srgbClr val="B9D7E6"/>
+            </a:solidFill>
+            <a:prstDash val="solid"/>
+          </a:ln>
+        </p:spPr>
+      </p:sp>
+      <p:sp>
+        <p:nvSpPr>
+          <p:cNvPr id="10" name="Text 8"/>
+          <p:cNvSpPr/>
+          <p:nvPr/>
+        </p:nvSpPr>
+        <p:spPr>
+          <a:xfrm>
+            <a:off x="8074152" y="1563624"/>
+            <a:ext cx="2825496" cy="201168"/>
+          </a:xfrm>
+          <a:prstGeom prst="rect">
+            <a:avLst/>
+          </a:prstGeom>
+          <a:noFill/>
+          <a:ln/>
+        </p:spPr>
+        <p:txBody>
+          <a:bodyPr wrap="square" lIns="0" tIns="0" rIns="0" bIns="0" rtlCol="0" anchor="ctr"/>
+          <a:lstStyle/>
+          <a:p>
+            <a:pPr indent="0" marL="0">
+              <a:buNone/>
+            </a:pPr>
+            <a:r>
+              <a:rPr lang="en-US" sz="950" b="1" dirty="0">
+                <a:solidFill>
+                  <a:srgbClr val="0068B7"/>
+                </a:solidFill>
+                <a:latin typeface="Aptos" pitchFamily="34" charset="0"/>
+                <a:ea typeface="Aptos" pitchFamily="34" charset="-122"/>
+                <a:cs typeface="Aptos" pitchFamily="34" charset="-120"/>
+              </a:rPr>
+              <a:t>Key idea</a:t>
+            </a:r>
+            <a:endParaRPr lang="en-US" sz="950" dirty="0"/>
+          </a:p>
+        </p:txBody>
+      </p:sp>
+      <p:sp>
+        <p:nvSpPr>
+          <p:cNvPr id="11" name="Text 9"/>
+          <p:cNvSpPr/>
+          <p:nvPr/>
+        </p:nvSpPr>
+        <p:spPr>
+          <a:xfrm>
+            <a:off x="8074152" y="1856232"/>
+            <a:ext cx="2825496" cy="1261872"/>
+          </a:xfrm>
+          <a:prstGeom prst="rect">
+            <a:avLst/>
+          </a:prstGeom>
+          <a:noFill/>
+          <a:ln/>
+        </p:spPr>
+        <p:txBody>
+          <a:bodyPr wrap="square" lIns="0" tIns="0" rIns="0" bIns="0" rtlCol="0" anchor="t">
+            <a:normAutofit/>
+          </a:bodyPr>
+          <a:lstStyle/>
+          <a:p>
+            <a:pPr indent="0" marL="0">
+              <a:buNone/>
+            </a:pPr>
+            <a:r>
+              <a:rPr lang="en-US" sz="1250" dirty="0">
                 <a:solidFill>
                   <a:srgbClr val="17364A"/>
                 </a:solidFill>
@@ -5414,13 +8533,106 @@
                 <a:ea typeface="Aptos" pitchFamily="34" charset="-122"/>
                 <a:cs typeface="Aptos" pitchFamily="34" charset="-120"/>
               </a:rPr>
-              <a:t>2. Which task is an example of information extraction?</a:t>
-            </a:r>
-            <a:endParaRPr lang="en-US" sz="1450" dirty="0"/>
-          </a:p>
-          <a:p>
-            <a:r>
-              <a:rPr lang="en-US" sz="1450" dirty="0">
+              <a:t>Source verification and privacy safeguards</a:t>
+            </a:r>
+            <a:endParaRPr lang="en-US" sz="1250" dirty="0"/>
+          </a:p>
+        </p:txBody>
+      </p:sp>
+      <p:sp>
+        <p:nvSpPr>
+          <p:cNvPr id="12" name="Shape 10"/>
+          <p:cNvSpPr/>
+          <p:nvPr/>
+        </p:nvSpPr>
+        <p:spPr>
+          <a:xfrm>
+            <a:off x="7909560" y="3520440"/>
+            <a:ext cx="3154680" cy="1737360"/>
+          </a:xfrm>
+          <a:prstGeom prst="roundRect">
+            <a:avLst>
+              <a:gd name="adj" fmla="val 6316"/>
+            </a:avLst>
+          </a:prstGeom>
+          <a:solidFill>
+            <a:srgbClr val="EAF6F8"/>
+          </a:solidFill>
+          <a:ln w="12700">
+            <a:solidFill>
+              <a:srgbClr val="B9D7E6"/>
+            </a:solidFill>
+            <a:prstDash val="solid"/>
+          </a:ln>
+        </p:spPr>
+      </p:sp>
+      <p:sp>
+        <p:nvSpPr>
+          <p:cNvPr id="13" name="Text 11"/>
+          <p:cNvSpPr/>
+          <p:nvPr/>
+        </p:nvSpPr>
+        <p:spPr>
+          <a:xfrm>
+            <a:off x="8074152" y="3666744"/>
+            <a:ext cx="2825496" cy="201168"/>
+          </a:xfrm>
+          <a:prstGeom prst="rect">
+            <a:avLst/>
+          </a:prstGeom>
+          <a:noFill/>
+          <a:ln/>
+        </p:spPr>
+        <p:txBody>
+          <a:bodyPr wrap="square" lIns="0" tIns="0" rIns="0" bIns="0" rtlCol="0" anchor="ctr"/>
+          <a:lstStyle/>
+          <a:p>
+            <a:pPr indent="0" marL="0">
+              <a:buNone/>
+            </a:pPr>
+            <a:r>
+              <a:rPr lang="en-US" sz="950" b="1" dirty="0">
+                <a:solidFill>
+                  <a:srgbClr val="0068B7"/>
+                </a:solidFill>
+                <a:latin typeface="Aptos" pitchFamily="34" charset="0"/>
+                <a:ea typeface="Aptos" pitchFamily="34" charset="-122"/>
+                <a:cs typeface="Aptos" pitchFamily="34" charset="-120"/>
+              </a:rPr>
+              <a:t>Use this for</a:t>
+            </a:r>
+            <a:endParaRPr lang="en-US" sz="950" dirty="0"/>
+          </a:p>
+        </p:txBody>
+      </p:sp>
+      <p:sp>
+        <p:nvSpPr>
+          <p:cNvPr id="14" name="Text 12"/>
+          <p:cNvSpPr/>
+          <p:nvPr/>
+        </p:nvSpPr>
+        <p:spPr>
+          <a:xfrm>
+            <a:off x="8074152" y="3959352"/>
+            <a:ext cx="2825496" cy="1170432"/>
+          </a:xfrm>
+          <a:prstGeom prst="rect">
+            <a:avLst/>
+          </a:prstGeom>
+          <a:noFill/>
+          <a:ln/>
+        </p:spPr>
+        <p:txBody>
+          <a:bodyPr wrap="square" lIns="0" tIns="0" rIns="0" bIns="0" rtlCol="0" anchor="t">
+            <a:normAutofit/>
+          </a:bodyPr>
+          <a:lstStyle/>
+          <a:p>
+            <a:pPr indent="0" marL="0">
+              <a:buNone/>
+            </a:pPr>
+            <a:r>
+              <a:rPr lang="en-US" sz="1250" dirty="0">
                 <a:solidFill>
                   <a:srgbClr val="17364A"/>
                 </a:solidFill>
@@ -5428,37 +8640,9 @@
                 <a:ea typeface="Aptos" pitchFamily="34" charset="-122"/>
                 <a:cs typeface="Aptos" pitchFamily="34" charset="-120"/>
               </a:rPr>
-              <a:t>3. Why is source verification important for NLP outputs?</a:t>
-            </a:r>
-            <a:endParaRPr lang="en-US" sz="1450" dirty="0"/>
-          </a:p>
-          <a:p>
-            <a:r>
-              <a:rPr lang="en-US" sz="1450" dirty="0">
-                <a:solidFill>
-                  <a:srgbClr val="17364A"/>
-                </a:solidFill>
-                <a:latin typeface="Aptos" pitchFamily="34" charset="0"/>
-                <a:ea typeface="Aptos" pitchFamily="34" charset="-122"/>
-                <a:cs typeface="Aptos" pitchFamily="34" charset="-120"/>
-              </a:rPr>
-              <a:t>4. Which NLP use requires strong safeguards?</a:t>
-            </a:r>
-            <a:endParaRPr lang="en-US" sz="1450" dirty="0"/>
-          </a:p>
-          <a:p>
-            <a:r>
-              <a:rPr lang="en-US" sz="1450" dirty="0">
-                <a:solidFill>
-                  <a:srgbClr val="17364A"/>
-                </a:solidFill>
-                <a:latin typeface="Aptos" pitchFamily="34" charset="0"/>
-                <a:ea typeface="Aptos" pitchFamily="34" charset="-122"/>
-                <a:cs typeface="Aptos" pitchFamily="34" charset="-120"/>
-              </a:rPr>
-              <a:t>5. What is strong completion evidence for this module?</a:t>
-            </a:r>
-            <a:endParaRPr lang="en-US" sz="1450" dirty="0"/>
+              <a:t>Connect the concept to public health decisions, safeguards, documentation, or implementation work.</a:t>
+            </a:r>
+            <a:endParaRPr lang="en-US" sz="1250" dirty="0"/>
           </a:p>
         </p:txBody>
       </p:sp>
@@ -5521,7 +8705,32 @@
       </p:sp>
       <p:sp>
         <p:nvSpPr>
-          <p:cNvPr id="3" name="Text 1"/>
+          <p:cNvPr id="3" name="Shape 1"/>
+          <p:cNvSpPr/>
+          <p:nvPr/>
+        </p:nvSpPr>
+        <p:spPr>
+          <a:xfrm>
+            <a:off x="0" y="164592"/>
+            <a:ext cx="146304" cy="6693408"/>
+          </a:xfrm>
+          <a:prstGeom prst="rect">
+            <a:avLst/>
+          </a:prstGeom>
+          <a:solidFill>
+            <a:srgbClr val="2F8A28"/>
+          </a:solidFill>
+          <a:ln w="12700">
+            <a:solidFill>
+              <a:srgbClr val="2F8A28"/>
+            </a:solidFill>
+            <a:prstDash val="solid"/>
+          </a:ln>
+        </p:spPr>
+      </p:sp>
+      <p:sp>
+        <p:nvSpPr>
+          <p:cNvPr id="4" name="Text 2"/>
           <p:cNvSpPr/>
           <p:nvPr/>
         </p:nvSpPr>
@@ -5560,7 +8769,7 @@
       </p:sp>
       <p:sp>
         <p:nvSpPr>
-          <p:cNvPr id="4" name="Text 2"/>
+          <p:cNvPr id="5" name="Text 3"/>
           <p:cNvSpPr/>
           <p:nvPr/>
         </p:nvSpPr>
@@ -5599,7 +8808,7 @@
       </p:sp>
       <p:sp>
         <p:nvSpPr>
-          <p:cNvPr id="5" name="Text 3"/>
+          <p:cNvPr id="6" name="Text 4"/>
           <p:cNvSpPr/>
           <p:nvPr/>
         </p:nvSpPr>
@@ -5638,7 +8847,7 @@
       </p:sp>
       <p:sp>
         <p:nvSpPr>
-          <p:cNvPr id="6" name="Text 4"/>
+          <p:cNvPr id="7" name="Text 5"/>
           <p:cNvSpPr/>
           <p:nvPr/>
         </p:nvSpPr>
@@ -5671,7 +8880,7 @@
                 <a:ea typeface="Aptos Display" pitchFamily="34" charset="-122"/>
                 <a:cs typeface="Aptos Display" pitchFamily="34" charset="-120"/>
               </a:rPr>
-              <a:t>Module Context</a:t>
+              <a:t>What this module helps you do</a:t>
             </a:r>
             <a:endParaRPr lang="en-US" sz="2700" dirty="0"/>
           </a:p>
@@ -5679,14 +8888,14 @@
       </p:sp>
       <p:sp>
         <p:nvSpPr>
-          <p:cNvPr id="7" name="Text 5"/>
-          <p:cNvSpPr/>
-          <p:nvPr/>
-        </p:nvSpPr>
-        <p:spPr>
-          <a:xfrm>
-            <a:off x="822960" y="1325880"/>
-            <a:ext cx="10378440" cy="1371600"/>
+          <p:cNvPr id="8" name="Text 6"/>
+          <p:cNvSpPr/>
+          <p:nvPr/>
+        </p:nvSpPr>
+        <p:spPr>
+          <a:xfrm>
+            <a:off x="868680" y="1417320"/>
+            <a:ext cx="6675120" cy="3291840"/>
           </a:xfrm>
           <a:prstGeom prst="rect">
             <a:avLst/>
@@ -5701,7 +8910,7 @@
           <a:lstStyle/>
           <a:p>
             <a:r>
-              <a:rPr lang="en-US" sz="1600" dirty="0">
+              <a:rPr lang="en-US" sz="1700" dirty="0">
                 <a:solidFill>
                   <a:srgbClr val="17364A"/>
                 </a:solidFill>
@@ -5709,13 +8918,13 @@
                 <a:ea typeface="Aptos" pitchFamily="34" charset="-122"/>
                 <a:cs typeface="Aptos" pitchFamily="34" charset="-120"/>
               </a:rPr>
-              <a:t>Level: applied/foundational</a:t>
-            </a:r>
-            <a:endParaRPr lang="en-US" sz="1600" dirty="0"/>
-          </a:p>
-          <a:p>
-            <a:r>
-              <a:rPr lang="en-US" sz="1600" dirty="0">
+              <a:t>Natural language processing is a branch of AI that works with human language.</a:t>
+            </a:r>
+            <a:endParaRPr lang="en-US" sz="1700" dirty="0"/>
+          </a:p>
+          <a:p>
+            <a:r>
+              <a:rPr lang="en-US" sz="1700" dirty="0">
                 <a:solidFill>
                   <a:srgbClr val="17364A"/>
                 </a:solidFill>
@@ -5723,13 +8932,13 @@
                 <a:ea typeface="Aptos" pitchFamily="34" charset="-122"/>
                 <a:cs typeface="Aptos" pitchFamily="34" charset="-120"/>
               </a:rPr>
-              <a:t>Primary track: Analytics and Modeling Track</a:t>
-            </a:r>
-            <a:endParaRPr lang="en-US" sz="1600" dirty="0"/>
-          </a:p>
-          <a:p>
-            <a:r>
-              <a:rPr lang="en-US" sz="1600" dirty="0">
+              <a:t>Public health agencies often hold important information in free-text sources, including clinical notes, case narratives, call center logs,.</a:t>
+            </a:r>
+            <a:endParaRPr lang="en-US" sz="1700" dirty="0"/>
+          </a:p>
+          <a:p>
+            <a:r>
+              <a:rPr lang="en-US" sz="1700" dirty="0">
                 <a:solidFill>
                   <a:srgbClr val="17364A"/>
                 </a:solidFill>
@@ -5737,31 +8946,97 @@
                 <a:ea typeface="Aptos" pitchFamily="34" charset="-122"/>
                 <a:cs typeface="Aptos" pitchFamily="34" charset="-120"/>
               </a:rPr>
-              <a:t>Appears in tracks: technical-architecture</a:t>
-            </a:r>
-            <a:endParaRPr lang="en-US" sz="1600" dirty="0"/>
-          </a:p>
-        </p:txBody>
-      </p:sp>
-      <p:sp>
-        <p:nvSpPr>
-          <p:cNvPr id="8" name="Text 6"/>
-          <p:cNvSpPr/>
-          <p:nvPr/>
-        </p:nvSpPr>
-        <p:spPr>
-          <a:xfrm>
-            <a:off x="822960" y="2743200"/>
-            <a:ext cx="10378440" cy="2834640"/>
-          </a:xfrm>
-          <a:prstGeom prst="rect">
-            <a:avLst/>
-          </a:prstGeom>
-          <a:noFill/>
-          <a:ln/>
-        </p:spPr>
-        <p:txBody>
-          <a:bodyPr wrap="square" lIns="1016" tIns="1016" rIns="1016" bIns="1016" rtlCol="0" anchor="t">
+              <a:t>This module teaches learners how NLP can support public health work and how to evaluate its risks.</a:t>
+            </a:r>
+            <a:endParaRPr lang="en-US" sz="1700" dirty="0"/>
+          </a:p>
+        </p:txBody>
+      </p:sp>
+      <p:sp>
+        <p:nvSpPr>
+          <p:cNvPr id="9" name="Shape 7"/>
+          <p:cNvSpPr/>
+          <p:nvPr/>
+        </p:nvSpPr>
+        <p:spPr>
+          <a:xfrm>
+            <a:off x="7909560" y="1417320"/>
+            <a:ext cx="3154680" cy="1920240"/>
+          </a:xfrm>
+          <a:prstGeom prst="roundRect">
+            <a:avLst>
+              <a:gd name="adj" fmla="val 5714"/>
+            </a:avLst>
+          </a:prstGeom>
+          <a:solidFill>
+            <a:srgbClr val="EAF6F8"/>
+          </a:solidFill>
+          <a:ln w="12700">
+            <a:solidFill>
+              <a:srgbClr val="B9D7E6"/>
+            </a:solidFill>
+            <a:prstDash val="solid"/>
+          </a:ln>
+        </p:spPr>
+      </p:sp>
+      <p:sp>
+        <p:nvSpPr>
+          <p:cNvPr id="10" name="Text 8"/>
+          <p:cNvSpPr/>
+          <p:nvPr/>
+        </p:nvSpPr>
+        <p:spPr>
+          <a:xfrm>
+            <a:off x="8074152" y="1563624"/>
+            <a:ext cx="2825496" cy="201168"/>
+          </a:xfrm>
+          <a:prstGeom prst="rect">
+            <a:avLst/>
+          </a:prstGeom>
+          <a:noFill/>
+          <a:ln/>
+        </p:spPr>
+        <p:txBody>
+          <a:bodyPr wrap="square" lIns="0" tIns="0" rIns="0" bIns="0" rtlCol="0" anchor="ctr"/>
+          <a:lstStyle/>
+          <a:p>
+            <a:pPr indent="0" marL="0">
+              <a:buNone/>
+            </a:pPr>
+            <a:r>
+              <a:rPr lang="en-US" sz="950" b="1" dirty="0">
+                <a:solidFill>
+                  <a:srgbClr val="0068B7"/>
+                </a:solidFill>
+                <a:latin typeface="Aptos" pitchFamily="34" charset="0"/>
+                <a:ea typeface="Aptos" pitchFamily="34" charset="-122"/>
+                <a:cs typeface="Aptos" pitchFamily="34" charset="-120"/>
+              </a:rPr>
+              <a:t>Module details</a:t>
+            </a:r>
+            <a:endParaRPr lang="en-US" sz="950" dirty="0"/>
+          </a:p>
+        </p:txBody>
+      </p:sp>
+      <p:sp>
+        <p:nvSpPr>
+          <p:cNvPr id="11" name="Text 9"/>
+          <p:cNvSpPr/>
+          <p:nvPr/>
+        </p:nvSpPr>
+        <p:spPr>
+          <a:xfrm>
+            <a:off x="8074152" y="1856232"/>
+            <a:ext cx="2825496" cy="1353312"/>
+          </a:xfrm>
+          <a:prstGeom prst="rect">
+            <a:avLst/>
+          </a:prstGeom>
+          <a:noFill/>
+          <a:ln/>
+        </p:spPr>
+        <p:txBody>
+          <a:bodyPr wrap="square" lIns="0" tIns="0" rIns="0" bIns="0" rtlCol="0" anchor="t">
             <a:normAutofit/>
           </a:bodyPr>
           <a:lstStyle/>
@@ -5770,7 +9045,7 @@
               <a:buNone/>
             </a:pPr>
             <a:r>
-              <a:rPr lang="en-US" sz="1400" dirty="0">
+              <a:rPr lang="en-US" sz="1250" dirty="0">
                 <a:solidFill>
                   <a:srgbClr val="17364A"/>
                 </a:solidFill>
@@ -5778,9 +9053,150 @@
                 <a:ea typeface="Aptos" pitchFamily="34" charset="-122"/>
                 <a:cs typeface="Aptos" pitchFamily="34" charset="-120"/>
               </a:rPr>
-              <a:t>Natural language processing is a branch of AI that works with human language. Public health agencies often hold important information in free-text sources, including clinical notes, case narratives, call center logs, inspection reports, complaints, death certificate text, public comments, and community feedback. This module teaches learners how NLP can support public health work and how to evaluate its risks.</a:t>
-            </a:r>
-            <a:endParaRPr lang="en-US" sz="1400" dirty="0"/>
+              <a:t>Level: applied/foundational</a:t>
+            </a:r>
+            <a:endParaRPr lang="en-US" sz="1250" dirty="0"/>
+          </a:p>
+          <a:p>
+            <a:pPr indent="0" marL="0">
+              <a:buNone/>
+            </a:pPr>
+            <a:r>
+              <a:rPr lang="en-US" sz="1250" dirty="0">
+                <a:solidFill>
+                  <a:srgbClr val="17364A"/>
+                </a:solidFill>
+                <a:latin typeface="Aptos" pitchFamily="34" charset="0"/>
+                <a:ea typeface="Aptos" pitchFamily="34" charset="-122"/>
+                <a:cs typeface="Aptos" pitchFamily="34" charset="-120"/>
+              </a:rPr>
+              <a:t>Primary track: Analytics and Modeling Track</a:t>
+            </a:r>
+            <a:endParaRPr lang="en-US" sz="1250" dirty="0"/>
+          </a:p>
+          <a:p>
+            <a:pPr indent="0" marL="0">
+              <a:buNone/>
+            </a:pPr>
+            <a:r>
+              <a:rPr lang="en-US" sz="1250" dirty="0">
+                <a:solidFill>
+                  <a:srgbClr val="17364A"/>
+                </a:solidFill>
+                <a:latin typeface="Aptos" pitchFamily="34" charset="0"/>
+                <a:ea typeface="Aptos" pitchFamily="34" charset="-122"/>
+                <a:cs typeface="Aptos" pitchFamily="34" charset="-120"/>
+              </a:rPr>
+              <a:t>Appears in tracks: technical-architecture</a:t>
+            </a:r>
+            <a:endParaRPr lang="en-US" sz="1250" dirty="0"/>
+          </a:p>
+        </p:txBody>
+      </p:sp>
+      <p:sp>
+        <p:nvSpPr>
+          <p:cNvPr id="12" name="Shape 10"/>
+          <p:cNvSpPr/>
+          <p:nvPr/>
+        </p:nvSpPr>
+        <p:spPr>
+          <a:xfrm>
+            <a:off x="7909560" y="3611880"/>
+            <a:ext cx="3154680" cy="1783080"/>
+          </a:xfrm>
+          <a:prstGeom prst="roundRect">
+            <a:avLst>
+              <a:gd name="adj" fmla="val 6154"/>
+            </a:avLst>
+          </a:prstGeom>
+          <a:solidFill>
+            <a:srgbClr val="EEF8ED"/>
+          </a:solidFill>
+          <a:ln w="12700">
+            <a:solidFill>
+              <a:srgbClr val="B9D7E6"/>
+            </a:solidFill>
+            <a:prstDash val="solid"/>
+          </a:ln>
+        </p:spPr>
+      </p:sp>
+      <p:sp>
+        <p:nvSpPr>
+          <p:cNvPr id="13" name="Text 11"/>
+          <p:cNvSpPr/>
+          <p:nvPr/>
+        </p:nvSpPr>
+        <p:spPr>
+          <a:xfrm>
+            <a:off x="8074152" y="3758184"/>
+            <a:ext cx="2825496" cy="201168"/>
+          </a:xfrm>
+          <a:prstGeom prst="rect">
+            <a:avLst/>
+          </a:prstGeom>
+          <a:noFill/>
+          <a:ln/>
+        </p:spPr>
+        <p:txBody>
+          <a:bodyPr wrap="square" lIns="0" tIns="0" rIns="0" bIns="0" rtlCol="0" anchor="ctr"/>
+          <a:lstStyle/>
+          <a:p>
+            <a:pPr indent="0" marL="0">
+              <a:buNone/>
+            </a:pPr>
+            <a:r>
+              <a:rPr lang="en-US" sz="950" b="1" dirty="0">
+                <a:solidFill>
+                  <a:srgbClr val="0068B7"/>
+                </a:solidFill>
+                <a:latin typeface="Aptos" pitchFamily="34" charset="0"/>
+                <a:ea typeface="Aptos" pitchFamily="34" charset="-122"/>
+                <a:cs typeface="Aptos" pitchFamily="34" charset="-120"/>
+              </a:rPr>
+              <a:t>Learning approach</a:t>
+            </a:r>
+            <a:endParaRPr lang="en-US" sz="950" dirty="0"/>
+          </a:p>
+        </p:txBody>
+      </p:sp>
+      <p:sp>
+        <p:nvSpPr>
+          <p:cNvPr id="14" name="Text 12"/>
+          <p:cNvSpPr/>
+          <p:nvPr/>
+        </p:nvSpPr>
+        <p:spPr>
+          <a:xfrm>
+            <a:off x="8074152" y="4050792"/>
+            <a:ext cx="2825496" cy="1216152"/>
+          </a:xfrm>
+          <a:prstGeom prst="rect">
+            <a:avLst/>
+          </a:prstGeom>
+          <a:noFill/>
+          <a:ln/>
+        </p:spPr>
+        <p:txBody>
+          <a:bodyPr wrap="square" lIns="0" tIns="0" rIns="0" bIns="0" rtlCol="0" anchor="t">
+            <a:normAutofit/>
+          </a:bodyPr>
+          <a:lstStyle/>
+          <a:p>
+            <a:pPr indent="0" marL="0">
+              <a:buNone/>
+            </a:pPr>
+            <a:r>
+              <a:rPr lang="en-US" sz="1250" dirty="0">
+                <a:solidFill>
+                  <a:srgbClr val="17364A"/>
+                </a:solidFill>
+                <a:latin typeface="Aptos" pitchFamily="34" charset="0"/>
+                <a:ea typeface="Aptos" pitchFamily="34" charset="-122"/>
+                <a:cs typeface="Aptos" pitchFamily="34" charset="-120"/>
+              </a:rPr>
+              <a:t>Review the core ideas, complete the practical exercise, check your understanding, and use the related plays and tools to apply the lesson.</a:t>
+            </a:r>
+            <a:endParaRPr lang="en-US" sz="1250" dirty="0"/>
           </a:p>
         </p:txBody>
       </p:sp>
@@ -5843,7 +9259,32 @@
       </p:sp>
       <p:sp>
         <p:nvSpPr>
-          <p:cNvPr id="3" name="Text 1"/>
+          <p:cNvPr id="3" name="Shape 1"/>
+          <p:cNvSpPr/>
+          <p:nvPr/>
+        </p:nvSpPr>
+        <p:spPr>
+          <a:xfrm>
+            <a:off x="0" y="164592"/>
+            <a:ext cx="146304" cy="6693408"/>
+          </a:xfrm>
+          <a:prstGeom prst="rect">
+            <a:avLst/>
+          </a:prstGeom>
+          <a:solidFill>
+            <a:srgbClr val="2F8A28"/>
+          </a:solidFill>
+          <a:ln w="12700">
+            <a:solidFill>
+              <a:srgbClr val="2F8A28"/>
+            </a:solidFill>
+            <a:prstDash val="solid"/>
+          </a:ln>
+        </p:spPr>
+      </p:sp>
+      <p:sp>
+        <p:nvSpPr>
+          <p:cNvPr id="4" name="Text 2"/>
           <p:cNvSpPr/>
           <p:nvPr/>
         </p:nvSpPr>
@@ -5882,7 +9323,7 @@
       </p:sp>
       <p:sp>
         <p:nvSpPr>
-          <p:cNvPr id="4" name="Text 2"/>
+          <p:cNvPr id="5" name="Text 3"/>
           <p:cNvSpPr/>
           <p:nvPr/>
         </p:nvSpPr>
@@ -5921,7 +9362,7 @@
       </p:sp>
       <p:sp>
         <p:nvSpPr>
-          <p:cNvPr id="5" name="Text 3"/>
+          <p:cNvPr id="6" name="Text 4"/>
           <p:cNvSpPr/>
           <p:nvPr/>
         </p:nvSpPr>
@@ -5960,13 +9401,77 @@
       </p:sp>
       <p:sp>
         <p:nvSpPr>
-          <p:cNvPr id="6" name="Text 4"/>
+          <p:cNvPr id="7" name="Shape 5"/>
           <p:cNvSpPr/>
           <p:nvPr/>
         </p:nvSpPr>
         <p:spPr>
           <a:xfrm>
             <a:off x="640080" y="658368"/>
+            <a:ext cx="420624" cy="420624"/>
+          </a:xfrm>
+          <a:prstGeom prst="ellipse">
+            <a:avLst/>
+          </a:prstGeom>
+          <a:solidFill>
+            <a:srgbClr val="0068B7"/>
+          </a:solidFill>
+          <a:ln w="12700">
+            <a:solidFill>
+              <a:srgbClr val="0068B7"/>
+            </a:solidFill>
+            <a:prstDash val="solid"/>
+          </a:ln>
+        </p:spPr>
+      </p:sp>
+      <p:sp>
+        <p:nvSpPr>
+          <p:cNvPr id="8" name="Text 6"/>
+          <p:cNvSpPr/>
+          <p:nvPr/>
+        </p:nvSpPr>
+        <p:spPr>
+          <a:xfrm>
+            <a:off x="640080" y="731520"/>
+            <a:ext cx="420624" cy="164592"/>
+          </a:xfrm>
+          <a:prstGeom prst="rect">
+            <a:avLst/>
+          </a:prstGeom>
+          <a:noFill/>
+          <a:ln/>
+        </p:spPr>
+        <p:txBody>
+          <a:bodyPr wrap="square" lIns="0" tIns="0" rIns="0" bIns="0" rtlCol="0" anchor="ctr"/>
+          <a:lstStyle/>
+          <a:p>
+            <a:pPr algn="ctr" indent="0" marL="0">
+              <a:buNone/>
+            </a:pPr>
+            <a:r>
+              <a:rPr lang="en-US" sz="1100" b="1" dirty="0">
+                <a:solidFill>
+                  <a:srgbClr val="FFFFFF"/>
+                </a:solidFill>
+                <a:latin typeface="Aptos" pitchFamily="34" charset="0"/>
+                <a:ea typeface="Aptos" pitchFamily="34" charset="-122"/>
+                <a:cs typeface="Aptos" pitchFamily="34" charset="-120"/>
+              </a:rPr>
+              <a:t>12</a:t>
+            </a:r>
+            <a:endParaRPr lang="en-US" sz="1100" dirty="0"/>
+          </a:p>
+        </p:txBody>
+      </p:sp>
+      <p:sp>
+        <p:nvSpPr>
+          <p:cNvPr id="9" name="Text 7"/>
+          <p:cNvSpPr/>
+          <p:nvPr/>
+        </p:nvSpPr>
+        <p:spPr>
+          <a:xfrm>
+            <a:off x="640080" y="621792"/>
             <a:ext cx="10881360" cy="566928"/>
           </a:xfrm>
           <a:prstGeom prst="rect">
@@ -5993,7 +9498,7 @@
                 <a:ea typeface="Aptos Display" pitchFamily="34" charset="-122"/>
                 <a:cs typeface="Aptos Display" pitchFamily="34" charset="-120"/>
               </a:rPr>
-              <a:t>References and Resources</a:t>
+              <a:t>Expected Assignment</a:t>
             </a:r>
             <a:endParaRPr lang="en-US" sz="2700" dirty="0"/>
           </a:p>
@@ -6001,14 +9506,14 @@
       </p:sp>
       <p:sp>
         <p:nvSpPr>
-          <p:cNvPr id="7" name="Text 5"/>
-          <p:cNvSpPr/>
-          <p:nvPr/>
-        </p:nvSpPr>
-        <p:spPr>
-          <a:xfrm>
-            <a:off x="822960" y="1325880"/>
-            <a:ext cx="10378440" cy="4800600"/>
+          <p:cNvPr id="10" name="Text 8"/>
+          <p:cNvSpPr/>
+          <p:nvPr/>
+        </p:nvSpPr>
+        <p:spPr>
+          <a:xfrm>
+            <a:off x="868680" y="1417320"/>
+            <a:ext cx="6675120" cy="4434840"/>
           </a:xfrm>
           <a:prstGeom prst="rect">
             <a:avLst/>
@@ -6023,7 +9528,7 @@
           <a:lstStyle/>
           <a:p>
             <a:r>
-              <a:rPr lang="en-US" sz="1450" dirty="0">
+              <a:rPr lang="en-US" sz="1700" dirty="0">
                 <a:solidFill>
                   <a:srgbClr val="17364A"/>
                 </a:solidFill>
@@ -6031,13 +9536,1209 @@
                 <a:ea typeface="Aptos" pitchFamily="34" charset="-122"/>
                 <a:cs typeface="Aptos" pitchFamily="34" charset="-120"/>
               </a:rPr>
+              <a:t>NLP use case description</a:t>
+            </a:r>
+            <a:endParaRPr lang="en-US" sz="1700" dirty="0"/>
+          </a:p>
+          <a:p>
+            <a:r>
+              <a:rPr lang="en-US" sz="1700" dirty="0">
+                <a:solidFill>
+                  <a:srgbClr val="17364A"/>
+                </a:solidFill>
+                <a:latin typeface="Aptos" pitchFamily="34" charset="0"/>
+                <a:ea typeface="Aptos" pitchFamily="34" charset="-122"/>
+                <a:cs typeface="Aptos" pitchFamily="34" charset="-120"/>
+              </a:rPr>
+              <a:t>NLP evaluation plan</a:t>
+            </a:r>
+            <a:endParaRPr lang="en-US" sz="1700" dirty="0"/>
+          </a:p>
+          <a:p>
+            <a:r>
+              <a:rPr lang="en-US" sz="1700" dirty="0">
+                <a:solidFill>
+                  <a:srgbClr val="17364A"/>
+                </a:solidFill>
+                <a:latin typeface="Aptos" pitchFamily="34" charset="0"/>
+                <a:ea typeface="Aptos" pitchFamily="34" charset="-122"/>
+                <a:cs typeface="Aptos" pitchFamily="34" charset="-120"/>
+              </a:rPr>
+              <a:t>Human review checklist</a:t>
+            </a:r>
+            <a:endParaRPr lang="en-US" sz="1700" dirty="0"/>
+          </a:p>
+          <a:p>
+            <a:r>
+              <a:rPr lang="en-US" sz="1700" dirty="0">
+                <a:solidFill>
+                  <a:srgbClr val="17364A"/>
+                </a:solidFill>
+                <a:latin typeface="Aptos" pitchFamily="34" charset="0"/>
+                <a:ea typeface="Aptos" pitchFamily="34" charset="-122"/>
+                <a:cs typeface="Aptos" pitchFamily="34" charset="-120"/>
+              </a:rPr>
+              <a:t>Source verification and privacy safeguards</a:t>
+            </a:r>
+            <a:endParaRPr lang="en-US" sz="1700" dirty="0"/>
+          </a:p>
+        </p:txBody>
+      </p:sp>
+      <p:sp>
+        <p:nvSpPr>
+          <p:cNvPr id="11" name="Shape 9"/>
+          <p:cNvSpPr/>
+          <p:nvPr/>
+        </p:nvSpPr>
+        <p:spPr>
+          <a:xfrm>
+            <a:off x="7909560" y="1417320"/>
+            <a:ext cx="3154680" cy="1828800"/>
+          </a:xfrm>
+          <a:prstGeom prst="roundRect">
+            <a:avLst>
+              <a:gd name="adj" fmla="val 6000"/>
+            </a:avLst>
+          </a:prstGeom>
+          <a:solidFill>
+            <a:srgbClr val="EEF8ED"/>
+          </a:solidFill>
+          <a:ln w="12700">
+            <a:solidFill>
+              <a:srgbClr val="B9D7E6"/>
+            </a:solidFill>
+            <a:prstDash val="solid"/>
+          </a:ln>
+        </p:spPr>
+      </p:sp>
+      <p:sp>
+        <p:nvSpPr>
+          <p:cNvPr id="12" name="Text 10"/>
+          <p:cNvSpPr/>
+          <p:nvPr/>
+        </p:nvSpPr>
+        <p:spPr>
+          <a:xfrm>
+            <a:off x="8074152" y="1563624"/>
+            <a:ext cx="2825496" cy="201168"/>
+          </a:xfrm>
+          <a:prstGeom prst="rect">
+            <a:avLst/>
+          </a:prstGeom>
+          <a:noFill/>
+          <a:ln/>
+        </p:spPr>
+        <p:txBody>
+          <a:bodyPr wrap="square" lIns="0" tIns="0" rIns="0" bIns="0" rtlCol="0" anchor="ctr"/>
+          <a:lstStyle/>
+          <a:p>
+            <a:pPr indent="0" marL="0">
+              <a:buNone/>
+            </a:pPr>
+            <a:r>
+              <a:rPr lang="en-US" sz="950" b="1" dirty="0">
+                <a:solidFill>
+                  <a:srgbClr val="0068B7"/>
+                </a:solidFill>
+                <a:latin typeface="Aptos" pitchFamily="34" charset="0"/>
+                <a:ea typeface="Aptos" pitchFamily="34" charset="-122"/>
+                <a:cs typeface="Aptos" pitchFamily="34" charset="-120"/>
+              </a:rPr>
+              <a:t>Key idea</a:t>
+            </a:r>
+            <a:endParaRPr lang="en-US" sz="950" dirty="0"/>
+          </a:p>
+        </p:txBody>
+      </p:sp>
+      <p:sp>
+        <p:nvSpPr>
+          <p:cNvPr id="13" name="Text 11"/>
+          <p:cNvSpPr/>
+          <p:nvPr/>
+        </p:nvSpPr>
+        <p:spPr>
+          <a:xfrm>
+            <a:off x="8074152" y="1856232"/>
+            <a:ext cx="2825496" cy="1261872"/>
+          </a:xfrm>
+          <a:prstGeom prst="rect">
+            <a:avLst/>
+          </a:prstGeom>
+          <a:noFill/>
+          <a:ln/>
+        </p:spPr>
+        <p:txBody>
+          <a:bodyPr wrap="square" lIns="0" tIns="0" rIns="0" bIns="0" rtlCol="0" anchor="t">
+            <a:normAutofit/>
+          </a:bodyPr>
+          <a:lstStyle/>
+          <a:p>
+            <a:pPr indent="0" marL="0">
+              <a:buNone/>
+            </a:pPr>
+            <a:r>
+              <a:rPr lang="en-US" sz="1250" dirty="0">
+                <a:solidFill>
+                  <a:srgbClr val="17364A"/>
+                </a:solidFill>
+                <a:latin typeface="Aptos" pitchFamily="34" charset="0"/>
+                <a:ea typeface="Aptos" pitchFamily="34" charset="-122"/>
+                <a:cs typeface="Aptos" pitchFamily="34" charset="-120"/>
+              </a:rPr>
+              <a:t>NLP use case description</a:t>
+            </a:r>
+            <a:endParaRPr lang="en-US" sz="1250" dirty="0"/>
+          </a:p>
+        </p:txBody>
+      </p:sp>
+      <p:sp>
+        <p:nvSpPr>
+          <p:cNvPr id="14" name="Shape 12"/>
+          <p:cNvSpPr/>
+          <p:nvPr/>
+        </p:nvSpPr>
+        <p:spPr>
+          <a:xfrm>
+            <a:off x="7909560" y="3520440"/>
+            <a:ext cx="3154680" cy="1737360"/>
+          </a:xfrm>
+          <a:prstGeom prst="roundRect">
+            <a:avLst>
+              <a:gd name="adj" fmla="val 6316"/>
+            </a:avLst>
+          </a:prstGeom>
+          <a:solidFill>
+            <a:srgbClr val="EAF6F8"/>
+          </a:solidFill>
+          <a:ln w="12700">
+            <a:solidFill>
+              <a:srgbClr val="B9D7E6"/>
+            </a:solidFill>
+            <a:prstDash val="solid"/>
+          </a:ln>
+        </p:spPr>
+      </p:sp>
+      <p:sp>
+        <p:nvSpPr>
+          <p:cNvPr id="15" name="Text 13"/>
+          <p:cNvSpPr/>
+          <p:nvPr/>
+        </p:nvSpPr>
+        <p:spPr>
+          <a:xfrm>
+            <a:off x="8074152" y="3666744"/>
+            <a:ext cx="2825496" cy="201168"/>
+          </a:xfrm>
+          <a:prstGeom prst="rect">
+            <a:avLst/>
+          </a:prstGeom>
+          <a:noFill/>
+          <a:ln/>
+        </p:spPr>
+        <p:txBody>
+          <a:bodyPr wrap="square" lIns="0" tIns="0" rIns="0" bIns="0" rtlCol="0" anchor="ctr"/>
+          <a:lstStyle/>
+          <a:p>
+            <a:pPr indent="0" marL="0">
+              <a:buNone/>
+            </a:pPr>
+            <a:r>
+              <a:rPr lang="en-US" sz="950" b="1" dirty="0">
+                <a:solidFill>
+                  <a:srgbClr val="0068B7"/>
+                </a:solidFill>
+                <a:latin typeface="Aptos" pitchFamily="34" charset="0"/>
+                <a:ea typeface="Aptos" pitchFamily="34" charset="-122"/>
+                <a:cs typeface="Aptos" pitchFamily="34" charset="-120"/>
+              </a:rPr>
+              <a:t>Use this for</a:t>
+            </a:r>
+            <a:endParaRPr lang="en-US" sz="950" dirty="0"/>
+          </a:p>
+        </p:txBody>
+      </p:sp>
+      <p:sp>
+        <p:nvSpPr>
+          <p:cNvPr id="16" name="Text 14"/>
+          <p:cNvSpPr/>
+          <p:nvPr/>
+        </p:nvSpPr>
+        <p:spPr>
+          <a:xfrm>
+            <a:off x="8074152" y="3959352"/>
+            <a:ext cx="2825496" cy="1170432"/>
+          </a:xfrm>
+          <a:prstGeom prst="rect">
+            <a:avLst/>
+          </a:prstGeom>
+          <a:noFill/>
+          <a:ln/>
+        </p:spPr>
+        <p:txBody>
+          <a:bodyPr wrap="square" lIns="0" tIns="0" rIns="0" bIns="0" rtlCol="0" anchor="t">
+            <a:normAutofit/>
+          </a:bodyPr>
+          <a:lstStyle/>
+          <a:p>
+            <a:pPr indent="0" marL="0">
+              <a:buNone/>
+            </a:pPr>
+            <a:r>
+              <a:rPr lang="en-US" sz="1250" dirty="0">
+                <a:solidFill>
+                  <a:srgbClr val="17364A"/>
+                </a:solidFill>
+                <a:latin typeface="Aptos" pitchFamily="34" charset="0"/>
+                <a:ea typeface="Aptos" pitchFamily="34" charset="-122"/>
+                <a:cs typeface="Aptos" pitchFamily="34" charset="-120"/>
+              </a:rPr>
+              <a:t>Connect the concept to public health decisions, safeguards, documentation, or implementation work.</a:t>
+            </a:r>
+            <a:endParaRPr lang="en-US" sz="1250" dirty="0"/>
+          </a:p>
+        </p:txBody>
+      </p:sp>
+    </p:spTree>
+  </p:cSld>
+  <p:clrMapOvr>
+    <a:masterClrMapping/>
+  </p:clrMapOvr>
+</p:sld>
+</file>
+
+<file path=ppt/slides/slide21.xml><?xml version="1.0" encoding="utf-8"?>
+<p:sld xmlns:a="http://schemas.openxmlformats.org/drawingml/2006/main" xmlns:r="http://schemas.openxmlformats.org/officeDocument/2006/relationships" xmlns:p="http://schemas.openxmlformats.org/presentationml/2006/main">
+  <p:cSld name="Slide 21">
+    <p:bg>
+      <p:bgPr>
+        <a:solidFill>
+          <a:srgbClr val="F7FBFD"/>
+        </a:solidFill>
+      </p:bgPr>
+    </p:bg>
+    <p:spTree>
+      <p:nvGrpSpPr>
+        <p:cNvPr id="1" name=""/>
+        <p:cNvGrpSpPr/>
+        <p:nvPr/>
+      </p:nvGrpSpPr>
+      <p:grpSpPr>
+        <a:xfrm>
+          <a:off x="0" y="0"/>
+          <a:ext cx="0" cy="0"/>
+          <a:chOff x="0" y="0"/>
+          <a:chExt cx="0" cy="0"/>
+        </a:xfrm>
+      </p:grpSpPr>
+      <p:sp>
+        <p:nvSpPr>
+          <p:cNvPr id="2" name="Shape 0"/>
+          <p:cNvSpPr/>
+          <p:nvPr/>
+        </p:nvSpPr>
+        <p:spPr>
+          <a:xfrm>
+            <a:off x="0" y="0"/>
+            <a:ext cx="12191695" cy="164592"/>
+          </a:xfrm>
+          <a:prstGeom prst="rect">
+            <a:avLst/>
+          </a:prstGeom>
+          <a:solidFill>
+            <a:srgbClr val="0068B7"/>
+          </a:solidFill>
+          <a:ln w="12700">
+            <a:solidFill>
+              <a:srgbClr val="0068B7"/>
+            </a:solidFill>
+            <a:prstDash val="solid"/>
+          </a:ln>
+        </p:spPr>
+      </p:sp>
+      <p:sp>
+        <p:nvSpPr>
+          <p:cNvPr id="3" name="Shape 1"/>
+          <p:cNvSpPr/>
+          <p:nvPr/>
+        </p:nvSpPr>
+        <p:spPr>
+          <a:xfrm>
+            <a:off x="0" y="164592"/>
+            <a:ext cx="146304" cy="6693408"/>
+          </a:xfrm>
+          <a:prstGeom prst="rect">
+            <a:avLst/>
+          </a:prstGeom>
+          <a:solidFill>
+            <a:srgbClr val="2F8A28"/>
+          </a:solidFill>
+          <a:ln w="12700">
+            <a:solidFill>
+              <a:srgbClr val="2F8A28"/>
+            </a:solidFill>
+            <a:prstDash val="solid"/>
+          </a:ln>
+        </p:spPr>
+      </p:sp>
+      <p:sp>
+        <p:nvSpPr>
+          <p:cNvPr id="4" name="Text 2"/>
+          <p:cNvSpPr/>
+          <p:nvPr/>
+        </p:nvSpPr>
+        <p:spPr>
+          <a:xfrm>
+            <a:off x="502920" y="292608"/>
+            <a:ext cx="10149840" cy="256032"/>
+          </a:xfrm>
+          <a:prstGeom prst="rect">
+            <a:avLst/>
+          </a:prstGeom>
+          <a:noFill/>
+          <a:ln/>
+        </p:spPr>
+        <p:txBody>
+          <a:bodyPr wrap="square" lIns="0" tIns="0" rIns="0" bIns="0" rtlCol="0" anchor="ctr"/>
+          <a:lstStyle/>
+          <a:p>
+            <a:pPr indent="0" marL="0">
+              <a:buNone/>
+            </a:pPr>
+            <a:r>
+              <a:rPr lang="en-US" sz="900" b="1" dirty="0">
+                <a:solidFill>
+                  <a:srgbClr val="5F7181"/>
+                </a:solidFill>
+                <a:latin typeface="Aptos" pitchFamily="34" charset="0"/>
+                <a:ea typeface="Aptos" pitchFamily="34" charset="-122"/>
+                <a:cs typeface="Aptos" pitchFamily="34" charset="-120"/>
+              </a:rPr>
+              <a:t>Natural Language Processing for Public Health</a:t>
+            </a:r>
+            <a:endParaRPr lang="en-US" sz="900" dirty="0"/>
+          </a:p>
+        </p:txBody>
+      </p:sp>
+      <p:sp>
+        <p:nvSpPr>
+          <p:cNvPr id="5" name="Text 3"/>
+          <p:cNvSpPr/>
+          <p:nvPr/>
+        </p:nvSpPr>
+        <p:spPr>
+          <a:xfrm>
+            <a:off x="502920" y="6537960"/>
+            <a:ext cx="7772400" cy="201168"/>
+          </a:xfrm>
+          <a:prstGeom prst="rect">
+            <a:avLst/>
+          </a:prstGeom>
+          <a:noFill/>
+          <a:ln/>
+        </p:spPr>
+        <p:txBody>
+          <a:bodyPr wrap="square" lIns="0" tIns="0" rIns="0" bIns="0" rtlCol="0" anchor="ctr"/>
+          <a:lstStyle/>
+          <a:p>
+            <a:pPr indent="0" marL="0">
+              <a:buNone/>
+            </a:pPr>
+            <a:r>
+              <a:rPr lang="en-US" sz="800" dirty="0">
+                <a:solidFill>
+                  <a:srgbClr val="5F7181"/>
+                </a:solidFill>
+                <a:latin typeface="Aptos" pitchFamily="34" charset="0"/>
+                <a:ea typeface="Aptos" pitchFamily="34" charset="-122"/>
+                <a:cs typeface="Aptos" pitchFamily="34" charset="-120"/>
+              </a:rPr>
+              <a:t>AI Playbook and Toolkit for Public Health Departments</a:t>
+            </a:r>
+            <a:endParaRPr lang="en-US" sz="800" dirty="0"/>
+          </a:p>
+        </p:txBody>
+      </p:sp>
+      <p:sp>
+        <p:nvSpPr>
+          <p:cNvPr id="6" name="Text 4"/>
+          <p:cNvSpPr/>
+          <p:nvPr/>
+        </p:nvSpPr>
+        <p:spPr>
+          <a:xfrm>
+            <a:off x="9966960" y="6537960"/>
+            <a:ext cx="1645920" cy="201168"/>
+          </a:xfrm>
+          <a:prstGeom prst="rect">
+            <a:avLst/>
+          </a:prstGeom>
+          <a:noFill/>
+          <a:ln/>
+        </p:spPr>
+        <p:txBody>
+          <a:bodyPr wrap="square" lIns="0" tIns="0" rIns="0" bIns="0" rtlCol="0" anchor="ctr"/>
+          <a:lstStyle/>
+          <a:p>
+            <a:pPr algn="r" indent="0" marL="0">
+              <a:buNone/>
+            </a:pPr>
+            <a:r>
+              <a:rPr lang="en-US" sz="800" dirty="0">
+                <a:solidFill>
+                  <a:srgbClr val="5F7181"/>
+                </a:solidFill>
+                <a:latin typeface="Aptos" pitchFamily="34" charset="0"/>
+                <a:ea typeface="Aptos" pitchFamily="34" charset="-122"/>
+                <a:cs typeface="Aptos" pitchFamily="34" charset="-120"/>
+              </a:rPr>
+              <a:t>© Paula Soper</a:t>
+            </a:r>
+            <a:endParaRPr lang="en-US" sz="800" dirty="0"/>
+          </a:p>
+        </p:txBody>
+      </p:sp>
+      <p:sp>
+        <p:nvSpPr>
+          <p:cNvPr id="7" name="Shape 5"/>
+          <p:cNvSpPr/>
+          <p:nvPr/>
+        </p:nvSpPr>
+        <p:spPr>
+          <a:xfrm>
+            <a:off x="640080" y="658368"/>
+            <a:ext cx="420624" cy="420624"/>
+          </a:xfrm>
+          <a:prstGeom prst="ellipse">
+            <a:avLst/>
+          </a:prstGeom>
+          <a:solidFill>
+            <a:srgbClr val="0068B7"/>
+          </a:solidFill>
+          <a:ln w="12700">
+            <a:solidFill>
+              <a:srgbClr val="0068B7"/>
+            </a:solidFill>
+            <a:prstDash val="solid"/>
+          </a:ln>
+        </p:spPr>
+      </p:sp>
+      <p:sp>
+        <p:nvSpPr>
+          <p:cNvPr id="8" name="Text 6"/>
+          <p:cNvSpPr/>
+          <p:nvPr/>
+        </p:nvSpPr>
+        <p:spPr>
+          <a:xfrm>
+            <a:off x="640080" y="731520"/>
+            <a:ext cx="420624" cy="164592"/>
+          </a:xfrm>
+          <a:prstGeom prst="rect">
+            <a:avLst/>
+          </a:prstGeom>
+          <a:noFill/>
+          <a:ln/>
+        </p:spPr>
+        <p:txBody>
+          <a:bodyPr wrap="square" lIns="0" tIns="0" rIns="0" bIns="0" rtlCol="0" anchor="ctr"/>
+          <a:lstStyle/>
+          <a:p>
+            <a:pPr algn="ctr" indent="0" marL="0">
+              <a:buNone/>
+            </a:pPr>
+            <a:r>
+              <a:rPr lang="en-US" sz="1100" b="1" dirty="0">
+                <a:solidFill>
+                  <a:srgbClr val="FFFFFF"/>
+                </a:solidFill>
+                <a:latin typeface="Aptos" pitchFamily="34" charset="0"/>
+                <a:ea typeface="Aptos" pitchFamily="34" charset="-122"/>
+                <a:cs typeface="Aptos" pitchFamily="34" charset="-120"/>
+              </a:rPr>
+              <a:t>13</a:t>
+            </a:r>
+            <a:endParaRPr lang="en-US" sz="1100" dirty="0"/>
+          </a:p>
+        </p:txBody>
+      </p:sp>
+      <p:sp>
+        <p:nvSpPr>
+          <p:cNvPr id="9" name="Text 7"/>
+          <p:cNvSpPr/>
+          <p:nvPr/>
+        </p:nvSpPr>
+        <p:spPr>
+          <a:xfrm>
+            <a:off x="640080" y="621792"/>
+            <a:ext cx="10881360" cy="566928"/>
+          </a:xfrm>
+          <a:prstGeom prst="rect">
+            <a:avLst/>
+          </a:prstGeom>
+          <a:noFill/>
+          <a:ln/>
+        </p:spPr>
+        <p:txBody>
+          <a:bodyPr wrap="square" lIns="0" tIns="0" rIns="0" bIns="0" rtlCol="0" anchor="ctr">
+            <a:normAutofit/>
+          </a:bodyPr>
+          <a:lstStyle/>
+          <a:p>
+            <a:pPr indent="0" marL="0">
+              <a:buNone/>
+            </a:pPr>
+            <a:r>
+              <a:rPr lang="en-US" sz="2700" b="1" dirty="0">
+                <a:solidFill>
+                  <a:srgbClr val="003A63"/>
+                </a:solidFill>
+                <a:latin typeface="Aptos Display" pitchFamily="34" charset="0"/>
+                <a:ea typeface="Aptos Display" pitchFamily="34" charset="-122"/>
+                <a:cs typeface="Aptos Display" pitchFamily="34" charset="-120"/>
+              </a:rPr>
+              <a:t>Knowledge Check</a:t>
+            </a:r>
+            <a:endParaRPr lang="en-US" sz="2700" dirty="0"/>
+          </a:p>
+        </p:txBody>
+      </p:sp>
+      <p:sp>
+        <p:nvSpPr>
+          <p:cNvPr id="10" name="Text 8"/>
+          <p:cNvSpPr/>
+          <p:nvPr/>
+        </p:nvSpPr>
+        <p:spPr>
+          <a:xfrm>
+            <a:off x="868680" y="1417320"/>
+            <a:ext cx="6675120" cy="4434840"/>
+          </a:xfrm>
+          <a:prstGeom prst="rect">
+            <a:avLst/>
+          </a:prstGeom>
+          <a:noFill/>
+          <a:ln/>
+        </p:spPr>
+        <p:txBody>
+          <a:bodyPr wrap="square" lIns="635" tIns="635" rIns="635" bIns="635" rtlCol="0" anchor="t">
+            <a:normAutofit/>
+          </a:bodyPr>
+          <a:lstStyle/>
+          <a:p>
+            <a:r>
+              <a:rPr lang="en-US" sz="1700" dirty="0">
+                <a:solidFill>
+                  <a:srgbClr val="17364A"/>
+                </a:solidFill>
+                <a:latin typeface="Aptos" pitchFamily="34" charset="0"/>
+                <a:ea typeface="Aptos" pitchFamily="34" charset="-122"/>
+                <a:cs typeface="Aptos" pitchFamily="34" charset="-120"/>
+              </a:rPr>
+              <a:t>1. What is NLP?</a:t>
+            </a:r>
+            <a:endParaRPr lang="en-US" sz="1700" dirty="0"/>
+          </a:p>
+          <a:p>
+            <a:r>
+              <a:rPr lang="en-US" sz="1700" dirty="0">
+                <a:solidFill>
+                  <a:srgbClr val="17364A"/>
+                </a:solidFill>
+                <a:latin typeface="Aptos" pitchFamily="34" charset="0"/>
+                <a:ea typeface="Aptos" pitchFamily="34" charset="-122"/>
+                <a:cs typeface="Aptos" pitchFamily="34" charset="-120"/>
+              </a:rPr>
+              <a:t>2. Which task is an example of information extraction?</a:t>
+            </a:r>
+            <a:endParaRPr lang="en-US" sz="1700" dirty="0"/>
+          </a:p>
+          <a:p>
+            <a:r>
+              <a:rPr lang="en-US" sz="1700" dirty="0">
+                <a:solidFill>
+                  <a:srgbClr val="17364A"/>
+                </a:solidFill>
+                <a:latin typeface="Aptos" pitchFamily="34" charset="0"/>
+                <a:ea typeface="Aptos" pitchFamily="34" charset="-122"/>
+                <a:cs typeface="Aptos" pitchFamily="34" charset="-120"/>
+              </a:rPr>
+              <a:t>3. Why is source verification important for NLP outputs?</a:t>
+            </a:r>
+            <a:endParaRPr lang="en-US" sz="1700" dirty="0"/>
+          </a:p>
+          <a:p>
+            <a:r>
+              <a:rPr lang="en-US" sz="1700" dirty="0">
+                <a:solidFill>
+                  <a:srgbClr val="17364A"/>
+                </a:solidFill>
+                <a:latin typeface="Aptos" pitchFamily="34" charset="0"/>
+                <a:ea typeface="Aptos" pitchFamily="34" charset="-122"/>
+                <a:cs typeface="Aptos" pitchFamily="34" charset="-120"/>
+              </a:rPr>
+              <a:t>4. Which NLP use requires strong safeguards?</a:t>
+            </a:r>
+            <a:endParaRPr lang="en-US" sz="1700" dirty="0"/>
+          </a:p>
+        </p:txBody>
+      </p:sp>
+      <p:sp>
+        <p:nvSpPr>
+          <p:cNvPr id="11" name="Shape 9"/>
+          <p:cNvSpPr/>
+          <p:nvPr/>
+        </p:nvSpPr>
+        <p:spPr>
+          <a:xfrm>
+            <a:off x="7909560" y="1417320"/>
+            <a:ext cx="3154680" cy="1828800"/>
+          </a:xfrm>
+          <a:prstGeom prst="roundRect">
+            <a:avLst>
+              <a:gd name="adj" fmla="val 6000"/>
+            </a:avLst>
+          </a:prstGeom>
+          <a:solidFill>
+            <a:srgbClr val="EEF8ED"/>
+          </a:solidFill>
+          <a:ln w="12700">
+            <a:solidFill>
+              <a:srgbClr val="B9D7E6"/>
+            </a:solidFill>
+            <a:prstDash val="solid"/>
+          </a:ln>
+        </p:spPr>
+      </p:sp>
+      <p:sp>
+        <p:nvSpPr>
+          <p:cNvPr id="12" name="Text 10"/>
+          <p:cNvSpPr/>
+          <p:nvPr/>
+        </p:nvSpPr>
+        <p:spPr>
+          <a:xfrm>
+            <a:off x="8074152" y="1563624"/>
+            <a:ext cx="2825496" cy="201168"/>
+          </a:xfrm>
+          <a:prstGeom prst="rect">
+            <a:avLst/>
+          </a:prstGeom>
+          <a:noFill/>
+          <a:ln/>
+        </p:spPr>
+        <p:txBody>
+          <a:bodyPr wrap="square" lIns="0" tIns="0" rIns="0" bIns="0" rtlCol="0" anchor="ctr"/>
+          <a:lstStyle/>
+          <a:p>
+            <a:pPr indent="0" marL="0">
+              <a:buNone/>
+            </a:pPr>
+            <a:r>
+              <a:rPr lang="en-US" sz="950" b="1" dirty="0">
+                <a:solidFill>
+                  <a:srgbClr val="0068B7"/>
+                </a:solidFill>
+                <a:latin typeface="Aptos" pitchFamily="34" charset="0"/>
+                <a:ea typeface="Aptos" pitchFamily="34" charset="-122"/>
+                <a:cs typeface="Aptos" pitchFamily="34" charset="-120"/>
+              </a:rPr>
+              <a:t>Key idea</a:t>
+            </a:r>
+            <a:endParaRPr lang="en-US" sz="950" dirty="0"/>
+          </a:p>
+        </p:txBody>
+      </p:sp>
+      <p:sp>
+        <p:nvSpPr>
+          <p:cNvPr id="13" name="Text 11"/>
+          <p:cNvSpPr/>
+          <p:nvPr/>
+        </p:nvSpPr>
+        <p:spPr>
+          <a:xfrm>
+            <a:off x="8074152" y="1856232"/>
+            <a:ext cx="2825496" cy="1261872"/>
+          </a:xfrm>
+          <a:prstGeom prst="rect">
+            <a:avLst/>
+          </a:prstGeom>
+          <a:noFill/>
+          <a:ln/>
+        </p:spPr>
+        <p:txBody>
+          <a:bodyPr wrap="square" lIns="0" tIns="0" rIns="0" bIns="0" rtlCol="0" anchor="t">
+            <a:normAutofit/>
+          </a:bodyPr>
+          <a:lstStyle/>
+          <a:p>
+            <a:pPr indent="0" marL="0">
+              <a:buNone/>
+            </a:pPr>
+            <a:r>
+              <a:rPr lang="en-US" sz="1250" dirty="0">
+                <a:solidFill>
+                  <a:srgbClr val="17364A"/>
+                </a:solidFill>
+                <a:latin typeface="Aptos" pitchFamily="34" charset="0"/>
+                <a:ea typeface="Aptos" pitchFamily="34" charset="-122"/>
+                <a:cs typeface="Aptos" pitchFamily="34" charset="-120"/>
+              </a:rPr>
+              <a:t>1. What is NLP?</a:t>
+            </a:r>
+            <a:endParaRPr lang="en-US" sz="1250" dirty="0"/>
+          </a:p>
+        </p:txBody>
+      </p:sp>
+      <p:sp>
+        <p:nvSpPr>
+          <p:cNvPr id="14" name="Shape 12"/>
+          <p:cNvSpPr/>
+          <p:nvPr/>
+        </p:nvSpPr>
+        <p:spPr>
+          <a:xfrm>
+            <a:off x="7909560" y="3520440"/>
+            <a:ext cx="3154680" cy="1737360"/>
+          </a:xfrm>
+          <a:prstGeom prst="roundRect">
+            <a:avLst>
+              <a:gd name="adj" fmla="val 6316"/>
+            </a:avLst>
+          </a:prstGeom>
+          <a:solidFill>
+            <a:srgbClr val="EAF6F8"/>
+          </a:solidFill>
+          <a:ln w="12700">
+            <a:solidFill>
+              <a:srgbClr val="B9D7E6"/>
+            </a:solidFill>
+            <a:prstDash val="solid"/>
+          </a:ln>
+        </p:spPr>
+      </p:sp>
+      <p:sp>
+        <p:nvSpPr>
+          <p:cNvPr id="15" name="Text 13"/>
+          <p:cNvSpPr/>
+          <p:nvPr/>
+        </p:nvSpPr>
+        <p:spPr>
+          <a:xfrm>
+            <a:off x="8074152" y="3666744"/>
+            <a:ext cx="2825496" cy="201168"/>
+          </a:xfrm>
+          <a:prstGeom prst="rect">
+            <a:avLst/>
+          </a:prstGeom>
+          <a:noFill/>
+          <a:ln/>
+        </p:spPr>
+        <p:txBody>
+          <a:bodyPr wrap="square" lIns="0" tIns="0" rIns="0" bIns="0" rtlCol="0" anchor="ctr"/>
+          <a:lstStyle/>
+          <a:p>
+            <a:pPr indent="0" marL="0">
+              <a:buNone/>
+            </a:pPr>
+            <a:r>
+              <a:rPr lang="en-US" sz="950" b="1" dirty="0">
+                <a:solidFill>
+                  <a:srgbClr val="0068B7"/>
+                </a:solidFill>
+                <a:latin typeface="Aptos" pitchFamily="34" charset="0"/>
+                <a:ea typeface="Aptos" pitchFamily="34" charset="-122"/>
+                <a:cs typeface="Aptos" pitchFamily="34" charset="-120"/>
+              </a:rPr>
+              <a:t>Use this for</a:t>
+            </a:r>
+            <a:endParaRPr lang="en-US" sz="950" dirty="0"/>
+          </a:p>
+        </p:txBody>
+      </p:sp>
+      <p:sp>
+        <p:nvSpPr>
+          <p:cNvPr id="16" name="Text 14"/>
+          <p:cNvSpPr/>
+          <p:nvPr/>
+        </p:nvSpPr>
+        <p:spPr>
+          <a:xfrm>
+            <a:off x="8074152" y="3959352"/>
+            <a:ext cx="2825496" cy="1170432"/>
+          </a:xfrm>
+          <a:prstGeom prst="rect">
+            <a:avLst/>
+          </a:prstGeom>
+          <a:noFill/>
+          <a:ln/>
+        </p:spPr>
+        <p:txBody>
+          <a:bodyPr wrap="square" lIns="0" tIns="0" rIns="0" bIns="0" rtlCol="0" anchor="t">
+            <a:normAutofit/>
+          </a:bodyPr>
+          <a:lstStyle/>
+          <a:p>
+            <a:pPr indent="0" marL="0">
+              <a:buNone/>
+            </a:pPr>
+            <a:r>
+              <a:rPr lang="en-US" sz="1250" dirty="0">
+                <a:solidFill>
+                  <a:srgbClr val="17364A"/>
+                </a:solidFill>
+                <a:latin typeface="Aptos" pitchFamily="34" charset="0"/>
+                <a:ea typeface="Aptos" pitchFamily="34" charset="-122"/>
+                <a:cs typeface="Aptos" pitchFamily="34" charset="-120"/>
+              </a:rPr>
+              <a:t>Connect the concept to public health decisions, safeguards, documentation, or implementation work.</a:t>
+            </a:r>
+            <a:endParaRPr lang="en-US" sz="1250" dirty="0"/>
+          </a:p>
+        </p:txBody>
+      </p:sp>
+    </p:spTree>
+  </p:cSld>
+  <p:clrMapOvr>
+    <a:masterClrMapping/>
+  </p:clrMapOvr>
+</p:sld>
+</file>
+
+<file path=ppt/slides/slide22.xml><?xml version="1.0" encoding="utf-8"?>
+<p:sld xmlns:a="http://schemas.openxmlformats.org/drawingml/2006/main" xmlns:r="http://schemas.openxmlformats.org/officeDocument/2006/relationships" xmlns:p="http://schemas.openxmlformats.org/presentationml/2006/main">
+  <p:cSld name="Slide 22">
+    <p:bg>
+      <p:bgPr>
+        <a:solidFill>
+          <a:srgbClr val="F7FBFD"/>
+        </a:solidFill>
+      </p:bgPr>
+    </p:bg>
+    <p:spTree>
+      <p:nvGrpSpPr>
+        <p:cNvPr id="1" name=""/>
+        <p:cNvGrpSpPr/>
+        <p:nvPr/>
+      </p:nvGrpSpPr>
+      <p:grpSpPr>
+        <a:xfrm>
+          <a:off x="0" y="0"/>
+          <a:ext cx="0" cy="0"/>
+          <a:chOff x="0" y="0"/>
+          <a:chExt cx="0" cy="0"/>
+        </a:xfrm>
+      </p:grpSpPr>
+      <p:sp>
+        <p:nvSpPr>
+          <p:cNvPr id="2" name="Shape 0"/>
+          <p:cNvSpPr/>
+          <p:nvPr/>
+        </p:nvSpPr>
+        <p:spPr>
+          <a:xfrm>
+            <a:off x="0" y="0"/>
+            <a:ext cx="12191695" cy="164592"/>
+          </a:xfrm>
+          <a:prstGeom prst="rect">
+            <a:avLst/>
+          </a:prstGeom>
+          <a:solidFill>
+            <a:srgbClr val="0068B7"/>
+          </a:solidFill>
+          <a:ln w="12700">
+            <a:solidFill>
+              <a:srgbClr val="0068B7"/>
+            </a:solidFill>
+            <a:prstDash val="solid"/>
+          </a:ln>
+        </p:spPr>
+      </p:sp>
+      <p:sp>
+        <p:nvSpPr>
+          <p:cNvPr id="3" name="Shape 1"/>
+          <p:cNvSpPr/>
+          <p:nvPr/>
+        </p:nvSpPr>
+        <p:spPr>
+          <a:xfrm>
+            <a:off x="0" y="164592"/>
+            <a:ext cx="146304" cy="6693408"/>
+          </a:xfrm>
+          <a:prstGeom prst="rect">
+            <a:avLst/>
+          </a:prstGeom>
+          <a:solidFill>
+            <a:srgbClr val="2F8A28"/>
+          </a:solidFill>
+          <a:ln w="12700">
+            <a:solidFill>
+              <a:srgbClr val="2F8A28"/>
+            </a:solidFill>
+            <a:prstDash val="solid"/>
+          </a:ln>
+        </p:spPr>
+      </p:sp>
+      <p:sp>
+        <p:nvSpPr>
+          <p:cNvPr id="4" name="Text 2"/>
+          <p:cNvSpPr/>
+          <p:nvPr/>
+        </p:nvSpPr>
+        <p:spPr>
+          <a:xfrm>
+            <a:off x="502920" y="292608"/>
+            <a:ext cx="10149840" cy="256032"/>
+          </a:xfrm>
+          <a:prstGeom prst="rect">
+            <a:avLst/>
+          </a:prstGeom>
+          <a:noFill/>
+          <a:ln/>
+        </p:spPr>
+        <p:txBody>
+          <a:bodyPr wrap="square" lIns="0" tIns="0" rIns="0" bIns="0" rtlCol="0" anchor="ctr"/>
+          <a:lstStyle/>
+          <a:p>
+            <a:pPr indent="0" marL="0">
+              <a:buNone/>
+            </a:pPr>
+            <a:r>
+              <a:rPr lang="en-US" sz="900" b="1" dirty="0">
+                <a:solidFill>
+                  <a:srgbClr val="5F7181"/>
+                </a:solidFill>
+                <a:latin typeface="Aptos" pitchFamily="34" charset="0"/>
+                <a:ea typeface="Aptos" pitchFamily="34" charset="-122"/>
+                <a:cs typeface="Aptos" pitchFamily="34" charset="-120"/>
+              </a:rPr>
+              <a:t>Natural Language Processing for Public Health</a:t>
+            </a:r>
+            <a:endParaRPr lang="en-US" sz="900" dirty="0"/>
+          </a:p>
+        </p:txBody>
+      </p:sp>
+      <p:sp>
+        <p:nvSpPr>
+          <p:cNvPr id="5" name="Text 3"/>
+          <p:cNvSpPr/>
+          <p:nvPr/>
+        </p:nvSpPr>
+        <p:spPr>
+          <a:xfrm>
+            <a:off x="502920" y="6537960"/>
+            <a:ext cx="7772400" cy="201168"/>
+          </a:xfrm>
+          <a:prstGeom prst="rect">
+            <a:avLst/>
+          </a:prstGeom>
+          <a:noFill/>
+          <a:ln/>
+        </p:spPr>
+        <p:txBody>
+          <a:bodyPr wrap="square" lIns="0" tIns="0" rIns="0" bIns="0" rtlCol="0" anchor="ctr"/>
+          <a:lstStyle/>
+          <a:p>
+            <a:pPr indent="0" marL="0">
+              <a:buNone/>
+            </a:pPr>
+            <a:r>
+              <a:rPr lang="en-US" sz="800" dirty="0">
+                <a:solidFill>
+                  <a:srgbClr val="5F7181"/>
+                </a:solidFill>
+                <a:latin typeface="Aptos" pitchFamily="34" charset="0"/>
+                <a:ea typeface="Aptos" pitchFamily="34" charset="-122"/>
+                <a:cs typeface="Aptos" pitchFamily="34" charset="-120"/>
+              </a:rPr>
+              <a:t>AI Playbook and Toolkit for Public Health Departments</a:t>
+            </a:r>
+            <a:endParaRPr lang="en-US" sz="800" dirty="0"/>
+          </a:p>
+        </p:txBody>
+      </p:sp>
+      <p:sp>
+        <p:nvSpPr>
+          <p:cNvPr id="6" name="Text 4"/>
+          <p:cNvSpPr/>
+          <p:nvPr/>
+        </p:nvSpPr>
+        <p:spPr>
+          <a:xfrm>
+            <a:off x="9966960" y="6537960"/>
+            <a:ext cx="1645920" cy="201168"/>
+          </a:xfrm>
+          <a:prstGeom prst="rect">
+            <a:avLst/>
+          </a:prstGeom>
+          <a:noFill/>
+          <a:ln/>
+        </p:spPr>
+        <p:txBody>
+          <a:bodyPr wrap="square" lIns="0" tIns="0" rIns="0" bIns="0" rtlCol="0" anchor="ctr"/>
+          <a:lstStyle/>
+          <a:p>
+            <a:pPr algn="r" indent="0" marL="0">
+              <a:buNone/>
+            </a:pPr>
+            <a:r>
+              <a:rPr lang="en-US" sz="800" dirty="0">
+                <a:solidFill>
+                  <a:srgbClr val="5F7181"/>
+                </a:solidFill>
+                <a:latin typeface="Aptos" pitchFamily="34" charset="0"/>
+                <a:ea typeface="Aptos" pitchFamily="34" charset="-122"/>
+                <a:cs typeface="Aptos" pitchFamily="34" charset="-120"/>
+              </a:rPr>
+              <a:t>© Paula Soper</a:t>
+            </a:r>
+            <a:endParaRPr lang="en-US" sz="800" dirty="0"/>
+          </a:p>
+        </p:txBody>
+      </p:sp>
+      <p:sp>
+        <p:nvSpPr>
+          <p:cNvPr id="7" name="Shape 5"/>
+          <p:cNvSpPr/>
+          <p:nvPr/>
+        </p:nvSpPr>
+        <p:spPr>
+          <a:xfrm>
+            <a:off x="640080" y="658368"/>
+            <a:ext cx="420624" cy="420624"/>
+          </a:xfrm>
+          <a:prstGeom prst="ellipse">
+            <a:avLst/>
+          </a:prstGeom>
+          <a:solidFill>
+            <a:srgbClr val="0068B7"/>
+          </a:solidFill>
+          <a:ln w="12700">
+            <a:solidFill>
+              <a:srgbClr val="0068B7"/>
+            </a:solidFill>
+            <a:prstDash val="solid"/>
+          </a:ln>
+        </p:spPr>
+      </p:sp>
+      <p:sp>
+        <p:nvSpPr>
+          <p:cNvPr id="8" name="Text 6"/>
+          <p:cNvSpPr/>
+          <p:nvPr/>
+        </p:nvSpPr>
+        <p:spPr>
+          <a:xfrm>
+            <a:off x="640080" y="731520"/>
+            <a:ext cx="420624" cy="164592"/>
+          </a:xfrm>
+          <a:prstGeom prst="rect">
+            <a:avLst/>
+          </a:prstGeom>
+          <a:noFill/>
+          <a:ln/>
+        </p:spPr>
+        <p:txBody>
+          <a:bodyPr wrap="square" lIns="0" tIns="0" rIns="0" bIns="0" rtlCol="0" anchor="ctr"/>
+          <a:lstStyle/>
+          <a:p>
+            <a:pPr algn="ctr" indent="0" marL="0">
+              <a:buNone/>
+            </a:pPr>
+            <a:r>
+              <a:rPr lang="en-US" sz="1100" b="1" dirty="0">
+                <a:solidFill>
+                  <a:srgbClr val="FFFFFF"/>
+                </a:solidFill>
+                <a:latin typeface="Aptos" pitchFamily="34" charset="0"/>
+                <a:ea typeface="Aptos" pitchFamily="34" charset="-122"/>
+                <a:cs typeface="Aptos" pitchFamily="34" charset="-120"/>
+              </a:rPr>
+              <a:t>14</a:t>
+            </a:r>
+            <a:endParaRPr lang="en-US" sz="1100" dirty="0"/>
+          </a:p>
+        </p:txBody>
+      </p:sp>
+      <p:sp>
+        <p:nvSpPr>
+          <p:cNvPr id="9" name="Text 7"/>
+          <p:cNvSpPr/>
+          <p:nvPr/>
+        </p:nvSpPr>
+        <p:spPr>
+          <a:xfrm>
+            <a:off x="640080" y="621792"/>
+            <a:ext cx="10881360" cy="566928"/>
+          </a:xfrm>
+          <a:prstGeom prst="rect">
+            <a:avLst/>
+          </a:prstGeom>
+          <a:noFill/>
+          <a:ln/>
+        </p:spPr>
+        <p:txBody>
+          <a:bodyPr wrap="square" lIns="0" tIns="0" rIns="0" bIns="0" rtlCol="0" anchor="ctr">
+            <a:normAutofit/>
+          </a:bodyPr>
+          <a:lstStyle/>
+          <a:p>
+            <a:pPr indent="0" marL="0">
+              <a:buNone/>
+            </a:pPr>
+            <a:r>
+              <a:rPr lang="en-US" sz="2700" b="1" dirty="0">
+                <a:solidFill>
+                  <a:srgbClr val="003A63"/>
+                </a:solidFill>
+                <a:latin typeface="Aptos Display" pitchFamily="34" charset="0"/>
+                <a:ea typeface="Aptos Display" pitchFamily="34" charset="-122"/>
+                <a:cs typeface="Aptos Display" pitchFamily="34" charset="-120"/>
+              </a:rPr>
+              <a:t>References and Resources</a:t>
+            </a:r>
+            <a:endParaRPr lang="en-US" sz="2700" dirty="0"/>
+          </a:p>
+        </p:txBody>
+      </p:sp>
+      <p:sp>
+        <p:nvSpPr>
+          <p:cNvPr id="10" name="Text 8"/>
+          <p:cNvSpPr/>
+          <p:nvPr/>
+        </p:nvSpPr>
+        <p:spPr>
+          <a:xfrm>
+            <a:off x="868680" y="1417320"/>
+            <a:ext cx="6675120" cy="4434840"/>
+          </a:xfrm>
+          <a:prstGeom prst="rect">
+            <a:avLst/>
+          </a:prstGeom>
+          <a:noFill/>
+          <a:ln/>
+        </p:spPr>
+        <p:txBody>
+          <a:bodyPr wrap="square" lIns="635" tIns="635" rIns="635" bIns="635" rtlCol="0" anchor="t">
+            <a:normAutofit/>
+          </a:bodyPr>
+          <a:lstStyle/>
+          <a:p>
+            <a:r>
+              <a:rPr lang="en-US" sz="1700" dirty="0">
+                <a:solidFill>
+                  <a:srgbClr val="17364A"/>
+                </a:solidFill>
+                <a:latin typeface="Aptos" pitchFamily="34" charset="0"/>
+                <a:ea typeface="Aptos" pitchFamily="34" charset="-122"/>
+                <a:cs typeface="Aptos" pitchFamily="34" charset="-120"/>
+              </a:rPr>
               <a:t>NIST Artificial Intelligence Risk Management Framework: https://www.nist.gov/itl/ai-risk-management-framework</a:t>
             </a:r>
-            <a:endParaRPr lang="en-US" sz="1450" dirty="0"/>
-          </a:p>
-          <a:p>
-            <a:r>
-              <a:rPr lang="en-US" sz="1450" dirty="0">
+            <a:endParaRPr lang="en-US" sz="1700" dirty="0"/>
+          </a:p>
+          <a:p>
+            <a:r>
+              <a:rPr lang="en-US" sz="1700" dirty="0">
                 <a:solidFill>
                   <a:srgbClr val="17364A"/>
                 </a:solidFill>
@@ -6045,13 +10746,13 @@
                 <a:ea typeface="Aptos" pitchFamily="34" charset="-122"/>
                 <a:cs typeface="Aptos" pitchFamily="34" charset="-120"/>
               </a:rPr>
-              <a:t>NIST AI RMF Generative AI Profile: https://www.nist.gov/publications/artificial-intelligence-risk-management-framework-generative-artificial-intelligence</a:t>
-            </a:r>
-            <a:endParaRPr lang="en-US" sz="1450" dirty="0"/>
-          </a:p>
-          <a:p>
-            <a:r>
-              <a:rPr lang="en-US" sz="1450" dirty="0">
+              <a:t>NIST AI RMF Generative AI Profile:.</a:t>
+            </a:r>
+            <a:endParaRPr lang="en-US" sz="1700" dirty="0"/>
+          </a:p>
+          <a:p>
+            <a:r>
+              <a:rPr lang="en-US" sz="1700" dirty="0">
                 <a:solidFill>
                   <a:srgbClr val="17364A"/>
                 </a:solidFill>
@@ -6061,11 +10762,11 @@
               </a:rPr>
               <a:t>WHO Guidance on Large Multi-Modal Models: https://www.who.int/publications/i/item/9789240084759</a:t>
             </a:r>
-            <a:endParaRPr lang="en-US" sz="1450" dirty="0"/>
-          </a:p>
-          <a:p>
-            <a:r>
-              <a:rPr lang="en-US" sz="1450" dirty="0">
+            <a:endParaRPr lang="en-US" sz="1700" dirty="0"/>
+          </a:p>
+          <a:p>
+            <a:r>
+              <a:rPr lang="en-US" sz="1700" dirty="0">
                 <a:solidFill>
                   <a:srgbClr val="17364A"/>
                 </a:solidFill>
@@ -6075,11 +10776,104 @@
               </a:rPr>
               <a:t>CDC Public Health Data Strategy: https://www.cdc.gov/public-health-data-strategy/php/about/index.html</a:t>
             </a:r>
-            <a:endParaRPr lang="en-US" sz="1450" dirty="0"/>
-          </a:p>
-          <a:p>
-            <a:r>
-              <a:rPr lang="en-US" sz="1450" dirty="0">
+            <a:endParaRPr lang="en-US" sz="1700" dirty="0"/>
+          </a:p>
+        </p:txBody>
+      </p:sp>
+      <p:sp>
+        <p:nvSpPr>
+          <p:cNvPr id="11" name="Shape 9"/>
+          <p:cNvSpPr/>
+          <p:nvPr/>
+        </p:nvSpPr>
+        <p:spPr>
+          <a:xfrm>
+            <a:off x="7909560" y="1417320"/>
+            <a:ext cx="3154680" cy="1828800"/>
+          </a:xfrm>
+          <a:prstGeom prst="roundRect">
+            <a:avLst>
+              <a:gd name="adj" fmla="val 6000"/>
+            </a:avLst>
+          </a:prstGeom>
+          <a:solidFill>
+            <a:srgbClr val="EEF8ED"/>
+          </a:solidFill>
+          <a:ln w="12700">
+            <a:solidFill>
+              <a:srgbClr val="B9D7E6"/>
+            </a:solidFill>
+            <a:prstDash val="solid"/>
+          </a:ln>
+        </p:spPr>
+      </p:sp>
+      <p:sp>
+        <p:nvSpPr>
+          <p:cNvPr id="12" name="Text 10"/>
+          <p:cNvSpPr/>
+          <p:nvPr/>
+        </p:nvSpPr>
+        <p:spPr>
+          <a:xfrm>
+            <a:off x="8074152" y="1563624"/>
+            <a:ext cx="2825496" cy="201168"/>
+          </a:xfrm>
+          <a:prstGeom prst="rect">
+            <a:avLst/>
+          </a:prstGeom>
+          <a:noFill/>
+          <a:ln/>
+        </p:spPr>
+        <p:txBody>
+          <a:bodyPr wrap="square" lIns="0" tIns="0" rIns="0" bIns="0" rtlCol="0" anchor="ctr"/>
+          <a:lstStyle/>
+          <a:p>
+            <a:pPr indent="0" marL="0">
+              <a:buNone/>
+            </a:pPr>
+            <a:r>
+              <a:rPr lang="en-US" sz="950" b="1" dirty="0">
+                <a:solidFill>
+                  <a:srgbClr val="0068B7"/>
+                </a:solidFill>
+                <a:latin typeface="Aptos" pitchFamily="34" charset="0"/>
+                <a:ea typeface="Aptos" pitchFamily="34" charset="-122"/>
+                <a:cs typeface="Aptos" pitchFamily="34" charset="-120"/>
+              </a:rPr>
+              <a:t>Key idea</a:t>
+            </a:r>
+            <a:endParaRPr lang="en-US" sz="950" dirty="0"/>
+          </a:p>
+        </p:txBody>
+      </p:sp>
+      <p:sp>
+        <p:nvSpPr>
+          <p:cNvPr id="13" name="Text 11"/>
+          <p:cNvSpPr/>
+          <p:nvPr/>
+        </p:nvSpPr>
+        <p:spPr>
+          <a:xfrm>
+            <a:off x="8074152" y="1856232"/>
+            <a:ext cx="2825496" cy="1261872"/>
+          </a:xfrm>
+          <a:prstGeom prst="rect">
+            <a:avLst/>
+          </a:prstGeom>
+          <a:noFill/>
+          <a:ln/>
+        </p:spPr>
+        <p:txBody>
+          <a:bodyPr wrap="square" lIns="0" tIns="0" rIns="0" bIns="0" rtlCol="0" anchor="t">
+            <a:normAutofit/>
+          </a:bodyPr>
+          <a:lstStyle/>
+          <a:p>
+            <a:pPr indent="0" marL="0">
+              <a:buNone/>
+            </a:pPr>
+            <a:r>
+              <a:rPr lang="en-US" sz="1250" dirty="0">
                 <a:solidFill>
                   <a:srgbClr val="17364A"/>
                 </a:solidFill>
@@ -6087,9 +10881,116 @@
                 <a:ea typeface="Aptos" pitchFamily="34" charset="-122"/>
                 <a:cs typeface="Aptos" pitchFamily="34" charset="-120"/>
               </a:rPr>
-              <a:t>Agency privacy, records, data governance, and program policies</a:t>
-            </a:r>
-            <a:endParaRPr lang="en-US" sz="1450" dirty="0"/>
+              <a:t>NIST Artificial Intelligence Risk Management Framework: https://www.nist.gov/itl/ai-risk-management-framework</a:t>
+            </a:r>
+            <a:endParaRPr lang="en-US" sz="1250" dirty="0"/>
+          </a:p>
+        </p:txBody>
+      </p:sp>
+      <p:sp>
+        <p:nvSpPr>
+          <p:cNvPr id="14" name="Shape 12"/>
+          <p:cNvSpPr/>
+          <p:nvPr/>
+        </p:nvSpPr>
+        <p:spPr>
+          <a:xfrm>
+            <a:off x="7909560" y="3520440"/>
+            <a:ext cx="3154680" cy="1737360"/>
+          </a:xfrm>
+          <a:prstGeom prst="roundRect">
+            <a:avLst>
+              <a:gd name="adj" fmla="val 6316"/>
+            </a:avLst>
+          </a:prstGeom>
+          <a:solidFill>
+            <a:srgbClr val="EAF6F8"/>
+          </a:solidFill>
+          <a:ln w="12700">
+            <a:solidFill>
+              <a:srgbClr val="B9D7E6"/>
+            </a:solidFill>
+            <a:prstDash val="solid"/>
+          </a:ln>
+        </p:spPr>
+      </p:sp>
+      <p:sp>
+        <p:nvSpPr>
+          <p:cNvPr id="15" name="Text 13"/>
+          <p:cNvSpPr/>
+          <p:nvPr/>
+        </p:nvSpPr>
+        <p:spPr>
+          <a:xfrm>
+            <a:off x="8074152" y="3666744"/>
+            <a:ext cx="2825496" cy="201168"/>
+          </a:xfrm>
+          <a:prstGeom prst="rect">
+            <a:avLst/>
+          </a:prstGeom>
+          <a:noFill/>
+          <a:ln/>
+        </p:spPr>
+        <p:txBody>
+          <a:bodyPr wrap="square" lIns="0" tIns="0" rIns="0" bIns="0" rtlCol="0" anchor="ctr"/>
+          <a:lstStyle/>
+          <a:p>
+            <a:pPr indent="0" marL="0">
+              <a:buNone/>
+            </a:pPr>
+            <a:r>
+              <a:rPr lang="en-US" sz="950" b="1" dirty="0">
+                <a:solidFill>
+                  <a:srgbClr val="0068B7"/>
+                </a:solidFill>
+                <a:latin typeface="Aptos" pitchFamily="34" charset="0"/>
+                <a:ea typeface="Aptos" pitchFamily="34" charset="-122"/>
+                <a:cs typeface="Aptos" pitchFamily="34" charset="-120"/>
+              </a:rPr>
+              <a:t>Use this for</a:t>
+            </a:r>
+            <a:endParaRPr lang="en-US" sz="950" dirty="0"/>
+          </a:p>
+        </p:txBody>
+      </p:sp>
+      <p:sp>
+        <p:nvSpPr>
+          <p:cNvPr id="16" name="Text 14"/>
+          <p:cNvSpPr/>
+          <p:nvPr/>
+        </p:nvSpPr>
+        <p:spPr>
+          <a:xfrm>
+            <a:off x="8074152" y="3959352"/>
+            <a:ext cx="2825496" cy="1170432"/>
+          </a:xfrm>
+          <a:prstGeom prst="rect">
+            <a:avLst/>
+          </a:prstGeom>
+          <a:noFill/>
+          <a:ln/>
+        </p:spPr>
+        <p:txBody>
+          <a:bodyPr wrap="square" lIns="0" tIns="0" rIns="0" bIns="0" rtlCol="0" anchor="t">
+            <a:normAutofit/>
+          </a:bodyPr>
+          <a:lstStyle/>
+          <a:p>
+            <a:pPr indent="0" marL="0">
+              <a:buNone/>
+            </a:pPr>
+            <a:r>
+              <a:rPr lang="en-US" sz="1250" dirty="0">
+                <a:solidFill>
+                  <a:srgbClr val="17364A"/>
+                </a:solidFill>
+                <a:latin typeface="Aptos" pitchFamily="34" charset="0"/>
+                <a:ea typeface="Aptos" pitchFamily="34" charset="-122"/>
+                <a:cs typeface="Aptos" pitchFamily="34" charset="-120"/>
+              </a:rPr>
+              <a:t>Connect the concept to public health decisions, safeguards, documentation, or implementation work.</a:t>
+            </a:r>
+            <a:endParaRPr lang="en-US" sz="1250" dirty="0"/>
           </a:p>
         </p:txBody>
       </p:sp>
@@ -6152,7 +11053,32 @@
       </p:sp>
       <p:sp>
         <p:nvSpPr>
-          <p:cNvPr id="3" name="Text 1"/>
+          <p:cNvPr id="3" name="Shape 1"/>
+          <p:cNvSpPr/>
+          <p:nvPr/>
+        </p:nvSpPr>
+        <p:spPr>
+          <a:xfrm>
+            <a:off x="0" y="164592"/>
+            <a:ext cx="146304" cy="6693408"/>
+          </a:xfrm>
+          <a:prstGeom prst="rect">
+            <a:avLst/>
+          </a:prstGeom>
+          <a:solidFill>
+            <a:srgbClr val="2F8A28"/>
+          </a:solidFill>
+          <a:ln w="12700">
+            <a:solidFill>
+              <a:srgbClr val="2F8A28"/>
+            </a:solidFill>
+            <a:prstDash val="solid"/>
+          </a:ln>
+        </p:spPr>
+      </p:sp>
+      <p:sp>
+        <p:nvSpPr>
+          <p:cNvPr id="4" name="Text 2"/>
           <p:cNvSpPr/>
           <p:nvPr/>
         </p:nvSpPr>
@@ -6191,7 +11117,7 @@
       </p:sp>
       <p:sp>
         <p:nvSpPr>
-          <p:cNvPr id="4" name="Text 2"/>
+          <p:cNvPr id="5" name="Text 3"/>
           <p:cNvSpPr/>
           <p:nvPr/>
         </p:nvSpPr>
@@ -6230,7 +11156,7 @@
       </p:sp>
       <p:sp>
         <p:nvSpPr>
-          <p:cNvPr id="5" name="Text 3"/>
+          <p:cNvPr id="6" name="Text 4"/>
           <p:cNvSpPr/>
           <p:nvPr/>
         </p:nvSpPr>
@@ -6269,7 +11195,7 @@
       </p:sp>
       <p:sp>
         <p:nvSpPr>
-          <p:cNvPr id="6" name="Text 4"/>
+          <p:cNvPr id="7" name="Text 5"/>
           <p:cNvSpPr/>
           <p:nvPr/>
         </p:nvSpPr>
@@ -6302,7 +11228,7 @@
                 <a:ea typeface="Aptos Display" pitchFamily="34" charset="-122"/>
                 <a:cs typeface="Aptos Display" pitchFamily="34" charset="-120"/>
               </a:rPr>
-              <a:t>Learning Objectives</a:t>
+              <a:t>How this module connects to the playbook</a:t>
             </a:r>
             <a:endParaRPr lang="en-US" sz="2700" dirty="0"/>
           </a:p>
@@ -6310,14 +11236,14 @@
       </p:sp>
       <p:sp>
         <p:nvSpPr>
-          <p:cNvPr id="7" name="Text 5"/>
-          <p:cNvSpPr/>
-          <p:nvPr/>
-        </p:nvSpPr>
-        <p:spPr>
-          <a:xfrm>
-            <a:off x="822960" y="1325880"/>
-            <a:ext cx="10378440" cy="4800600"/>
+          <p:cNvPr id="8" name="Text 6"/>
+          <p:cNvSpPr/>
+          <p:nvPr/>
+        </p:nvSpPr>
+        <p:spPr>
+          <a:xfrm>
+            <a:off x="868680" y="1417320"/>
+            <a:ext cx="6903720" cy="4480560"/>
           </a:xfrm>
           <a:prstGeom prst="rect">
             <a:avLst/>
@@ -6332,7 +11258,7 @@
           <a:lstStyle/>
           <a:p>
             <a:r>
-              <a:rPr lang="en-US" sz="1450" dirty="0">
+              <a:rPr lang="en-US" sz="1540" dirty="0">
                 <a:solidFill>
                   <a:srgbClr val="17364A"/>
                 </a:solidFill>
@@ -6340,13 +11266,13 @@
                 <a:ea typeface="Aptos" pitchFamily="34" charset="-122"/>
                 <a:cs typeface="Aptos" pitchFamily="34" charset="-120"/>
               </a:rPr>
-              <a:t>Define NLP in plain language and distinguish common NLP tasks.</a:t>
-            </a:r>
-            <a:endParaRPr lang="en-US" sz="1450" dirty="0"/>
-          </a:p>
-          <a:p>
-            <a:r>
-              <a:rPr lang="en-US" sz="1450" dirty="0">
+              <a:t>Play 11: Build and Deploy AI Solutions - This lesson informs Play 11 by helping learners connect the lesson topic to build and deploy.</a:t>
+            </a:r>
+            <a:endParaRPr lang="en-US" sz="1540" dirty="0"/>
+          </a:p>
+          <a:p>
+            <a:r>
+              <a:rPr lang="en-US" sz="1540" dirty="0">
                 <a:solidFill>
                   <a:srgbClr val="17364A"/>
                 </a:solidFill>
@@ -6354,13 +11280,13 @@
                 <a:ea typeface="Aptos" pitchFamily="34" charset="-122"/>
                 <a:cs typeface="Aptos" pitchFamily="34" charset="-120"/>
               </a:rPr>
-              <a:t>Identify public health workflows where NLP may be useful.</a:t>
-            </a:r>
-            <a:endParaRPr lang="en-US" sz="1450" dirty="0"/>
-          </a:p>
-          <a:p>
-            <a:r>
-              <a:rPr lang="en-US" sz="1450" dirty="0">
+              <a:t>Play 2: Readiness Assessment - This lesson informs Play 2 by helping learners connect the lesson topic to readiness assessment work.</a:t>
+            </a:r>
+            <a:endParaRPr lang="en-US" sz="1540" dirty="0"/>
+          </a:p>
+          <a:p>
+            <a:r>
+              <a:rPr lang="en-US" sz="1540" dirty="0">
                 <a:solidFill>
                   <a:srgbClr val="17364A"/>
                 </a:solidFill>
@@ -6368,13 +11294,13 @@
                 <a:ea typeface="Aptos" pitchFamily="34" charset="-122"/>
                 <a:cs typeface="Aptos" pitchFamily="34" charset="-120"/>
               </a:rPr>
-              <a:t>Assess risks related to accuracy, bias, privacy, hallucination, language, and missing context.</a:t>
-            </a:r>
-            <a:endParaRPr lang="en-US" sz="1450" dirty="0"/>
-          </a:p>
-          <a:p>
-            <a:r>
-              <a:rPr lang="en-US" sz="1450" dirty="0">
+              <a:t>Play 7: Prioritize Use Cases - This lesson informs Play 7 by helping learners connect the lesson topic to prioritize use cases work.</a:t>
+            </a:r>
+            <a:endParaRPr lang="en-US" sz="1540" dirty="0"/>
+          </a:p>
+          <a:p>
+            <a:r>
+              <a:rPr lang="en-US" sz="1540" dirty="0">
                 <a:solidFill>
                   <a:srgbClr val="17364A"/>
                 </a:solidFill>
@@ -6382,13 +11308,106 @@
                 <a:ea typeface="Aptos" pitchFamily="34" charset="-122"/>
                 <a:cs typeface="Aptos" pitchFamily="34" charset="-120"/>
               </a:rPr>
-              <a:t>Define source verification and human review requirements for NLP outputs.</a:t>
-            </a:r>
-            <a:endParaRPr lang="en-US" sz="1450" dirty="0"/>
-          </a:p>
-          <a:p>
-            <a:r>
-              <a:rPr lang="en-US" sz="1450" dirty="0">
+              <a:t>Play 1: Vision &amp; Guardrails - This lesson informs Play 1 by helping learners connect the lesson topic to vision &amp; guardrails work in.</a:t>
+            </a:r>
+            <a:endParaRPr lang="en-US" sz="1540" dirty="0"/>
+          </a:p>
+        </p:txBody>
+      </p:sp>
+      <p:sp>
+        <p:nvSpPr>
+          <p:cNvPr id="9" name="Shape 7"/>
+          <p:cNvSpPr/>
+          <p:nvPr/>
+        </p:nvSpPr>
+        <p:spPr>
+          <a:xfrm>
+            <a:off x="8046720" y="1417320"/>
+            <a:ext cx="3063240" cy="2103120"/>
+          </a:xfrm>
+          <a:prstGeom prst="roundRect">
+            <a:avLst>
+              <a:gd name="adj" fmla="val 5217"/>
+            </a:avLst>
+          </a:prstGeom>
+          <a:solidFill>
+            <a:srgbClr val="EEF8ED"/>
+          </a:solidFill>
+          <a:ln w="12700">
+            <a:solidFill>
+              <a:srgbClr val="B9D7E6"/>
+            </a:solidFill>
+            <a:prstDash val="solid"/>
+          </a:ln>
+        </p:spPr>
+      </p:sp>
+      <p:sp>
+        <p:nvSpPr>
+          <p:cNvPr id="10" name="Text 8"/>
+          <p:cNvSpPr/>
+          <p:nvPr/>
+        </p:nvSpPr>
+        <p:spPr>
+          <a:xfrm>
+            <a:off x="8211312" y="1563624"/>
+            <a:ext cx="2734056" cy="201168"/>
+          </a:xfrm>
+          <a:prstGeom prst="rect">
+            <a:avLst/>
+          </a:prstGeom>
+          <a:noFill/>
+          <a:ln/>
+        </p:spPr>
+        <p:txBody>
+          <a:bodyPr wrap="square" lIns="0" tIns="0" rIns="0" bIns="0" rtlCol="0" anchor="ctr"/>
+          <a:lstStyle/>
+          <a:p>
+            <a:pPr indent="0" marL="0">
+              <a:buNone/>
+            </a:pPr>
+            <a:r>
+              <a:rPr lang="en-US" sz="950" b="1" dirty="0">
+                <a:solidFill>
+                  <a:srgbClr val="0068B7"/>
+                </a:solidFill>
+                <a:latin typeface="Aptos" pitchFamily="34" charset="0"/>
+                <a:ea typeface="Aptos" pitchFamily="34" charset="-122"/>
+                <a:cs typeface="Aptos" pitchFamily="34" charset="-120"/>
+              </a:rPr>
+              <a:t>Apply the lesson</a:t>
+            </a:r>
+            <a:endParaRPr lang="en-US" sz="950" dirty="0"/>
+          </a:p>
+        </p:txBody>
+      </p:sp>
+      <p:sp>
+        <p:nvSpPr>
+          <p:cNvPr id="11" name="Text 9"/>
+          <p:cNvSpPr/>
+          <p:nvPr/>
+        </p:nvSpPr>
+        <p:spPr>
+          <a:xfrm>
+            <a:off x="8211312" y="1856232"/>
+            <a:ext cx="2734056" cy="1536192"/>
+          </a:xfrm>
+          <a:prstGeom prst="rect">
+            <a:avLst/>
+          </a:prstGeom>
+          <a:noFill/>
+          <a:ln/>
+        </p:spPr>
+        <p:txBody>
+          <a:bodyPr wrap="square" lIns="0" tIns="0" rIns="0" bIns="0" rtlCol="0" anchor="t">
+            <a:normAutofit/>
+          </a:bodyPr>
+          <a:lstStyle/>
+          <a:p>
+            <a:pPr indent="0" marL="0">
+              <a:buNone/>
+            </a:pPr>
+            <a:r>
+              <a:rPr lang="en-US" sz="1250" dirty="0">
                 <a:solidFill>
                   <a:srgbClr val="17364A"/>
                 </a:solidFill>
@@ -6396,9 +11415,116 @@
                 <a:ea typeface="Aptos" pitchFamily="34" charset="-122"/>
                 <a:cs typeface="Aptos" pitchFamily="34" charset="-120"/>
               </a:rPr>
-              <a:t>Produce an NLP evaluation plan for one public health workflow.</a:t>
-            </a:r>
-            <a:endParaRPr lang="en-US" sz="1450" dirty="0"/>
+              <a:t>Use the related plays to identify decisions, participants, timing, approvals, and documentation needed for responsible implementation.</a:t>
+            </a:r>
+            <a:endParaRPr lang="en-US" sz="1250" dirty="0"/>
+          </a:p>
+        </p:txBody>
+      </p:sp>
+      <p:sp>
+        <p:nvSpPr>
+          <p:cNvPr id="12" name="Shape 10"/>
+          <p:cNvSpPr/>
+          <p:nvPr/>
+        </p:nvSpPr>
+        <p:spPr>
+          <a:xfrm>
+            <a:off x="8046720" y="3794760"/>
+            <a:ext cx="3063240" cy="1508760"/>
+          </a:xfrm>
+          <a:prstGeom prst="roundRect">
+            <a:avLst>
+              <a:gd name="adj" fmla="val 7273"/>
+            </a:avLst>
+          </a:prstGeom>
+          <a:solidFill>
+            <a:srgbClr val="FFF4D9"/>
+          </a:solidFill>
+          <a:ln w="12700">
+            <a:solidFill>
+              <a:srgbClr val="B9D7E6"/>
+            </a:solidFill>
+            <a:prstDash val="solid"/>
+          </a:ln>
+        </p:spPr>
+      </p:sp>
+      <p:sp>
+        <p:nvSpPr>
+          <p:cNvPr id="13" name="Text 11"/>
+          <p:cNvSpPr/>
+          <p:nvPr/>
+        </p:nvSpPr>
+        <p:spPr>
+          <a:xfrm>
+            <a:off x="8211312" y="3941064"/>
+            <a:ext cx="2734056" cy="201168"/>
+          </a:xfrm>
+          <a:prstGeom prst="rect">
+            <a:avLst/>
+          </a:prstGeom>
+          <a:noFill/>
+          <a:ln/>
+        </p:spPr>
+        <p:txBody>
+          <a:bodyPr wrap="square" lIns="0" tIns="0" rIns="0" bIns="0" rtlCol="0" anchor="ctr"/>
+          <a:lstStyle/>
+          <a:p>
+            <a:pPr indent="0" marL="0">
+              <a:buNone/>
+            </a:pPr>
+            <a:r>
+              <a:rPr lang="en-US" sz="950" b="1" dirty="0">
+                <a:solidFill>
+                  <a:srgbClr val="0068B7"/>
+                </a:solidFill>
+                <a:latin typeface="Aptos" pitchFamily="34" charset="0"/>
+                <a:ea typeface="Aptos" pitchFamily="34" charset="-122"/>
+                <a:cs typeface="Aptos" pitchFamily="34" charset="-120"/>
+              </a:rPr>
+              <a:t>Keep in mind</a:t>
+            </a:r>
+            <a:endParaRPr lang="en-US" sz="950" dirty="0"/>
+          </a:p>
+        </p:txBody>
+      </p:sp>
+      <p:sp>
+        <p:nvSpPr>
+          <p:cNvPr id="14" name="Text 12"/>
+          <p:cNvSpPr/>
+          <p:nvPr/>
+        </p:nvSpPr>
+        <p:spPr>
+          <a:xfrm>
+            <a:off x="8211312" y="4233672"/>
+            <a:ext cx="2734056" cy="941832"/>
+          </a:xfrm>
+          <a:prstGeom prst="rect">
+            <a:avLst/>
+          </a:prstGeom>
+          <a:noFill/>
+          <a:ln/>
+        </p:spPr>
+        <p:txBody>
+          <a:bodyPr wrap="square" lIns="0" tIns="0" rIns="0" bIns="0" rtlCol="0" anchor="t">
+            <a:normAutofit/>
+          </a:bodyPr>
+          <a:lstStyle/>
+          <a:p>
+            <a:pPr indent="0" marL="0">
+              <a:buNone/>
+            </a:pPr>
+            <a:r>
+              <a:rPr lang="en-US" sz="1250" dirty="0">
+                <a:solidFill>
+                  <a:srgbClr val="17364A"/>
+                </a:solidFill>
+                <a:latin typeface="Aptos" pitchFamily="34" charset="0"/>
+                <a:ea typeface="Aptos" pitchFamily="34" charset="-122"/>
+                <a:cs typeface="Aptos" pitchFamily="34" charset="-120"/>
+              </a:rPr>
+              <a:t>The playbook connection helps turn training into agency work, not just individual knowledge.</a:t>
+            </a:r>
+            <a:endParaRPr lang="en-US" sz="1250" dirty="0"/>
           </a:p>
         </p:txBody>
       </p:sp>
@@ -6461,7 +11587,32 @@
       </p:sp>
       <p:sp>
         <p:nvSpPr>
-          <p:cNvPr id="3" name="Text 1"/>
+          <p:cNvPr id="3" name="Shape 1"/>
+          <p:cNvSpPr/>
+          <p:nvPr/>
+        </p:nvSpPr>
+        <p:spPr>
+          <a:xfrm>
+            <a:off x="0" y="164592"/>
+            <a:ext cx="146304" cy="6693408"/>
+          </a:xfrm>
+          <a:prstGeom prst="rect">
+            <a:avLst/>
+          </a:prstGeom>
+          <a:solidFill>
+            <a:srgbClr val="2F8A28"/>
+          </a:solidFill>
+          <a:ln w="12700">
+            <a:solidFill>
+              <a:srgbClr val="2F8A28"/>
+            </a:solidFill>
+            <a:prstDash val="solid"/>
+          </a:ln>
+        </p:spPr>
+      </p:sp>
+      <p:sp>
+        <p:nvSpPr>
+          <p:cNvPr id="4" name="Text 2"/>
           <p:cNvSpPr/>
           <p:nvPr/>
         </p:nvSpPr>
@@ -6500,7 +11651,7 @@
       </p:sp>
       <p:sp>
         <p:nvSpPr>
-          <p:cNvPr id="4" name="Text 2"/>
+          <p:cNvPr id="5" name="Text 3"/>
           <p:cNvSpPr/>
           <p:nvPr/>
         </p:nvSpPr>
@@ -6539,7 +11690,7 @@
       </p:sp>
       <p:sp>
         <p:nvSpPr>
-          <p:cNvPr id="5" name="Text 3"/>
+          <p:cNvPr id="6" name="Text 4"/>
           <p:cNvSpPr/>
           <p:nvPr/>
         </p:nvSpPr>
@@ -6578,7 +11729,7 @@
       </p:sp>
       <p:sp>
         <p:nvSpPr>
-          <p:cNvPr id="6" name="Text 4"/>
+          <p:cNvPr id="7" name="Text 5"/>
           <p:cNvSpPr/>
           <p:nvPr/>
         </p:nvSpPr>
@@ -6611,7 +11762,7 @@
                 <a:ea typeface="Aptos Display" pitchFamily="34" charset="-122"/>
                 <a:cs typeface="Aptos Display" pitchFamily="34" charset="-120"/>
               </a:rPr>
-              <a:t>Module Overview</a:t>
+              <a:t>Related toolkit resources</a:t>
             </a:r>
             <a:endParaRPr lang="en-US" sz="2700" dirty="0"/>
           </a:p>
@@ -6619,32 +11770,192 @@
       </p:sp>
       <p:sp>
         <p:nvSpPr>
-          <p:cNvPr id="7" name="Text 5"/>
-          <p:cNvSpPr/>
-          <p:nvPr/>
-        </p:nvSpPr>
-        <p:spPr>
-          <a:xfrm>
-            <a:off x="822960" y="1325880"/>
-            <a:ext cx="10378440" cy="4800600"/>
-          </a:xfrm>
-          <a:prstGeom prst="rect">
-            <a:avLst/>
-          </a:prstGeom>
-          <a:noFill/>
-          <a:ln/>
-        </p:spPr>
-        <p:txBody>
-          <a:bodyPr wrap="square" lIns="1016" tIns="1016" rIns="1016" bIns="1016" rtlCol="0" anchor="t">
+          <p:cNvPr id="8" name="Text 6"/>
+          <p:cNvSpPr/>
+          <p:nvPr/>
+        </p:nvSpPr>
+        <p:spPr>
+          <a:xfrm>
+            <a:off x="868680" y="1417320"/>
+            <a:ext cx="6903720" cy="4480560"/>
+          </a:xfrm>
+          <a:prstGeom prst="rect">
+            <a:avLst/>
+          </a:prstGeom>
+          <a:noFill/>
+          <a:ln/>
+        </p:spPr>
+        <p:txBody>
+          <a:bodyPr wrap="square" lIns="635" tIns="635" rIns="635" bIns="635" rtlCol="0" anchor="t">
             <a:normAutofit/>
           </a:bodyPr>
           <a:lstStyle/>
           <a:p>
+            <a:r>
+              <a:rPr lang="en-US" sz="1460" dirty="0">
+                <a:solidFill>
+                  <a:srgbClr val="17364A"/>
+                </a:solidFill>
+                <a:latin typeface="Aptos" pitchFamily="34" charset="0"/>
+                <a:ea typeface="Aptos" pitchFamily="34" charset="-122"/>
+                <a:cs typeface="Aptos" pitchFamily="34" charset="-120"/>
+              </a:rPr>
+              <a:t>Tool 4: AI Policy Landscape Scan (Worksheet) - Use AI Policy Landscape Scan to translate this lesson into a documented public health.</a:t>
+            </a:r>
+            <a:endParaRPr lang="en-US" sz="1460" dirty="0"/>
+          </a:p>
+          <a:p>
+            <a:r>
+              <a:rPr lang="en-US" sz="1460" dirty="0">
+                <a:solidFill>
+                  <a:srgbClr val="17364A"/>
+                </a:solidFill>
+                <a:latin typeface="Aptos" pitchFamily="34" charset="0"/>
+                <a:ea typeface="Aptos" pitchFamily="34" charset="-122"/>
+                <a:cs typeface="Aptos" pitchFamily="34" charset="-120"/>
+              </a:rPr>
+              <a:t>Tool 5: AI Environmental and Resource Impact Review (Checklist) - Use AI Environmental and Resource Impact Review to translate this.</a:t>
+            </a:r>
+            <a:endParaRPr lang="en-US" sz="1460" dirty="0"/>
+          </a:p>
+          <a:p>
+            <a:r>
+              <a:rPr lang="en-US" sz="1460" dirty="0">
+                <a:solidFill>
+                  <a:srgbClr val="17364A"/>
+                </a:solidFill>
+                <a:latin typeface="Aptos" pitchFamily="34" charset="0"/>
+                <a:ea typeface="Aptos" pitchFamily="34" charset="-122"/>
+                <a:cs typeface="Aptos" pitchFamily="34" charset="-120"/>
+              </a:rPr>
+              <a:t>Tool 6: Human-Centered AI Decision Rule Checklist (Checklist) - Use Human-Centered AI Decision Rule Checklist to translate this.</a:t>
+            </a:r>
+            <a:endParaRPr lang="en-US" sz="1460" dirty="0"/>
+          </a:p>
+          <a:p>
+            <a:r>
+              <a:rPr lang="en-US" sz="1460" dirty="0">
+                <a:solidFill>
+                  <a:srgbClr val="17364A"/>
+                </a:solidFill>
+                <a:latin typeface="Aptos" pitchFamily="34" charset="0"/>
+                <a:ea typeface="Aptos" pitchFamily="34" charset="-122"/>
+                <a:cs typeface="Aptos" pitchFamily="34" charset="-120"/>
+              </a:rPr>
+              <a:t>Tool 8: AI Project Charter (Planning) - Use AI Project Charter to translate this lesson into a documented public health AI planning,.</a:t>
+            </a:r>
+            <a:endParaRPr lang="en-US" sz="1460" dirty="0"/>
+          </a:p>
+          <a:p>
+            <a:r>
+              <a:rPr lang="en-US" sz="1460" dirty="0">
+                <a:solidFill>
+                  <a:srgbClr val="17364A"/>
+                </a:solidFill>
+                <a:latin typeface="Aptos" pitchFamily="34" charset="0"/>
+                <a:ea typeface="Aptos" pitchFamily="34" charset="-122"/>
+                <a:cs typeface="Aptos" pitchFamily="34" charset="-120"/>
+              </a:rPr>
+              <a:t>Tool 9: Data Quality Assessment Checklist (Checklist) - Use this tool to complete or strengthen the practical exercise for the module.</a:t>
+            </a:r>
+            <a:endParaRPr lang="en-US" sz="1460" dirty="0"/>
+          </a:p>
+        </p:txBody>
+      </p:sp>
+      <p:sp>
+        <p:nvSpPr>
+          <p:cNvPr id="9" name="Shape 7"/>
+          <p:cNvSpPr/>
+          <p:nvPr/>
+        </p:nvSpPr>
+        <p:spPr>
+          <a:xfrm>
+            <a:off x="8046720" y="1417320"/>
+            <a:ext cx="3063240" cy="2103120"/>
+          </a:xfrm>
+          <a:prstGeom prst="roundRect">
+            <a:avLst>
+              <a:gd name="adj" fmla="val 5217"/>
+            </a:avLst>
+          </a:prstGeom>
+          <a:solidFill>
+            <a:srgbClr val="EAF6F8"/>
+          </a:solidFill>
+          <a:ln w="12700">
+            <a:solidFill>
+              <a:srgbClr val="B9D7E6"/>
+            </a:solidFill>
+            <a:prstDash val="solid"/>
+          </a:ln>
+        </p:spPr>
+      </p:sp>
+      <p:sp>
+        <p:nvSpPr>
+          <p:cNvPr id="10" name="Text 8"/>
+          <p:cNvSpPr/>
+          <p:nvPr/>
+        </p:nvSpPr>
+        <p:spPr>
+          <a:xfrm>
+            <a:off x="8211312" y="1563624"/>
+            <a:ext cx="2734056" cy="201168"/>
+          </a:xfrm>
+          <a:prstGeom prst="rect">
+            <a:avLst/>
+          </a:prstGeom>
+          <a:noFill/>
+          <a:ln/>
+        </p:spPr>
+        <p:txBody>
+          <a:bodyPr wrap="square" lIns="0" tIns="0" rIns="0" bIns="0" rtlCol="0" anchor="ctr"/>
+          <a:lstStyle/>
+          <a:p>
             <a:pPr indent="0" marL="0">
               <a:buNone/>
             </a:pPr>
             <a:r>
-              <a:rPr lang="en-US" sz="1420" dirty="0">
+              <a:rPr lang="en-US" sz="950" b="1" dirty="0">
+                <a:solidFill>
+                  <a:srgbClr val="0068B7"/>
+                </a:solidFill>
+                <a:latin typeface="Aptos" pitchFamily="34" charset="0"/>
+                <a:ea typeface="Aptos" pitchFamily="34" charset="-122"/>
+                <a:cs typeface="Aptos" pitchFamily="34" charset="-120"/>
+              </a:rPr>
+              <a:t>Use the tools</a:t>
+            </a:r>
+            <a:endParaRPr lang="en-US" sz="950" dirty="0"/>
+          </a:p>
+        </p:txBody>
+      </p:sp>
+      <p:sp>
+        <p:nvSpPr>
+          <p:cNvPr id="11" name="Text 9"/>
+          <p:cNvSpPr/>
+          <p:nvPr/>
+        </p:nvSpPr>
+        <p:spPr>
+          <a:xfrm>
+            <a:off x="8211312" y="1856232"/>
+            <a:ext cx="2734056" cy="1536192"/>
+          </a:xfrm>
+          <a:prstGeom prst="rect">
+            <a:avLst/>
+          </a:prstGeom>
+          <a:noFill/>
+          <a:ln/>
+        </p:spPr>
+        <p:txBody>
+          <a:bodyPr wrap="square" lIns="0" tIns="0" rIns="0" bIns="0" rtlCol="0" anchor="t">
+            <a:normAutofit/>
+          </a:bodyPr>
+          <a:lstStyle/>
+          <a:p>
+            <a:pPr indent="0" marL="0">
+              <a:buNone/>
+            </a:pPr>
+            <a:r>
+              <a:rPr lang="en-US" sz="1250" dirty="0">
                 <a:solidFill>
                   <a:srgbClr val="17364A"/>
                 </a:solidFill>
@@ -6652,9 +11963,116 @@
                 <a:ea typeface="Aptos" pitchFamily="34" charset="-122"/>
                 <a:cs typeface="Aptos" pitchFamily="34" charset="-120"/>
               </a:rPr>
-              <a:t>Natural language processing is a branch of AI that works with human language. Public health agencies often hold important information in free-text sources, including clinical notes, case narratives, call center logs, inspection reports, complaints, death certificate text, public comments, and community feedback. This module teaches learners how NLP can support public health work and how to evaluate its risks.</a:t>
-            </a:r>
-            <a:endParaRPr lang="en-US" sz="1420" dirty="0"/>
+              <a:t>Use linked tools when your department needs a structured worksheet, template, checklist, review process, or documentation artifact.</a:t>
+            </a:r>
+            <a:endParaRPr lang="en-US" sz="1250" dirty="0"/>
+          </a:p>
+        </p:txBody>
+      </p:sp>
+      <p:sp>
+        <p:nvSpPr>
+          <p:cNvPr id="12" name="Shape 10"/>
+          <p:cNvSpPr/>
+          <p:nvPr/>
+        </p:nvSpPr>
+        <p:spPr>
+          <a:xfrm>
+            <a:off x="8046720" y="3794760"/>
+            <a:ext cx="3063240" cy="1508760"/>
+          </a:xfrm>
+          <a:prstGeom prst="roundRect">
+            <a:avLst>
+              <a:gd name="adj" fmla="val 7273"/>
+            </a:avLst>
+          </a:prstGeom>
+          <a:solidFill>
+            <a:srgbClr val="EEF8ED"/>
+          </a:solidFill>
+          <a:ln w="12700">
+            <a:solidFill>
+              <a:srgbClr val="B9D7E6"/>
+            </a:solidFill>
+            <a:prstDash val="solid"/>
+          </a:ln>
+        </p:spPr>
+      </p:sp>
+      <p:sp>
+        <p:nvSpPr>
+          <p:cNvPr id="13" name="Text 11"/>
+          <p:cNvSpPr/>
+          <p:nvPr/>
+        </p:nvSpPr>
+        <p:spPr>
+          <a:xfrm>
+            <a:off x="8211312" y="3941064"/>
+            <a:ext cx="2734056" cy="201168"/>
+          </a:xfrm>
+          <a:prstGeom prst="rect">
+            <a:avLst/>
+          </a:prstGeom>
+          <a:noFill/>
+          <a:ln/>
+        </p:spPr>
+        <p:txBody>
+          <a:bodyPr wrap="square" lIns="0" tIns="0" rIns="0" bIns="0" rtlCol="0" anchor="ctr"/>
+          <a:lstStyle/>
+          <a:p>
+            <a:pPr indent="0" marL="0">
+              <a:buNone/>
+            </a:pPr>
+            <a:r>
+              <a:rPr lang="en-US" sz="950" b="1" dirty="0">
+                <a:solidFill>
+                  <a:srgbClr val="0068B7"/>
+                </a:solidFill>
+                <a:latin typeface="Aptos" pitchFamily="34" charset="0"/>
+                <a:ea typeface="Aptos" pitchFamily="34" charset="-122"/>
+                <a:cs typeface="Aptos" pitchFamily="34" charset="-120"/>
+              </a:rPr>
+              <a:t>Avoid duplication</a:t>
+            </a:r>
+            <a:endParaRPr lang="en-US" sz="950" dirty="0"/>
+          </a:p>
+        </p:txBody>
+      </p:sp>
+      <p:sp>
+        <p:nvSpPr>
+          <p:cNvPr id="14" name="Text 12"/>
+          <p:cNvSpPr/>
+          <p:nvPr/>
+        </p:nvSpPr>
+        <p:spPr>
+          <a:xfrm>
+            <a:off x="8211312" y="4233672"/>
+            <a:ext cx="2734056" cy="941832"/>
+          </a:xfrm>
+          <a:prstGeom prst="rect">
+            <a:avLst/>
+          </a:prstGeom>
+          <a:noFill/>
+          <a:ln/>
+        </p:spPr>
+        <p:txBody>
+          <a:bodyPr wrap="square" lIns="0" tIns="0" rIns="0" bIns="0" rtlCol="0" anchor="t">
+            <a:normAutofit/>
+          </a:bodyPr>
+          <a:lstStyle/>
+          <a:p>
+            <a:pPr indent="0" marL="0">
+              <a:buNone/>
+            </a:pPr>
+            <a:r>
+              <a:rPr lang="en-US" sz="1250" dirty="0">
+                <a:solidFill>
+                  <a:srgbClr val="17364A"/>
+                </a:solidFill>
+                <a:latin typeface="Aptos" pitchFamily="34" charset="0"/>
+                <a:ea typeface="Aptos" pitchFamily="34" charset="-122"/>
+                <a:cs typeface="Aptos" pitchFamily="34" charset="-120"/>
+              </a:rPr>
+              <a:t>If your department already has a strong equivalent tool, adapt or use the existing process instead of recreating it.</a:t>
+            </a:r>
+            <a:endParaRPr lang="en-US" sz="1250" dirty="0"/>
           </a:p>
         </p:txBody>
       </p:sp>
@@ -6717,7 +12135,32 @@
       </p:sp>
       <p:sp>
         <p:nvSpPr>
-          <p:cNvPr id="3" name="Text 1"/>
+          <p:cNvPr id="3" name="Shape 1"/>
+          <p:cNvSpPr/>
+          <p:nvPr/>
+        </p:nvSpPr>
+        <p:spPr>
+          <a:xfrm>
+            <a:off x="0" y="164592"/>
+            <a:ext cx="146304" cy="6693408"/>
+          </a:xfrm>
+          <a:prstGeom prst="rect">
+            <a:avLst/>
+          </a:prstGeom>
+          <a:solidFill>
+            <a:srgbClr val="2F8A28"/>
+          </a:solidFill>
+          <a:ln w="12700">
+            <a:solidFill>
+              <a:srgbClr val="2F8A28"/>
+            </a:solidFill>
+            <a:prstDash val="solid"/>
+          </a:ln>
+        </p:spPr>
+      </p:sp>
+      <p:sp>
+        <p:nvSpPr>
+          <p:cNvPr id="4" name="Text 2"/>
           <p:cNvSpPr/>
           <p:nvPr/>
         </p:nvSpPr>
@@ -6756,7 +12199,7 @@
       </p:sp>
       <p:sp>
         <p:nvSpPr>
-          <p:cNvPr id="4" name="Text 2"/>
+          <p:cNvPr id="5" name="Text 3"/>
           <p:cNvSpPr/>
           <p:nvPr/>
         </p:nvSpPr>
@@ -6795,7 +12238,7 @@
       </p:sp>
       <p:sp>
         <p:nvSpPr>
-          <p:cNvPr id="5" name="Text 3"/>
+          <p:cNvPr id="6" name="Text 4"/>
           <p:cNvSpPr/>
           <p:nvPr/>
         </p:nvSpPr>
@@ -6834,13 +12277,77 @@
       </p:sp>
       <p:sp>
         <p:nvSpPr>
-          <p:cNvPr id="6" name="Text 4"/>
+          <p:cNvPr id="7" name="Shape 5"/>
           <p:cNvSpPr/>
           <p:nvPr/>
         </p:nvSpPr>
         <p:spPr>
           <a:xfrm>
             <a:off x="640080" y="658368"/>
+            <a:ext cx="420624" cy="420624"/>
+          </a:xfrm>
+          <a:prstGeom prst="ellipse">
+            <a:avLst/>
+          </a:prstGeom>
+          <a:solidFill>
+            <a:srgbClr val="0068B7"/>
+          </a:solidFill>
+          <a:ln w="12700">
+            <a:solidFill>
+              <a:srgbClr val="0068B7"/>
+            </a:solidFill>
+            <a:prstDash val="solid"/>
+          </a:ln>
+        </p:spPr>
+      </p:sp>
+      <p:sp>
+        <p:nvSpPr>
+          <p:cNvPr id="8" name="Text 6"/>
+          <p:cNvSpPr/>
+          <p:nvPr/>
+        </p:nvSpPr>
+        <p:spPr>
+          <a:xfrm>
+            <a:off x="640080" y="731520"/>
+            <a:ext cx="420624" cy="164592"/>
+          </a:xfrm>
+          <a:prstGeom prst="rect">
+            <a:avLst/>
+          </a:prstGeom>
+          <a:noFill/>
+          <a:ln/>
+        </p:spPr>
+        <p:txBody>
+          <a:bodyPr wrap="square" lIns="0" tIns="0" rIns="0" bIns="0" rtlCol="0" anchor="ctr"/>
+          <a:lstStyle/>
+          <a:p>
+            <a:pPr algn="ctr" indent="0" marL="0">
+              <a:buNone/>
+            </a:pPr>
+            <a:r>
+              <a:rPr lang="en-US" sz="1100" b="1" dirty="0">
+                <a:solidFill>
+                  <a:srgbClr val="FFFFFF"/>
+                </a:solidFill>
+                <a:latin typeface="Aptos" pitchFamily="34" charset="0"/>
+                <a:ea typeface="Aptos" pitchFamily="34" charset="-122"/>
+                <a:cs typeface="Aptos" pitchFamily="34" charset="-120"/>
+              </a:rPr>
+              <a:t>1</a:t>
+            </a:r>
+            <a:endParaRPr lang="en-US" sz="1100" dirty="0"/>
+          </a:p>
+        </p:txBody>
+      </p:sp>
+      <p:sp>
+        <p:nvSpPr>
+          <p:cNvPr id="9" name="Text 7"/>
+          <p:cNvSpPr/>
+          <p:nvPr/>
+        </p:nvSpPr>
+        <p:spPr>
+          <a:xfrm>
+            <a:off x="640080" y="621792"/>
             <a:ext cx="10881360" cy="566928"/>
           </a:xfrm>
           <a:prstGeom prst="rect">
@@ -6867,7 +12374,7 @@
                 <a:ea typeface="Aptos Display" pitchFamily="34" charset="-122"/>
                 <a:cs typeface="Aptos Display" pitchFamily="34" charset="-120"/>
               </a:rPr>
-              <a:t>Why This Topic Matters for Public Health AI</a:t>
+              <a:t>Learning Objectives</a:t>
             </a:r>
             <a:endParaRPr lang="en-US" sz="2700" dirty="0"/>
           </a:p>
@@ -6875,32 +12382,178 @@
       </p:sp>
       <p:sp>
         <p:nvSpPr>
-          <p:cNvPr id="7" name="Text 5"/>
-          <p:cNvSpPr/>
-          <p:nvPr/>
-        </p:nvSpPr>
-        <p:spPr>
-          <a:xfrm>
-            <a:off x="822960" y="1325880"/>
-            <a:ext cx="10378440" cy="4800600"/>
-          </a:xfrm>
-          <a:prstGeom prst="rect">
-            <a:avLst/>
-          </a:prstGeom>
-          <a:noFill/>
-          <a:ln/>
-        </p:spPr>
-        <p:txBody>
-          <a:bodyPr wrap="square" lIns="1016" tIns="1016" rIns="1016" bIns="1016" rtlCol="0" anchor="t">
+          <p:cNvPr id="10" name="Text 8"/>
+          <p:cNvSpPr/>
+          <p:nvPr/>
+        </p:nvSpPr>
+        <p:spPr>
+          <a:xfrm>
+            <a:off x="868680" y="1417320"/>
+            <a:ext cx="6675120" cy="4434840"/>
+          </a:xfrm>
+          <a:prstGeom prst="rect">
+            <a:avLst/>
+          </a:prstGeom>
+          <a:noFill/>
+          <a:ln/>
+        </p:spPr>
+        <p:txBody>
+          <a:bodyPr wrap="square" lIns="635" tIns="635" rIns="635" bIns="635" rtlCol="0" anchor="t">
             <a:normAutofit/>
           </a:bodyPr>
           <a:lstStyle/>
           <a:p>
+            <a:r>
+              <a:rPr lang="en-US" sz="1700" dirty="0">
+                <a:solidFill>
+                  <a:srgbClr val="17364A"/>
+                </a:solidFill>
+                <a:latin typeface="Aptos" pitchFamily="34" charset="0"/>
+                <a:ea typeface="Aptos" pitchFamily="34" charset="-122"/>
+                <a:cs typeface="Aptos" pitchFamily="34" charset="-120"/>
+              </a:rPr>
+              <a:t>Define NLP in plain language and distinguish common NLP tasks.</a:t>
+            </a:r>
+            <a:endParaRPr lang="en-US" sz="1700" dirty="0"/>
+          </a:p>
+          <a:p>
+            <a:r>
+              <a:rPr lang="en-US" sz="1700" dirty="0">
+                <a:solidFill>
+                  <a:srgbClr val="17364A"/>
+                </a:solidFill>
+                <a:latin typeface="Aptos" pitchFamily="34" charset="0"/>
+                <a:ea typeface="Aptos" pitchFamily="34" charset="-122"/>
+                <a:cs typeface="Aptos" pitchFamily="34" charset="-120"/>
+              </a:rPr>
+              <a:t>Identify public health workflows where NLP may be useful.</a:t>
+            </a:r>
+            <a:endParaRPr lang="en-US" sz="1700" dirty="0"/>
+          </a:p>
+          <a:p>
+            <a:r>
+              <a:rPr lang="en-US" sz="1700" dirty="0">
+                <a:solidFill>
+                  <a:srgbClr val="17364A"/>
+                </a:solidFill>
+                <a:latin typeface="Aptos" pitchFamily="34" charset="0"/>
+                <a:ea typeface="Aptos" pitchFamily="34" charset="-122"/>
+                <a:cs typeface="Aptos" pitchFamily="34" charset="-120"/>
+              </a:rPr>
+              <a:t>Assess risks related to accuracy, bias, privacy, hallucination, language, and missing context.</a:t>
+            </a:r>
+            <a:endParaRPr lang="en-US" sz="1700" dirty="0"/>
+          </a:p>
+          <a:p>
+            <a:r>
+              <a:rPr lang="en-US" sz="1700" dirty="0">
+                <a:solidFill>
+                  <a:srgbClr val="17364A"/>
+                </a:solidFill>
+                <a:latin typeface="Aptos" pitchFamily="34" charset="0"/>
+                <a:ea typeface="Aptos" pitchFamily="34" charset="-122"/>
+                <a:cs typeface="Aptos" pitchFamily="34" charset="-120"/>
+              </a:rPr>
+              <a:t>Define source verification and human review requirements for NLP outputs.</a:t>
+            </a:r>
+            <a:endParaRPr lang="en-US" sz="1700" dirty="0"/>
+          </a:p>
+        </p:txBody>
+      </p:sp>
+      <p:sp>
+        <p:nvSpPr>
+          <p:cNvPr id="11" name="Shape 9"/>
+          <p:cNvSpPr/>
+          <p:nvPr/>
+        </p:nvSpPr>
+        <p:spPr>
+          <a:xfrm>
+            <a:off x="7909560" y="1417320"/>
+            <a:ext cx="3154680" cy="1828800"/>
+          </a:xfrm>
+          <a:prstGeom prst="roundRect">
+            <a:avLst>
+              <a:gd name="adj" fmla="val 6000"/>
+            </a:avLst>
+          </a:prstGeom>
+          <a:solidFill>
+            <a:srgbClr val="EEF8ED"/>
+          </a:solidFill>
+          <a:ln w="12700">
+            <a:solidFill>
+              <a:srgbClr val="B9D7E6"/>
+            </a:solidFill>
+            <a:prstDash val="solid"/>
+          </a:ln>
+        </p:spPr>
+      </p:sp>
+      <p:sp>
+        <p:nvSpPr>
+          <p:cNvPr id="12" name="Text 10"/>
+          <p:cNvSpPr/>
+          <p:nvPr/>
+        </p:nvSpPr>
+        <p:spPr>
+          <a:xfrm>
+            <a:off x="8074152" y="1563624"/>
+            <a:ext cx="2825496" cy="201168"/>
+          </a:xfrm>
+          <a:prstGeom prst="rect">
+            <a:avLst/>
+          </a:prstGeom>
+          <a:noFill/>
+          <a:ln/>
+        </p:spPr>
+        <p:txBody>
+          <a:bodyPr wrap="square" lIns="0" tIns="0" rIns="0" bIns="0" rtlCol="0" anchor="ctr"/>
+          <a:lstStyle/>
+          <a:p>
             <a:pPr indent="0" marL="0">
               <a:buNone/>
             </a:pPr>
             <a:r>
-              <a:rPr lang="en-US" sz="1420" dirty="0">
+              <a:rPr lang="en-US" sz="950" b="1" dirty="0">
+                <a:solidFill>
+                  <a:srgbClr val="0068B7"/>
+                </a:solidFill>
+                <a:latin typeface="Aptos" pitchFamily="34" charset="0"/>
+                <a:ea typeface="Aptos" pitchFamily="34" charset="-122"/>
+                <a:cs typeface="Aptos" pitchFamily="34" charset="-120"/>
+              </a:rPr>
+              <a:t>Key idea</a:t>
+            </a:r>
+            <a:endParaRPr lang="en-US" sz="950" dirty="0"/>
+          </a:p>
+        </p:txBody>
+      </p:sp>
+      <p:sp>
+        <p:nvSpPr>
+          <p:cNvPr id="13" name="Text 11"/>
+          <p:cNvSpPr/>
+          <p:nvPr/>
+        </p:nvSpPr>
+        <p:spPr>
+          <a:xfrm>
+            <a:off x="8074152" y="1856232"/>
+            <a:ext cx="2825496" cy="1261872"/>
+          </a:xfrm>
+          <a:prstGeom prst="rect">
+            <a:avLst/>
+          </a:prstGeom>
+          <a:noFill/>
+          <a:ln/>
+        </p:spPr>
+        <p:txBody>
+          <a:bodyPr wrap="square" lIns="0" tIns="0" rIns="0" bIns="0" rtlCol="0" anchor="t">
+            <a:normAutofit/>
+          </a:bodyPr>
+          <a:lstStyle/>
+          <a:p>
+            <a:pPr indent="0" marL="0">
+              <a:buNone/>
+            </a:pPr>
+            <a:r>
+              <a:rPr lang="en-US" sz="1250" dirty="0">
                 <a:solidFill>
                   <a:srgbClr val="17364A"/>
                 </a:solidFill>
@@ -6908,9 +12561,116 @@
                 <a:ea typeface="Aptos" pitchFamily="34" charset="-122"/>
                 <a:cs typeface="Aptos" pitchFamily="34" charset="-120"/>
               </a:rPr>
-              <a:t>NLP can reduce burden by helping staff find, organize, classify, extract, translate, or summarize information from large volumes of text. It can support case investigation, environmental health complaint triage, syndromic surveillance, public inquiry response, community engagement analysis, and policy review. However, text is often ambiguous, incomplete, sensitive, and context-dependent. NLP outputs should not be treated as facts without review. A tool may omit important details, misread abbreviations, misunderstand negation, translate poorly, or generate a summary that sounds correct but is not supported by the source. Public health text may also include legal, clinical, cultural, or community context that a model does not understand. For technical staff, NLP evaluation requires more than checking whether outputs sound fluent. The agency should define the task, intended use, prohibited use, source material, review process, performance measures, subgroup considerations, privacy safeguards, and escalation pathway.</a:t>
-            </a:r>
-            <a:endParaRPr lang="en-US" sz="1420" dirty="0"/>
+              <a:t>Define NLP in plain language and distinguish common NLP tasks.</a:t>
+            </a:r>
+            <a:endParaRPr lang="en-US" sz="1250" dirty="0"/>
+          </a:p>
+        </p:txBody>
+      </p:sp>
+      <p:sp>
+        <p:nvSpPr>
+          <p:cNvPr id="14" name="Shape 12"/>
+          <p:cNvSpPr/>
+          <p:nvPr/>
+        </p:nvSpPr>
+        <p:spPr>
+          <a:xfrm>
+            <a:off x="7909560" y="3520440"/>
+            <a:ext cx="3154680" cy="1737360"/>
+          </a:xfrm>
+          <a:prstGeom prst="roundRect">
+            <a:avLst>
+              <a:gd name="adj" fmla="val 6316"/>
+            </a:avLst>
+          </a:prstGeom>
+          <a:solidFill>
+            <a:srgbClr val="EAF6F8"/>
+          </a:solidFill>
+          <a:ln w="12700">
+            <a:solidFill>
+              <a:srgbClr val="B9D7E6"/>
+            </a:solidFill>
+            <a:prstDash val="solid"/>
+          </a:ln>
+        </p:spPr>
+      </p:sp>
+      <p:sp>
+        <p:nvSpPr>
+          <p:cNvPr id="15" name="Text 13"/>
+          <p:cNvSpPr/>
+          <p:nvPr/>
+        </p:nvSpPr>
+        <p:spPr>
+          <a:xfrm>
+            <a:off x="8074152" y="3666744"/>
+            <a:ext cx="2825496" cy="201168"/>
+          </a:xfrm>
+          <a:prstGeom prst="rect">
+            <a:avLst/>
+          </a:prstGeom>
+          <a:noFill/>
+          <a:ln/>
+        </p:spPr>
+        <p:txBody>
+          <a:bodyPr wrap="square" lIns="0" tIns="0" rIns="0" bIns="0" rtlCol="0" anchor="ctr"/>
+          <a:lstStyle/>
+          <a:p>
+            <a:pPr indent="0" marL="0">
+              <a:buNone/>
+            </a:pPr>
+            <a:r>
+              <a:rPr lang="en-US" sz="950" b="1" dirty="0">
+                <a:solidFill>
+                  <a:srgbClr val="0068B7"/>
+                </a:solidFill>
+                <a:latin typeface="Aptos" pitchFamily="34" charset="0"/>
+                <a:ea typeface="Aptos" pitchFamily="34" charset="-122"/>
+                <a:cs typeface="Aptos" pitchFamily="34" charset="-120"/>
+              </a:rPr>
+              <a:t>Use this for</a:t>
+            </a:r>
+            <a:endParaRPr lang="en-US" sz="950" dirty="0"/>
+          </a:p>
+        </p:txBody>
+      </p:sp>
+      <p:sp>
+        <p:nvSpPr>
+          <p:cNvPr id="16" name="Text 14"/>
+          <p:cNvSpPr/>
+          <p:nvPr/>
+        </p:nvSpPr>
+        <p:spPr>
+          <a:xfrm>
+            <a:off x="8074152" y="3959352"/>
+            <a:ext cx="2825496" cy="1170432"/>
+          </a:xfrm>
+          <a:prstGeom prst="rect">
+            <a:avLst/>
+          </a:prstGeom>
+          <a:noFill/>
+          <a:ln/>
+        </p:spPr>
+        <p:txBody>
+          <a:bodyPr wrap="square" lIns="0" tIns="0" rIns="0" bIns="0" rtlCol="0" anchor="t">
+            <a:normAutofit/>
+          </a:bodyPr>
+          <a:lstStyle/>
+          <a:p>
+            <a:pPr indent="0" marL="0">
+              <a:buNone/>
+            </a:pPr>
+            <a:r>
+              <a:rPr lang="en-US" sz="1250" dirty="0">
+                <a:solidFill>
+                  <a:srgbClr val="17364A"/>
+                </a:solidFill>
+                <a:latin typeface="Aptos" pitchFamily="34" charset="0"/>
+                <a:ea typeface="Aptos" pitchFamily="34" charset="-122"/>
+                <a:cs typeface="Aptos" pitchFamily="34" charset="-120"/>
+              </a:rPr>
+              <a:t>Connect the concept to public health decisions, safeguards, documentation, or implementation work.</a:t>
+            </a:r>
+            <a:endParaRPr lang="en-US" sz="1250" dirty="0"/>
           </a:p>
         </p:txBody>
       </p:sp>
@@ -6973,7 +12733,32 @@
       </p:sp>
       <p:sp>
         <p:nvSpPr>
-          <p:cNvPr id="3" name="Text 1"/>
+          <p:cNvPr id="3" name="Shape 1"/>
+          <p:cNvSpPr/>
+          <p:nvPr/>
+        </p:nvSpPr>
+        <p:spPr>
+          <a:xfrm>
+            <a:off x="0" y="164592"/>
+            <a:ext cx="146304" cy="6693408"/>
+          </a:xfrm>
+          <a:prstGeom prst="rect">
+            <a:avLst/>
+          </a:prstGeom>
+          <a:solidFill>
+            <a:srgbClr val="2F8A28"/>
+          </a:solidFill>
+          <a:ln w="12700">
+            <a:solidFill>
+              <a:srgbClr val="2F8A28"/>
+            </a:solidFill>
+            <a:prstDash val="solid"/>
+          </a:ln>
+        </p:spPr>
+      </p:sp>
+      <p:sp>
+        <p:nvSpPr>
+          <p:cNvPr id="4" name="Text 2"/>
           <p:cNvSpPr/>
           <p:nvPr/>
         </p:nvSpPr>
@@ -7012,7 +12797,7 @@
       </p:sp>
       <p:sp>
         <p:nvSpPr>
-          <p:cNvPr id="4" name="Text 2"/>
+          <p:cNvPr id="5" name="Text 3"/>
           <p:cNvSpPr/>
           <p:nvPr/>
         </p:nvSpPr>
@@ -7051,7 +12836,7 @@
       </p:sp>
       <p:sp>
         <p:nvSpPr>
-          <p:cNvPr id="5" name="Text 3"/>
+          <p:cNvPr id="6" name="Text 4"/>
           <p:cNvSpPr/>
           <p:nvPr/>
         </p:nvSpPr>
@@ -7090,13 +12875,77 @@
       </p:sp>
       <p:sp>
         <p:nvSpPr>
-          <p:cNvPr id="6" name="Text 4"/>
+          <p:cNvPr id="7" name="Shape 5"/>
           <p:cNvSpPr/>
           <p:nvPr/>
         </p:nvSpPr>
         <p:spPr>
           <a:xfrm>
             <a:off x="640080" y="658368"/>
+            <a:ext cx="420624" cy="420624"/>
+          </a:xfrm>
+          <a:prstGeom prst="ellipse">
+            <a:avLst/>
+          </a:prstGeom>
+          <a:solidFill>
+            <a:srgbClr val="0068B7"/>
+          </a:solidFill>
+          <a:ln w="12700">
+            <a:solidFill>
+              <a:srgbClr val="0068B7"/>
+            </a:solidFill>
+            <a:prstDash val="solid"/>
+          </a:ln>
+        </p:spPr>
+      </p:sp>
+      <p:sp>
+        <p:nvSpPr>
+          <p:cNvPr id="8" name="Text 6"/>
+          <p:cNvSpPr/>
+          <p:nvPr/>
+        </p:nvSpPr>
+        <p:spPr>
+          <a:xfrm>
+            <a:off x="640080" y="731520"/>
+            <a:ext cx="420624" cy="164592"/>
+          </a:xfrm>
+          <a:prstGeom prst="rect">
+            <a:avLst/>
+          </a:prstGeom>
+          <a:noFill/>
+          <a:ln/>
+        </p:spPr>
+        <p:txBody>
+          <a:bodyPr wrap="square" lIns="0" tIns="0" rIns="0" bIns="0" rtlCol="0" anchor="ctr"/>
+          <a:lstStyle/>
+          <a:p>
+            <a:pPr algn="ctr" indent="0" marL="0">
+              <a:buNone/>
+            </a:pPr>
+            <a:r>
+              <a:rPr lang="en-US" sz="1100" b="1" dirty="0">
+                <a:solidFill>
+                  <a:srgbClr val="FFFFFF"/>
+                </a:solidFill>
+                <a:latin typeface="Aptos" pitchFamily="34" charset="0"/>
+                <a:ea typeface="Aptos" pitchFamily="34" charset="-122"/>
+                <a:cs typeface="Aptos" pitchFamily="34" charset="-120"/>
+              </a:rPr>
+              <a:t>2</a:t>
+            </a:r>
+            <a:endParaRPr lang="en-US" sz="1100" dirty="0"/>
+          </a:p>
+        </p:txBody>
+      </p:sp>
+      <p:sp>
+        <p:nvSpPr>
+          <p:cNvPr id="9" name="Text 7"/>
+          <p:cNvSpPr/>
+          <p:nvPr/>
+        </p:nvSpPr>
+        <p:spPr>
+          <a:xfrm>
+            <a:off x="640080" y="621792"/>
             <a:ext cx="10881360" cy="566928"/>
           </a:xfrm>
           <a:prstGeom prst="rect">
@@ -7123,7 +12972,7 @@
                 <a:ea typeface="Aptos Display" pitchFamily="34" charset="-122"/>
                 <a:cs typeface="Aptos Display" pitchFamily="34" charset="-120"/>
               </a:rPr>
-              <a:t>Core Concepts</a:t>
+              <a:t>Module Overview</a:t>
             </a:r>
             <a:endParaRPr lang="en-US" sz="2700" dirty="0"/>
           </a:p>
@@ -7131,32 +12980,164 @@
       </p:sp>
       <p:sp>
         <p:nvSpPr>
-          <p:cNvPr id="7" name="Text 5"/>
-          <p:cNvSpPr/>
-          <p:nvPr/>
-        </p:nvSpPr>
-        <p:spPr>
-          <a:xfrm>
-            <a:off x="822960" y="1325880"/>
-            <a:ext cx="10378440" cy="4800600"/>
-          </a:xfrm>
-          <a:prstGeom prst="rect">
-            <a:avLst/>
-          </a:prstGeom>
-          <a:noFill/>
-          <a:ln/>
-        </p:spPr>
-        <p:txBody>
-          <a:bodyPr wrap="square" lIns="1016" tIns="1016" rIns="1016" bIns="1016" rtlCol="0" anchor="t">
+          <p:cNvPr id="10" name="Text 8"/>
+          <p:cNvSpPr/>
+          <p:nvPr/>
+        </p:nvSpPr>
+        <p:spPr>
+          <a:xfrm>
+            <a:off x="868680" y="1417320"/>
+            <a:ext cx="6675120" cy="4434840"/>
+          </a:xfrm>
+          <a:prstGeom prst="rect">
+            <a:avLst/>
+          </a:prstGeom>
+          <a:noFill/>
+          <a:ln/>
+        </p:spPr>
+        <p:txBody>
+          <a:bodyPr wrap="square" lIns="635" tIns="635" rIns="635" bIns="635" rtlCol="0" anchor="t">
             <a:normAutofit/>
           </a:bodyPr>
           <a:lstStyle/>
           <a:p>
+            <a:r>
+              <a:rPr lang="en-US" sz="1700" dirty="0">
+                <a:solidFill>
+                  <a:srgbClr val="17364A"/>
+                </a:solidFill>
+                <a:latin typeface="Aptos" pitchFamily="34" charset="0"/>
+                <a:ea typeface="Aptos" pitchFamily="34" charset="-122"/>
+                <a:cs typeface="Aptos" pitchFamily="34" charset="-120"/>
+              </a:rPr>
+              <a:t>Natural language processing is a branch of AI that works with human language.</a:t>
+            </a:r>
+            <a:endParaRPr lang="en-US" sz="1700" dirty="0"/>
+          </a:p>
+          <a:p>
+            <a:r>
+              <a:rPr lang="en-US" sz="1700" dirty="0">
+                <a:solidFill>
+                  <a:srgbClr val="17364A"/>
+                </a:solidFill>
+                <a:latin typeface="Aptos" pitchFamily="34" charset="0"/>
+                <a:ea typeface="Aptos" pitchFamily="34" charset="-122"/>
+                <a:cs typeface="Aptos" pitchFamily="34" charset="-120"/>
+              </a:rPr>
+              <a:t>Public health agencies often hold important information in free-text sources, including clinical notes, case narratives,.</a:t>
+            </a:r>
+            <a:endParaRPr lang="en-US" sz="1700" dirty="0"/>
+          </a:p>
+          <a:p>
+            <a:r>
+              <a:rPr lang="en-US" sz="1700" dirty="0">
+                <a:solidFill>
+                  <a:srgbClr val="17364A"/>
+                </a:solidFill>
+                <a:latin typeface="Aptos" pitchFamily="34" charset="0"/>
+                <a:ea typeface="Aptos" pitchFamily="34" charset="-122"/>
+                <a:cs typeface="Aptos" pitchFamily="34" charset="-120"/>
+              </a:rPr>
+              <a:t>This module teaches learners how NLP can support public health work and how to evaluate its risks.</a:t>
+            </a:r>
+            <a:endParaRPr lang="en-US" sz="1700" dirty="0"/>
+          </a:p>
+        </p:txBody>
+      </p:sp>
+      <p:sp>
+        <p:nvSpPr>
+          <p:cNvPr id="11" name="Shape 9"/>
+          <p:cNvSpPr/>
+          <p:nvPr/>
+        </p:nvSpPr>
+        <p:spPr>
+          <a:xfrm>
+            <a:off x="7909560" y="1417320"/>
+            <a:ext cx="3154680" cy="1828800"/>
+          </a:xfrm>
+          <a:prstGeom prst="roundRect">
+            <a:avLst>
+              <a:gd name="adj" fmla="val 6000"/>
+            </a:avLst>
+          </a:prstGeom>
+          <a:solidFill>
+            <a:srgbClr val="EEF8ED"/>
+          </a:solidFill>
+          <a:ln w="12700">
+            <a:solidFill>
+              <a:srgbClr val="B9D7E6"/>
+            </a:solidFill>
+            <a:prstDash val="solid"/>
+          </a:ln>
+        </p:spPr>
+      </p:sp>
+      <p:sp>
+        <p:nvSpPr>
+          <p:cNvPr id="12" name="Text 10"/>
+          <p:cNvSpPr/>
+          <p:nvPr/>
+        </p:nvSpPr>
+        <p:spPr>
+          <a:xfrm>
+            <a:off x="8074152" y="1563624"/>
+            <a:ext cx="2825496" cy="201168"/>
+          </a:xfrm>
+          <a:prstGeom prst="rect">
+            <a:avLst/>
+          </a:prstGeom>
+          <a:noFill/>
+          <a:ln/>
+        </p:spPr>
+        <p:txBody>
+          <a:bodyPr wrap="square" lIns="0" tIns="0" rIns="0" bIns="0" rtlCol="0" anchor="ctr"/>
+          <a:lstStyle/>
+          <a:p>
             <a:pPr indent="0" marL="0">
               <a:buNone/>
             </a:pPr>
             <a:r>
-              <a:rPr lang="en-US" sz="1420" dirty="0">
+              <a:rPr lang="en-US" sz="950" b="1" dirty="0">
+                <a:solidFill>
+                  <a:srgbClr val="0068B7"/>
+                </a:solidFill>
+                <a:latin typeface="Aptos" pitchFamily="34" charset="0"/>
+                <a:ea typeface="Aptos" pitchFamily="34" charset="-122"/>
+                <a:cs typeface="Aptos" pitchFamily="34" charset="-120"/>
+              </a:rPr>
+              <a:t>Key idea</a:t>
+            </a:r>
+            <a:endParaRPr lang="en-US" sz="950" dirty="0"/>
+          </a:p>
+        </p:txBody>
+      </p:sp>
+      <p:sp>
+        <p:nvSpPr>
+          <p:cNvPr id="13" name="Text 11"/>
+          <p:cNvSpPr/>
+          <p:nvPr/>
+        </p:nvSpPr>
+        <p:spPr>
+          <a:xfrm>
+            <a:off x="8074152" y="1856232"/>
+            <a:ext cx="2825496" cy="1261872"/>
+          </a:xfrm>
+          <a:prstGeom prst="rect">
+            <a:avLst/>
+          </a:prstGeom>
+          <a:noFill/>
+          <a:ln/>
+        </p:spPr>
+        <p:txBody>
+          <a:bodyPr wrap="square" lIns="0" tIns="0" rIns="0" bIns="0" rtlCol="0" anchor="t">
+            <a:normAutofit/>
+          </a:bodyPr>
+          <a:lstStyle/>
+          <a:p>
+            <a:pPr indent="0" marL="0">
+              <a:buNone/>
+            </a:pPr>
+            <a:r>
+              <a:rPr lang="en-US" sz="1250" dirty="0">
                 <a:solidFill>
                   <a:srgbClr val="17364A"/>
                 </a:solidFill>
@@ -7164,9 +13145,116 @@
                 <a:ea typeface="Aptos" pitchFamily="34" charset="-122"/>
                 <a:cs typeface="Aptos" pitchFamily="34" charset="-120"/>
               </a:rPr>
-              <a:t>Natural language processing. NLP refers to AI methods that process, analyze, classify, summarize, extract, translate, or generate human language. It can work with structured prompts, free-text notes, documents, emails, calls, complaints, or reports. Information extraction. Information extraction pulls specific facts from text, such as symptoms, dates, locations, exposures, risk factors, facility names, or requested services. Extraction should be validated against source text. Text classification. Text classification assigns text to categories, such as complaint type, urgency, topic, likely condition, or program area. Classification requires labeled examples, clear categories, and evaluation.</a:t>
-            </a:r>
-            <a:endParaRPr lang="en-US" sz="1420" dirty="0"/>
+              <a:t>Natural language processing is a branch of AI that works with human language.</a:t>
+            </a:r>
+            <a:endParaRPr lang="en-US" sz="1250" dirty="0"/>
+          </a:p>
+        </p:txBody>
+      </p:sp>
+      <p:sp>
+        <p:nvSpPr>
+          <p:cNvPr id="14" name="Shape 12"/>
+          <p:cNvSpPr/>
+          <p:nvPr/>
+        </p:nvSpPr>
+        <p:spPr>
+          <a:xfrm>
+            <a:off x="7909560" y="3520440"/>
+            <a:ext cx="3154680" cy="1737360"/>
+          </a:xfrm>
+          <a:prstGeom prst="roundRect">
+            <a:avLst>
+              <a:gd name="adj" fmla="val 6316"/>
+            </a:avLst>
+          </a:prstGeom>
+          <a:solidFill>
+            <a:srgbClr val="EAF6F8"/>
+          </a:solidFill>
+          <a:ln w="12700">
+            <a:solidFill>
+              <a:srgbClr val="B9D7E6"/>
+            </a:solidFill>
+            <a:prstDash val="solid"/>
+          </a:ln>
+        </p:spPr>
+      </p:sp>
+      <p:sp>
+        <p:nvSpPr>
+          <p:cNvPr id="15" name="Text 13"/>
+          <p:cNvSpPr/>
+          <p:nvPr/>
+        </p:nvSpPr>
+        <p:spPr>
+          <a:xfrm>
+            <a:off x="8074152" y="3666744"/>
+            <a:ext cx="2825496" cy="201168"/>
+          </a:xfrm>
+          <a:prstGeom prst="rect">
+            <a:avLst/>
+          </a:prstGeom>
+          <a:noFill/>
+          <a:ln/>
+        </p:spPr>
+        <p:txBody>
+          <a:bodyPr wrap="square" lIns="0" tIns="0" rIns="0" bIns="0" rtlCol="0" anchor="ctr"/>
+          <a:lstStyle/>
+          <a:p>
+            <a:pPr indent="0" marL="0">
+              <a:buNone/>
+            </a:pPr>
+            <a:r>
+              <a:rPr lang="en-US" sz="950" b="1" dirty="0">
+                <a:solidFill>
+                  <a:srgbClr val="0068B7"/>
+                </a:solidFill>
+                <a:latin typeface="Aptos" pitchFamily="34" charset="0"/>
+                <a:ea typeface="Aptos" pitchFamily="34" charset="-122"/>
+                <a:cs typeface="Aptos" pitchFamily="34" charset="-120"/>
+              </a:rPr>
+              <a:t>Use this for</a:t>
+            </a:r>
+            <a:endParaRPr lang="en-US" sz="950" dirty="0"/>
+          </a:p>
+        </p:txBody>
+      </p:sp>
+      <p:sp>
+        <p:nvSpPr>
+          <p:cNvPr id="16" name="Text 14"/>
+          <p:cNvSpPr/>
+          <p:nvPr/>
+        </p:nvSpPr>
+        <p:spPr>
+          <a:xfrm>
+            <a:off x="8074152" y="3959352"/>
+            <a:ext cx="2825496" cy="1170432"/>
+          </a:xfrm>
+          <a:prstGeom prst="rect">
+            <a:avLst/>
+          </a:prstGeom>
+          <a:noFill/>
+          <a:ln/>
+        </p:spPr>
+        <p:txBody>
+          <a:bodyPr wrap="square" lIns="0" tIns="0" rIns="0" bIns="0" rtlCol="0" anchor="t">
+            <a:normAutofit/>
+          </a:bodyPr>
+          <a:lstStyle/>
+          <a:p>
+            <a:pPr indent="0" marL="0">
+              <a:buNone/>
+            </a:pPr>
+            <a:r>
+              <a:rPr lang="en-US" sz="1250" dirty="0">
+                <a:solidFill>
+                  <a:srgbClr val="17364A"/>
+                </a:solidFill>
+                <a:latin typeface="Aptos" pitchFamily="34" charset="0"/>
+                <a:ea typeface="Aptos" pitchFamily="34" charset="-122"/>
+                <a:cs typeface="Aptos" pitchFamily="34" charset="-120"/>
+              </a:rPr>
+              <a:t>Connect the concept to public health decisions, safeguards, documentation, or implementation work.</a:t>
+            </a:r>
+            <a:endParaRPr lang="en-US" sz="1250" dirty="0"/>
           </a:p>
         </p:txBody>
       </p:sp>
@@ -7229,7 +13317,32 @@
       </p:sp>
       <p:sp>
         <p:nvSpPr>
-          <p:cNvPr id="3" name="Text 1"/>
+          <p:cNvPr id="3" name="Shape 1"/>
+          <p:cNvSpPr/>
+          <p:nvPr/>
+        </p:nvSpPr>
+        <p:spPr>
+          <a:xfrm>
+            <a:off x="0" y="164592"/>
+            <a:ext cx="146304" cy="6693408"/>
+          </a:xfrm>
+          <a:prstGeom prst="rect">
+            <a:avLst/>
+          </a:prstGeom>
+          <a:solidFill>
+            <a:srgbClr val="2F8A28"/>
+          </a:solidFill>
+          <a:ln w="12700">
+            <a:solidFill>
+              <a:srgbClr val="2F8A28"/>
+            </a:solidFill>
+            <a:prstDash val="solid"/>
+          </a:ln>
+        </p:spPr>
+      </p:sp>
+      <p:sp>
+        <p:nvSpPr>
+          <p:cNvPr id="4" name="Text 2"/>
           <p:cNvSpPr/>
           <p:nvPr/>
         </p:nvSpPr>
@@ -7268,7 +13381,7 @@
       </p:sp>
       <p:sp>
         <p:nvSpPr>
-          <p:cNvPr id="4" name="Text 2"/>
+          <p:cNvPr id="5" name="Text 3"/>
           <p:cNvSpPr/>
           <p:nvPr/>
         </p:nvSpPr>
@@ -7307,7 +13420,7 @@
       </p:sp>
       <p:sp>
         <p:nvSpPr>
-          <p:cNvPr id="5" name="Text 3"/>
+          <p:cNvPr id="6" name="Text 4"/>
           <p:cNvSpPr/>
           <p:nvPr/>
         </p:nvSpPr>
@@ -7346,13 +13459,77 @@
       </p:sp>
       <p:sp>
         <p:nvSpPr>
-          <p:cNvPr id="6" name="Text 4"/>
+          <p:cNvPr id="7" name="Shape 5"/>
           <p:cNvSpPr/>
           <p:nvPr/>
         </p:nvSpPr>
         <p:spPr>
           <a:xfrm>
             <a:off x="640080" y="658368"/>
+            <a:ext cx="420624" cy="420624"/>
+          </a:xfrm>
+          <a:prstGeom prst="ellipse">
+            <a:avLst/>
+          </a:prstGeom>
+          <a:solidFill>
+            <a:srgbClr val="0068B7"/>
+          </a:solidFill>
+          <a:ln w="12700">
+            <a:solidFill>
+              <a:srgbClr val="0068B7"/>
+            </a:solidFill>
+            <a:prstDash val="solid"/>
+          </a:ln>
+        </p:spPr>
+      </p:sp>
+      <p:sp>
+        <p:nvSpPr>
+          <p:cNvPr id="8" name="Text 6"/>
+          <p:cNvSpPr/>
+          <p:nvPr/>
+        </p:nvSpPr>
+        <p:spPr>
+          <a:xfrm>
+            <a:off x="640080" y="731520"/>
+            <a:ext cx="420624" cy="164592"/>
+          </a:xfrm>
+          <a:prstGeom prst="rect">
+            <a:avLst/>
+          </a:prstGeom>
+          <a:noFill/>
+          <a:ln/>
+        </p:spPr>
+        <p:txBody>
+          <a:bodyPr wrap="square" lIns="0" tIns="0" rIns="0" bIns="0" rtlCol="0" anchor="ctr"/>
+          <a:lstStyle/>
+          <a:p>
+            <a:pPr algn="ctr" indent="0" marL="0">
+              <a:buNone/>
+            </a:pPr>
+            <a:r>
+              <a:rPr lang="en-US" sz="1100" b="1" dirty="0">
+                <a:solidFill>
+                  <a:srgbClr val="FFFFFF"/>
+                </a:solidFill>
+                <a:latin typeface="Aptos" pitchFamily="34" charset="0"/>
+                <a:ea typeface="Aptos" pitchFamily="34" charset="-122"/>
+                <a:cs typeface="Aptos" pitchFamily="34" charset="-120"/>
+              </a:rPr>
+              <a:t>3</a:t>
+            </a:r>
+            <a:endParaRPr lang="en-US" sz="1100" dirty="0"/>
+          </a:p>
+        </p:txBody>
+      </p:sp>
+      <p:sp>
+        <p:nvSpPr>
+          <p:cNvPr id="9" name="Text 7"/>
+          <p:cNvSpPr/>
+          <p:nvPr/>
+        </p:nvSpPr>
+        <p:spPr>
+          <a:xfrm>
+            <a:off x="640080" y="621792"/>
             <a:ext cx="10881360" cy="566928"/>
           </a:xfrm>
           <a:prstGeom prst="rect">
@@ -7379,7 +13556,7 @@
                 <a:ea typeface="Aptos Display" pitchFamily="34" charset="-122"/>
                 <a:cs typeface="Aptos Display" pitchFamily="34" charset="-120"/>
               </a:rPr>
-              <a:t>Core Concepts Continued</a:t>
+              <a:t>Why This Topic Matters for Public Health AI</a:t>
             </a:r>
             <a:endParaRPr lang="en-US" sz="2700" dirty="0"/>
           </a:p>
@@ -7387,32 +13564,178 @@
       </p:sp>
       <p:sp>
         <p:nvSpPr>
-          <p:cNvPr id="7" name="Text 5"/>
-          <p:cNvSpPr/>
-          <p:nvPr/>
-        </p:nvSpPr>
-        <p:spPr>
-          <a:xfrm>
-            <a:off x="822960" y="1325880"/>
-            <a:ext cx="10378440" cy="4800600"/>
-          </a:xfrm>
-          <a:prstGeom prst="rect">
-            <a:avLst/>
-          </a:prstGeom>
-          <a:noFill/>
-          <a:ln/>
-        </p:spPr>
-        <p:txBody>
-          <a:bodyPr wrap="square" lIns="1016" tIns="1016" rIns="1016" bIns="1016" rtlCol="0" anchor="t">
+          <p:cNvPr id="10" name="Text 8"/>
+          <p:cNvSpPr/>
+          <p:nvPr/>
+        </p:nvSpPr>
+        <p:spPr>
+          <a:xfrm>
+            <a:off x="868680" y="1417320"/>
+            <a:ext cx="6675120" cy="4434840"/>
+          </a:xfrm>
+          <a:prstGeom prst="rect">
+            <a:avLst/>
+          </a:prstGeom>
+          <a:noFill/>
+          <a:ln/>
+        </p:spPr>
+        <p:txBody>
+          <a:bodyPr wrap="square" lIns="635" tIns="635" rIns="635" bIns="635" rtlCol="0" anchor="t">
             <a:normAutofit/>
           </a:bodyPr>
           <a:lstStyle/>
           <a:p>
+            <a:r>
+              <a:rPr lang="en-US" sz="1700" dirty="0">
+                <a:solidFill>
+                  <a:srgbClr val="17364A"/>
+                </a:solidFill>
+                <a:latin typeface="Aptos" pitchFamily="34" charset="0"/>
+                <a:ea typeface="Aptos" pitchFamily="34" charset="-122"/>
+                <a:cs typeface="Aptos" pitchFamily="34" charset="-120"/>
+              </a:rPr>
+              <a:t>NLP can reduce burden by helping staff find, organize, classify, extract, translate, or summarize information from large.</a:t>
+            </a:r>
+            <a:endParaRPr lang="en-US" sz="1700" dirty="0"/>
+          </a:p>
+          <a:p>
+            <a:r>
+              <a:rPr lang="en-US" sz="1700" dirty="0">
+                <a:solidFill>
+                  <a:srgbClr val="17364A"/>
+                </a:solidFill>
+                <a:latin typeface="Aptos" pitchFamily="34" charset="0"/>
+                <a:ea typeface="Aptos" pitchFamily="34" charset="-122"/>
+                <a:cs typeface="Aptos" pitchFamily="34" charset="-120"/>
+              </a:rPr>
+              <a:t>It can support case investigation, environmental health complaint triage, syndromic surveillance, public inquiry response,.</a:t>
+            </a:r>
+            <a:endParaRPr lang="en-US" sz="1700" dirty="0"/>
+          </a:p>
+          <a:p>
+            <a:r>
+              <a:rPr lang="en-US" sz="1700" dirty="0">
+                <a:solidFill>
+                  <a:srgbClr val="17364A"/>
+                </a:solidFill>
+                <a:latin typeface="Aptos" pitchFamily="34" charset="0"/>
+                <a:ea typeface="Aptos" pitchFamily="34" charset="-122"/>
+                <a:cs typeface="Aptos" pitchFamily="34" charset="-120"/>
+              </a:rPr>
+              <a:t>However, text is often ambiguous, incomplete, sensitive, and context-dependent.</a:t>
+            </a:r>
+            <a:endParaRPr lang="en-US" sz="1700" dirty="0"/>
+          </a:p>
+          <a:p>
+            <a:r>
+              <a:rPr lang="en-US" sz="1700" dirty="0">
+                <a:solidFill>
+                  <a:srgbClr val="17364A"/>
+                </a:solidFill>
+                <a:latin typeface="Aptos" pitchFamily="34" charset="0"/>
+                <a:ea typeface="Aptos" pitchFamily="34" charset="-122"/>
+                <a:cs typeface="Aptos" pitchFamily="34" charset="-120"/>
+              </a:rPr>
+              <a:t>NLP outputs should not be treated as facts without review.</a:t>
+            </a:r>
+            <a:endParaRPr lang="en-US" sz="1700" dirty="0"/>
+          </a:p>
+        </p:txBody>
+      </p:sp>
+      <p:sp>
+        <p:nvSpPr>
+          <p:cNvPr id="11" name="Shape 9"/>
+          <p:cNvSpPr/>
+          <p:nvPr/>
+        </p:nvSpPr>
+        <p:spPr>
+          <a:xfrm>
+            <a:off x="7909560" y="1417320"/>
+            <a:ext cx="3154680" cy="1828800"/>
+          </a:xfrm>
+          <a:prstGeom prst="roundRect">
+            <a:avLst>
+              <a:gd name="adj" fmla="val 6000"/>
+            </a:avLst>
+          </a:prstGeom>
+          <a:solidFill>
+            <a:srgbClr val="EEF8ED"/>
+          </a:solidFill>
+          <a:ln w="12700">
+            <a:solidFill>
+              <a:srgbClr val="B9D7E6"/>
+            </a:solidFill>
+            <a:prstDash val="solid"/>
+          </a:ln>
+        </p:spPr>
+      </p:sp>
+      <p:sp>
+        <p:nvSpPr>
+          <p:cNvPr id="12" name="Text 10"/>
+          <p:cNvSpPr/>
+          <p:nvPr/>
+        </p:nvSpPr>
+        <p:spPr>
+          <a:xfrm>
+            <a:off x="8074152" y="1563624"/>
+            <a:ext cx="2825496" cy="201168"/>
+          </a:xfrm>
+          <a:prstGeom prst="rect">
+            <a:avLst/>
+          </a:prstGeom>
+          <a:noFill/>
+          <a:ln/>
+        </p:spPr>
+        <p:txBody>
+          <a:bodyPr wrap="square" lIns="0" tIns="0" rIns="0" bIns="0" rtlCol="0" anchor="ctr"/>
+          <a:lstStyle/>
+          <a:p>
             <a:pPr indent="0" marL="0">
               <a:buNone/>
             </a:pPr>
             <a:r>
-              <a:rPr lang="en-US" sz="1420" dirty="0">
+              <a:rPr lang="en-US" sz="950" b="1" dirty="0">
+                <a:solidFill>
+                  <a:srgbClr val="0068B7"/>
+                </a:solidFill>
+                <a:latin typeface="Aptos" pitchFamily="34" charset="0"/>
+                <a:ea typeface="Aptos" pitchFamily="34" charset="-122"/>
+                <a:cs typeface="Aptos" pitchFamily="34" charset="-120"/>
+              </a:rPr>
+              <a:t>Key idea</a:t>
+            </a:r>
+            <a:endParaRPr lang="en-US" sz="950" dirty="0"/>
+          </a:p>
+        </p:txBody>
+      </p:sp>
+      <p:sp>
+        <p:nvSpPr>
+          <p:cNvPr id="13" name="Text 11"/>
+          <p:cNvSpPr/>
+          <p:nvPr/>
+        </p:nvSpPr>
+        <p:spPr>
+          <a:xfrm>
+            <a:off x="8074152" y="1856232"/>
+            <a:ext cx="2825496" cy="1261872"/>
+          </a:xfrm>
+          <a:prstGeom prst="rect">
+            <a:avLst/>
+          </a:prstGeom>
+          <a:noFill/>
+          <a:ln/>
+        </p:spPr>
+        <p:txBody>
+          <a:bodyPr wrap="square" lIns="0" tIns="0" rIns="0" bIns="0" rtlCol="0" anchor="t">
+            <a:normAutofit/>
+          </a:bodyPr>
+          <a:lstStyle/>
+          <a:p>
+            <a:pPr indent="0" marL="0">
+              <a:buNone/>
+            </a:pPr>
+            <a:r>
+              <a:rPr lang="en-US" sz="1250" dirty="0">
                 <a:solidFill>
                   <a:srgbClr val="17364A"/>
                 </a:solidFill>
@@ -7420,9 +13743,116 @@
                 <a:ea typeface="Aptos" pitchFamily="34" charset="-122"/>
                 <a:cs typeface="Aptos" pitchFamily="34" charset="-120"/>
               </a:rPr>
-              <a:t>Summarization. Summarization creates a shorter version of longer text. Public health summarization should preserve uncertainty, cite sources when possible, and avoid adding unsupported claims. Hallucination. A hallucination is an AI-generated statement that is false, unsupported, or not present in the source material. Hallucination risk is especially important when summaries influence public health decisions or communications.</a:t>
-            </a:r>
-            <a:endParaRPr lang="en-US" sz="1420" dirty="0"/>
+              <a:t>NLP can reduce burden by helping staff find, organize, classify, extract, translate, or summarize information from large.</a:t>
+            </a:r>
+            <a:endParaRPr lang="en-US" sz="1250" dirty="0"/>
+          </a:p>
+        </p:txBody>
+      </p:sp>
+      <p:sp>
+        <p:nvSpPr>
+          <p:cNvPr id="14" name="Shape 12"/>
+          <p:cNvSpPr/>
+          <p:nvPr/>
+        </p:nvSpPr>
+        <p:spPr>
+          <a:xfrm>
+            <a:off x="7909560" y="3520440"/>
+            <a:ext cx="3154680" cy="1737360"/>
+          </a:xfrm>
+          <a:prstGeom prst="roundRect">
+            <a:avLst>
+              <a:gd name="adj" fmla="val 6316"/>
+            </a:avLst>
+          </a:prstGeom>
+          <a:solidFill>
+            <a:srgbClr val="EAF6F8"/>
+          </a:solidFill>
+          <a:ln w="12700">
+            <a:solidFill>
+              <a:srgbClr val="B9D7E6"/>
+            </a:solidFill>
+            <a:prstDash val="solid"/>
+          </a:ln>
+        </p:spPr>
+      </p:sp>
+      <p:sp>
+        <p:nvSpPr>
+          <p:cNvPr id="15" name="Text 13"/>
+          <p:cNvSpPr/>
+          <p:nvPr/>
+        </p:nvSpPr>
+        <p:spPr>
+          <a:xfrm>
+            <a:off x="8074152" y="3666744"/>
+            <a:ext cx="2825496" cy="201168"/>
+          </a:xfrm>
+          <a:prstGeom prst="rect">
+            <a:avLst/>
+          </a:prstGeom>
+          <a:noFill/>
+          <a:ln/>
+        </p:spPr>
+        <p:txBody>
+          <a:bodyPr wrap="square" lIns="0" tIns="0" rIns="0" bIns="0" rtlCol="0" anchor="ctr"/>
+          <a:lstStyle/>
+          <a:p>
+            <a:pPr indent="0" marL="0">
+              <a:buNone/>
+            </a:pPr>
+            <a:r>
+              <a:rPr lang="en-US" sz="950" b="1" dirty="0">
+                <a:solidFill>
+                  <a:srgbClr val="0068B7"/>
+                </a:solidFill>
+                <a:latin typeface="Aptos" pitchFamily="34" charset="0"/>
+                <a:ea typeface="Aptos" pitchFamily="34" charset="-122"/>
+                <a:cs typeface="Aptos" pitchFamily="34" charset="-120"/>
+              </a:rPr>
+              <a:t>Use this for</a:t>
+            </a:r>
+            <a:endParaRPr lang="en-US" sz="950" dirty="0"/>
+          </a:p>
+        </p:txBody>
+      </p:sp>
+      <p:sp>
+        <p:nvSpPr>
+          <p:cNvPr id="16" name="Text 14"/>
+          <p:cNvSpPr/>
+          <p:nvPr/>
+        </p:nvSpPr>
+        <p:spPr>
+          <a:xfrm>
+            <a:off x="8074152" y="3959352"/>
+            <a:ext cx="2825496" cy="1170432"/>
+          </a:xfrm>
+          <a:prstGeom prst="rect">
+            <a:avLst/>
+          </a:prstGeom>
+          <a:noFill/>
+          <a:ln/>
+        </p:spPr>
+        <p:txBody>
+          <a:bodyPr wrap="square" lIns="0" tIns="0" rIns="0" bIns="0" rtlCol="0" anchor="t">
+            <a:normAutofit/>
+          </a:bodyPr>
+          <a:lstStyle/>
+          <a:p>
+            <a:pPr indent="0" marL="0">
+              <a:buNone/>
+            </a:pPr>
+            <a:r>
+              <a:rPr lang="en-US" sz="1250" dirty="0">
+                <a:solidFill>
+                  <a:srgbClr val="17364A"/>
+                </a:solidFill>
+                <a:latin typeface="Aptos" pitchFamily="34" charset="0"/>
+                <a:ea typeface="Aptos" pitchFamily="34" charset="-122"/>
+                <a:cs typeface="Aptos" pitchFamily="34" charset="-120"/>
+              </a:rPr>
+              <a:t>Connect the concept to public health decisions, safeguards, documentation, or implementation work.</a:t>
+            </a:r>
+            <a:endParaRPr lang="en-US" sz="1250" dirty="0"/>
           </a:p>
         </p:txBody>
       </p:sp>
@@ -7485,7 +13915,32 @@
       </p:sp>
       <p:sp>
         <p:nvSpPr>
-          <p:cNvPr id="3" name="Text 1"/>
+          <p:cNvPr id="3" name="Shape 1"/>
+          <p:cNvSpPr/>
+          <p:nvPr/>
+        </p:nvSpPr>
+        <p:spPr>
+          <a:xfrm>
+            <a:off x="0" y="164592"/>
+            <a:ext cx="146304" cy="6693408"/>
+          </a:xfrm>
+          <a:prstGeom prst="rect">
+            <a:avLst/>
+          </a:prstGeom>
+          <a:solidFill>
+            <a:srgbClr val="2F8A28"/>
+          </a:solidFill>
+          <a:ln w="12700">
+            <a:solidFill>
+              <a:srgbClr val="2F8A28"/>
+            </a:solidFill>
+            <a:prstDash val="solid"/>
+          </a:ln>
+        </p:spPr>
+      </p:sp>
+      <p:sp>
+        <p:nvSpPr>
+          <p:cNvPr id="4" name="Text 2"/>
           <p:cNvSpPr/>
           <p:nvPr/>
         </p:nvSpPr>
@@ -7524,7 +13979,7 @@
       </p:sp>
       <p:sp>
         <p:nvSpPr>
-          <p:cNvPr id="4" name="Text 2"/>
+          <p:cNvPr id="5" name="Text 3"/>
           <p:cNvSpPr/>
           <p:nvPr/>
         </p:nvSpPr>
@@ -7563,7 +14018,7 @@
       </p:sp>
       <p:sp>
         <p:nvSpPr>
-          <p:cNvPr id="5" name="Text 3"/>
+          <p:cNvPr id="6" name="Text 4"/>
           <p:cNvSpPr/>
           <p:nvPr/>
         </p:nvSpPr>
@@ -7602,13 +14057,77 @@
       </p:sp>
       <p:sp>
         <p:nvSpPr>
-          <p:cNvPr id="6" name="Text 4"/>
+          <p:cNvPr id="7" name="Shape 5"/>
           <p:cNvSpPr/>
           <p:nvPr/>
         </p:nvSpPr>
         <p:spPr>
           <a:xfrm>
             <a:off x="640080" y="658368"/>
+            <a:ext cx="420624" cy="420624"/>
+          </a:xfrm>
+          <a:prstGeom prst="ellipse">
+            <a:avLst/>
+          </a:prstGeom>
+          <a:solidFill>
+            <a:srgbClr val="0068B7"/>
+          </a:solidFill>
+          <a:ln w="12700">
+            <a:solidFill>
+              <a:srgbClr val="0068B7"/>
+            </a:solidFill>
+            <a:prstDash val="solid"/>
+          </a:ln>
+        </p:spPr>
+      </p:sp>
+      <p:sp>
+        <p:nvSpPr>
+          <p:cNvPr id="8" name="Text 6"/>
+          <p:cNvSpPr/>
+          <p:nvPr/>
+        </p:nvSpPr>
+        <p:spPr>
+          <a:xfrm>
+            <a:off x="640080" y="731520"/>
+            <a:ext cx="420624" cy="164592"/>
+          </a:xfrm>
+          <a:prstGeom prst="rect">
+            <a:avLst/>
+          </a:prstGeom>
+          <a:noFill/>
+          <a:ln/>
+        </p:spPr>
+        <p:txBody>
+          <a:bodyPr wrap="square" lIns="0" tIns="0" rIns="0" bIns="0" rtlCol="0" anchor="ctr"/>
+          <a:lstStyle/>
+          <a:p>
+            <a:pPr algn="ctr" indent="0" marL="0">
+              <a:buNone/>
+            </a:pPr>
+            <a:r>
+              <a:rPr lang="en-US" sz="1100" b="1" dirty="0">
+                <a:solidFill>
+                  <a:srgbClr val="FFFFFF"/>
+                </a:solidFill>
+                <a:latin typeface="Aptos" pitchFamily="34" charset="0"/>
+                <a:ea typeface="Aptos" pitchFamily="34" charset="-122"/>
+                <a:cs typeface="Aptos" pitchFamily="34" charset="-120"/>
+              </a:rPr>
+              <a:t>4</a:t>
+            </a:r>
+            <a:endParaRPr lang="en-US" sz="1100" dirty="0"/>
+          </a:p>
+        </p:txBody>
+      </p:sp>
+      <p:sp>
+        <p:nvSpPr>
+          <p:cNvPr id="9" name="Text 7"/>
+          <p:cNvSpPr/>
+          <p:nvPr/>
+        </p:nvSpPr>
+        <p:spPr>
+          <a:xfrm>
+            <a:off x="640080" y="621792"/>
             <a:ext cx="10881360" cy="566928"/>
           </a:xfrm>
           <a:prstGeom prst="rect">
@@ -7635,7 +14154,7 @@
                 <a:ea typeface="Aptos Display" pitchFamily="34" charset="-122"/>
                 <a:cs typeface="Aptos Display" pitchFamily="34" charset="-120"/>
               </a:rPr>
-              <a:t>Public Health Example</a:t>
+              <a:t>Core Concepts</a:t>
             </a:r>
             <a:endParaRPr lang="en-US" sz="2700" dirty="0"/>
           </a:p>
@@ -7643,32 +14162,178 @@
       </p:sp>
       <p:sp>
         <p:nvSpPr>
-          <p:cNvPr id="7" name="Text 5"/>
-          <p:cNvSpPr/>
-          <p:nvPr/>
-        </p:nvSpPr>
-        <p:spPr>
-          <a:xfrm>
-            <a:off x="822960" y="1325880"/>
-            <a:ext cx="10378440" cy="4800600"/>
-          </a:xfrm>
-          <a:prstGeom prst="rect">
-            <a:avLst/>
-          </a:prstGeom>
-          <a:noFill/>
-          <a:ln/>
-        </p:spPr>
-        <p:txBody>
-          <a:bodyPr wrap="square" lIns="1016" tIns="1016" rIns="1016" bIns="1016" rtlCol="0" anchor="t">
+          <p:cNvPr id="10" name="Text 8"/>
+          <p:cNvSpPr/>
+          <p:nvPr/>
+        </p:nvSpPr>
+        <p:spPr>
+          <a:xfrm>
+            <a:off x="868680" y="1417320"/>
+            <a:ext cx="6675120" cy="4434840"/>
+          </a:xfrm>
+          <a:prstGeom prst="rect">
+            <a:avLst/>
+          </a:prstGeom>
+          <a:noFill/>
+          <a:ln/>
+        </p:spPr>
+        <p:txBody>
+          <a:bodyPr wrap="square" lIns="635" tIns="635" rIns="635" bIns="635" rtlCol="0" anchor="t">
             <a:normAutofit/>
           </a:bodyPr>
           <a:lstStyle/>
           <a:p>
+            <a:r>
+              <a:rPr lang="en-US" sz="1700" dirty="0">
+                <a:solidFill>
+                  <a:srgbClr val="17364A"/>
+                </a:solidFill>
+                <a:latin typeface="Aptos" pitchFamily="34" charset="0"/>
+                <a:ea typeface="Aptos" pitchFamily="34" charset="-122"/>
+                <a:cs typeface="Aptos" pitchFamily="34" charset="-120"/>
+              </a:rPr>
+              <a:t>Natural language processing.</a:t>
+            </a:r>
+            <a:endParaRPr lang="en-US" sz="1700" dirty="0"/>
+          </a:p>
+          <a:p>
+            <a:r>
+              <a:rPr lang="en-US" sz="1700" dirty="0">
+                <a:solidFill>
+                  <a:srgbClr val="17364A"/>
+                </a:solidFill>
+                <a:latin typeface="Aptos" pitchFamily="34" charset="0"/>
+                <a:ea typeface="Aptos" pitchFamily="34" charset="-122"/>
+                <a:cs typeface="Aptos" pitchFamily="34" charset="-120"/>
+              </a:rPr>
+              <a:t>NLP refers to AI methods that process, analyze, classify, summarize, extract, translate, or generate human language.</a:t>
+            </a:r>
+            <a:endParaRPr lang="en-US" sz="1700" dirty="0"/>
+          </a:p>
+          <a:p>
+            <a:r>
+              <a:rPr lang="en-US" sz="1700" dirty="0">
+                <a:solidFill>
+                  <a:srgbClr val="17364A"/>
+                </a:solidFill>
+                <a:latin typeface="Aptos" pitchFamily="34" charset="0"/>
+                <a:ea typeface="Aptos" pitchFamily="34" charset="-122"/>
+                <a:cs typeface="Aptos" pitchFamily="34" charset="-120"/>
+              </a:rPr>
+              <a:t>It can work with structured prompts, free-text notes, documents, emails, calls, complaints, or reports.</a:t>
+            </a:r>
+            <a:endParaRPr lang="en-US" sz="1700" dirty="0"/>
+          </a:p>
+          <a:p>
+            <a:r>
+              <a:rPr lang="en-US" sz="1700" dirty="0">
+                <a:solidFill>
+                  <a:srgbClr val="17364A"/>
+                </a:solidFill>
+                <a:latin typeface="Aptos" pitchFamily="34" charset="0"/>
+                <a:ea typeface="Aptos" pitchFamily="34" charset="-122"/>
+                <a:cs typeface="Aptos" pitchFamily="34" charset="-120"/>
+              </a:rPr>
+              <a:t>Information extraction.</a:t>
+            </a:r>
+            <a:endParaRPr lang="en-US" sz="1700" dirty="0"/>
+          </a:p>
+        </p:txBody>
+      </p:sp>
+      <p:sp>
+        <p:nvSpPr>
+          <p:cNvPr id="11" name="Shape 9"/>
+          <p:cNvSpPr/>
+          <p:nvPr/>
+        </p:nvSpPr>
+        <p:spPr>
+          <a:xfrm>
+            <a:off x="7909560" y="1417320"/>
+            <a:ext cx="3154680" cy="1828800"/>
+          </a:xfrm>
+          <a:prstGeom prst="roundRect">
+            <a:avLst>
+              <a:gd name="adj" fmla="val 6000"/>
+            </a:avLst>
+          </a:prstGeom>
+          <a:solidFill>
+            <a:srgbClr val="EEF8ED"/>
+          </a:solidFill>
+          <a:ln w="12700">
+            <a:solidFill>
+              <a:srgbClr val="B9D7E6"/>
+            </a:solidFill>
+            <a:prstDash val="solid"/>
+          </a:ln>
+        </p:spPr>
+      </p:sp>
+      <p:sp>
+        <p:nvSpPr>
+          <p:cNvPr id="12" name="Text 10"/>
+          <p:cNvSpPr/>
+          <p:nvPr/>
+        </p:nvSpPr>
+        <p:spPr>
+          <a:xfrm>
+            <a:off x="8074152" y="1563624"/>
+            <a:ext cx="2825496" cy="201168"/>
+          </a:xfrm>
+          <a:prstGeom prst="rect">
+            <a:avLst/>
+          </a:prstGeom>
+          <a:noFill/>
+          <a:ln/>
+        </p:spPr>
+        <p:txBody>
+          <a:bodyPr wrap="square" lIns="0" tIns="0" rIns="0" bIns="0" rtlCol="0" anchor="ctr"/>
+          <a:lstStyle/>
+          <a:p>
             <a:pPr indent="0" marL="0">
               <a:buNone/>
             </a:pPr>
             <a:r>
-              <a:rPr lang="en-US" sz="1420" dirty="0">
+              <a:rPr lang="en-US" sz="950" b="1" dirty="0">
+                <a:solidFill>
+                  <a:srgbClr val="0068B7"/>
+                </a:solidFill>
+                <a:latin typeface="Aptos" pitchFamily="34" charset="0"/>
+                <a:ea typeface="Aptos" pitchFamily="34" charset="-122"/>
+                <a:cs typeface="Aptos" pitchFamily="34" charset="-120"/>
+              </a:rPr>
+              <a:t>Key idea</a:t>
+            </a:r>
+            <a:endParaRPr lang="en-US" sz="950" dirty="0"/>
+          </a:p>
+        </p:txBody>
+      </p:sp>
+      <p:sp>
+        <p:nvSpPr>
+          <p:cNvPr id="13" name="Text 11"/>
+          <p:cNvSpPr/>
+          <p:nvPr/>
+        </p:nvSpPr>
+        <p:spPr>
+          <a:xfrm>
+            <a:off x="8074152" y="1856232"/>
+            <a:ext cx="2825496" cy="1261872"/>
+          </a:xfrm>
+          <a:prstGeom prst="rect">
+            <a:avLst/>
+          </a:prstGeom>
+          <a:noFill/>
+          <a:ln/>
+        </p:spPr>
+        <p:txBody>
+          <a:bodyPr wrap="square" lIns="0" tIns="0" rIns="0" bIns="0" rtlCol="0" anchor="t">
+            <a:normAutofit/>
+          </a:bodyPr>
+          <a:lstStyle/>
+          <a:p>
+            <a:pPr indent="0" marL="0">
+              <a:buNone/>
+            </a:pPr>
+            <a:r>
+              <a:rPr lang="en-US" sz="1250" dirty="0">
                 <a:solidFill>
                   <a:srgbClr val="17364A"/>
                 </a:solidFill>
@@ -7676,9 +14341,116 @@
                 <a:ea typeface="Aptos" pitchFamily="34" charset="-122"/>
                 <a:cs typeface="Aptos" pitchFamily="34" charset="-120"/>
               </a:rPr>
-              <a:t>A contact center may receive hundreds of public inquiries during an outbreak. NLP could classify messages by topic, identify urgent issues, and draft response summaries for staff review. This can improve timeliness, but messages may contain sensitive information, emotional language, misinformation, or ambiguous requests. Staff need review procedures and escalation criteria. An environmental health program may use NLP to classify complaints about food safety, housing, water, pests, or nuisance conditions. The tool may help route complaints, but errors can affect response time and enforcement. The program should validate classification accuracy and ensure that original complaint text remains available to reviewers.</a:t>
-            </a:r>
-            <a:endParaRPr lang="en-US" sz="1420" dirty="0"/>
+              <a:t>Natural language processing.</a:t>
+            </a:r>
+            <a:endParaRPr lang="en-US" sz="1250" dirty="0"/>
+          </a:p>
+        </p:txBody>
+      </p:sp>
+      <p:sp>
+        <p:nvSpPr>
+          <p:cNvPr id="14" name="Shape 12"/>
+          <p:cNvSpPr/>
+          <p:nvPr/>
+        </p:nvSpPr>
+        <p:spPr>
+          <a:xfrm>
+            <a:off x="7909560" y="3520440"/>
+            <a:ext cx="3154680" cy="1737360"/>
+          </a:xfrm>
+          <a:prstGeom prst="roundRect">
+            <a:avLst>
+              <a:gd name="adj" fmla="val 6316"/>
+            </a:avLst>
+          </a:prstGeom>
+          <a:solidFill>
+            <a:srgbClr val="EAF6F8"/>
+          </a:solidFill>
+          <a:ln w="12700">
+            <a:solidFill>
+              <a:srgbClr val="B9D7E6"/>
+            </a:solidFill>
+            <a:prstDash val="solid"/>
+          </a:ln>
+        </p:spPr>
+      </p:sp>
+      <p:sp>
+        <p:nvSpPr>
+          <p:cNvPr id="15" name="Text 13"/>
+          <p:cNvSpPr/>
+          <p:nvPr/>
+        </p:nvSpPr>
+        <p:spPr>
+          <a:xfrm>
+            <a:off x="8074152" y="3666744"/>
+            <a:ext cx="2825496" cy="201168"/>
+          </a:xfrm>
+          <a:prstGeom prst="rect">
+            <a:avLst/>
+          </a:prstGeom>
+          <a:noFill/>
+          <a:ln/>
+        </p:spPr>
+        <p:txBody>
+          <a:bodyPr wrap="square" lIns="0" tIns="0" rIns="0" bIns="0" rtlCol="0" anchor="ctr"/>
+          <a:lstStyle/>
+          <a:p>
+            <a:pPr indent="0" marL="0">
+              <a:buNone/>
+            </a:pPr>
+            <a:r>
+              <a:rPr lang="en-US" sz="950" b="1" dirty="0">
+                <a:solidFill>
+                  <a:srgbClr val="0068B7"/>
+                </a:solidFill>
+                <a:latin typeface="Aptos" pitchFamily="34" charset="0"/>
+                <a:ea typeface="Aptos" pitchFamily="34" charset="-122"/>
+                <a:cs typeface="Aptos" pitchFamily="34" charset="-120"/>
+              </a:rPr>
+              <a:t>Use this for</a:t>
+            </a:r>
+            <a:endParaRPr lang="en-US" sz="950" dirty="0"/>
+          </a:p>
+        </p:txBody>
+      </p:sp>
+      <p:sp>
+        <p:nvSpPr>
+          <p:cNvPr id="16" name="Text 14"/>
+          <p:cNvSpPr/>
+          <p:nvPr/>
+        </p:nvSpPr>
+        <p:spPr>
+          <a:xfrm>
+            <a:off x="8074152" y="3959352"/>
+            <a:ext cx="2825496" cy="1170432"/>
+          </a:xfrm>
+          <a:prstGeom prst="rect">
+            <a:avLst/>
+          </a:prstGeom>
+          <a:noFill/>
+          <a:ln/>
+        </p:spPr>
+        <p:txBody>
+          <a:bodyPr wrap="square" lIns="0" tIns="0" rIns="0" bIns="0" rtlCol="0" anchor="t">
+            <a:normAutofit/>
+          </a:bodyPr>
+          <a:lstStyle/>
+          <a:p>
+            <a:pPr indent="0" marL="0">
+              <a:buNone/>
+            </a:pPr>
+            <a:r>
+              <a:rPr lang="en-US" sz="1250" dirty="0">
+                <a:solidFill>
+                  <a:srgbClr val="17364A"/>
+                </a:solidFill>
+                <a:latin typeface="Aptos" pitchFamily="34" charset="0"/>
+                <a:ea typeface="Aptos" pitchFamily="34" charset="-122"/>
+                <a:cs typeface="Aptos" pitchFamily="34" charset="-120"/>
+              </a:rPr>
+              <a:t>Connect the concept to public health decisions, safeguards, documentation, or implementation work.</a:t>
+            </a:r>
+            <a:endParaRPr lang="en-US" sz="1250" dirty="0"/>
           </a:p>
         </p:txBody>
       </p:sp>
@@ -7741,7 +14513,32 @@
       </p:sp>
       <p:sp>
         <p:nvSpPr>
-          <p:cNvPr id="3" name="Text 1"/>
+          <p:cNvPr id="3" name="Shape 1"/>
+          <p:cNvSpPr/>
+          <p:nvPr/>
+        </p:nvSpPr>
+        <p:spPr>
+          <a:xfrm>
+            <a:off x="0" y="164592"/>
+            <a:ext cx="146304" cy="6693408"/>
+          </a:xfrm>
+          <a:prstGeom prst="rect">
+            <a:avLst/>
+          </a:prstGeom>
+          <a:solidFill>
+            <a:srgbClr val="2F8A28"/>
+          </a:solidFill>
+          <a:ln w="12700">
+            <a:solidFill>
+              <a:srgbClr val="2F8A28"/>
+            </a:solidFill>
+            <a:prstDash val="solid"/>
+          </a:ln>
+        </p:spPr>
+      </p:sp>
+      <p:sp>
+        <p:nvSpPr>
+          <p:cNvPr id="4" name="Text 2"/>
           <p:cNvSpPr/>
           <p:nvPr/>
         </p:nvSpPr>
@@ -7780,7 +14577,7 @@
       </p:sp>
       <p:sp>
         <p:nvSpPr>
-          <p:cNvPr id="4" name="Text 2"/>
+          <p:cNvPr id="5" name="Text 3"/>
           <p:cNvSpPr/>
           <p:nvPr/>
         </p:nvSpPr>
@@ -7819,7 +14616,7 @@
       </p:sp>
       <p:sp>
         <p:nvSpPr>
-          <p:cNvPr id="5" name="Text 3"/>
+          <p:cNvPr id="6" name="Text 4"/>
           <p:cNvSpPr/>
           <p:nvPr/>
         </p:nvSpPr>
@@ -7858,7 +14655,7 @@
       </p:sp>
       <p:sp>
         <p:nvSpPr>
-          <p:cNvPr id="6" name="Text 4"/>
+          <p:cNvPr id="7" name="Text 5"/>
           <p:cNvSpPr/>
           <p:nvPr/>
         </p:nvSpPr>
@@ -7891,7 +14688,7 @@
                 <a:ea typeface="Aptos Display" pitchFamily="34" charset="-122"/>
                 <a:cs typeface="Aptos Display" pitchFamily="34" charset="-120"/>
               </a:rPr>
-              <a:t>Technical Deep Dive</a:t>
+              <a:t>Core Concepts Continued</a:t>
             </a:r>
             <a:endParaRPr lang="en-US" sz="2700" dirty="0"/>
           </a:p>
@@ -7899,32 +14696,178 @@
       </p:sp>
       <p:sp>
         <p:nvSpPr>
-          <p:cNvPr id="7" name="Text 5"/>
-          <p:cNvSpPr/>
-          <p:nvPr/>
-        </p:nvSpPr>
-        <p:spPr>
-          <a:xfrm>
-            <a:off x="822960" y="1325880"/>
-            <a:ext cx="10378440" cy="4800600"/>
-          </a:xfrm>
-          <a:prstGeom prst="rect">
-            <a:avLst/>
-          </a:prstGeom>
-          <a:noFill/>
-          <a:ln/>
-        </p:spPr>
-        <p:txBody>
-          <a:bodyPr wrap="square" lIns="1016" tIns="1016" rIns="1016" bIns="1016" rtlCol="0" anchor="t">
+          <p:cNvPr id="8" name="Text 6"/>
+          <p:cNvSpPr/>
+          <p:nvPr/>
+        </p:nvSpPr>
+        <p:spPr>
+          <a:xfrm>
+            <a:off x="868680" y="1417320"/>
+            <a:ext cx="6675120" cy="4434840"/>
+          </a:xfrm>
+          <a:prstGeom prst="rect">
+            <a:avLst/>
+          </a:prstGeom>
+          <a:noFill/>
+          <a:ln/>
+        </p:spPr>
+        <p:txBody>
+          <a:bodyPr wrap="square" lIns="635" tIns="635" rIns="635" bIns="635" rtlCol="0" anchor="t">
             <a:normAutofit/>
           </a:bodyPr>
           <a:lstStyle/>
           <a:p>
+            <a:r>
+              <a:rPr lang="en-US" sz="1700" dirty="0">
+                <a:solidFill>
+                  <a:srgbClr val="17364A"/>
+                </a:solidFill>
+                <a:latin typeface="Aptos" pitchFamily="34" charset="0"/>
+                <a:ea typeface="Aptos" pitchFamily="34" charset="-122"/>
+                <a:cs typeface="Aptos" pitchFamily="34" charset="-120"/>
+              </a:rPr>
+              <a:t>Summarization.</a:t>
+            </a:r>
+            <a:endParaRPr lang="en-US" sz="1700" dirty="0"/>
+          </a:p>
+          <a:p>
+            <a:r>
+              <a:rPr lang="en-US" sz="1700" dirty="0">
+                <a:solidFill>
+                  <a:srgbClr val="17364A"/>
+                </a:solidFill>
+                <a:latin typeface="Aptos" pitchFamily="34" charset="0"/>
+                <a:ea typeface="Aptos" pitchFamily="34" charset="-122"/>
+                <a:cs typeface="Aptos" pitchFamily="34" charset="-120"/>
+              </a:rPr>
+              <a:t>Summarization creates a shorter version of longer text.</a:t>
+            </a:r>
+            <a:endParaRPr lang="en-US" sz="1700" dirty="0"/>
+          </a:p>
+          <a:p>
+            <a:r>
+              <a:rPr lang="en-US" sz="1700" dirty="0">
+                <a:solidFill>
+                  <a:srgbClr val="17364A"/>
+                </a:solidFill>
+                <a:latin typeface="Aptos" pitchFamily="34" charset="0"/>
+                <a:ea typeface="Aptos" pitchFamily="34" charset="-122"/>
+                <a:cs typeface="Aptos" pitchFamily="34" charset="-120"/>
+              </a:rPr>
+              <a:t>Public health summarization should preserve uncertainty, cite sources when possible, and avoid adding unsupported claims.</a:t>
+            </a:r>
+            <a:endParaRPr lang="en-US" sz="1700" dirty="0"/>
+          </a:p>
+          <a:p>
+            <a:r>
+              <a:rPr lang="en-US" sz="1700" dirty="0">
+                <a:solidFill>
+                  <a:srgbClr val="17364A"/>
+                </a:solidFill>
+                <a:latin typeface="Aptos" pitchFamily="34" charset="0"/>
+                <a:ea typeface="Aptos" pitchFamily="34" charset="-122"/>
+                <a:cs typeface="Aptos" pitchFamily="34" charset="-120"/>
+              </a:rPr>
+              <a:t>Hallucination.</a:t>
+            </a:r>
+            <a:endParaRPr lang="en-US" sz="1700" dirty="0"/>
+          </a:p>
+        </p:txBody>
+      </p:sp>
+      <p:sp>
+        <p:nvSpPr>
+          <p:cNvPr id="9" name="Shape 7"/>
+          <p:cNvSpPr/>
+          <p:nvPr/>
+        </p:nvSpPr>
+        <p:spPr>
+          <a:xfrm>
+            <a:off x="7909560" y="1417320"/>
+            <a:ext cx="3154680" cy="1828800"/>
+          </a:xfrm>
+          <a:prstGeom prst="roundRect">
+            <a:avLst>
+              <a:gd name="adj" fmla="val 6000"/>
+            </a:avLst>
+          </a:prstGeom>
+          <a:solidFill>
+            <a:srgbClr val="EEF8ED"/>
+          </a:solidFill>
+          <a:ln w="12700">
+            <a:solidFill>
+              <a:srgbClr val="B9D7E6"/>
+            </a:solidFill>
+            <a:prstDash val="solid"/>
+          </a:ln>
+        </p:spPr>
+      </p:sp>
+      <p:sp>
+        <p:nvSpPr>
+          <p:cNvPr id="10" name="Text 8"/>
+          <p:cNvSpPr/>
+          <p:nvPr/>
+        </p:nvSpPr>
+        <p:spPr>
+          <a:xfrm>
+            <a:off x="8074152" y="1563624"/>
+            <a:ext cx="2825496" cy="201168"/>
+          </a:xfrm>
+          <a:prstGeom prst="rect">
+            <a:avLst/>
+          </a:prstGeom>
+          <a:noFill/>
+          <a:ln/>
+        </p:spPr>
+        <p:txBody>
+          <a:bodyPr wrap="square" lIns="0" tIns="0" rIns="0" bIns="0" rtlCol="0" anchor="ctr"/>
+          <a:lstStyle/>
+          <a:p>
             <a:pPr indent="0" marL="0">
               <a:buNone/>
             </a:pPr>
             <a:r>
-              <a:rPr lang="en-US" sz="1420" dirty="0">
+              <a:rPr lang="en-US" sz="950" b="1" dirty="0">
+                <a:solidFill>
+                  <a:srgbClr val="0068B7"/>
+                </a:solidFill>
+                <a:latin typeface="Aptos" pitchFamily="34" charset="0"/>
+                <a:ea typeface="Aptos" pitchFamily="34" charset="-122"/>
+                <a:cs typeface="Aptos" pitchFamily="34" charset="-120"/>
+              </a:rPr>
+              <a:t>Key idea</a:t>
+            </a:r>
+            <a:endParaRPr lang="en-US" sz="950" dirty="0"/>
+          </a:p>
+        </p:txBody>
+      </p:sp>
+      <p:sp>
+        <p:nvSpPr>
+          <p:cNvPr id="11" name="Text 9"/>
+          <p:cNvSpPr/>
+          <p:nvPr/>
+        </p:nvSpPr>
+        <p:spPr>
+          <a:xfrm>
+            <a:off x="8074152" y="1856232"/>
+            <a:ext cx="2825496" cy="1261872"/>
+          </a:xfrm>
+          <a:prstGeom prst="rect">
+            <a:avLst/>
+          </a:prstGeom>
+          <a:noFill/>
+          <a:ln/>
+        </p:spPr>
+        <p:txBody>
+          <a:bodyPr wrap="square" lIns="0" tIns="0" rIns="0" bIns="0" rtlCol="0" anchor="t">
+            <a:normAutofit/>
+          </a:bodyPr>
+          <a:lstStyle/>
+          <a:p>
+            <a:pPr indent="0" marL="0">
+              <a:buNone/>
+            </a:pPr>
+            <a:r>
+              <a:rPr lang="en-US" sz="1250" dirty="0">
                 <a:solidFill>
                   <a:srgbClr val="17364A"/>
                 </a:solidFill>
@@ -7932,9 +14875,116 @@
                 <a:ea typeface="Aptos" pitchFamily="34" charset="-122"/>
                 <a:cs typeface="Aptos" pitchFamily="34" charset="-120"/>
               </a:rPr>
-              <a:t>NLP implementation begins with task definition. Extraction, classification, summarization, translation, topic modeling, and question answering are different tasks with different evaluation methods. A tool that performs well at summarization may perform poorly at extracting dates or classifying urgency. Staff should define the task narrowly before selecting or testing a tool. Evaluation should use representative source text. Test examples should include common language, uncommon language, abbreviations, misspellings, multilingual text, ambiguous statements, negation, sensitive information, and edge cases. Performance should be reviewed by people who understand the public health workflow, not only by technical staff. Privacy and source traceability are central. NLP may process sensitive case notes, complaints, or community feedback. The agency must define whether the data can be used, where processing occurs, how outputs are stored, who can access them, and how source text is preserved. For consequential uses, users should be able to trace extracted facts or summaries back to the original text.</a:t>
-            </a:r>
-            <a:endParaRPr lang="en-US" sz="1420" dirty="0"/>
+              <a:t>Summarization.</a:t>
+            </a:r>
+            <a:endParaRPr lang="en-US" sz="1250" dirty="0"/>
+          </a:p>
+        </p:txBody>
+      </p:sp>
+      <p:sp>
+        <p:nvSpPr>
+          <p:cNvPr id="12" name="Shape 10"/>
+          <p:cNvSpPr/>
+          <p:nvPr/>
+        </p:nvSpPr>
+        <p:spPr>
+          <a:xfrm>
+            <a:off x="7909560" y="3520440"/>
+            <a:ext cx="3154680" cy="1737360"/>
+          </a:xfrm>
+          <a:prstGeom prst="roundRect">
+            <a:avLst>
+              <a:gd name="adj" fmla="val 6316"/>
+            </a:avLst>
+          </a:prstGeom>
+          <a:solidFill>
+            <a:srgbClr val="EAF6F8"/>
+          </a:solidFill>
+          <a:ln w="12700">
+            <a:solidFill>
+              <a:srgbClr val="B9D7E6"/>
+            </a:solidFill>
+            <a:prstDash val="solid"/>
+          </a:ln>
+        </p:spPr>
+      </p:sp>
+      <p:sp>
+        <p:nvSpPr>
+          <p:cNvPr id="13" name="Text 11"/>
+          <p:cNvSpPr/>
+          <p:nvPr/>
+        </p:nvSpPr>
+        <p:spPr>
+          <a:xfrm>
+            <a:off x="8074152" y="3666744"/>
+            <a:ext cx="2825496" cy="201168"/>
+          </a:xfrm>
+          <a:prstGeom prst="rect">
+            <a:avLst/>
+          </a:prstGeom>
+          <a:noFill/>
+          <a:ln/>
+        </p:spPr>
+        <p:txBody>
+          <a:bodyPr wrap="square" lIns="0" tIns="0" rIns="0" bIns="0" rtlCol="0" anchor="ctr"/>
+          <a:lstStyle/>
+          <a:p>
+            <a:pPr indent="0" marL="0">
+              <a:buNone/>
+            </a:pPr>
+            <a:r>
+              <a:rPr lang="en-US" sz="950" b="1" dirty="0">
+                <a:solidFill>
+                  <a:srgbClr val="0068B7"/>
+                </a:solidFill>
+                <a:latin typeface="Aptos" pitchFamily="34" charset="0"/>
+                <a:ea typeface="Aptos" pitchFamily="34" charset="-122"/>
+                <a:cs typeface="Aptos" pitchFamily="34" charset="-120"/>
+              </a:rPr>
+              <a:t>Use this for</a:t>
+            </a:r>
+            <a:endParaRPr lang="en-US" sz="950" dirty="0"/>
+          </a:p>
+        </p:txBody>
+      </p:sp>
+      <p:sp>
+        <p:nvSpPr>
+          <p:cNvPr id="14" name="Text 12"/>
+          <p:cNvSpPr/>
+          <p:nvPr/>
+        </p:nvSpPr>
+        <p:spPr>
+          <a:xfrm>
+            <a:off x="8074152" y="3959352"/>
+            <a:ext cx="2825496" cy="1170432"/>
+          </a:xfrm>
+          <a:prstGeom prst="rect">
+            <a:avLst/>
+          </a:prstGeom>
+          <a:noFill/>
+          <a:ln/>
+        </p:spPr>
+        <p:txBody>
+          <a:bodyPr wrap="square" lIns="0" tIns="0" rIns="0" bIns="0" rtlCol="0" anchor="t">
+            <a:normAutofit/>
+          </a:bodyPr>
+          <a:lstStyle/>
+          <a:p>
+            <a:pPr indent="0" marL="0">
+              <a:buNone/>
+            </a:pPr>
+            <a:r>
+              <a:rPr lang="en-US" sz="1250" dirty="0">
+                <a:solidFill>
+                  <a:srgbClr val="17364A"/>
+                </a:solidFill>
+                <a:latin typeface="Aptos" pitchFamily="34" charset="0"/>
+                <a:ea typeface="Aptos" pitchFamily="34" charset="-122"/>
+                <a:cs typeface="Aptos" pitchFamily="34" charset="-120"/>
+              </a:rPr>
+              <a:t>Connect the concept to public health decisions, safeguards, documentation, or implementation work.</a:t>
+            </a:r>
+            <a:endParaRPr lang="en-US" sz="1250" dirty="0"/>
           </a:p>
         </p:txBody>
       </p:sp>

--- a/downloads/presentations/modules/lesson-02-natural-language-processing-for-public-health.pptx
+++ b/downloads/presentations/modules/lesson-02-natural-language-processing-for-public-health.pptx
@@ -2998,6 +2998,45 @@
           </a:p>
         </p:txBody>
       </p:sp>
+      <p:sp>
+        <p:nvSpPr>
+          <p:cNvPr id="8" name="Text 5"/>
+          <p:cNvSpPr/>
+          <p:nvPr/>
+        </p:nvSpPr>
+        <p:spPr>
+          <a:xfrm>
+            <a:off x="11137392" y="6510528"/>
+            <a:ext cx="411480" cy="201168"/>
+          </a:xfrm>
+          <a:prstGeom prst="rect">
+            <a:avLst/>
+          </a:prstGeom>
+          <a:noFill/>
+          <a:ln/>
+        </p:spPr>
+        <p:txBody>
+          <a:bodyPr wrap="square" lIns="0" tIns="0" rIns="0" bIns="0" rtlCol="0" anchor="ctr"/>
+          <a:lstStyle/>
+          <a:p>
+            <a:pPr algn="r" indent="0" marL="0">
+              <a:buNone/>
+            </a:pPr>
+            <a:r>
+              <a:rPr lang="en-US" sz="900" dirty="0">
+                <a:solidFill>
+                  <a:srgbClr val="5F7181"/>
+                </a:solidFill>
+                <a:latin typeface="Aptos" pitchFamily="34" charset="0"/>
+                <a:ea typeface="Aptos" pitchFamily="34" charset="-122"/>
+                <a:cs typeface="Aptos" pitchFamily="34" charset="-120"/>
+              </a:rPr>
+              <a:t>1</a:t>
+            </a:r>
+            <a:endParaRPr lang="en-US" sz="900" dirty="0"/>
+          </a:p>
+        </p:txBody>
+      </p:sp>
     </p:spTree>
   </p:cSld>
   <p:clrMapOvr>
@@ -3191,7 +3230,7 @@
                 <a:ea typeface="Aptos" pitchFamily="34" charset="-122"/>
                 <a:cs typeface="Aptos" pitchFamily="34" charset="-120"/>
               </a:rPr>
-              <a:t>© Paula Soper</a:t>
+              <a:t>Â© Paula Soper</a:t>
             </a:r>
             <a:endParaRPr lang="en-US" sz="800" dirty="0"/>
           </a:p>
@@ -3199,7 +3238,46 @@
       </p:sp>
       <p:sp>
         <p:nvSpPr>
-          <p:cNvPr id="7" name="Shape 5"/>
+          <p:cNvPr id="7" name="Text 5"/>
+          <p:cNvSpPr/>
+          <p:nvPr/>
+        </p:nvSpPr>
+        <p:spPr>
+          <a:xfrm>
+            <a:off x="11137392" y="6510528"/>
+            <a:ext cx="411480" cy="201168"/>
+          </a:xfrm>
+          <a:prstGeom prst="rect">
+            <a:avLst/>
+          </a:prstGeom>
+          <a:noFill/>
+          <a:ln/>
+        </p:spPr>
+        <p:txBody>
+          <a:bodyPr wrap="square" lIns="0" tIns="0" rIns="0" bIns="0" rtlCol="0" anchor="ctr"/>
+          <a:lstStyle/>
+          <a:p>
+            <a:pPr algn="r" indent="0" marL="0">
+              <a:buNone/>
+            </a:pPr>
+            <a:r>
+              <a:rPr lang="en-US" sz="900" dirty="0">
+                <a:solidFill>
+                  <a:srgbClr val="5F7181"/>
+                </a:solidFill>
+                <a:latin typeface="Aptos" pitchFamily="34" charset="0"/>
+                <a:ea typeface="Aptos" pitchFamily="34" charset="-122"/>
+                <a:cs typeface="Aptos" pitchFamily="34" charset="-120"/>
+              </a:rPr>
+              <a:t>10</a:t>
+            </a:r>
+            <a:endParaRPr lang="en-US" sz="900" dirty="0"/>
+          </a:p>
+        </p:txBody>
+      </p:sp>
+      <p:sp>
+        <p:nvSpPr>
+          <p:cNvPr id="8" name="Shape 6"/>
           <p:cNvSpPr/>
           <p:nvPr/>
         </p:nvSpPr>
@@ -3224,7 +3302,7 @@
       </p:sp>
       <p:sp>
         <p:nvSpPr>
-          <p:cNvPr id="8" name="Text 6"/>
+          <p:cNvPr id="9" name="Text 7"/>
           <p:cNvSpPr/>
           <p:nvPr/>
         </p:nvSpPr>
@@ -3263,14 +3341,14 @@
       </p:sp>
       <p:sp>
         <p:nvSpPr>
-          <p:cNvPr id="9" name="Text 7"/>
+          <p:cNvPr id="10" name="Text 8"/>
           <p:cNvSpPr/>
           <p:nvPr/>
         </p:nvSpPr>
         <p:spPr>
           <a:xfrm>
             <a:off x="640080" y="621792"/>
-            <a:ext cx="10881360" cy="566928"/>
+            <a:ext cx="10881360" cy="713232"/>
           </a:xfrm>
           <a:prstGeom prst="rect">
             <a:avLst/>
@@ -3288,7 +3366,7 @@
               <a:buNone/>
             </a:pPr>
             <a:r>
-              <a:rPr lang="en-US" sz="2700" b="1" dirty="0">
+              <a:rPr lang="en-US" sz="3400" b="1" dirty="0">
                 <a:solidFill>
                   <a:srgbClr val="003A63"/>
                 </a:solidFill>
@@ -3298,20 +3376,20 @@
               </a:rPr>
               <a:t>Public Health Example</a:t>
             </a:r>
-            <a:endParaRPr lang="en-US" sz="2700" dirty="0"/>
-          </a:p>
-        </p:txBody>
-      </p:sp>
-      <p:sp>
-        <p:nvSpPr>
-          <p:cNvPr id="10" name="Text 8"/>
-          <p:cNvSpPr/>
-          <p:nvPr/>
-        </p:nvSpPr>
-        <p:spPr>
-          <a:xfrm>
-            <a:off x="868680" y="1417320"/>
-            <a:ext cx="6675120" cy="4434840"/>
+            <a:endParaRPr lang="en-US" sz="3400" dirty="0"/>
+          </a:p>
+        </p:txBody>
+      </p:sp>
+      <p:sp>
+        <p:nvSpPr>
+          <p:cNvPr id="11" name="Text 9"/>
+          <p:cNvSpPr/>
+          <p:nvPr/>
+        </p:nvSpPr>
+        <p:spPr>
+          <a:xfrm>
+            <a:off x="868680" y="1508760"/>
+            <a:ext cx="6537960" cy="4160520"/>
           </a:xfrm>
           <a:prstGeom prst="rect">
             <a:avLst/>
@@ -3326,7 +3404,7 @@
           <a:lstStyle/>
           <a:p>
             <a:r>
-              <a:rPr lang="en-US" sz="1700" dirty="0">
+              <a:rPr lang="en-US" sz="2100" dirty="0">
                 <a:solidFill>
                   <a:srgbClr val="17364A"/>
                 </a:solidFill>
@@ -3336,11 +3414,11 @@
               </a:rPr>
               <a:t>A contact center may receive hundreds of public inquiries during an outbreak.</a:t>
             </a:r>
-            <a:endParaRPr lang="en-US" sz="1700" dirty="0"/>
-          </a:p>
-          <a:p>
-            <a:r>
-              <a:rPr lang="en-US" sz="1700" dirty="0">
+            <a:endParaRPr lang="en-US" sz="2100" dirty="0"/>
+          </a:p>
+          <a:p>
+            <a:r>
+              <a:rPr lang="en-US" sz="2100" dirty="0">
                 <a:solidFill>
                   <a:srgbClr val="17364A"/>
                 </a:solidFill>
@@ -3348,13 +3426,13 @@
                 <a:ea typeface="Aptos" pitchFamily="34" charset="-122"/>
                 <a:cs typeface="Aptos" pitchFamily="34" charset="-120"/>
               </a:rPr>
-              <a:t>NLP could classify messages by topic, identify urgent issues, and draft response summaries for staff review.</a:t>
-            </a:r>
-            <a:endParaRPr lang="en-US" sz="1700" dirty="0"/>
-          </a:p>
-          <a:p>
-            <a:r>
-              <a:rPr lang="en-US" sz="1700" dirty="0">
+              <a:t>NLP could classify messages by topic, identify urgent issues, and draft response summaries for staff.</a:t>
+            </a:r>
+            <a:endParaRPr lang="en-US" sz="2100" dirty="0"/>
+          </a:p>
+          <a:p>
+            <a:r>
+              <a:rPr lang="en-US" sz="2100" dirty="0">
                 <a:solidFill>
                   <a:srgbClr val="17364A"/>
                 </a:solidFill>
@@ -3362,29 +3440,15 @@
                 <a:ea typeface="Aptos" pitchFamily="34" charset="-122"/>
                 <a:cs typeface="Aptos" pitchFamily="34" charset="-120"/>
               </a:rPr>
-              <a:t>This can improve timeliness, but messages may contain sensitive information, emotional language, misinformation, or.</a:t>
-            </a:r>
-            <a:endParaRPr lang="en-US" sz="1700" dirty="0"/>
-          </a:p>
-          <a:p>
-            <a:r>
-              <a:rPr lang="en-US" sz="1700" dirty="0">
-                <a:solidFill>
-                  <a:srgbClr val="17364A"/>
-                </a:solidFill>
-                <a:latin typeface="Aptos" pitchFamily="34" charset="0"/>
-                <a:ea typeface="Aptos" pitchFamily="34" charset="-122"/>
-                <a:cs typeface="Aptos" pitchFamily="34" charset="-120"/>
-              </a:rPr>
-              <a:t>Staff need review procedures and escalation criteria.</a:t>
-            </a:r>
-            <a:endParaRPr lang="en-US" sz="1700" dirty="0"/>
-          </a:p>
-        </p:txBody>
-      </p:sp>
-      <p:sp>
-        <p:nvSpPr>
-          <p:cNvPr id="11" name="Shape 9"/>
+              <a:t>This can improve timeliness, but messages may contain sensitive information, emotional language,.</a:t>
+            </a:r>
+            <a:endParaRPr lang="en-US" sz="2100" dirty="0"/>
+          </a:p>
+        </p:txBody>
+      </p:sp>
+      <p:sp>
+        <p:nvSpPr>
+          <p:cNvPr id="12" name="Shape 10"/>
           <p:cNvSpPr/>
           <p:nvPr/>
         </p:nvSpPr>
@@ -3411,14 +3475,14 @@
       </p:sp>
       <p:sp>
         <p:nvSpPr>
-          <p:cNvPr id="12" name="Text 10"/>
+          <p:cNvPr id="13" name="Text 11"/>
           <p:cNvSpPr/>
           <p:nvPr/>
         </p:nvSpPr>
         <p:spPr>
           <a:xfrm>
             <a:off x="8074152" y="1563624"/>
-            <a:ext cx="2825496" cy="201168"/>
+            <a:ext cx="2825496" cy="256032"/>
           </a:xfrm>
           <a:prstGeom prst="rect">
             <a:avLst/>
@@ -3434,7 +3498,7 @@
               <a:buNone/>
             </a:pPr>
             <a:r>
-              <a:rPr lang="en-US" sz="950" b="1" dirty="0">
+              <a:rPr lang="en-US" sz="1300" b="1" dirty="0">
                 <a:solidFill>
                   <a:srgbClr val="0068B7"/>
                 </a:solidFill>
@@ -3444,20 +3508,20 @@
               </a:rPr>
               <a:t>Key idea</a:t>
             </a:r>
-            <a:endParaRPr lang="en-US" sz="950" dirty="0"/>
-          </a:p>
-        </p:txBody>
-      </p:sp>
-      <p:sp>
-        <p:nvSpPr>
-          <p:cNvPr id="13" name="Text 11"/>
-          <p:cNvSpPr/>
-          <p:nvPr/>
-        </p:nvSpPr>
-        <p:spPr>
-          <a:xfrm>
-            <a:off x="8074152" y="1856232"/>
-            <a:ext cx="2825496" cy="1261872"/>
+            <a:endParaRPr lang="en-US" sz="1300" dirty="0"/>
+          </a:p>
+        </p:txBody>
+      </p:sp>
+      <p:sp>
+        <p:nvSpPr>
+          <p:cNvPr id="14" name="Text 12"/>
+          <p:cNvSpPr/>
+          <p:nvPr/>
+        </p:nvSpPr>
+        <p:spPr>
+          <a:xfrm>
+            <a:off x="8074152" y="1920240"/>
+            <a:ext cx="2825496" cy="1188720"/>
           </a:xfrm>
           <a:prstGeom prst="rect">
             <a:avLst/>
@@ -3475,7 +3539,7 @@
               <a:buNone/>
             </a:pPr>
             <a:r>
-              <a:rPr lang="en-US" sz="1250" dirty="0">
+              <a:rPr lang="en-US" sz="1550" dirty="0">
                 <a:solidFill>
                   <a:srgbClr val="17364A"/>
                 </a:solidFill>
@@ -3485,13 +3549,13 @@
               </a:rPr>
               <a:t>A contact center may receive hundreds of public inquiries during an outbreak.</a:t>
             </a:r>
-            <a:endParaRPr lang="en-US" sz="1250" dirty="0"/>
-          </a:p>
-        </p:txBody>
-      </p:sp>
-      <p:sp>
-        <p:nvSpPr>
-          <p:cNvPr id="14" name="Shape 12"/>
+            <a:endParaRPr lang="en-US" sz="1550" dirty="0"/>
+          </a:p>
+        </p:txBody>
+      </p:sp>
+      <p:sp>
+        <p:nvSpPr>
+          <p:cNvPr id="15" name="Shape 13"/>
           <p:cNvSpPr/>
           <p:nvPr/>
         </p:nvSpPr>
@@ -3518,14 +3582,14 @@
       </p:sp>
       <p:sp>
         <p:nvSpPr>
-          <p:cNvPr id="15" name="Text 13"/>
+          <p:cNvPr id="16" name="Text 14"/>
           <p:cNvSpPr/>
           <p:nvPr/>
         </p:nvSpPr>
         <p:spPr>
           <a:xfrm>
             <a:off x="8074152" y="3666744"/>
-            <a:ext cx="2825496" cy="201168"/>
+            <a:ext cx="2825496" cy="256032"/>
           </a:xfrm>
           <a:prstGeom prst="rect">
             <a:avLst/>
@@ -3541,7 +3605,7 @@
               <a:buNone/>
             </a:pPr>
             <a:r>
-              <a:rPr lang="en-US" sz="950" b="1" dirty="0">
+              <a:rPr lang="en-US" sz="1300" b="1" dirty="0">
                 <a:solidFill>
                   <a:srgbClr val="0068B7"/>
                 </a:solidFill>
@@ -3551,20 +3615,20 @@
               </a:rPr>
               <a:t>Use this for</a:t>
             </a:r>
-            <a:endParaRPr lang="en-US" sz="950" dirty="0"/>
-          </a:p>
-        </p:txBody>
-      </p:sp>
-      <p:sp>
-        <p:nvSpPr>
-          <p:cNvPr id="16" name="Text 14"/>
-          <p:cNvSpPr/>
-          <p:nvPr/>
-        </p:nvSpPr>
-        <p:spPr>
-          <a:xfrm>
-            <a:off x="8074152" y="3959352"/>
-            <a:ext cx="2825496" cy="1170432"/>
+            <a:endParaRPr lang="en-US" sz="1300" dirty="0"/>
+          </a:p>
+        </p:txBody>
+      </p:sp>
+      <p:sp>
+        <p:nvSpPr>
+          <p:cNvPr id="17" name="Text 15"/>
+          <p:cNvSpPr/>
+          <p:nvPr/>
+        </p:nvSpPr>
+        <p:spPr>
+          <a:xfrm>
+            <a:off x="8074152" y="4023360"/>
+            <a:ext cx="2825496" cy="1097280"/>
           </a:xfrm>
           <a:prstGeom prst="rect">
             <a:avLst/>
@@ -3582,7 +3646,7 @@
               <a:buNone/>
             </a:pPr>
             <a:r>
-              <a:rPr lang="en-US" sz="1250" dirty="0">
+              <a:rPr lang="en-US" sz="1550" dirty="0">
                 <a:solidFill>
                   <a:srgbClr val="17364A"/>
                 </a:solidFill>
@@ -3592,7 +3656,7 @@
               </a:rPr>
               <a:t>Connect the concept to public health decisions, safeguards, documentation, or implementation work.</a:t>
             </a:r>
-            <a:endParaRPr lang="en-US" sz="1250" dirty="0"/>
+            <a:endParaRPr lang="en-US" sz="1550" dirty="0"/>
           </a:p>
         </p:txBody>
       </p:sp>
@@ -3789,7 +3853,7 @@
                 <a:ea typeface="Aptos" pitchFamily="34" charset="-122"/>
                 <a:cs typeface="Aptos" pitchFamily="34" charset="-120"/>
               </a:rPr>
-              <a:t>© Paula Soper</a:t>
+              <a:t>Â© Paula Soper</a:t>
             </a:r>
             <a:endParaRPr lang="en-US" sz="800" dirty="0"/>
           </a:p>
@@ -3797,7 +3861,46 @@
       </p:sp>
       <p:sp>
         <p:nvSpPr>
-          <p:cNvPr id="7" name="Shape 5"/>
+          <p:cNvPr id="7" name="Text 5"/>
+          <p:cNvSpPr/>
+          <p:nvPr/>
+        </p:nvSpPr>
+        <p:spPr>
+          <a:xfrm>
+            <a:off x="11137392" y="6510528"/>
+            <a:ext cx="411480" cy="201168"/>
+          </a:xfrm>
+          <a:prstGeom prst="rect">
+            <a:avLst/>
+          </a:prstGeom>
+          <a:noFill/>
+          <a:ln/>
+        </p:spPr>
+        <p:txBody>
+          <a:bodyPr wrap="square" lIns="0" tIns="0" rIns="0" bIns="0" rtlCol="0" anchor="ctr"/>
+          <a:lstStyle/>
+          <a:p>
+            <a:pPr algn="r" indent="0" marL="0">
+              <a:buNone/>
+            </a:pPr>
+            <a:r>
+              <a:rPr lang="en-US" sz="900" dirty="0">
+                <a:solidFill>
+                  <a:srgbClr val="5F7181"/>
+                </a:solidFill>
+                <a:latin typeface="Aptos" pitchFamily="34" charset="0"/>
+                <a:ea typeface="Aptos" pitchFamily="34" charset="-122"/>
+                <a:cs typeface="Aptos" pitchFamily="34" charset="-120"/>
+              </a:rPr>
+              <a:t>11</a:t>
+            </a:r>
+            <a:endParaRPr lang="en-US" sz="900" dirty="0"/>
+          </a:p>
+        </p:txBody>
+      </p:sp>
+      <p:sp>
+        <p:nvSpPr>
+          <p:cNvPr id="8" name="Shape 6"/>
           <p:cNvSpPr/>
           <p:nvPr/>
         </p:nvSpPr>
@@ -3822,7 +3925,7 @@
       </p:sp>
       <p:sp>
         <p:nvSpPr>
-          <p:cNvPr id="8" name="Text 6"/>
+          <p:cNvPr id="9" name="Text 7"/>
           <p:cNvSpPr/>
           <p:nvPr/>
         </p:nvSpPr>
@@ -3861,14 +3964,14 @@
       </p:sp>
       <p:sp>
         <p:nvSpPr>
-          <p:cNvPr id="9" name="Text 7"/>
+          <p:cNvPr id="10" name="Text 8"/>
           <p:cNvSpPr/>
           <p:nvPr/>
         </p:nvSpPr>
         <p:spPr>
           <a:xfrm>
             <a:off x="640080" y="621792"/>
-            <a:ext cx="10881360" cy="566928"/>
+            <a:ext cx="10881360" cy="713232"/>
           </a:xfrm>
           <a:prstGeom prst="rect">
             <a:avLst/>
@@ -3886,7 +3989,7 @@
               <a:buNone/>
             </a:pPr>
             <a:r>
-              <a:rPr lang="en-US" sz="2700" b="1" dirty="0">
+              <a:rPr lang="en-US" sz="3400" b="1" dirty="0">
                 <a:solidFill>
                   <a:srgbClr val="003A63"/>
                 </a:solidFill>
@@ -3896,20 +3999,20 @@
               </a:rPr>
               <a:t>Technical Deep Dive</a:t>
             </a:r>
-            <a:endParaRPr lang="en-US" sz="2700" dirty="0"/>
-          </a:p>
-        </p:txBody>
-      </p:sp>
-      <p:sp>
-        <p:nvSpPr>
-          <p:cNvPr id="10" name="Text 8"/>
-          <p:cNvSpPr/>
-          <p:nvPr/>
-        </p:nvSpPr>
-        <p:spPr>
-          <a:xfrm>
-            <a:off x="868680" y="1417320"/>
-            <a:ext cx="6675120" cy="4434840"/>
+            <a:endParaRPr lang="en-US" sz="3400" dirty="0"/>
+          </a:p>
+        </p:txBody>
+      </p:sp>
+      <p:sp>
+        <p:nvSpPr>
+          <p:cNvPr id="11" name="Text 9"/>
+          <p:cNvSpPr/>
+          <p:nvPr/>
+        </p:nvSpPr>
+        <p:spPr>
+          <a:xfrm>
+            <a:off x="868680" y="1508760"/>
+            <a:ext cx="6537960" cy="4160520"/>
           </a:xfrm>
           <a:prstGeom prst="rect">
             <a:avLst/>
@@ -3924,7 +4027,7 @@
           <a:lstStyle/>
           <a:p>
             <a:r>
-              <a:rPr lang="en-US" sz="1700" dirty="0">
+              <a:rPr lang="en-US" sz="2100" dirty="0">
                 <a:solidFill>
                   <a:srgbClr val="17364A"/>
                 </a:solidFill>
@@ -3934,11 +4037,11 @@
               </a:rPr>
               <a:t>NLP implementation begins with task definition.</a:t>
             </a:r>
-            <a:endParaRPr lang="en-US" sz="1700" dirty="0"/>
-          </a:p>
-          <a:p>
-            <a:r>
-              <a:rPr lang="en-US" sz="1700" dirty="0">
+            <a:endParaRPr lang="en-US" sz="2100" dirty="0"/>
+          </a:p>
+          <a:p>
+            <a:r>
+              <a:rPr lang="en-US" sz="2100" dirty="0">
                 <a:solidFill>
                   <a:srgbClr val="17364A"/>
                 </a:solidFill>
@@ -3946,13 +4049,13 @@
                 <a:ea typeface="Aptos" pitchFamily="34" charset="-122"/>
                 <a:cs typeface="Aptos" pitchFamily="34" charset="-120"/>
               </a:rPr>
-              <a:t>Extraction, classification, summarization, translation, topic modeling, and question answering are different tasks with.</a:t>
-            </a:r>
-            <a:endParaRPr lang="en-US" sz="1700" dirty="0"/>
-          </a:p>
-          <a:p>
-            <a:r>
-              <a:rPr lang="en-US" sz="1700" dirty="0">
+              <a:t>Extraction, classification, summarization, translation, topic modeling, and question answering are.</a:t>
+            </a:r>
+            <a:endParaRPr lang="en-US" sz="2100" dirty="0"/>
+          </a:p>
+          <a:p>
+            <a:r>
+              <a:rPr lang="en-US" sz="2100" dirty="0">
                 <a:solidFill>
                   <a:srgbClr val="17364A"/>
                 </a:solidFill>
@@ -3962,27 +4065,13 @@
               </a:rPr>
               <a:t>A tool that performs well at summarization may perform poorly at extracting dates or classifying urgency.</a:t>
             </a:r>
-            <a:endParaRPr lang="en-US" sz="1700" dirty="0"/>
-          </a:p>
-          <a:p>
-            <a:r>
-              <a:rPr lang="en-US" sz="1700" dirty="0">
-                <a:solidFill>
-                  <a:srgbClr val="17364A"/>
-                </a:solidFill>
-                <a:latin typeface="Aptos" pitchFamily="34" charset="0"/>
-                <a:ea typeface="Aptos" pitchFamily="34" charset="-122"/>
-                <a:cs typeface="Aptos" pitchFamily="34" charset="-120"/>
-              </a:rPr>
-              <a:t>Staff should define the task narrowly before selecting or testing a tool.</a:t>
-            </a:r>
-            <a:endParaRPr lang="en-US" sz="1700" dirty="0"/>
-          </a:p>
-        </p:txBody>
-      </p:sp>
-      <p:sp>
-        <p:nvSpPr>
-          <p:cNvPr id="11" name="Shape 9"/>
+            <a:endParaRPr lang="en-US" sz="2100" dirty="0"/>
+          </a:p>
+        </p:txBody>
+      </p:sp>
+      <p:sp>
+        <p:nvSpPr>
+          <p:cNvPr id="12" name="Shape 10"/>
           <p:cNvSpPr/>
           <p:nvPr/>
         </p:nvSpPr>
@@ -4009,14 +4098,14 @@
       </p:sp>
       <p:sp>
         <p:nvSpPr>
-          <p:cNvPr id="12" name="Text 10"/>
+          <p:cNvPr id="13" name="Text 11"/>
           <p:cNvSpPr/>
           <p:nvPr/>
         </p:nvSpPr>
         <p:spPr>
           <a:xfrm>
             <a:off x="8074152" y="1563624"/>
-            <a:ext cx="2825496" cy="201168"/>
+            <a:ext cx="2825496" cy="256032"/>
           </a:xfrm>
           <a:prstGeom prst="rect">
             <a:avLst/>
@@ -4032,7 +4121,7 @@
               <a:buNone/>
             </a:pPr>
             <a:r>
-              <a:rPr lang="en-US" sz="950" b="1" dirty="0">
+              <a:rPr lang="en-US" sz="1300" b="1" dirty="0">
                 <a:solidFill>
                   <a:srgbClr val="0068B7"/>
                 </a:solidFill>
@@ -4042,20 +4131,20 @@
               </a:rPr>
               <a:t>Key idea</a:t>
             </a:r>
-            <a:endParaRPr lang="en-US" sz="950" dirty="0"/>
-          </a:p>
-        </p:txBody>
-      </p:sp>
-      <p:sp>
-        <p:nvSpPr>
-          <p:cNvPr id="13" name="Text 11"/>
-          <p:cNvSpPr/>
-          <p:nvPr/>
-        </p:nvSpPr>
-        <p:spPr>
-          <a:xfrm>
-            <a:off x="8074152" y="1856232"/>
-            <a:ext cx="2825496" cy="1261872"/>
+            <a:endParaRPr lang="en-US" sz="1300" dirty="0"/>
+          </a:p>
+        </p:txBody>
+      </p:sp>
+      <p:sp>
+        <p:nvSpPr>
+          <p:cNvPr id="14" name="Text 12"/>
+          <p:cNvSpPr/>
+          <p:nvPr/>
+        </p:nvSpPr>
+        <p:spPr>
+          <a:xfrm>
+            <a:off x="8074152" y="1920240"/>
+            <a:ext cx="2825496" cy="1188720"/>
           </a:xfrm>
           <a:prstGeom prst="rect">
             <a:avLst/>
@@ -4073,7 +4162,7 @@
               <a:buNone/>
             </a:pPr>
             <a:r>
-              <a:rPr lang="en-US" sz="1250" dirty="0">
+              <a:rPr lang="en-US" sz="1550" dirty="0">
                 <a:solidFill>
                   <a:srgbClr val="17364A"/>
                 </a:solidFill>
@@ -4083,13 +4172,13 @@
               </a:rPr>
               <a:t>NLP implementation begins with task definition.</a:t>
             </a:r>
-            <a:endParaRPr lang="en-US" sz="1250" dirty="0"/>
-          </a:p>
-        </p:txBody>
-      </p:sp>
-      <p:sp>
-        <p:nvSpPr>
-          <p:cNvPr id="14" name="Shape 12"/>
+            <a:endParaRPr lang="en-US" sz="1550" dirty="0"/>
+          </a:p>
+        </p:txBody>
+      </p:sp>
+      <p:sp>
+        <p:nvSpPr>
+          <p:cNvPr id="15" name="Shape 13"/>
           <p:cNvSpPr/>
           <p:nvPr/>
         </p:nvSpPr>
@@ -4116,14 +4205,14 @@
       </p:sp>
       <p:sp>
         <p:nvSpPr>
-          <p:cNvPr id="15" name="Text 13"/>
+          <p:cNvPr id="16" name="Text 14"/>
           <p:cNvSpPr/>
           <p:nvPr/>
         </p:nvSpPr>
         <p:spPr>
           <a:xfrm>
             <a:off x="8074152" y="3666744"/>
-            <a:ext cx="2825496" cy="201168"/>
+            <a:ext cx="2825496" cy="256032"/>
           </a:xfrm>
           <a:prstGeom prst="rect">
             <a:avLst/>
@@ -4139,7 +4228,7 @@
               <a:buNone/>
             </a:pPr>
             <a:r>
-              <a:rPr lang="en-US" sz="950" b="1" dirty="0">
+              <a:rPr lang="en-US" sz="1300" b="1" dirty="0">
                 <a:solidFill>
                   <a:srgbClr val="0068B7"/>
                 </a:solidFill>
@@ -4149,20 +4238,20 @@
               </a:rPr>
               <a:t>Use this for</a:t>
             </a:r>
-            <a:endParaRPr lang="en-US" sz="950" dirty="0"/>
-          </a:p>
-        </p:txBody>
-      </p:sp>
-      <p:sp>
-        <p:nvSpPr>
-          <p:cNvPr id="16" name="Text 14"/>
-          <p:cNvSpPr/>
-          <p:nvPr/>
-        </p:nvSpPr>
-        <p:spPr>
-          <a:xfrm>
-            <a:off x="8074152" y="3959352"/>
-            <a:ext cx="2825496" cy="1170432"/>
+            <a:endParaRPr lang="en-US" sz="1300" dirty="0"/>
+          </a:p>
+        </p:txBody>
+      </p:sp>
+      <p:sp>
+        <p:nvSpPr>
+          <p:cNvPr id="17" name="Text 15"/>
+          <p:cNvSpPr/>
+          <p:nvPr/>
+        </p:nvSpPr>
+        <p:spPr>
+          <a:xfrm>
+            <a:off x="8074152" y="4023360"/>
+            <a:ext cx="2825496" cy="1097280"/>
           </a:xfrm>
           <a:prstGeom prst="rect">
             <a:avLst/>
@@ -4180,7 +4269,7 @@
               <a:buNone/>
             </a:pPr>
             <a:r>
-              <a:rPr lang="en-US" sz="1250" dirty="0">
+              <a:rPr lang="en-US" sz="1550" dirty="0">
                 <a:solidFill>
                   <a:srgbClr val="17364A"/>
                 </a:solidFill>
@@ -4190,7 +4279,7 @@
               </a:rPr>
               <a:t>Connect the concept to public health decisions, safeguards, documentation, or implementation work.</a:t>
             </a:r>
-            <a:endParaRPr lang="en-US" sz="1250" dirty="0"/>
+            <a:endParaRPr lang="en-US" sz="1550" dirty="0"/>
           </a:p>
         </p:txBody>
       </p:sp>
@@ -4387,7 +4476,7 @@
                 <a:ea typeface="Aptos" pitchFamily="34" charset="-122"/>
                 <a:cs typeface="Aptos" pitchFamily="34" charset="-120"/>
               </a:rPr>
-              <a:t>© Paula Soper</a:t>
+              <a:t>Â© Paula Soper</a:t>
             </a:r>
             <a:endParaRPr lang="en-US" sz="800" dirty="0"/>
           </a:p>
@@ -4395,7 +4484,46 @@
       </p:sp>
       <p:sp>
         <p:nvSpPr>
-          <p:cNvPr id="7" name="Shape 5"/>
+          <p:cNvPr id="7" name="Text 5"/>
+          <p:cNvSpPr/>
+          <p:nvPr/>
+        </p:nvSpPr>
+        <p:spPr>
+          <a:xfrm>
+            <a:off x="11137392" y="6510528"/>
+            <a:ext cx="411480" cy="201168"/>
+          </a:xfrm>
+          <a:prstGeom prst="rect">
+            <a:avLst/>
+          </a:prstGeom>
+          <a:noFill/>
+          <a:ln/>
+        </p:spPr>
+        <p:txBody>
+          <a:bodyPr wrap="square" lIns="0" tIns="0" rIns="0" bIns="0" rtlCol="0" anchor="ctr"/>
+          <a:lstStyle/>
+          <a:p>
+            <a:pPr algn="r" indent="0" marL="0">
+              <a:buNone/>
+            </a:pPr>
+            <a:r>
+              <a:rPr lang="en-US" sz="900" dirty="0">
+                <a:solidFill>
+                  <a:srgbClr val="5F7181"/>
+                </a:solidFill>
+                <a:latin typeface="Aptos" pitchFamily="34" charset="0"/>
+                <a:ea typeface="Aptos" pitchFamily="34" charset="-122"/>
+                <a:cs typeface="Aptos" pitchFamily="34" charset="-120"/>
+              </a:rPr>
+              <a:t>12</a:t>
+            </a:r>
+            <a:endParaRPr lang="en-US" sz="900" dirty="0"/>
+          </a:p>
+        </p:txBody>
+      </p:sp>
+      <p:sp>
+        <p:nvSpPr>
+          <p:cNvPr id="8" name="Shape 6"/>
           <p:cNvSpPr/>
           <p:nvPr/>
         </p:nvSpPr>
@@ -4420,7 +4548,7 @@
       </p:sp>
       <p:sp>
         <p:nvSpPr>
-          <p:cNvPr id="8" name="Text 6"/>
+          <p:cNvPr id="9" name="Text 7"/>
           <p:cNvSpPr/>
           <p:nvPr/>
         </p:nvSpPr>
@@ -4459,14 +4587,14 @@
       </p:sp>
       <p:sp>
         <p:nvSpPr>
-          <p:cNvPr id="9" name="Text 7"/>
+          <p:cNvPr id="10" name="Text 8"/>
           <p:cNvSpPr/>
           <p:nvPr/>
         </p:nvSpPr>
         <p:spPr>
           <a:xfrm>
             <a:off x="640080" y="621792"/>
-            <a:ext cx="10881360" cy="566928"/>
+            <a:ext cx="10881360" cy="713232"/>
           </a:xfrm>
           <a:prstGeom prst="rect">
             <a:avLst/>
@@ -4484,7 +4612,7 @@
               <a:buNone/>
             </a:pPr>
             <a:r>
-              <a:rPr lang="en-US" sz="2700" b="1" dirty="0">
+              <a:rPr lang="en-US" sz="3400" b="1" dirty="0">
                 <a:solidFill>
                   <a:srgbClr val="003A63"/>
                 </a:solidFill>
@@ -4494,20 +4622,20 @@
               </a:rPr>
               <a:t>Risks, Failure Modes, and Guardrails</a:t>
             </a:r>
-            <a:endParaRPr lang="en-US" sz="2700" dirty="0"/>
-          </a:p>
-        </p:txBody>
-      </p:sp>
-      <p:sp>
-        <p:nvSpPr>
-          <p:cNvPr id="10" name="Text 8"/>
-          <p:cNvSpPr/>
-          <p:nvPr/>
-        </p:nvSpPr>
-        <p:spPr>
-          <a:xfrm>
-            <a:off x="868680" y="1417320"/>
-            <a:ext cx="6675120" cy="4434840"/>
+            <a:endParaRPr lang="en-US" sz="3400" dirty="0"/>
+          </a:p>
+        </p:txBody>
+      </p:sp>
+      <p:sp>
+        <p:nvSpPr>
+          <p:cNvPr id="11" name="Text 9"/>
+          <p:cNvSpPr/>
+          <p:nvPr/>
+        </p:nvSpPr>
+        <p:spPr>
+          <a:xfrm>
+            <a:off x="868680" y="1508760"/>
+            <a:ext cx="6537960" cy="4160520"/>
           </a:xfrm>
           <a:prstGeom prst="rect">
             <a:avLst/>
@@ -4522,7 +4650,7 @@
           <a:lstStyle/>
           <a:p>
             <a:r>
-              <a:rPr lang="en-US" sz="1700" dirty="0">
+              <a:rPr lang="en-US" sz="2100" dirty="0">
                 <a:solidFill>
                   <a:srgbClr val="17364A"/>
                 </a:solidFill>
@@ -4532,11 +4660,11 @@
               </a:rPr>
               <a:t>Unsupported summaries.</a:t>
             </a:r>
-            <a:endParaRPr lang="en-US" sz="1700" dirty="0"/>
-          </a:p>
-          <a:p>
-            <a:r>
-              <a:rPr lang="en-US" sz="1700" dirty="0">
+            <a:endParaRPr lang="en-US" sz="2100" dirty="0"/>
+          </a:p>
+          <a:p>
+            <a:r>
+              <a:rPr lang="en-US" sz="2100" dirty="0">
                 <a:solidFill>
                   <a:srgbClr val="17364A"/>
                 </a:solidFill>
@@ -4546,11 +4674,11 @@
               </a:rPr>
               <a:t>NLP tools may omit, distort, or invent information.</a:t>
             </a:r>
-            <a:endParaRPr lang="en-US" sz="1700" dirty="0"/>
-          </a:p>
-          <a:p>
-            <a:r>
-              <a:rPr lang="en-US" sz="1700" dirty="0">
+            <a:endParaRPr lang="en-US" sz="2100" dirty="0"/>
+          </a:p>
+          <a:p>
+            <a:r>
+              <a:rPr lang="en-US" sz="2100" dirty="0">
                 <a:solidFill>
                   <a:srgbClr val="17364A"/>
                 </a:solidFill>
@@ -4560,27 +4688,13 @@
               </a:rPr>
               <a:t>Guardrails include source review, citations, factuality checks, and human approval.</a:t>
             </a:r>
-            <a:endParaRPr lang="en-US" sz="1700" dirty="0"/>
-          </a:p>
-          <a:p>
-            <a:r>
-              <a:rPr lang="en-US" sz="1700" dirty="0">
-                <a:solidFill>
-                  <a:srgbClr val="17364A"/>
-                </a:solidFill>
-                <a:latin typeface="Aptos" pitchFamily="34" charset="0"/>
-                <a:ea typeface="Aptos" pitchFamily="34" charset="-122"/>
-                <a:cs typeface="Aptos" pitchFamily="34" charset="-120"/>
-              </a:rPr>
-              <a:t>Language and accessibility gaps.</a:t>
-            </a:r>
-            <a:endParaRPr lang="en-US" sz="1700" dirty="0"/>
-          </a:p>
-        </p:txBody>
-      </p:sp>
-      <p:sp>
-        <p:nvSpPr>
-          <p:cNvPr id="11" name="Shape 9"/>
+            <a:endParaRPr lang="en-US" sz="2100" dirty="0"/>
+          </a:p>
+        </p:txBody>
+      </p:sp>
+      <p:sp>
+        <p:nvSpPr>
+          <p:cNvPr id="12" name="Shape 10"/>
           <p:cNvSpPr/>
           <p:nvPr/>
         </p:nvSpPr>
@@ -4607,14 +4721,14 @@
       </p:sp>
       <p:sp>
         <p:nvSpPr>
-          <p:cNvPr id="12" name="Text 10"/>
+          <p:cNvPr id="13" name="Text 11"/>
           <p:cNvSpPr/>
           <p:nvPr/>
         </p:nvSpPr>
         <p:spPr>
           <a:xfrm>
             <a:off x="8074152" y="1563624"/>
-            <a:ext cx="2825496" cy="201168"/>
+            <a:ext cx="2825496" cy="256032"/>
           </a:xfrm>
           <a:prstGeom prst="rect">
             <a:avLst/>
@@ -4630,7 +4744,7 @@
               <a:buNone/>
             </a:pPr>
             <a:r>
-              <a:rPr lang="en-US" sz="950" b="1" dirty="0">
+              <a:rPr lang="en-US" sz="1300" b="1" dirty="0">
                 <a:solidFill>
                   <a:srgbClr val="0068B7"/>
                 </a:solidFill>
@@ -4640,20 +4754,20 @@
               </a:rPr>
               <a:t>Key idea</a:t>
             </a:r>
-            <a:endParaRPr lang="en-US" sz="950" dirty="0"/>
-          </a:p>
-        </p:txBody>
-      </p:sp>
-      <p:sp>
-        <p:nvSpPr>
-          <p:cNvPr id="13" name="Text 11"/>
-          <p:cNvSpPr/>
-          <p:nvPr/>
-        </p:nvSpPr>
-        <p:spPr>
-          <a:xfrm>
-            <a:off x="8074152" y="1856232"/>
-            <a:ext cx="2825496" cy="1261872"/>
+            <a:endParaRPr lang="en-US" sz="1300" dirty="0"/>
+          </a:p>
+        </p:txBody>
+      </p:sp>
+      <p:sp>
+        <p:nvSpPr>
+          <p:cNvPr id="14" name="Text 12"/>
+          <p:cNvSpPr/>
+          <p:nvPr/>
+        </p:nvSpPr>
+        <p:spPr>
+          <a:xfrm>
+            <a:off x="8074152" y="1920240"/>
+            <a:ext cx="2825496" cy="1188720"/>
           </a:xfrm>
           <a:prstGeom prst="rect">
             <a:avLst/>
@@ -4671,7 +4785,7 @@
               <a:buNone/>
             </a:pPr>
             <a:r>
-              <a:rPr lang="en-US" sz="1250" dirty="0">
+              <a:rPr lang="en-US" sz="1550" dirty="0">
                 <a:solidFill>
                   <a:srgbClr val="17364A"/>
                 </a:solidFill>
@@ -4681,13 +4795,13 @@
               </a:rPr>
               <a:t>Unsupported summaries.</a:t>
             </a:r>
-            <a:endParaRPr lang="en-US" sz="1250" dirty="0"/>
-          </a:p>
-        </p:txBody>
-      </p:sp>
-      <p:sp>
-        <p:nvSpPr>
-          <p:cNvPr id="14" name="Shape 12"/>
+            <a:endParaRPr lang="en-US" sz="1550" dirty="0"/>
+          </a:p>
+        </p:txBody>
+      </p:sp>
+      <p:sp>
+        <p:nvSpPr>
+          <p:cNvPr id="15" name="Shape 13"/>
           <p:cNvSpPr/>
           <p:nvPr/>
         </p:nvSpPr>
@@ -4714,14 +4828,14 @@
       </p:sp>
       <p:sp>
         <p:nvSpPr>
-          <p:cNvPr id="15" name="Text 13"/>
+          <p:cNvPr id="16" name="Text 14"/>
           <p:cNvSpPr/>
           <p:nvPr/>
         </p:nvSpPr>
         <p:spPr>
           <a:xfrm>
             <a:off x="8074152" y="3666744"/>
-            <a:ext cx="2825496" cy="201168"/>
+            <a:ext cx="2825496" cy="256032"/>
           </a:xfrm>
           <a:prstGeom prst="rect">
             <a:avLst/>
@@ -4737,7 +4851,7 @@
               <a:buNone/>
             </a:pPr>
             <a:r>
-              <a:rPr lang="en-US" sz="950" b="1" dirty="0">
+              <a:rPr lang="en-US" sz="1300" b="1" dirty="0">
                 <a:solidFill>
                   <a:srgbClr val="0068B7"/>
                 </a:solidFill>
@@ -4747,20 +4861,20 @@
               </a:rPr>
               <a:t>Use this for</a:t>
             </a:r>
-            <a:endParaRPr lang="en-US" sz="950" dirty="0"/>
-          </a:p>
-        </p:txBody>
-      </p:sp>
-      <p:sp>
-        <p:nvSpPr>
-          <p:cNvPr id="16" name="Text 14"/>
-          <p:cNvSpPr/>
-          <p:nvPr/>
-        </p:nvSpPr>
-        <p:spPr>
-          <a:xfrm>
-            <a:off x="8074152" y="3959352"/>
-            <a:ext cx="2825496" cy="1170432"/>
+            <a:endParaRPr lang="en-US" sz="1300" dirty="0"/>
+          </a:p>
+        </p:txBody>
+      </p:sp>
+      <p:sp>
+        <p:nvSpPr>
+          <p:cNvPr id="17" name="Text 15"/>
+          <p:cNvSpPr/>
+          <p:nvPr/>
+        </p:nvSpPr>
+        <p:spPr>
+          <a:xfrm>
+            <a:off x="8074152" y="4023360"/>
+            <a:ext cx="2825496" cy="1097280"/>
           </a:xfrm>
           <a:prstGeom prst="rect">
             <a:avLst/>
@@ -4778,7 +4892,7 @@
               <a:buNone/>
             </a:pPr>
             <a:r>
-              <a:rPr lang="en-US" sz="1250" dirty="0">
+              <a:rPr lang="en-US" sz="1550" dirty="0">
                 <a:solidFill>
                   <a:srgbClr val="17364A"/>
                 </a:solidFill>
@@ -4788,7 +4902,7 @@
               </a:rPr>
               <a:t>Connect the concept to public health decisions, safeguards, documentation, or implementation work.</a:t>
             </a:r>
-            <a:endParaRPr lang="en-US" sz="1250" dirty="0"/>
+            <a:endParaRPr lang="en-US" sz="1550" dirty="0"/>
           </a:p>
         </p:txBody>
       </p:sp>
@@ -4985,7 +5099,7 @@
                 <a:ea typeface="Aptos" pitchFamily="34" charset="-122"/>
                 <a:cs typeface="Aptos" pitchFamily="34" charset="-120"/>
               </a:rPr>
-              <a:t>© Paula Soper</a:t>
+              <a:t>Â© Paula Soper</a:t>
             </a:r>
             <a:endParaRPr lang="en-US" sz="800" dirty="0"/>
           </a:p>
@@ -4999,8 +5113,47 @@
         </p:nvSpPr>
         <p:spPr>
           <a:xfrm>
+            <a:off x="11137392" y="6510528"/>
+            <a:ext cx="411480" cy="201168"/>
+          </a:xfrm>
+          <a:prstGeom prst="rect">
+            <a:avLst/>
+          </a:prstGeom>
+          <a:noFill/>
+          <a:ln/>
+        </p:spPr>
+        <p:txBody>
+          <a:bodyPr wrap="square" lIns="0" tIns="0" rIns="0" bIns="0" rtlCol="0" anchor="ctr"/>
+          <a:lstStyle/>
+          <a:p>
+            <a:pPr algn="r" indent="0" marL="0">
+              <a:buNone/>
+            </a:pPr>
+            <a:r>
+              <a:rPr lang="en-US" sz="900" dirty="0">
+                <a:solidFill>
+                  <a:srgbClr val="5F7181"/>
+                </a:solidFill>
+                <a:latin typeface="Aptos" pitchFamily="34" charset="0"/>
+                <a:ea typeface="Aptos" pitchFamily="34" charset="-122"/>
+                <a:cs typeface="Aptos" pitchFamily="34" charset="-120"/>
+              </a:rPr>
+              <a:t>13</a:t>
+            </a:r>
+            <a:endParaRPr lang="en-US" sz="900" dirty="0"/>
+          </a:p>
+        </p:txBody>
+      </p:sp>
+      <p:sp>
+        <p:nvSpPr>
+          <p:cNvPr id="8" name="Text 6"/>
+          <p:cNvSpPr/>
+          <p:nvPr/>
+        </p:nvSpPr>
+        <p:spPr>
+          <a:xfrm>
             <a:off x="640080" y="658368"/>
-            <a:ext cx="10881360" cy="566928"/>
+            <a:ext cx="10881360" cy="713232"/>
           </a:xfrm>
           <a:prstGeom prst="rect">
             <a:avLst/>
@@ -5018,7 +5171,7 @@
               <a:buNone/>
             </a:pPr>
             <a:r>
-              <a:rPr lang="en-US" sz="2700" b="1" dirty="0">
+              <a:rPr lang="en-US" sz="3400" b="1" dirty="0">
                 <a:solidFill>
                   <a:srgbClr val="003A63"/>
                 </a:solidFill>
@@ -5028,20 +5181,20 @@
               </a:rPr>
               <a:t>Risks, Failure Modes, and Guardrails Continued</a:t>
             </a:r>
-            <a:endParaRPr lang="en-US" sz="2700" dirty="0"/>
-          </a:p>
-        </p:txBody>
-      </p:sp>
-      <p:sp>
-        <p:nvSpPr>
-          <p:cNvPr id="8" name="Text 6"/>
-          <p:cNvSpPr/>
-          <p:nvPr/>
-        </p:nvSpPr>
-        <p:spPr>
-          <a:xfrm>
-            <a:off x="868680" y="1417320"/>
-            <a:ext cx="6675120" cy="4434840"/>
+            <a:endParaRPr lang="en-US" sz="3400" dirty="0"/>
+          </a:p>
+        </p:txBody>
+      </p:sp>
+      <p:sp>
+        <p:nvSpPr>
+          <p:cNvPr id="9" name="Text 7"/>
+          <p:cNvSpPr/>
+          <p:nvPr/>
+        </p:nvSpPr>
+        <p:spPr>
+          <a:xfrm>
+            <a:off x="868680" y="1508760"/>
+            <a:ext cx="6537960" cy="4160520"/>
           </a:xfrm>
           <a:prstGeom prst="rect">
             <a:avLst/>
@@ -5056,7 +5209,7 @@
           <a:lstStyle/>
           <a:p>
             <a:r>
-              <a:rPr lang="en-US" sz="1700" dirty="0">
+              <a:rPr lang="en-US" sz="2100" dirty="0">
                 <a:solidFill>
                   <a:srgbClr val="17364A"/>
                 </a:solidFill>
@@ -5066,11 +5219,11 @@
               </a:rPr>
               <a:t>Misclassification.</a:t>
             </a:r>
-            <a:endParaRPr lang="en-US" sz="1700" dirty="0"/>
-          </a:p>
-          <a:p>
-            <a:r>
-              <a:rPr lang="en-US" sz="1700" dirty="0">
+            <a:endParaRPr lang="en-US" sz="2100" dirty="0"/>
+          </a:p>
+          <a:p>
+            <a:r>
+              <a:rPr lang="en-US" sz="2100" dirty="0">
                 <a:solidFill>
                   <a:srgbClr val="17364A"/>
                 </a:solidFill>
@@ -5080,11 +5233,11 @@
               </a:rPr>
               <a:t>Incorrect labels can affect routing or priority.</a:t>
             </a:r>
-            <a:endParaRPr lang="en-US" sz="1700" dirty="0"/>
-          </a:p>
-          <a:p>
-            <a:r>
-              <a:rPr lang="en-US" sz="1700" dirty="0">
+            <a:endParaRPr lang="en-US" sz="2100" dirty="0"/>
+          </a:p>
+          <a:p>
+            <a:r>
+              <a:rPr lang="en-US" sz="2100" dirty="0">
                 <a:solidFill>
                   <a:srgbClr val="17364A"/>
                 </a:solidFill>
@@ -5094,13 +5247,13 @@
               </a:rPr>
               <a:t>Guardrails include validation, confidence thresholds, review queues, and monitoring of overrides.</a:t>
             </a:r>
-            <a:endParaRPr lang="en-US" sz="1700" dirty="0"/>
-          </a:p>
-        </p:txBody>
-      </p:sp>
-      <p:sp>
-        <p:nvSpPr>
-          <p:cNvPr id="9" name="Shape 7"/>
+            <a:endParaRPr lang="en-US" sz="2100" dirty="0"/>
+          </a:p>
+        </p:txBody>
+      </p:sp>
+      <p:sp>
+        <p:nvSpPr>
+          <p:cNvPr id="10" name="Shape 8"/>
           <p:cNvSpPr/>
           <p:nvPr/>
         </p:nvSpPr>
@@ -5127,14 +5280,14 @@
       </p:sp>
       <p:sp>
         <p:nvSpPr>
-          <p:cNvPr id="10" name="Text 8"/>
+          <p:cNvPr id="11" name="Text 9"/>
           <p:cNvSpPr/>
           <p:nvPr/>
         </p:nvSpPr>
         <p:spPr>
           <a:xfrm>
             <a:off x="8074152" y="1563624"/>
-            <a:ext cx="2825496" cy="201168"/>
+            <a:ext cx="2825496" cy="256032"/>
           </a:xfrm>
           <a:prstGeom prst="rect">
             <a:avLst/>
@@ -5150,7 +5303,7 @@
               <a:buNone/>
             </a:pPr>
             <a:r>
-              <a:rPr lang="en-US" sz="950" b="1" dirty="0">
+              <a:rPr lang="en-US" sz="1300" b="1" dirty="0">
                 <a:solidFill>
                   <a:srgbClr val="0068B7"/>
                 </a:solidFill>
@@ -5160,20 +5313,20 @@
               </a:rPr>
               <a:t>Key idea</a:t>
             </a:r>
-            <a:endParaRPr lang="en-US" sz="950" dirty="0"/>
-          </a:p>
-        </p:txBody>
-      </p:sp>
-      <p:sp>
-        <p:nvSpPr>
-          <p:cNvPr id="11" name="Text 9"/>
-          <p:cNvSpPr/>
-          <p:nvPr/>
-        </p:nvSpPr>
-        <p:spPr>
-          <a:xfrm>
-            <a:off x="8074152" y="1856232"/>
-            <a:ext cx="2825496" cy="1261872"/>
+            <a:endParaRPr lang="en-US" sz="1300" dirty="0"/>
+          </a:p>
+        </p:txBody>
+      </p:sp>
+      <p:sp>
+        <p:nvSpPr>
+          <p:cNvPr id="12" name="Text 10"/>
+          <p:cNvSpPr/>
+          <p:nvPr/>
+        </p:nvSpPr>
+        <p:spPr>
+          <a:xfrm>
+            <a:off x="8074152" y="1920240"/>
+            <a:ext cx="2825496" cy="1188720"/>
           </a:xfrm>
           <a:prstGeom prst="rect">
             <a:avLst/>
@@ -5191,7 +5344,7 @@
               <a:buNone/>
             </a:pPr>
             <a:r>
-              <a:rPr lang="en-US" sz="1250" dirty="0">
+              <a:rPr lang="en-US" sz="1550" dirty="0">
                 <a:solidFill>
                   <a:srgbClr val="17364A"/>
                 </a:solidFill>
@@ -5201,13 +5354,13 @@
               </a:rPr>
               <a:t>Misclassification.</a:t>
             </a:r>
-            <a:endParaRPr lang="en-US" sz="1250" dirty="0"/>
-          </a:p>
-        </p:txBody>
-      </p:sp>
-      <p:sp>
-        <p:nvSpPr>
-          <p:cNvPr id="12" name="Shape 10"/>
+            <a:endParaRPr lang="en-US" sz="1550" dirty="0"/>
+          </a:p>
+        </p:txBody>
+      </p:sp>
+      <p:sp>
+        <p:nvSpPr>
+          <p:cNvPr id="13" name="Shape 11"/>
           <p:cNvSpPr/>
           <p:nvPr/>
         </p:nvSpPr>
@@ -5234,14 +5387,14 @@
       </p:sp>
       <p:sp>
         <p:nvSpPr>
-          <p:cNvPr id="13" name="Text 11"/>
+          <p:cNvPr id="14" name="Text 12"/>
           <p:cNvSpPr/>
           <p:nvPr/>
         </p:nvSpPr>
         <p:spPr>
           <a:xfrm>
             <a:off x="8074152" y="3666744"/>
-            <a:ext cx="2825496" cy="201168"/>
+            <a:ext cx="2825496" cy="256032"/>
           </a:xfrm>
           <a:prstGeom prst="rect">
             <a:avLst/>
@@ -5257,7 +5410,7 @@
               <a:buNone/>
             </a:pPr>
             <a:r>
-              <a:rPr lang="en-US" sz="950" b="1" dirty="0">
+              <a:rPr lang="en-US" sz="1300" b="1" dirty="0">
                 <a:solidFill>
                   <a:srgbClr val="0068B7"/>
                 </a:solidFill>
@@ -5267,20 +5420,20 @@
               </a:rPr>
               <a:t>Use this for</a:t>
             </a:r>
-            <a:endParaRPr lang="en-US" sz="950" dirty="0"/>
-          </a:p>
-        </p:txBody>
-      </p:sp>
-      <p:sp>
-        <p:nvSpPr>
-          <p:cNvPr id="14" name="Text 12"/>
-          <p:cNvSpPr/>
-          <p:nvPr/>
-        </p:nvSpPr>
-        <p:spPr>
-          <a:xfrm>
-            <a:off x="8074152" y="3959352"/>
-            <a:ext cx="2825496" cy="1170432"/>
+            <a:endParaRPr lang="en-US" sz="1300" dirty="0"/>
+          </a:p>
+        </p:txBody>
+      </p:sp>
+      <p:sp>
+        <p:nvSpPr>
+          <p:cNvPr id="15" name="Text 13"/>
+          <p:cNvSpPr/>
+          <p:nvPr/>
+        </p:nvSpPr>
+        <p:spPr>
+          <a:xfrm>
+            <a:off x="8074152" y="4023360"/>
+            <a:ext cx="2825496" cy="1097280"/>
           </a:xfrm>
           <a:prstGeom prst="rect">
             <a:avLst/>
@@ -5298,7 +5451,7 @@
               <a:buNone/>
             </a:pPr>
             <a:r>
-              <a:rPr lang="en-US" sz="1250" dirty="0">
+              <a:rPr lang="en-US" sz="1550" dirty="0">
                 <a:solidFill>
                   <a:srgbClr val="17364A"/>
                 </a:solidFill>
@@ -5308,7 +5461,7 @@
               </a:rPr>
               <a:t>Connect the concept to public health decisions, safeguards, documentation, or implementation work.</a:t>
             </a:r>
-            <a:endParaRPr lang="en-US" sz="1250" dirty="0"/>
+            <a:endParaRPr lang="en-US" sz="1550" dirty="0"/>
           </a:p>
         </p:txBody>
       </p:sp>
@@ -5505,7 +5658,7 @@
                 <a:ea typeface="Aptos" pitchFamily="34" charset="-122"/>
                 <a:cs typeface="Aptos" pitchFamily="34" charset="-120"/>
               </a:rPr>
-              <a:t>© Paula Soper</a:t>
+              <a:t>Â© Paula Soper</a:t>
             </a:r>
             <a:endParaRPr lang="en-US" sz="800" dirty="0"/>
           </a:p>
@@ -5513,7 +5666,46 @@
       </p:sp>
       <p:sp>
         <p:nvSpPr>
-          <p:cNvPr id="7" name="Shape 5"/>
+          <p:cNvPr id="7" name="Text 5"/>
+          <p:cNvSpPr/>
+          <p:nvPr/>
+        </p:nvSpPr>
+        <p:spPr>
+          <a:xfrm>
+            <a:off x="11137392" y="6510528"/>
+            <a:ext cx="411480" cy="201168"/>
+          </a:xfrm>
+          <a:prstGeom prst="rect">
+            <a:avLst/>
+          </a:prstGeom>
+          <a:noFill/>
+          <a:ln/>
+        </p:spPr>
+        <p:txBody>
+          <a:bodyPr wrap="square" lIns="0" tIns="0" rIns="0" bIns="0" rtlCol="0" anchor="ctr"/>
+          <a:lstStyle/>
+          <a:p>
+            <a:pPr algn="r" indent="0" marL="0">
+              <a:buNone/>
+            </a:pPr>
+            <a:r>
+              <a:rPr lang="en-US" sz="900" dirty="0">
+                <a:solidFill>
+                  <a:srgbClr val="5F7181"/>
+                </a:solidFill>
+                <a:latin typeface="Aptos" pitchFamily="34" charset="0"/>
+                <a:ea typeface="Aptos" pitchFamily="34" charset="-122"/>
+                <a:cs typeface="Aptos" pitchFamily="34" charset="-120"/>
+              </a:rPr>
+              <a:t>14</a:t>
+            </a:r>
+            <a:endParaRPr lang="en-US" sz="900" dirty="0"/>
+          </a:p>
+        </p:txBody>
+      </p:sp>
+      <p:sp>
+        <p:nvSpPr>
+          <p:cNvPr id="8" name="Shape 6"/>
           <p:cNvSpPr/>
           <p:nvPr/>
         </p:nvSpPr>
@@ -5538,7 +5730,7 @@
       </p:sp>
       <p:sp>
         <p:nvSpPr>
-          <p:cNvPr id="8" name="Text 6"/>
+          <p:cNvPr id="9" name="Text 7"/>
           <p:cNvSpPr/>
           <p:nvPr/>
         </p:nvSpPr>
@@ -5577,14 +5769,14 @@
       </p:sp>
       <p:sp>
         <p:nvSpPr>
-          <p:cNvPr id="9" name="Text 7"/>
+          <p:cNvPr id="10" name="Text 8"/>
           <p:cNvSpPr/>
           <p:nvPr/>
         </p:nvSpPr>
         <p:spPr>
           <a:xfrm>
             <a:off x="640080" y="621792"/>
-            <a:ext cx="10881360" cy="566928"/>
+            <a:ext cx="10881360" cy="713232"/>
           </a:xfrm>
           <a:prstGeom prst="rect">
             <a:avLst/>
@@ -5602,7 +5794,7 @@
               <a:buNone/>
             </a:pPr>
             <a:r>
-              <a:rPr lang="en-US" sz="2700" b="1" dirty="0">
+              <a:rPr lang="en-US" sz="3400" b="1" dirty="0">
                 <a:solidFill>
                   <a:srgbClr val="003A63"/>
                 </a:solidFill>
@@ -5612,20 +5804,20 @@
               </a:rPr>
               <a:t>Application to AI-Supported Workflows</a:t>
             </a:r>
-            <a:endParaRPr lang="en-US" sz="2700" dirty="0"/>
-          </a:p>
-        </p:txBody>
-      </p:sp>
-      <p:sp>
-        <p:nvSpPr>
-          <p:cNvPr id="10" name="Text 8"/>
-          <p:cNvSpPr/>
-          <p:nvPr/>
-        </p:nvSpPr>
-        <p:spPr>
-          <a:xfrm>
-            <a:off x="868680" y="1417320"/>
-            <a:ext cx="6675120" cy="4434840"/>
+            <a:endParaRPr lang="en-US" sz="3400" dirty="0"/>
+          </a:p>
+        </p:txBody>
+      </p:sp>
+      <p:sp>
+        <p:nvSpPr>
+          <p:cNvPr id="11" name="Text 9"/>
+          <p:cNvSpPr/>
+          <p:nvPr/>
+        </p:nvSpPr>
+        <p:spPr>
+          <a:xfrm>
+            <a:off x="868680" y="1508760"/>
+            <a:ext cx="6537960" cy="4160520"/>
           </a:xfrm>
           <a:prstGeom prst="rect">
             <a:avLst/>
@@ -5640,7 +5832,7 @@
           <a:lstStyle/>
           <a:p>
             <a:r>
-              <a:rPr lang="en-US" sz="1700" dirty="0">
+              <a:rPr lang="en-US" sz="2100" dirty="0">
                 <a:solidFill>
                   <a:srgbClr val="17364A"/>
                 </a:solidFill>
@@ -5648,13 +5840,13 @@
                 <a:ea typeface="Aptos" pitchFamily="34" charset="-122"/>
                 <a:cs typeface="Aptos" pitchFamily="34" charset="-120"/>
               </a:rPr>
-              <a:t>Generative AI is often used for summarization, drafting, and question answering, but outputs must be checked against source.</a:t>
-            </a:r>
-            <a:endParaRPr lang="en-US" sz="1700" dirty="0"/>
-          </a:p>
-          <a:p>
-            <a:r>
-              <a:rPr lang="en-US" sz="1700" dirty="0">
+              <a:t>Generative AI is often used for summarization, drafting, and question answering, but outputs must be.</a:t>
+            </a:r>
+            <a:endParaRPr lang="en-US" sz="2100" dirty="0"/>
+          </a:p>
+          <a:p>
+            <a:r>
+              <a:rPr lang="en-US" sz="2100" dirty="0">
                 <a:solidFill>
                   <a:srgbClr val="17364A"/>
                 </a:solidFill>
@@ -5664,11 +5856,11 @@
               </a:rPr>
               <a:t>Predictive analytics may use NLP-derived features, so extraction quality affects model performance.</a:t>
             </a:r>
-            <a:endParaRPr lang="en-US" sz="1700" dirty="0"/>
-          </a:p>
-          <a:p>
-            <a:r>
-              <a:rPr lang="en-US" sz="1700" dirty="0">
+            <a:endParaRPr lang="en-US" sz="2100" dirty="0"/>
+          </a:p>
+          <a:p>
+            <a:r>
+              <a:rPr lang="en-US" sz="2100" dirty="0">
                 <a:solidFill>
                   <a:srgbClr val="17364A"/>
                 </a:solidFill>
@@ -5676,29 +5868,15 @@
                 <a:ea typeface="Aptos" pitchFamily="34" charset="-122"/>
                 <a:cs typeface="Aptos" pitchFamily="34" charset="-120"/>
               </a:rPr>
-              <a:t>RAG systems use NLP to retrieve and summarize documents, which requires document governance and source citation.</a:t>
-            </a:r>
-            <a:endParaRPr lang="en-US" sz="1700" dirty="0"/>
-          </a:p>
-          <a:p>
-            <a:r>
-              <a:rPr lang="en-US" sz="1700" dirty="0">
-                <a:solidFill>
-                  <a:srgbClr val="17364A"/>
-                </a:solidFill>
-                <a:latin typeface="Aptos" pitchFamily="34" charset="0"/>
-                <a:ea typeface="Aptos" pitchFamily="34" charset="-122"/>
-                <a:cs typeface="Aptos" pitchFamily="34" charset="-120"/>
-              </a:rPr>
-              <a:t>Agentic AI using NLP to trigger actions should require clear thresholds and human approval for consequential steps.</a:t>
-            </a:r>
-            <a:endParaRPr lang="en-US" sz="1700" dirty="0"/>
-          </a:p>
-        </p:txBody>
-      </p:sp>
-      <p:sp>
-        <p:nvSpPr>
-          <p:cNvPr id="11" name="Shape 9"/>
+              <a:t>RAG systems use NLP to retrieve and summarize documents, which requires document governance and source.</a:t>
+            </a:r>
+            <a:endParaRPr lang="en-US" sz="2100" dirty="0"/>
+          </a:p>
+        </p:txBody>
+      </p:sp>
+      <p:sp>
+        <p:nvSpPr>
+          <p:cNvPr id="12" name="Shape 10"/>
           <p:cNvSpPr/>
           <p:nvPr/>
         </p:nvSpPr>
@@ -5725,14 +5903,14 @@
       </p:sp>
       <p:sp>
         <p:nvSpPr>
-          <p:cNvPr id="12" name="Text 10"/>
+          <p:cNvPr id="13" name="Text 11"/>
           <p:cNvSpPr/>
           <p:nvPr/>
         </p:nvSpPr>
         <p:spPr>
           <a:xfrm>
             <a:off x="8074152" y="1563624"/>
-            <a:ext cx="2825496" cy="201168"/>
+            <a:ext cx="2825496" cy="256032"/>
           </a:xfrm>
           <a:prstGeom prst="rect">
             <a:avLst/>
@@ -5748,7 +5926,7 @@
               <a:buNone/>
             </a:pPr>
             <a:r>
-              <a:rPr lang="en-US" sz="950" b="1" dirty="0">
+              <a:rPr lang="en-US" sz="1300" b="1" dirty="0">
                 <a:solidFill>
                   <a:srgbClr val="0068B7"/>
                 </a:solidFill>
@@ -5758,20 +5936,20 @@
               </a:rPr>
               <a:t>Key idea</a:t>
             </a:r>
-            <a:endParaRPr lang="en-US" sz="950" dirty="0"/>
-          </a:p>
-        </p:txBody>
-      </p:sp>
-      <p:sp>
-        <p:nvSpPr>
-          <p:cNvPr id="13" name="Text 11"/>
-          <p:cNvSpPr/>
-          <p:nvPr/>
-        </p:nvSpPr>
-        <p:spPr>
-          <a:xfrm>
-            <a:off x="8074152" y="1856232"/>
-            <a:ext cx="2825496" cy="1261872"/>
+            <a:endParaRPr lang="en-US" sz="1300" dirty="0"/>
+          </a:p>
+        </p:txBody>
+      </p:sp>
+      <p:sp>
+        <p:nvSpPr>
+          <p:cNvPr id="14" name="Text 12"/>
+          <p:cNvSpPr/>
+          <p:nvPr/>
+        </p:nvSpPr>
+        <p:spPr>
+          <a:xfrm>
+            <a:off x="8074152" y="1920240"/>
+            <a:ext cx="2825496" cy="1188720"/>
           </a:xfrm>
           <a:prstGeom prst="rect">
             <a:avLst/>
@@ -5789,7 +5967,7 @@
               <a:buNone/>
             </a:pPr>
             <a:r>
-              <a:rPr lang="en-US" sz="1250" dirty="0">
+              <a:rPr lang="en-US" sz="1550" dirty="0">
                 <a:solidFill>
                   <a:srgbClr val="17364A"/>
                 </a:solidFill>
@@ -5797,15 +5975,15 @@
                 <a:ea typeface="Aptos" pitchFamily="34" charset="-122"/>
                 <a:cs typeface="Aptos" pitchFamily="34" charset="-120"/>
               </a:rPr>
-              <a:t>Generative AI is often used for summarization, drafting, and question answering, but outputs must be checked against source.</a:t>
-            </a:r>
-            <a:endParaRPr lang="en-US" sz="1250" dirty="0"/>
-          </a:p>
-        </p:txBody>
-      </p:sp>
-      <p:sp>
-        <p:nvSpPr>
-          <p:cNvPr id="14" name="Shape 12"/>
+              <a:t>Generative AI is often used for summarization, drafting, and question answering, but outputs must be.</a:t>
+            </a:r>
+            <a:endParaRPr lang="en-US" sz="1550" dirty="0"/>
+          </a:p>
+        </p:txBody>
+      </p:sp>
+      <p:sp>
+        <p:nvSpPr>
+          <p:cNvPr id="15" name="Shape 13"/>
           <p:cNvSpPr/>
           <p:nvPr/>
         </p:nvSpPr>
@@ -5832,14 +6010,14 @@
       </p:sp>
       <p:sp>
         <p:nvSpPr>
-          <p:cNvPr id="15" name="Text 13"/>
+          <p:cNvPr id="16" name="Text 14"/>
           <p:cNvSpPr/>
           <p:nvPr/>
         </p:nvSpPr>
         <p:spPr>
           <a:xfrm>
             <a:off x="8074152" y="3666744"/>
-            <a:ext cx="2825496" cy="201168"/>
+            <a:ext cx="2825496" cy="256032"/>
           </a:xfrm>
           <a:prstGeom prst="rect">
             <a:avLst/>
@@ -5855,7 +6033,7 @@
               <a:buNone/>
             </a:pPr>
             <a:r>
-              <a:rPr lang="en-US" sz="950" b="1" dirty="0">
+              <a:rPr lang="en-US" sz="1300" b="1" dirty="0">
                 <a:solidFill>
                   <a:srgbClr val="0068B7"/>
                 </a:solidFill>
@@ -5865,20 +6043,20 @@
               </a:rPr>
               <a:t>Use this for</a:t>
             </a:r>
-            <a:endParaRPr lang="en-US" sz="950" dirty="0"/>
-          </a:p>
-        </p:txBody>
-      </p:sp>
-      <p:sp>
-        <p:nvSpPr>
-          <p:cNvPr id="16" name="Text 14"/>
-          <p:cNvSpPr/>
-          <p:nvPr/>
-        </p:nvSpPr>
-        <p:spPr>
-          <a:xfrm>
-            <a:off x="8074152" y="3959352"/>
-            <a:ext cx="2825496" cy="1170432"/>
+            <a:endParaRPr lang="en-US" sz="1300" dirty="0"/>
+          </a:p>
+        </p:txBody>
+      </p:sp>
+      <p:sp>
+        <p:nvSpPr>
+          <p:cNvPr id="17" name="Text 15"/>
+          <p:cNvSpPr/>
+          <p:nvPr/>
+        </p:nvSpPr>
+        <p:spPr>
+          <a:xfrm>
+            <a:off x="8074152" y="4023360"/>
+            <a:ext cx="2825496" cy="1097280"/>
           </a:xfrm>
           <a:prstGeom prst="rect">
             <a:avLst/>
@@ -5896,7 +6074,7 @@
               <a:buNone/>
             </a:pPr>
             <a:r>
-              <a:rPr lang="en-US" sz="1250" dirty="0">
+              <a:rPr lang="en-US" sz="1550" dirty="0">
                 <a:solidFill>
                   <a:srgbClr val="17364A"/>
                 </a:solidFill>
@@ -5906,7 +6084,7 @@
               </a:rPr>
               <a:t>Connect the concept to public health decisions, safeguards, documentation, or implementation work.</a:t>
             </a:r>
-            <a:endParaRPr lang="en-US" sz="1250" dirty="0"/>
+            <a:endParaRPr lang="en-US" sz="1550" dirty="0"/>
           </a:p>
         </p:txBody>
       </p:sp>
@@ -6103,7 +6281,7 @@
                 <a:ea typeface="Aptos" pitchFamily="34" charset="-122"/>
                 <a:cs typeface="Aptos" pitchFamily="34" charset="-120"/>
               </a:rPr>
-              <a:t>© Paula Soper</a:t>
+              <a:t>Â© Paula Soper</a:t>
             </a:r>
             <a:endParaRPr lang="en-US" sz="800" dirty="0"/>
           </a:p>
@@ -6111,7 +6289,46 @@
       </p:sp>
       <p:sp>
         <p:nvSpPr>
-          <p:cNvPr id="7" name="Shape 5"/>
+          <p:cNvPr id="7" name="Text 5"/>
+          <p:cNvSpPr/>
+          <p:nvPr/>
+        </p:nvSpPr>
+        <p:spPr>
+          <a:xfrm>
+            <a:off x="11137392" y="6510528"/>
+            <a:ext cx="411480" cy="201168"/>
+          </a:xfrm>
+          <a:prstGeom prst="rect">
+            <a:avLst/>
+          </a:prstGeom>
+          <a:noFill/>
+          <a:ln/>
+        </p:spPr>
+        <p:txBody>
+          <a:bodyPr wrap="square" lIns="0" tIns="0" rIns="0" bIns="0" rtlCol="0" anchor="ctr"/>
+          <a:lstStyle/>
+          <a:p>
+            <a:pPr algn="r" indent="0" marL="0">
+              <a:buNone/>
+            </a:pPr>
+            <a:r>
+              <a:rPr lang="en-US" sz="900" dirty="0">
+                <a:solidFill>
+                  <a:srgbClr val="5F7181"/>
+                </a:solidFill>
+                <a:latin typeface="Aptos" pitchFamily="34" charset="0"/>
+                <a:ea typeface="Aptos" pitchFamily="34" charset="-122"/>
+                <a:cs typeface="Aptos" pitchFamily="34" charset="-120"/>
+              </a:rPr>
+              <a:t>15</a:t>
+            </a:r>
+            <a:endParaRPr lang="en-US" sz="900" dirty="0"/>
+          </a:p>
+        </p:txBody>
+      </p:sp>
+      <p:sp>
+        <p:nvSpPr>
+          <p:cNvPr id="8" name="Shape 6"/>
           <p:cNvSpPr/>
           <p:nvPr/>
         </p:nvSpPr>
@@ -6136,7 +6353,7 @@
       </p:sp>
       <p:sp>
         <p:nvSpPr>
-          <p:cNvPr id="8" name="Text 6"/>
+          <p:cNvPr id="9" name="Text 7"/>
           <p:cNvSpPr/>
           <p:nvPr/>
         </p:nvSpPr>
@@ -6175,14 +6392,14 @@
       </p:sp>
       <p:sp>
         <p:nvSpPr>
-          <p:cNvPr id="9" name="Text 7"/>
+          <p:cNvPr id="10" name="Text 8"/>
           <p:cNvSpPr/>
           <p:nvPr/>
         </p:nvSpPr>
         <p:spPr>
           <a:xfrm>
             <a:off x="640080" y="621792"/>
-            <a:ext cx="10881360" cy="566928"/>
+            <a:ext cx="10881360" cy="713232"/>
           </a:xfrm>
           <a:prstGeom prst="rect">
             <a:avLst/>
@@ -6200,7 +6417,7 @@
               <a:buNone/>
             </a:pPr>
             <a:r>
-              <a:rPr lang="en-US" sz="2700" b="1" dirty="0">
+              <a:rPr lang="en-US" sz="3400" b="1" dirty="0">
                 <a:solidFill>
                   <a:srgbClr val="003A63"/>
                 </a:solidFill>
@@ -6210,20 +6427,20 @@
               </a:rPr>
               <a:t>Reflection Questions</a:t>
             </a:r>
-            <a:endParaRPr lang="en-US" sz="2700" dirty="0"/>
-          </a:p>
-        </p:txBody>
-      </p:sp>
-      <p:sp>
-        <p:nvSpPr>
-          <p:cNvPr id="10" name="Text 8"/>
-          <p:cNvSpPr/>
-          <p:nvPr/>
-        </p:nvSpPr>
-        <p:spPr>
-          <a:xfrm>
-            <a:off x="868680" y="1417320"/>
-            <a:ext cx="6675120" cy="4434840"/>
+            <a:endParaRPr lang="en-US" sz="3400" dirty="0"/>
+          </a:p>
+        </p:txBody>
+      </p:sp>
+      <p:sp>
+        <p:nvSpPr>
+          <p:cNvPr id="11" name="Text 9"/>
+          <p:cNvSpPr/>
+          <p:nvPr/>
+        </p:nvSpPr>
+        <p:spPr>
+          <a:xfrm>
+            <a:off x="868680" y="1508760"/>
+            <a:ext cx="6537960" cy="4160520"/>
           </a:xfrm>
           <a:prstGeom prst="rect">
             <a:avLst/>
@@ -6238,7 +6455,7 @@
           <a:lstStyle/>
           <a:p>
             <a:r>
-              <a:rPr lang="en-US" sz="1700" dirty="0">
+              <a:rPr lang="en-US" sz="2100" dirty="0">
                 <a:solidFill>
                   <a:srgbClr val="17364A"/>
                 </a:solidFill>
@@ -6248,11 +6465,11 @@
               </a:rPr>
               <a:t>Which public health workflows involve large volumes of free text?</a:t>
             </a:r>
-            <a:endParaRPr lang="en-US" sz="1700" dirty="0"/>
-          </a:p>
-          <a:p>
-            <a:r>
-              <a:rPr lang="en-US" sz="1700" dirty="0">
+            <a:endParaRPr lang="en-US" sz="2100" dirty="0"/>
+          </a:p>
+          <a:p>
+            <a:r>
+              <a:rPr lang="en-US" sz="2100" dirty="0">
                 <a:solidFill>
                   <a:srgbClr val="17364A"/>
                 </a:solidFill>
@@ -6262,11 +6479,11 @@
               </a:rPr>
               <a:t>What task would NLP support: extraction, classification, summarization, translation, or topic detection?</a:t>
             </a:r>
-            <a:endParaRPr lang="en-US" sz="1700" dirty="0"/>
-          </a:p>
-          <a:p>
-            <a:r>
-              <a:rPr lang="en-US" sz="1700" dirty="0">
+            <a:endParaRPr lang="en-US" sz="2100" dirty="0"/>
+          </a:p>
+          <a:p>
+            <a:r>
+              <a:rPr lang="en-US" sz="2100" dirty="0">
                 <a:solidFill>
                   <a:srgbClr val="17364A"/>
                 </a:solidFill>
@@ -6276,13 +6493,13 @@
               </a:rPr>
               <a:t>What errors would be most harmful?</a:t>
             </a:r>
-            <a:endParaRPr lang="en-US" sz="1700" dirty="0"/>
-          </a:p>
-        </p:txBody>
-      </p:sp>
-      <p:sp>
-        <p:nvSpPr>
-          <p:cNvPr id="11" name="Shape 9"/>
+            <a:endParaRPr lang="en-US" sz="2100" dirty="0"/>
+          </a:p>
+        </p:txBody>
+      </p:sp>
+      <p:sp>
+        <p:nvSpPr>
+          <p:cNvPr id="12" name="Shape 10"/>
           <p:cNvSpPr/>
           <p:nvPr/>
         </p:nvSpPr>
@@ -6309,14 +6526,14 @@
       </p:sp>
       <p:sp>
         <p:nvSpPr>
-          <p:cNvPr id="12" name="Text 10"/>
+          <p:cNvPr id="13" name="Text 11"/>
           <p:cNvSpPr/>
           <p:nvPr/>
         </p:nvSpPr>
         <p:spPr>
           <a:xfrm>
             <a:off x="8074152" y="1563624"/>
-            <a:ext cx="2825496" cy="201168"/>
+            <a:ext cx="2825496" cy="256032"/>
           </a:xfrm>
           <a:prstGeom prst="rect">
             <a:avLst/>
@@ -6332,7 +6549,7 @@
               <a:buNone/>
             </a:pPr>
             <a:r>
-              <a:rPr lang="en-US" sz="950" b="1" dirty="0">
+              <a:rPr lang="en-US" sz="1300" b="1" dirty="0">
                 <a:solidFill>
                   <a:srgbClr val="0068B7"/>
                 </a:solidFill>
@@ -6342,20 +6559,20 @@
               </a:rPr>
               <a:t>Key idea</a:t>
             </a:r>
-            <a:endParaRPr lang="en-US" sz="950" dirty="0"/>
-          </a:p>
-        </p:txBody>
-      </p:sp>
-      <p:sp>
-        <p:nvSpPr>
-          <p:cNvPr id="13" name="Text 11"/>
-          <p:cNvSpPr/>
-          <p:nvPr/>
-        </p:nvSpPr>
-        <p:spPr>
-          <a:xfrm>
-            <a:off x="8074152" y="1856232"/>
-            <a:ext cx="2825496" cy="1261872"/>
+            <a:endParaRPr lang="en-US" sz="1300" dirty="0"/>
+          </a:p>
+        </p:txBody>
+      </p:sp>
+      <p:sp>
+        <p:nvSpPr>
+          <p:cNvPr id="14" name="Text 12"/>
+          <p:cNvSpPr/>
+          <p:nvPr/>
+        </p:nvSpPr>
+        <p:spPr>
+          <a:xfrm>
+            <a:off x="8074152" y="1920240"/>
+            <a:ext cx="2825496" cy="1188720"/>
           </a:xfrm>
           <a:prstGeom prst="rect">
             <a:avLst/>
@@ -6373,7 +6590,7 @@
               <a:buNone/>
             </a:pPr>
             <a:r>
-              <a:rPr lang="en-US" sz="1250" dirty="0">
+              <a:rPr lang="en-US" sz="1550" dirty="0">
                 <a:solidFill>
                   <a:srgbClr val="17364A"/>
                 </a:solidFill>
@@ -6383,13 +6600,13 @@
               </a:rPr>
               <a:t>Which public health workflows involve large volumes of free text?</a:t>
             </a:r>
-            <a:endParaRPr lang="en-US" sz="1250" dirty="0"/>
-          </a:p>
-        </p:txBody>
-      </p:sp>
-      <p:sp>
-        <p:nvSpPr>
-          <p:cNvPr id="14" name="Shape 12"/>
+            <a:endParaRPr lang="en-US" sz="1550" dirty="0"/>
+          </a:p>
+        </p:txBody>
+      </p:sp>
+      <p:sp>
+        <p:nvSpPr>
+          <p:cNvPr id="15" name="Shape 13"/>
           <p:cNvSpPr/>
           <p:nvPr/>
         </p:nvSpPr>
@@ -6416,14 +6633,14 @@
       </p:sp>
       <p:sp>
         <p:nvSpPr>
-          <p:cNvPr id="15" name="Text 13"/>
+          <p:cNvPr id="16" name="Text 14"/>
           <p:cNvSpPr/>
           <p:nvPr/>
         </p:nvSpPr>
         <p:spPr>
           <a:xfrm>
             <a:off x="8074152" y="3666744"/>
-            <a:ext cx="2825496" cy="201168"/>
+            <a:ext cx="2825496" cy="256032"/>
           </a:xfrm>
           <a:prstGeom prst="rect">
             <a:avLst/>
@@ -6439,7 +6656,7 @@
               <a:buNone/>
             </a:pPr>
             <a:r>
-              <a:rPr lang="en-US" sz="950" b="1" dirty="0">
+              <a:rPr lang="en-US" sz="1300" b="1" dirty="0">
                 <a:solidFill>
                   <a:srgbClr val="0068B7"/>
                 </a:solidFill>
@@ -6449,20 +6666,20 @@
               </a:rPr>
               <a:t>Use this for</a:t>
             </a:r>
-            <a:endParaRPr lang="en-US" sz="950" dirty="0"/>
-          </a:p>
-        </p:txBody>
-      </p:sp>
-      <p:sp>
-        <p:nvSpPr>
-          <p:cNvPr id="16" name="Text 14"/>
-          <p:cNvSpPr/>
-          <p:nvPr/>
-        </p:nvSpPr>
-        <p:spPr>
-          <a:xfrm>
-            <a:off x="8074152" y="3959352"/>
-            <a:ext cx="2825496" cy="1170432"/>
+            <a:endParaRPr lang="en-US" sz="1300" dirty="0"/>
+          </a:p>
+        </p:txBody>
+      </p:sp>
+      <p:sp>
+        <p:nvSpPr>
+          <p:cNvPr id="17" name="Text 15"/>
+          <p:cNvSpPr/>
+          <p:nvPr/>
+        </p:nvSpPr>
+        <p:spPr>
+          <a:xfrm>
+            <a:off x="8074152" y="4023360"/>
+            <a:ext cx="2825496" cy="1097280"/>
           </a:xfrm>
           <a:prstGeom prst="rect">
             <a:avLst/>
@@ -6480,7 +6697,7 @@
               <a:buNone/>
             </a:pPr>
             <a:r>
-              <a:rPr lang="en-US" sz="1250" dirty="0">
+              <a:rPr lang="en-US" sz="1550" dirty="0">
                 <a:solidFill>
                   <a:srgbClr val="17364A"/>
                 </a:solidFill>
@@ -6490,7 +6707,7 @@
               </a:rPr>
               <a:t>Connect the concept to public health decisions, safeguards, documentation, or implementation work.</a:t>
             </a:r>
-            <a:endParaRPr lang="en-US" sz="1250" dirty="0"/>
+            <a:endParaRPr lang="en-US" sz="1550" dirty="0"/>
           </a:p>
         </p:txBody>
       </p:sp>
@@ -6687,7 +6904,7 @@
                 <a:ea typeface="Aptos" pitchFamily="34" charset="-122"/>
                 <a:cs typeface="Aptos" pitchFamily="34" charset="-120"/>
               </a:rPr>
-              <a:t>© Paula Soper</a:t>
+              <a:t>Â© Paula Soper</a:t>
             </a:r>
             <a:endParaRPr lang="en-US" sz="800" dirty="0"/>
           </a:p>
@@ -6701,8 +6918,47 @@
         </p:nvSpPr>
         <p:spPr>
           <a:xfrm>
+            <a:off x="11137392" y="6510528"/>
+            <a:ext cx="411480" cy="201168"/>
+          </a:xfrm>
+          <a:prstGeom prst="rect">
+            <a:avLst/>
+          </a:prstGeom>
+          <a:noFill/>
+          <a:ln/>
+        </p:spPr>
+        <p:txBody>
+          <a:bodyPr wrap="square" lIns="0" tIns="0" rIns="0" bIns="0" rtlCol="0" anchor="ctr"/>
+          <a:lstStyle/>
+          <a:p>
+            <a:pPr algn="r" indent="0" marL="0">
+              <a:buNone/>
+            </a:pPr>
+            <a:r>
+              <a:rPr lang="en-US" sz="900" dirty="0">
+                <a:solidFill>
+                  <a:srgbClr val="5F7181"/>
+                </a:solidFill>
+                <a:latin typeface="Aptos" pitchFamily="34" charset="0"/>
+                <a:ea typeface="Aptos" pitchFamily="34" charset="-122"/>
+                <a:cs typeface="Aptos" pitchFamily="34" charset="-120"/>
+              </a:rPr>
+              <a:t>16</a:t>
+            </a:r>
+            <a:endParaRPr lang="en-US" sz="900" dirty="0"/>
+          </a:p>
+        </p:txBody>
+      </p:sp>
+      <p:sp>
+        <p:nvSpPr>
+          <p:cNvPr id="8" name="Text 6"/>
+          <p:cNvSpPr/>
+          <p:nvPr/>
+        </p:nvSpPr>
+        <p:spPr>
+          <a:xfrm>
             <a:off x="640080" y="658368"/>
-            <a:ext cx="10881360" cy="566928"/>
+            <a:ext cx="10881360" cy="713232"/>
           </a:xfrm>
           <a:prstGeom prst="rect">
             <a:avLst/>
@@ -6720,7 +6976,7 @@
               <a:buNone/>
             </a:pPr>
             <a:r>
-              <a:rPr lang="en-US" sz="2700" b="1" dirty="0">
+              <a:rPr lang="en-US" sz="3400" b="1" dirty="0">
                 <a:solidFill>
                   <a:srgbClr val="003A63"/>
                 </a:solidFill>
@@ -6730,20 +6986,20 @@
               </a:rPr>
               <a:t>Reflection Questions Continued</a:t>
             </a:r>
-            <a:endParaRPr lang="en-US" sz="2700" dirty="0"/>
-          </a:p>
-        </p:txBody>
-      </p:sp>
-      <p:sp>
-        <p:nvSpPr>
-          <p:cNvPr id="8" name="Text 6"/>
-          <p:cNvSpPr/>
-          <p:nvPr/>
-        </p:nvSpPr>
-        <p:spPr>
-          <a:xfrm>
-            <a:off x="868680" y="1417320"/>
-            <a:ext cx="6675120" cy="4434840"/>
+            <a:endParaRPr lang="en-US" sz="3400" dirty="0"/>
+          </a:p>
+        </p:txBody>
+      </p:sp>
+      <p:sp>
+        <p:nvSpPr>
+          <p:cNvPr id="9" name="Text 7"/>
+          <p:cNvSpPr/>
+          <p:nvPr/>
+        </p:nvSpPr>
+        <p:spPr>
+          <a:xfrm>
+            <a:off x="868680" y="1508760"/>
+            <a:ext cx="6537960" cy="4160520"/>
           </a:xfrm>
           <a:prstGeom prst="rect">
             <a:avLst/>
@@ -6758,7 +7014,7 @@
           <a:lstStyle/>
           <a:p>
             <a:r>
-              <a:rPr lang="en-US" sz="1700" dirty="0">
+              <a:rPr lang="en-US" sz="2100" dirty="0">
                 <a:solidFill>
                   <a:srgbClr val="17364A"/>
                 </a:solidFill>
@@ -6768,11 +7024,11 @@
               </a:rPr>
               <a:t>What source material must be retained for human review?</a:t>
             </a:r>
-            <a:endParaRPr lang="en-US" sz="1700" dirty="0"/>
-          </a:p>
-          <a:p>
-            <a:r>
-              <a:rPr lang="en-US" sz="1700" dirty="0">
+            <a:endParaRPr lang="en-US" sz="2100" dirty="0"/>
+          </a:p>
+          <a:p>
+            <a:r>
+              <a:rPr lang="en-US" sz="2100" dirty="0">
                 <a:solidFill>
                   <a:srgbClr val="17364A"/>
                 </a:solidFill>
@@ -6782,13 +7038,13 @@
               </a:rPr>
               <a:t>How will staff evaluate accuracy across languages, populations, and program areas?</a:t>
             </a:r>
-            <a:endParaRPr lang="en-US" sz="1700" dirty="0"/>
-          </a:p>
-        </p:txBody>
-      </p:sp>
-      <p:sp>
-        <p:nvSpPr>
-          <p:cNvPr id="9" name="Shape 7"/>
+            <a:endParaRPr lang="en-US" sz="2100" dirty="0"/>
+          </a:p>
+        </p:txBody>
+      </p:sp>
+      <p:sp>
+        <p:nvSpPr>
+          <p:cNvPr id="10" name="Shape 8"/>
           <p:cNvSpPr/>
           <p:nvPr/>
         </p:nvSpPr>
@@ -6815,14 +7071,14 @@
       </p:sp>
       <p:sp>
         <p:nvSpPr>
-          <p:cNvPr id="10" name="Text 8"/>
+          <p:cNvPr id="11" name="Text 9"/>
           <p:cNvSpPr/>
           <p:nvPr/>
         </p:nvSpPr>
         <p:spPr>
           <a:xfrm>
             <a:off x="8074152" y="1563624"/>
-            <a:ext cx="2825496" cy="201168"/>
+            <a:ext cx="2825496" cy="256032"/>
           </a:xfrm>
           <a:prstGeom prst="rect">
             <a:avLst/>
@@ -6838,7 +7094,7 @@
               <a:buNone/>
             </a:pPr>
             <a:r>
-              <a:rPr lang="en-US" sz="950" b="1" dirty="0">
+              <a:rPr lang="en-US" sz="1300" b="1" dirty="0">
                 <a:solidFill>
                   <a:srgbClr val="0068B7"/>
                 </a:solidFill>
@@ -6848,20 +7104,20 @@
               </a:rPr>
               <a:t>Key idea</a:t>
             </a:r>
-            <a:endParaRPr lang="en-US" sz="950" dirty="0"/>
-          </a:p>
-        </p:txBody>
-      </p:sp>
-      <p:sp>
-        <p:nvSpPr>
-          <p:cNvPr id="11" name="Text 9"/>
-          <p:cNvSpPr/>
-          <p:nvPr/>
-        </p:nvSpPr>
-        <p:spPr>
-          <a:xfrm>
-            <a:off x="8074152" y="1856232"/>
-            <a:ext cx="2825496" cy="1261872"/>
+            <a:endParaRPr lang="en-US" sz="1300" dirty="0"/>
+          </a:p>
+        </p:txBody>
+      </p:sp>
+      <p:sp>
+        <p:nvSpPr>
+          <p:cNvPr id="12" name="Text 10"/>
+          <p:cNvSpPr/>
+          <p:nvPr/>
+        </p:nvSpPr>
+        <p:spPr>
+          <a:xfrm>
+            <a:off x="8074152" y="1920240"/>
+            <a:ext cx="2825496" cy="1188720"/>
           </a:xfrm>
           <a:prstGeom prst="rect">
             <a:avLst/>
@@ -6879,7 +7135,7 @@
               <a:buNone/>
             </a:pPr>
             <a:r>
-              <a:rPr lang="en-US" sz="1250" dirty="0">
+              <a:rPr lang="en-US" sz="1550" dirty="0">
                 <a:solidFill>
                   <a:srgbClr val="17364A"/>
                 </a:solidFill>
@@ -6889,13 +7145,13 @@
               </a:rPr>
               <a:t>What source material must be retained for human review?</a:t>
             </a:r>
-            <a:endParaRPr lang="en-US" sz="1250" dirty="0"/>
-          </a:p>
-        </p:txBody>
-      </p:sp>
-      <p:sp>
-        <p:nvSpPr>
-          <p:cNvPr id="12" name="Shape 10"/>
+            <a:endParaRPr lang="en-US" sz="1550" dirty="0"/>
+          </a:p>
+        </p:txBody>
+      </p:sp>
+      <p:sp>
+        <p:nvSpPr>
+          <p:cNvPr id="13" name="Shape 11"/>
           <p:cNvSpPr/>
           <p:nvPr/>
         </p:nvSpPr>
@@ -6922,14 +7178,14 @@
       </p:sp>
       <p:sp>
         <p:nvSpPr>
-          <p:cNvPr id="13" name="Text 11"/>
+          <p:cNvPr id="14" name="Text 12"/>
           <p:cNvSpPr/>
           <p:nvPr/>
         </p:nvSpPr>
         <p:spPr>
           <a:xfrm>
             <a:off x="8074152" y="3666744"/>
-            <a:ext cx="2825496" cy="201168"/>
+            <a:ext cx="2825496" cy="256032"/>
           </a:xfrm>
           <a:prstGeom prst="rect">
             <a:avLst/>
@@ -6945,7 +7201,7 @@
               <a:buNone/>
             </a:pPr>
             <a:r>
-              <a:rPr lang="en-US" sz="950" b="1" dirty="0">
+              <a:rPr lang="en-US" sz="1300" b="1" dirty="0">
                 <a:solidFill>
                   <a:srgbClr val="0068B7"/>
                 </a:solidFill>
@@ -6955,20 +7211,20 @@
               </a:rPr>
               <a:t>Use this for</a:t>
             </a:r>
-            <a:endParaRPr lang="en-US" sz="950" dirty="0"/>
-          </a:p>
-        </p:txBody>
-      </p:sp>
-      <p:sp>
-        <p:nvSpPr>
-          <p:cNvPr id="14" name="Text 12"/>
-          <p:cNvSpPr/>
-          <p:nvPr/>
-        </p:nvSpPr>
-        <p:spPr>
-          <a:xfrm>
-            <a:off x="8074152" y="3959352"/>
-            <a:ext cx="2825496" cy="1170432"/>
+            <a:endParaRPr lang="en-US" sz="1300" dirty="0"/>
+          </a:p>
+        </p:txBody>
+      </p:sp>
+      <p:sp>
+        <p:nvSpPr>
+          <p:cNvPr id="15" name="Text 13"/>
+          <p:cNvSpPr/>
+          <p:nvPr/>
+        </p:nvSpPr>
+        <p:spPr>
+          <a:xfrm>
+            <a:off x="8074152" y="4023360"/>
+            <a:ext cx="2825496" cy="1097280"/>
           </a:xfrm>
           <a:prstGeom prst="rect">
             <a:avLst/>
@@ -6986,7 +7242,7 @@
               <a:buNone/>
             </a:pPr>
             <a:r>
-              <a:rPr lang="en-US" sz="1250" dirty="0">
+              <a:rPr lang="en-US" sz="1550" dirty="0">
                 <a:solidFill>
                   <a:srgbClr val="17364A"/>
                 </a:solidFill>
@@ -6996,7 +7252,7 @@
               </a:rPr>
               <a:t>Connect the concept to public health decisions, safeguards, documentation, or implementation work.</a:t>
             </a:r>
-            <a:endParaRPr lang="en-US" sz="1250" dirty="0"/>
+            <a:endParaRPr lang="en-US" sz="1550" dirty="0"/>
           </a:p>
         </p:txBody>
       </p:sp>
@@ -7193,7 +7449,7 @@
                 <a:ea typeface="Aptos" pitchFamily="34" charset="-122"/>
                 <a:cs typeface="Aptos" pitchFamily="34" charset="-120"/>
               </a:rPr>
-              <a:t>© Paula Soper</a:t>
+              <a:t>Â© Paula Soper</a:t>
             </a:r>
             <a:endParaRPr lang="en-US" sz="800" dirty="0"/>
           </a:p>
@@ -7201,7 +7457,46 @@
       </p:sp>
       <p:sp>
         <p:nvSpPr>
-          <p:cNvPr id="7" name="Shape 5"/>
+          <p:cNvPr id="7" name="Text 5"/>
+          <p:cNvSpPr/>
+          <p:nvPr/>
+        </p:nvSpPr>
+        <p:spPr>
+          <a:xfrm>
+            <a:off x="11137392" y="6510528"/>
+            <a:ext cx="411480" cy="201168"/>
+          </a:xfrm>
+          <a:prstGeom prst="rect">
+            <a:avLst/>
+          </a:prstGeom>
+          <a:noFill/>
+          <a:ln/>
+        </p:spPr>
+        <p:txBody>
+          <a:bodyPr wrap="square" lIns="0" tIns="0" rIns="0" bIns="0" rtlCol="0" anchor="ctr"/>
+          <a:lstStyle/>
+          <a:p>
+            <a:pPr algn="r" indent="0" marL="0">
+              <a:buNone/>
+            </a:pPr>
+            <a:r>
+              <a:rPr lang="en-US" sz="900" dirty="0">
+                <a:solidFill>
+                  <a:srgbClr val="5F7181"/>
+                </a:solidFill>
+                <a:latin typeface="Aptos" pitchFamily="34" charset="0"/>
+                <a:ea typeface="Aptos" pitchFamily="34" charset="-122"/>
+                <a:cs typeface="Aptos" pitchFamily="34" charset="-120"/>
+              </a:rPr>
+              <a:t>17</a:t>
+            </a:r>
+            <a:endParaRPr lang="en-US" sz="900" dirty="0"/>
+          </a:p>
+        </p:txBody>
+      </p:sp>
+      <p:sp>
+        <p:nvSpPr>
+          <p:cNvPr id="8" name="Shape 6"/>
           <p:cNvSpPr/>
           <p:nvPr/>
         </p:nvSpPr>
@@ -7226,7 +7521,7 @@
       </p:sp>
       <p:sp>
         <p:nvSpPr>
-          <p:cNvPr id="8" name="Text 6"/>
+          <p:cNvPr id="9" name="Text 7"/>
           <p:cNvSpPr/>
           <p:nvPr/>
         </p:nvSpPr>
@@ -7265,14 +7560,14 @@
       </p:sp>
       <p:sp>
         <p:nvSpPr>
-          <p:cNvPr id="9" name="Text 7"/>
+          <p:cNvPr id="10" name="Text 8"/>
           <p:cNvSpPr/>
           <p:nvPr/>
         </p:nvSpPr>
         <p:spPr>
           <a:xfrm>
             <a:off x="640080" y="621792"/>
-            <a:ext cx="10881360" cy="566928"/>
+            <a:ext cx="10881360" cy="713232"/>
           </a:xfrm>
           <a:prstGeom prst="rect">
             <a:avLst/>
@@ -7290,7 +7585,7 @@
               <a:buNone/>
             </a:pPr>
             <a:r>
-              <a:rPr lang="en-US" sz="2700" b="1" dirty="0">
+              <a:rPr lang="en-US" sz="3400" b="1" dirty="0">
                 <a:solidFill>
                   <a:srgbClr val="003A63"/>
                 </a:solidFill>
@@ -7300,20 +7595,20 @@
               </a:rPr>
               <a:t>Practical Exercise</a:t>
             </a:r>
-            <a:endParaRPr lang="en-US" sz="2700" dirty="0"/>
-          </a:p>
-        </p:txBody>
-      </p:sp>
-      <p:sp>
-        <p:nvSpPr>
-          <p:cNvPr id="10" name="Text 8"/>
-          <p:cNvSpPr/>
-          <p:nvPr/>
-        </p:nvSpPr>
-        <p:spPr>
-          <a:xfrm>
-            <a:off x="868680" y="1417320"/>
-            <a:ext cx="6675120" cy="4434840"/>
+            <a:endParaRPr lang="en-US" sz="3400" dirty="0"/>
+          </a:p>
+        </p:txBody>
+      </p:sp>
+      <p:sp>
+        <p:nvSpPr>
+          <p:cNvPr id="11" name="Text 9"/>
+          <p:cNvSpPr/>
+          <p:nvPr/>
+        </p:nvSpPr>
+        <p:spPr>
+          <a:xfrm>
+            <a:off x="868680" y="1508760"/>
+            <a:ext cx="6537960" cy="4160520"/>
           </a:xfrm>
           <a:prstGeom prst="rect">
             <a:avLst/>
@@ -7328,7 +7623,7 @@
           <a:lstStyle/>
           <a:p>
             <a:r>
-              <a:rPr lang="en-US" sz="1700" dirty="0">
+              <a:rPr lang="en-US" sz="2100" dirty="0">
                 <a:solidFill>
                   <a:srgbClr val="17364A"/>
                 </a:solidFill>
@@ -7338,11 +7633,11 @@
               </a:rPr>
               <a:t>Create an NLP evaluation plan for one public health workflow.</a:t>
             </a:r>
-            <a:endParaRPr lang="en-US" sz="1700" dirty="0"/>
-          </a:p>
-          <a:p>
-            <a:r>
-              <a:rPr lang="en-US" sz="1700" dirty="0">
+            <a:endParaRPr lang="en-US" sz="2100" dirty="0"/>
+          </a:p>
+          <a:p>
+            <a:r>
+              <a:rPr lang="en-US" sz="2100" dirty="0">
                 <a:solidFill>
                   <a:srgbClr val="17364A"/>
                 </a:solidFill>
@@ -7350,15 +7645,15 @@
                 <a:ea typeface="Aptos" pitchFamily="34" charset="-122"/>
                 <a:cs typeface="Aptos" pitchFamily="34" charset="-120"/>
               </a:rPr>
-              <a:t>Include the text source, NLP task, intended use, prohibited use, required human review, accuracy measures, bias or subgroup.</a:t>
-            </a:r>
-            <a:endParaRPr lang="en-US" sz="1700" dirty="0"/>
-          </a:p>
-        </p:txBody>
-      </p:sp>
-      <p:sp>
-        <p:nvSpPr>
-          <p:cNvPr id="11" name="Shape 9"/>
+              <a:t>Include the text source, NLP task, intended use, prohibited use, required human review, accuracy.</a:t>
+            </a:r>
+            <a:endParaRPr lang="en-US" sz="2100" dirty="0"/>
+          </a:p>
+        </p:txBody>
+      </p:sp>
+      <p:sp>
+        <p:nvSpPr>
+          <p:cNvPr id="12" name="Shape 10"/>
           <p:cNvSpPr/>
           <p:nvPr/>
         </p:nvSpPr>
@@ -7385,14 +7680,14 @@
       </p:sp>
       <p:sp>
         <p:nvSpPr>
-          <p:cNvPr id="12" name="Text 10"/>
+          <p:cNvPr id="13" name="Text 11"/>
           <p:cNvSpPr/>
           <p:nvPr/>
         </p:nvSpPr>
         <p:spPr>
           <a:xfrm>
             <a:off x="8074152" y="1563624"/>
-            <a:ext cx="2825496" cy="201168"/>
+            <a:ext cx="2825496" cy="256032"/>
           </a:xfrm>
           <a:prstGeom prst="rect">
             <a:avLst/>
@@ -7408,7 +7703,7 @@
               <a:buNone/>
             </a:pPr>
             <a:r>
-              <a:rPr lang="en-US" sz="950" b="1" dirty="0">
+              <a:rPr lang="en-US" sz="1300" b="1" dirty="0">
                 <a:solidFill>
                   <a:srgbClr val="0068B7"/>
                 </a:solidFill>
@@ -7418,20 +7713,20 @@
               </a:rPr>
               <a:t>Key idea</a:t>
             </a:r>
-            <a:endParaRPr lang="en-US" sz="950" dirty="0"/>
-          </a:p>
-        </p:txBody>
-      </p:sp>
-      <p:sp>
-        <p:nvSpPr>
-          <p:cNvPr id="13" name="Text 11"/>
-          <p:cNvSpPr/>
-          <p:nvPr/>
-        </p:nvSpPr>
-        <p:spPr>
-          <a:xfrm>
-            <a:off x="8074152" y="1856232"/>
-            <a:ext cx="2825496" cy="1261872"/>
+            <a:endParaRPr lang="en-US" sz="1300" dirty="0"/>
+          </a:p>
+        </p:txBody>
+      </p:sp>
+      <p:sp>
+        <p:nvSpPr>
+          <p:cNvPr id="14" name="Text 12"/>
+          <p:cNvSpPr/>
+          <p:nvPr/>
+        </p:nvSpPr>
+        <p:spPr>
+          <a:xfrm>
+            <a:off x="8074152" y="1920240"/>
+            <a:ext cx="2825496" cy="1188720"/>
           </a:xfrm>
           <a:prstGeom prst="rect">
             <a:avLst/>
@@ -7449,7 +7744,7 @@
               <a:buNone/>
             </a:pPr>
             <a:r>
-              <a:rPr lang="en-US" sz="1250" dirty="0">
+              <a:rPr lang="en-US" sz="1550" dirty="0">
                 <a:solidFill>
                   <a:srgbClr val="17364A"/>
                 </a:solidFill>
@@ -7459,13 +7754,13 @@
               </a:rPr>
               <a:t>Create an NLP evaluation plan for one public health workflow.</a:t>
             </a:r>
-            <a:endParaRPr lang="en-US" sz="1250" dirty="0"/>
-          </a:p>
-        </p:txBody>
-      </p:sp>
-      <p:sp>
-        <p:nvSpPr>
-          <p:cNvPr id="14" name="Shape 12"/>
+            <a:endParaRPr lang="en-US" sz="1550" dirty="0"/>
+          </a:p>
+        </p:txBody>
+      </p:sp>
+      <p:sp>
+        <p:nvSpPr>
+          <p:cNvPr id="15" name="Shape 13"/>
           <p:cNvSpPr/>
           <p:nvPr/>
         </p:nvSpPr>
@@ -7492,14 +7787,14 @@
       </p:sp>
       <p:sp>
         <p:nvSpPr>
-          <p:cNvPr id="15" name="Text 13"/>
+          <p:cNvPr id="16" name="Text 14"/>
           <p:cNvSpPr/>
           <p:nvPr/>
         </p:nvSpPr>
         <p:spPr>
           <a:xfrm>
             <a:off x="8074152" y="3666744"/>
-            <a:ext cx="2825496" cy="201168"/>
+            <a:ext cx="2825496" cy="256032"/>
           </a:xfrm>
           <a:prstGeom prst="rect">
             <a:avLst/>
@@ -7515,7 +7810,7 @@
               <a:buNone/>
             </a:pPr>
             <a:r>
-              <a:rPr lang="en-US" sz="950" b="1" dirty="0">
+              <a:rPr lang="en-US" sz="1300" b="1" dirty="0">
                 <a:solidFill>
                   <a:srgbClr val="0068B7"/>
                 </a:solidFill>
@@ -7525,20 +7820,20 @@
               </a:rPr>
               <a:t>Use this for</a:t>
             </a:r>
-            <a:endParaRPr lang="en-US" sz="950" dirty="0"/>
-          </a:p>
-        </p:txBody>
-      </p:sp>
-      <p:sp>
-        <p:nvSpPr>
-          <p:cNvPr id="16" name="Text 14"/>
-          <p:cNvSpPr/>
-          <p:nvPr/>
-        </p:nvSpPr>
-        <p:spPr>
-          <a:xfrm>
-            <a:off x="8074152" y="3959352"/>
-            <a:ext cx="2825496" cy="1170432"/>
+            <a:endParaRPr lang="en-US" sz="1300" dirty="0"/>
+          </a:p>
+        </p:txBody>
+      </p:sp>
+      <p:sp>
+        <p:nvSpPr>
+          <p:cNvPr id="17" name="Text 15"/>
+          <p:cNvSpPr/>
+          <p:nvPr/>
+        </p:nvSpPr>
+        <p:spPr>
+          <a:xfrm>
+            <a:off x="8074152" y="4023360"/>
+            <a:ext cx="2825496" cy="1097280"/>
           </a:xfrm>
           <a:prstGeom prst="rect">
             <a:avLst/>
@@ -7556,7 +7851,7 @@
               <a:buNone/>
             </a:pPr>
             <a:r>
-              <a:rPr lang="en-US" sz="1250" dirty="0">
+              <a:rPr lang="en-US" sz="1550" dirty="0">
                 <a:solidFill>
                   <a:srgbClr val="17364A"/>
                 </a:solidFill>
@@ -7566,7 +7861,7 @@
               </a:rPr>
               <a:t>Connect the concept to public health decisions, safeguards, documentation, or implementation work.</a:t>
             </a:r>
-            <a:endParaRPr lang="en-US" sz="1250" dirty="0"/>
+            <a:endParaRPr lang="en-US" sz="1550" dirty="0"/>
           </a:p>
         </p:txBody>
       </p:sp>
@@ -7763,7 +8058,7 @@
                 <a:ea typeface="Aptos" pitchFamily="34" charset="-122"/>
                 <a:cs typeface="Aptos" pitchFamily="34" charset="-120"/>
               </a:rPr>
-              <a:t>© Paula Soper</a:t>
+              <a:t>Â© Paula Soper</a:t>
             </a:r>
             <a:endParaRPr lang="en-US" sz="800" dirty="0"/>
           </a:p>
@@ -7771,7 +8066,46 @@
       </p:sp>
       <p:sp>
         <p:nvSpPr>
-          <p:cNvPr id="7" name="Shape 5"/>
+          <p:cNvPr id="7" name="Text 5"/>
+          <p:cNvSpPr/>
+          <p:nvPr/>
+        </p:nvSpPr>
+        <p:spPr>
+          <a:xfrm>
+            <a:off x="11137392" y="6510528"/>
+            <a:ext cx="411480" cy="201168"/>
+          </a:xfrm>
+          <a:prstGeom prst="rect">
+            <a:avLst/>
+          </a:prstGeom>
+          <a:noFill/>
+          <a:ln/>
+        </p:spPr>
+        <p:txBody>
+          <a:bodyPr wrap="square" lIns="0" tIns="0" rIns="0" bIns="0" rtlCol="0" anchor="ctr"/>
+          <a:lstStyle/>
+          <a:p>
+            <a:pPr algn="r" indent="0" marL="0">
+              <a:buNone/>
+            </a:pPr>
+            <a:r>
+              <a:rPr lang="en-US" sz="900" dirty="0">
+                <a:solidFill>
+                  <a:srgbClr val="5F7181"/>
+                </a:solidFill>
+                <a:latin typeface="Aptos" pitchFamily="34" charset="0"/>
+                <a:ea typeface="Aptos" pitchFamily="34" charset="-122"/>
+                <a:cs typeface="Aptos" pitchFamily="34" charset="-120"/>
+              </a:rPr>
+              <a:t>18</a:t>
+            </a:r>
+            <a:endParaRPr lang="en-US" sz="900" dirty="0"/>
+          </a:p>
+        </p:txBody>
+      </p:sp>
+      <p:sp>
+        <p:nvSpPr>
+          <p:cNvPr id="8" name="Shape 6"/>
           <p:cNvSpPr/>
           <p:nvPr/>
         </p:nvSpPr>
@@ -7796,7 +8130,7 @@
       </p:sp>
       <p:sp>
         <p:nvSpPr>
-          <p:cNvPr id="8" name="Text 6"/>
+          <p:cNvPr id="9" name="Text 7"/>
           <p:cNvSpPr/>
           <p:nvPr/>
         </p:nvSpPr>
@@ -7835,14 +8169,14 @@
       </p:sp>
       <p:sp>
         <p:nvSpPr>
-          <p:cNvPr id="9" name="Text 7"/>
+          <p:cNvPr id="10" name="Text 8"/>
           <p:cNvSpPr/>
           <p:nvPr/>
         </p:nvSpPr>
         <p:spPr>
           <a:xfrm>
             <a:off x="640080" y="621792"/>
-            <a:ext cx="10881360" cy="566928"/>
+            <a:ext cx="10881360" cy="713232"/>
           </a:xfrm>
           <a:prstGeom prst="rect">
             <a:avLst/>
@@ -7860,7 +8194,7 @@
               <a:buNone/>
             </a:pPr>
             <a:r>
-              <a:rPr lang="en-US" sz="2700" b="1" dirty="0">
+              <a:rPr lang="en-US" sz="3400" b="1" dirty="0">
                 <a:solidFill>
                   <a:srgbClr val="003A63"/>
                 </a:solidFill>
@@ -7870,20 +8204,20 @@
               </a:rPr>
               <a:t>Expected Artifact or Evidence</a:t>
             </a:r>
-            <a:endParaRPr lang="en-US" sz="2700" dirty="0"/>
-          </a:p>
-        </p:txBody>
-      </p:sp>
-      <p:sp>
-        <p:nvSpPr>
-          <p:cNvPr id="10" name="Text 8"/>
-          <p:cNvSpPr/>
-          <p:nvPr/>
-        </p:nvSpPr>
-        <p:spPr>
-          <a:xfrm>
-            <a:off x="868680" y="1417320"/>
-            <a:ext cx="6675120" cy="4434840"/>
+            <a:endParaRPr lang="en-US" sz="3400" dirty="0"/>
+          </a:p>
+        </p:txBody>
+      </p:sp>
+      <p:sp>
+        <p:nvSpPr>
+          <p:cNvPr id="11" name="Text 9"/>
+          <p:cNvSpPr/>
+          <p:nvPr/>
+        </p:nvSpPr>
+        <p:spPr>
+          <a:xfrm>
+            <a:off x="868680" y="1508760"/>
+            <a:ext cx="6537960" cy="4160520"/>
           </a:xfrm>
           <a:prstGeom prst="rect">
             <a:avLst/>
@@ -7898,7 +8232,7 @@
           <a:lstStyle/>
           <a:p>
             <a:r>
-              <a:rPr lang="en-US" sz="1700" dirty="0">
+              <a:rPr lang="en-US" sz="2100" dirty="0">
                 <a:solidFill>
                   <a:srgbClr val="17364A"/>
                 </a:solidFill>
@@ -7908,11 +8242,11 @@
               </a:rPr>
               <a:t>NLP use case description</a:t>
             </a:r>
-            <a:endParaRPr lang="en-US" sz="1700" dirty="0"/>
-          </a:p>
-          <a:p>
-            <a:r>
-              <a:rPr lang="en-US" sz="1700" dirty="0">
+            <a:endParaRPr lang="en-US" sz="2100" dirty="0"/>
+          </a:p>
+          <a:p>
+            <a:r>
+              <a:rPr lang="en-US" sz="2100" dirty="0">
                 <a:solidFill>
                   <a:srgbClr val="17364A"/>
                 </a:solidFill>
@@ -7922,11 +8256,11 @@
               </a:rPr>
               <a:t>NLP evaluation plan</a:t>
             </a:r>
-            <a:endParaRPr lang="en-US" sz="1700" dirty="0"/>
-          </a:p>
-          <a:p>
-            <a:r>
-              <a:rPr lang="en-US" sz="1700" dirty="0">
+            <a:endParaRPr lang="en-US" sz="2100" dirty="0"/>
+          </a:p>
+          <a:p>
+            <a:r>
+              <a:rPr lang="en-US" sz="2100" dirty="0">
                 <a:solidFill>
                   <a:srgbClr val="17364A"/>
                 </a:solidFill>
@@ -7936,13 +8270,13 @@
               </a:rPr>
               <a:t>Human review checklist</a:t>
             </a:r>
-            <a:endParaRPr lang="en-US" sz="1700" dirty="0"/>
-          </a:p>
-        </p:txBody>
-      </p:sp>
-      <p:sp>
-        <p:nvSpPr>
-          <p:cNvPr id="11" name="Shape 9"/>
+            <a:endParaRPr lang="en-US" sz="2100" dirty="0"/>
+          </a:p>
+        </p:txBody>
+      </p:sp>
+      <p:sp>
+        <p:nvSpPr>
+          <p:cNvPr id="12" name="Shape 10"/>
           <p:cNvSpPr/>
           <p:nvPr/>
         </p:nvSpPr>
@@ -7969,14 +8303,14 @@
       </p:sp>
       <p:sp>
         <p:nvSpPr>
-          <p:cNvPr id="12" name="Text 10"/>
+          <p:cNvPr id="13" name="Text 11"/>
           <p:cNvSpPr/>
           <p:nvPr/>
         </p:nvSpPr>
         <p:spPr>
           <a:xfrm>
             <a:off x="8074152" y="1563624"/>
-            <a:ext cx="2825496" cy="201168"/>
+            <a:ext cx="2825496" cy="256032"/>
           </a:xfrm>
           <a:prstGeom prst="rect">
             <a:avLst/>
@@ -7992,7 +8326,7 @@
               <a:buNone/>
             </a:pPr>
             <a:r>
-              <a:rPr lang="en-US" sz="950" b="1" dirty="0">
+              <a:rPr lang="en-US" sz="1300" b="1" dirty="0">
                 <a:solidFill>
                   <a:srgbClr val="0068B7"/>
                 </a:solidFill>
@@ -8002,20 +8336,20 @@
               </a:rPr>
               <a:t>Key idea</a:t>
             </a:r>
-            <a:endParaRPr lang="en-US" sz="950" dirty="0"/>
-          </a:p>
-        </p:txBody>
-      </p:sp>
-      <p:sp>
-        <p:nvSpPr>
-          <p:cNvPr id="13" name="Text 11"/>
-          <p:cNvSpPr/>
-          <p:nvPr/>
-        </p:nvSpPr>
-        <p:spPr>
-          <a:xfrm>
-            <a:off x="8074152" y="1856232"/>
-            <a:ext cx="2825496" cy="1261872"/>
+            <a:endParaRPr lang="en-US" sz="1300" dirty="0"/>
+          </a:p>
+        </p:txBody>
+      </p:sp>
+      <p:sp>
+        <p:nvSpPr>
+          <p:cNvPr id="14" name="Text 12"/>
+          <p:cNvSpPr/>
+          <p:nvPr/>
+        </p:nvSpPr>
+        <p:spPr>
+          <a:xfrm>
+            <a:off x="8074152" y="1920240"/>
+            <a:ext cx="2825496" cy="1188720"/>
           </a:xfrm>
           <a:prstGeom prst="rect">
             <a:avLst/>
@@ -8033,7 +8367,7 @@
               <a:buNone/>
             </a:pPr>
             <a:r>
-              <a:rPr lang="en-US" sz="1250" dirty="0">
+              <a:rPr lang="en-US" sz="1550" dirty="0">
                 <a:solidFill>
                   <a:srgbClr val="17364A"/>
                 </a:solidFill>
@@ -8043,13 +8377,13 @@
               </a:rPr>
               <a:t>NLP use case description</a:t>
             </a:r>
-            <a:endParaRPr lang="en-US" sz="1250" dirty="0"/>
-          </a:p>
-        </p:txBody>
-      </p:sp>
-      <p:sp>
-        <p:nvSpPr>
-          <p:cNvPr id="14" name="Shape 12"/>
+            <a:endParaRPr lang="en-US" sz="1550" dirty="0"/>
+          </a:p>
+        </p:txBody>
+      </p:sp>
+      <p:sp>
+        <p:nvSpPr>
+          <p:cNvPr id="15" name="Shape 13"/>
           <p:cNvSpPr/>
           <p:nvPr/>
         </p:nvSpPr>
@@ -8076,14 +8410,14 @@
       </p:sp>
       <p:sp>
         <p:nvSpPr>
-          <p:cNvPr id="15" name="Text 13"/>
+          <p:cNvPr id="16" name="Text 14"/>
           <p:cNvSpPr/>
           <p:nvPr/>
         </p:nvSpPr>
         <p:spPr>
           <a:xfrm>
             <a:off x="8074152" y="3666744"/>
-            <a:ext cx="2825496" cy="201168"/>
+            <a:ext cx="2825496" cy="256032"/>
           </a:xfrm>
           <a:prstGeom prst="rect">
             <a:avLst/>
@@ -8099,7 +8433,7 @@
               <a:buNone/>
             </a:pPr>
             <a:r>
-              <a:rPr lang="en-US" sz="950" b="1" dirty="0">
+              <a:rPr lang="en-US" sz="1300" b="1" dirty="0">
                 <a:solidFill>
                   <a:srgbClr val="0068B7"/>
                 </a:solidFill>
@@ -8109,20 +8443,20 @@
               </a:rPr>
               <a:t>Use this for</a:t>
             </a:r>
-            <a:endParaRPr lang="en-US" sz="950" dirty="0"/>
-          </a:p>
-        </p:txBody>
-      </p:sp>
-      <p:sp>
-        <p:nvSpPr>
-          <p:cNvPr id="16" name="Text 14"/>
-          <p:cNvSpPr/>
-          <p:nvPr/>
-        </p:nvSpPr>
-        <p:spPr>
-          <a:xfrm>
-            <a:off x="8074152" y="3959352"/>
-            <a:ext cx="2825496" cy="1170432"/>
+            <a:endParaRPr lang="en-US" sz="1300" dirty="0"/>
+          </a:p>
+        </p:txBody>
+      </p:sp>
+      <p:sp>
+        <p:nvSpPr>
+          <p:cNvPr id="17" name="Text 15"/>
+          <p:cNvSpPr/>
+          <p:nvPr/>
+        </p:nvSpPr>
+        <p:spPr>
+          <a:xfrm>
+            <a:off x="8074152" y="4023360"/>
+            <a:ext cx="2825496" cy="1097280"/>
           </a:xfrm>
           <a:prstGeom prst="rect">
             <a:avLst/>
@@ -8140,7 +8474,7 @@
               <a:buNone/>
             </a:pPr>
             <a:r>
-              <a:rPr lang="en-US" sz="1250" dirty="0">
+              <a:rPr lang="en-US" sz="1550" dirty="0">
                 <a:solidFill>
                   <a:srgbClr val="17364A"/>
                 </a:solidFill>
@@ -8150,7 +8484,7 @@
               </a:rPr>
               <a:t>Connect the concept to public health decisions, safeguards, documentation, or implementation work.</a:t>
             </a:r>
-            <a:endParaRPr lang="en-US" sz="1250" dirty="0"/>
+            <a:endParaRPr lang="en-US" sz="1550" dirty="0"/>
           </a:p>
         </p:txBody>
       </p:sp>
@@ -8347,7 +8681,7 @@
                 <a:ea typeface="Aptos" pitchFamily="34" charset="-122"/>
                 <a:cs typeface="Aptos" pitchFamily="34" charset="-120"/>
               </a:rPr>
-              <a:t>© Paula Soper</a:t>
+              <a:t>Â© Paula Soper</a:t>
             </a:r>
             <a:endParaRPr lang="en-US" sz="800" dirty="0"/>
           </a:p>
@@ -8361,8 +8695,47 @@
         </p:nvSpPr>
         <p:spPr>
           <a:xfrm>
+            <a:off x="11137392" y="6510528"/>
+            <a:ext cx="411480" cy="201168"/>
+          </a:xfrm>
+          <a:prstGeom prst="rect">
+            <a:avLst/>
+          </a:prstGeom>
+          <a:noFill/>
+          <a:ln/>
+        </p:spPr>
+        <p:txBody>
+          <a:bodyPr wrap="square" lIns="0" tIns="0" rIns="0" bIns="0" rtlCol="0" anchor="ctr"/>
+          <a:lstStyle/>
+          <a:p>
+            <a:pPr algn="r" indent="0" marL="0">
+              <a:buNone/>
+            </a:pPr>
+            <a:r>
+              <a:rPr lang="en-US" sz="900" dirty="0">
+                <a:solidFill>
+                  <a:srgbClr val="5F7181"/>
+                </a:solidFill>
+                <a:latin typeface="Aptos" pitchFamily="34" charset="0"/>
+                <a:ea typeface="Aptos" pitchFamily="34" charset="-122"/>
+                <a:cs typeface="Aptos" pitchFamily="34" charset="-120"/>
+              </a:rPr>
+              <a:t>19</a:t>
+            </a:r>
+            <a:endParaRPr lang="en-US" sz="900" dirty="0"/>
+          </a:p>
+        </p:txBody>
+      </p:sp>
+      <p:sp>
+        <p:nvSpPr>
+          <p:cNvPr id="8" name="Text 6"/>
+          <p:cNvSpPr/>
+          <p:nvPr/>
+        </p:nvSpPr>
+        <p:spPr>
+          <a:xfrm>
             <a:off x="640080" y="658368"/>
-            <a:ext cx="10881360" cy="566928"/>
+            <a:ext cx="10881360" cy="713232"/>
           </a:xfrm>
           <a:prstGeom prst="rect">
             <a:avLst/>
@@ -8380,7 +8753,7 @@
               <a:buNone/>
             </a:pPr>
             <a:r>
-              <a:rPr lang="en-US" sz="2700" b="1" dirty="0">
+              <a:rPr lang="en-US" sz="3400" b="1" dirty="0">
                 <a:solidFill>
                   <a:srgbClr val="003A63"/>
                 </a:solidFill>
@@ -8390,20 +8763,20 @@
               </a:rPr>
               <a:t>Expected Artifact or Evidence Continued</a:t>
             </a:r>
-            <a:endParaRPr lang="en-US" sz="2700" dirty="0"/>
-          </a:p>
-        </p:txBody>
-      </p:sp>
-      <p:sp>
-        <p:nvSpPr>
-          <p:cNvPr id="8" name="Text 6"/>
-          <p:cNvSpPr/>
-          <p:nvPr/>
-        </p:nvSpPr>
-        <p:spPr>
-          <a:xfrm>
-            <a:off x="868680" y="1417320"/>
-            <a:ext cx="6675120" cy="4434840"/>
+            <a:endParaRPr lang="en-US" sz="3400" dirty="0"/>
+          </a:p>
+        </p:txBody>
+      </p:sp>
+      <p:sp>
+        <p:nvSpPr>
+          <p:cNvPr id="9" name="Text 7"/>
+          <p:cNvSpPr/>
+          <p:nvPr/>
+        </p:nvSpPr>
+        <p:spPr>
+          <a:xfrm>
+            <a:off x="868680" y="1508760"/>
+            <a:ext cx="6537960" cy="4160520"/>
           </a:xfrm>
           <a:prstGeom prst="rect">
             <a:avLst/>
@@ -8418,7 +8791,7 @@
           <a:lstStyle/>
           <a:p>
             <a:r>
-              <a:rPr lang="en-US" sz="1700" dirty="0">
+              <a:rPr lang="en-US" sz="2100" dirty="0">
                 <a:solidFill>
                   <a:srgbClr val="17364A"/>
                 </a:solidFill>
@@ -8428,13 +8801,13 @@
               </a:rPr>
               <a:t>Source verification and privacy safeguards</a:t>
             </a:r>
-            <a:endParaRPr lang="en-US" sz="1700" dirty="0"/>
-          </a:p>
-        </p:txBody>
-      </p:sp>
-      <p:sp>
-        <p:nvSpPr>
-          <p:cNvPr id="9" name="Shape 7"/>
+            <a:endParaRPr lang="en-US" sz="2100" dirty="0"/>
+          </a:p>
+        </p:txBody>
+      </p:sp>
+      <p:sp>
+        <p:nvSpPr>
+          <p:cNvPr id="10" name="Shape 8"/>
           <p:cNvSpPr/>
           <p:nvPr/>
         </p:nvSpPr>
@@ -8461,14 +8834,14 @@
       </p:sp>
       <p:sp>
         <p:nvSpPr>
-          <p:cNvPr id="10" name="Text 8"/>
+          <p:cNvPr id="11" name="Text 9"/>
           <p:cNvSpPr/>
           <p:nvPr/>
         </p:nvSpPr>
         <p:spPr>
           <a:xfrm>
             <a:off x="8074152" y="1563624"/>
-            <a:ext cx="2825496" cy="201168"/>
+            <a:ext cx="2825496" cy="256032"/>
           </a:xfrm>
           <a:prstGeom prst="rect">
             <a:avLst/>
@@ -8484,7 +8857,7 @@
               <a:buNone/>
             </a:pPr>
             <a:r>
-              <a:rPr lang="en-US" sz="950" b="1" dirty="0">
+              <a:rPr lang="en-US" sz="1300" b="1" dirty="0">
                 <a:solidFill>
                   <a:srgbClr val="0068B7"/>
                 </a:solidFill>
@@ -8494,20 +8867,20 @@
               </a:rPr>
               <a:t>Key idea</a:t>
             </a:r>
-            <a:endParaRPr lang="en-US" sz="950" dirty="0"/>
-          </a:p>
-        </p:txBody>
-      </p:sp>
-      <p:sp>
-        <p:nvSpPr>
-          <p:cNvPr id="11" name="Text 9"/>
-          <p:cNvSpPr/>
-          <p:nvPr/>
-        </p:nvSpPr>
-        <p:spPr>
-          <a:xfrm>
-            <a:off x="8074152" y="1856232"/>
-            <a:ext cx="2825496" cy="1261872"/>
+            <a:endParaRPr lang="en-US" sz="1300" dirty="0"/>
+          </a:p>
+        </p:txBody>
+      </p:sp>
+      <p:sp>
+        <p:nvSpPr>
+          <p:cNvPr id="12" name="Text 10"/>
+          <p:cNvSpPr/>
+          <p:nvPr/>
+        </p:nvSpPr>
+        <p:spPr>
+          <a:xfrm>
+            <a:off x="8074152" y="1920240"/>
+            <a:ext cx="2825496" cy="1188720"/>
           </a:xfrm>
           <a:prstGeom prst="rect">
             <a:avLst/>
@@ -8525,7 +8898,7 @@
               <a:buNone/>
             </a:pPr>
             <a:r>
-              <a:rPr lang="en-US" sz="1250" dirty="0">
+              <a:rPr lang="en-US" sz="1550" dirty="0">
                 <a:solidFill>
                   <a:srgbClr val="17364A"/>
                 </a:solidFill>
@@ -8535,13 +8908,13 @@
               </a:rPr>
               <a:t>Source verification and privacy safeguards</a:t>
             </a:r>
-            <a:endParaRPr lang="en-US" sz="1250" dirty="0"/>
-          </a:p>
-        </p:txBody>
-      </p:sp>
-      <p:sp>
-        <p:nvSpPr>
-          <p:cNvPr id="12" name="Shape 10"/>
+            <a:endParaRPr lang="en-US" sz="1550" dirty="0"/>
+          </a:p>
+        </p:txBody>
+      </p:sp>
+      <p:sp>
+        <p:nvSpPr>
+          <p:cNvPr id="13" name="Shape 11"/>
           <p:cNvSpPr/>
           <p:nvPr/>
         </p:nvSpPr>
@@ -8568,14 +8941,14 @@
       </p:sp>
       <p:sp>
         <p:nvSpPr>
-          <p:cNvPr id="13" name="Text 11"/>
+          <p:cNvPr id="14" name="Text 12"/>
           <p:cNvSpPr/>
           <p:nvPr/>
         </p:nvSpPr>
         <p:spPr>
           <a:xfrm>
             <a:off x="8074152" y="3666744"/>
-            <a:ext cx="2825496" cy="201168"/>
+            <a:ext cx="2825496" cy="256032"/>
           </a:xfrm>
           <a:prstGeom prst="rect">
             <a:avLst/>
@@ -8591,7 +8964,7 @@
               <a:buNone/>
             </a:pPr>
             <a:r>
-              <a:rPr lang="en-US" sz="950" b="1" dirty="0">
+              <a:rPr lang="en-US" sz="1300" b="1" dirty="0">
                 <a:solidFill>
                   <a:srgbClr val="0068B7"/>
                 </a:solidFill>
@@ -8601,20 +8974,20 @@
               </a:rPr>
               <a:t>Use this for</a:t>
             </a:r>
-            <a:endParaRPr lang="en-US" sz="950" dirty="0"/>
-          </a:p>
-        </p:txBody>
-      </p:sp>
-      <p:sp>
-        <p:nvSpPr>
-          <p:cNvPr id="14" name="Text 12"/>
-          <p:cNvSpPr/>
-          <p:nvPr/>
-        </p:nvSpPr>
-        <p:spPr>
-          <a:xfrm>
-            <a:off x="8074152" y="3959352"/>
-            <a:ext cx="2825496" cy="1170432"/>
+            <a:endParaRPr lang="en-US" sz="1300" dirty="0"/>
+          </a:p>
+        </p:txBody>
+      </p:sp>
+      <p:sp>
+        <p:nvSpPr>
+          <p:cNvPr id="15" name="Text 13"/>
+          <p:cNvSpPr/>
+          <p:nvPr/>
+        </p:nvSpPr>
+        <p:spPr>
+          <a:xfrm>
+            <a:off x="8074152" y="4023360"/>
+            <a:ext cx="2825496" cy="1097280"/>
           </a:xfrm>
           <a:prstGeom prst="rect">
             <a:avLst/>
@@ -8632,7 +9005,7 @@
               <a:buNone/>
             </a:pPr>
             <a:r>
-              <a:rPr lang="en-US" sz="1250" dirty="0">
+              <a:rPr lang="en-US" sz="1550" dirty="0">
                 <a:solidFill>
                   <a:srgbClr val="17364A"/>
                 </a:solidFill>
@@ -8642,7 +9015,7 @@
               </a:rPr>
               <a:t>Connect the concept to public health decisions, safeguards, documentation, or implementation work.</a:t>
             </a:r>
-            <a:endParaRPr lang="en-US" sz="1250" dirty="0"/>
+            <a:endParaRPr lang="en-US" sz="1550" dirty="0"/>
           </a:p>
         </p:txBody>
       </p:sp>
@@ -8839,7 +9212,7 @@
                 <a:ea typeface="Aptos" pitchFamily="34" charset="-122"/>
                 <a:cs typeface="Aptos" pitchFamily="34" charset="-120"/>
               </a:rPr>
-              <a:t>© Paula Soper</a:t>
+              <a:t>Â© Paula Soper</a:t>
             </a:r>
             <a:endParaRPr lang="en-US" sz="800" dirty="0"/>
           </a:p>
@@ -8853,8 +9226,47 @@
         </p:nvSpPr>
         <p:spPr>
           <a:xfrm>
+            <a:off x="11137392" y="6510528"/>
+            <a:ext cx="411480" cy="201168"/>
+          </a:xfrm>
+          <a:prstGeom prst="rect">
+            <a:avLst/>
+          </a:prstGeom>
+          <a:noFill/>
+          <a:ln/>
+        </p:spPr>
+        <p:txBody>
+          <a:bodyPr wrap="square" lIns="0" tIns="0" rIns="0" bIns="0" rtlCol="0" anchor="ctr"/>
+          <a:lstStyle/>
+          <a:p>
+            <a:pPr algn="r" indent="0" marL="0">
+              <a:buNone/>
+            </a:pPr>
+            <a:r>
+              <a:rPr lang="en-US" sz="900" dirty="0">
+                <a:solidFill>
+                  <a:srgbClr val="5F7181"/>
+                </a:solidFill>
+                <a:latin typeface="Aptos" pitchFamily="34" charset="0"/>
+                <a:ea typeface="Aptos" pitchFamily="34" charset="-122"/>
+                <a:cs typeface="Aptos" pitchFamily="34" charset="-120"/>
+              </a:rPr>
+              <a:t>2</a:t>
+            </a:r>
+            <a:endParaRPr lang="en-US" sz="900" dirty="0"/>
+          </a:p>
+        </p:txBody>
+      </p:sp>
+      <p:sp>
+        <p:nvSpPr>
+          <p:cNvPr id="8" name="Text 6"/>
+          <p:cNvSpPr/>
+          <p:nvPr/>
+        </p:nvSpPr>
+        <p:spPr>
+          <a:xfrm>
             <a:off x="640080" y="658368"/>
-            <a:ext cx="10881360" cy="566928"/>
+            <a:ext cx="10881360" cy="713232"/>
           </a:xfrm>
           <a:prstGeom prst="rect">
             <a:avLst/>
@@ -8872,7 +9284,7 @@
               <a:buNone/>
             </a:pPr>
             <a:r>
-              <a:rPr lang="en-US" sz="2700" b="1" dirty="0">
+              <a:rPr lang="en-US" sz="3400" b="1" dirty="0">
                 <a:solidFill>
                   <a:srgbClr val="003A63"/>
                 </a:solidFill>
@@ -8882,20 +9294,20 @@
               </a:rPr>
               <a:t>What this module helps you do</a:t>
             </a:r>
-            <a:endParaRPr lang="en-US" sz="2700" dirty="0"/>
-          </a:p>
-        </p:txBody>
-      </p:sp>
-      <p:sp>
-        <p:nvSpPr>
-          <p:cNvPr id="8" name="Text 6"/>
-          <p:cNvSpPr/>
-          <p:nvPr/>
-        </p:nvSpPr>
-        <p:spPr>
-          <a:xfrm>
-            <a:off x="868680" y="1417320"/>
-            <a:ext cx="6675120" cy="3291840"/>
+            <a:endParaRPr lang="en-US" sz="3400" dirty="0"/>
+          </a:p>
+        </p:txBody>
+      </p:sp>
+      <p:sp>
+        <p:nvSpPr>
+          <p:cNvPr id="9" name="Text 7"/>
+          <p:cNvSpPr/>
+          <p:nvPr/>
+        </p:nvSpPr>
+        <p:spPr>
+          <a:xfrm>
+            <a:off x="868680" y="1508760"/>
+            <a:ext cx="6446520" cy="2926080"/>
           </a:xfrm>
           <a:prstGeom prst="rect">
             <a:avLst/>
@@ -8910,7 +9322,7 @@
           <a:lstStyle/>
           <a:p>
             <a:r>
-              <a:rPr lang="en-US" sz="1700" dirty="0">
+              <a:rPr lang="en-US" sz="2100" dirty="0">
                 <a:solidFill>
                   <a:srgbClr val="17364A"/>
                 </a:solidFill>
@@ -8920,11 +9332,11 @@
               </a:rPr>
               <a:t>Natural language processing is a branch of AI that works with human language.</a:t>
             </a:r>
-            <a:endParaRPr lang="en-US" sz="1700" dirty="0"/>
-          </a:p>
-          <a:p>
-            <a:r>
-              <a:rPr lang="en-US" sz="1700" dirty="0">
+            <a:endParaRPr lang="en-US" sz="2100" dirty="0"/>
+          </a:p>
+          <a:p>
+            <a:r>
+              <a:rPr lang="en-US" sz="2100" dirty="0">
                 <a:solidFill>
                   <a:srgbClr val="17364A"/>
                 </a:solidFill>
@@ -8932,13 +9344,13 @@
                 <a:ea typeface="Aptos" pitchFamily="34" charset="-122"/>
                 <a:cs typeface="Aptos" pitchFamily="34" charset="-120"/>
               </a:rPr>
-              <a:t>Public health agencies often hold important information in free-text sources, including clinical notes, case narratives, call center logs,.</a:t>
-            </a:r>
-            <a:endParaRPr lang="en-US" sz="1700" dirty="0"/>
-          </a:p>
-          <a:p>
-            <a:r>
-              <a:rPr lang="en-US" sz="1700" dirty="0">
+              <a:t>Public health agencies often hold important information in free-text sources, including clinical notes, case.</a:t>
+            </a:r>
+            <a:endParaRPr lang="en-US" sz="2100" dirty="0"/>
+          </a:p>
+          <a:p>
+            <a:r>
+              <a:rPr lang="en-US" sz="2100" dirty="0">
                 <a:solidFill>
                   <a:srgbClr val="17364A"/>
                 </a:solidFill>
@@ -8948,13 +9360,13 @@
               </a:rPr>
               <a:t>This module teaches learners how NLP can support public health work and how to evaluate its risks.</a:t>
             </a:r>
-            <a:endParaRPr lang="en-US" sz="1700" dirty="0"/>
-          </a:p>
-        </p:txBody>
-      </p:sp>
-      <p:sp>
-        <p:nvSpPr>
-          <p:cNvPr id="9" name="Shape 7"/>
+            <a:endParaRPr lang="en-US" sz="2100" dirty="0"/>
+          </a:p>
+        </p:txBody>
+      </p:sp>
+      <p:sp>
+        <p:nvSpPr>
+          <p:cNvPr id="10" name="Shape 8"/>
           <p:cNvSpPr/>
           <p:nvPr/>
         </p:nvSpPr>
@@ -8981,14 +9393,14 @@
       </p:sp>
       <p:sp>
         <p:nvSpPr>
-          <p:cNvPr id="10" name="Text 8"/>
+          <p:cNvPr id="11" name="Text 9"/>
           <p:cNvSpPr/>
           <p:nvPr/>
         </p:nvSpPr>
         <p:spPr>
           <a:xfrm>
             <a:off x="8074152" y="1563624"/>
-            <a:ext cx="2825496" cy="201168"/>
+            <a:ext cx="2825496" cy="256032"/>
           </a:xfrm>
           <a:prstGeom prst="rect">
             <a:avLst/>
@@ -9004,7 +9416,7 @@
               <a:buNone/>
             </a:pPr>
             <a:r>
-              <a:rPr lang="en-US" sz="950" b="1" dirty="0">
+              <a:rPr lang="en-US" sz="1300" b="1" dirty="0">
                 <a:solidFill>
                   <a:srgbClr val="0068B7"/>
                 </a:solidFill>
@@ -9014,20 +9426,20 @@
               </a:rPr>
               <a:t>Module details</a:t>
             </a:r>
-            <a:endParaRPr lang="en-US" sz="950" dirty="0"/>
-          </a:p>
-        </p:txBody>
-      </p:sp>
-      <p:sp>
-        <p:nvSpPr>
-          <p:cNvPr id="11" name="Text 9"/>
-          <p:cNvSpPr/>
-          <p:nvPr/>
-        </p:nvSpPr>
-        <p:spPr>
-          <a:xfrm>
-            <a:off x="8074152" y="1856232"/>
-            <a:ext cx="2825496" cy="1353312"/>
+            <a:endParaRPr lang="en-US" sz="1300" dirty="0"/>
+          </a:p>
+        </p:txBody>
+      </p:sp>
+      <p:sp>
+        <p:nvSpPr>
+          <p:cNvPr id="12" name="Text 10"/>
+          <p:cNvSpPr/>
+          <p:nvPr/>
+        </p:nvSpPr>
+        <p:spPr>
+          <a:xfrm>
+            <a:off x="8074152" y="1920240"/>
+            <a:ext cx="2825496" cy="1280160"/>
           </a:xfrm>
           <a:prstGeom prst="rect">
             <a:avLst/>
@@ -9045,7 +9457,7 @@
               <a:buNone/>
             </a:pPr>
             <a:r>
-              <a:rPr lang="en-US" sz="1250" dirty="0">
+              <a:rPr lang="en-US" sz="1550" dirty="0">
                 <a:solidFill>
                   <a:srgbClr val="17364A"/>
                 </a:solidFill>
@@ -9055,14 +9467,14 @@
               </a:rPr>
               <a:t>Level: applied/foundational</a:t>
             </a:r>
-            <a:endParaRPr lang="en-US" sz="1250" dirty="0"/>
+            <a:endParaRPr lang="en-US" sz="1550" dirty="0"/>
           </a:p>
           <a:p>
             <a:pPr indent="0" marL="0">
               <a:buNone/>
             </a:pPr>
             <a:r>
-              <a:rPr lang="en-US" sz="1250" dirty="0">
+              <a:rPr lang="en-US" sz="1550" dirty="0">
                 <a:solidFill>
                   <a:srgbClr val="17364A"/>
                 </a:solidFill>
@@ -9072,14 +9484,14 @@
               </a:rPr>
               <a:t>Primary track: Analytics and Modeling Track</a:t>
             </a:r>
-            <a:endParaRPr lang="en-US" sz="1250" dirty="0"/>
+            <a:endParaRPr lang="en-US" sz="1550" dirty="0"/>
           </a:p>
           <a:p>
             <a:pPr indent="0" marL="0">
               <a:buNone/>
             </a:pPr>
             <a:r>
-              <a:rPr lang="en-US" sz="1250" dirty="0">
+              <a:rPr lang="en-US" sz="1550" dirty="0">
                 <a:solidFill>
                   <a:srgbClr val="17364A"/>
                 </a:solidFill>
@@ -9089,32 +9501,32 @@
               </a:rPr>
               <a:t>Appears in tracks: technical-architecture</a:t>
             </a:r>
-            <a:endParaRPr lang="en-US" sz="1250" dirty="0"/>
-          </a:p>
-        </p:txBody>
-      </p:sp>
-      <p:sp>
-        <p:nvSpPr>
-          <p:cNvPr id="12" name="Shape 10"/>
-          <p:cNvSpPr/>
-          <p:nvPr/>
-        </p:nvSpPr>
-        <p:spPr>
-          <a:xfrm>
-            <a:off x="7909560" y="3611880"/>
-            <a:ext cx="3154680" cy="1783080"/>
+            <a:endParaRPr lang="en-US" sz="1550" dirty="0"/>
+          </a:p>
+        </p:txBody>
+      </p:sp>
+      <p:sp>
+        <p:nvSpPr>
+          <p:cNvPr id="13" name="Shape 11"/>
+          <p:cNvSpPr/>
+          <p:nvPr/>
+        </p:nvSpPr>
+        <p:spPr>
+          <a:xfrm>
+            <a:off x="7635240" y="3730752"/>
+            <a:ext cx="1033272" cy="749808"/>
           </a:xfrm>
           <a:prstGeom prst="roundRect">
             <a:avLst>
-              <a:gd name="adj" fmla="val 6154"/>
+              <a:gd name="adj" fmla="val 14634"/>
             </a:avLst>
           </a:prstGeom>
           <a:solidFill>
-            <a:srgbClr val="EEF8ED"/>
+            <a:srgbClr val="0068B7"/>
           </a:solidFill>
           <a:ln w="12700">
             <a:solidFill>
-              <a:srgbClr val="B9D7E6"/>
+              <a:srgbClr val="0068B7"/>
             </a:solidFill>
             <a:prstDash val="solid"/>
           </a:ln>
@@ -9122,81 +9534,256 @@
       </p:sp>
       <p:sp>
         <p:nvSpPr>
-          <p:cNvPr id="13" name="Text 11"/>
-          <p:cNvSpPr/>
-          <p:nvPr/>
-        </p:nvSpPr>
-        <p:spPr>
-          <a:xfrm>
-            <a:off x="8074152" y="3758184"/>
-            <a:ext cx="2825496" cy="201168"/>
-          </a:xfrm>
-          <a:prstGeom prst="rect">
-            <a:avLst/>
-          </a:prstGeom>
-          <a:noFill/>
-          <a:ln/>
-        </p:spPr>
-        <p:txBody>
-          <a:bodyPr wrap="square" lIns="0" tIns="0" rIns="0" bIns="0" rtlCol="0" anchor="ctr"/>
-          <a:lstStyle/>
-          <a:p>
-            <a:pPr indent="0" marL="0">
-              <a:buNone/>
-            </a:pPr>
-            <a:r>
-              <a:rPr lang="en-US" sz="950" b="1" dirty="0">
-                <a:solidFill>
-                  <a:srgbClr val="0068B7"/>
-                </a:solidFill>
-                <a:latin typeface="Aptos" pitchFamily="34" charset="0"/>
-                <a:ea typeface="Aptos" pitchFamily="34" charset="-122"/>
-                <a:cs typeface="Aptos" pitchFamily="34" charset="-120"/>
-              </a:rPr>
-              <a:t>Learning approach</a:t>
-            </a:r>
-            <a:endParaRPr lang="en-US" sz="950" dirty="0"/>
-          </a:p>
-        </p:txBody>
-      </p:sp>
-      <p:sp>
-        <p:nvSpPr>
           <p:cNvPr id="14" name="Text 12"/>
           <p:cNvSpPr/>
           <p:nvPr/>
         </p:nvSpPr>
         <p:spPr>
           <a:xfrm>
-            <a:off x="8074152" y="4050792"/>
-            <a:ext cx="2825496" cy="1216152"/>
-          </a:xfrm>
-          <a:prstGeom prst="rect">
-            <a:avLst/>
-          </a:prstGeom>
-          <a:noFill/>
-          <a:ln/>
-        </p:spPr>
-        <p:txBody>
-          <a:bodyPr wrap="square" lIns="0" tIns="0" rIns="0" bIns="0" rtlCol="0" anchor="t">
+            <a:off x="7708392" y="3922776"/>
+            <a:ext cx="886968" cy="310896"/>
+          </a:xfrm>
+          <a:prstGeom prst="rect">
+            <a:avLst/>
+          </a:prstGeom>
+          <a:noFill/>
+          <a:ln/>
+        </p:spPr>
+        <p:txBody>
+          <a:bodyPr wrap="square" lIns="0" tIns="0" rIns="0" bIns="0" rtlCol="0" anchor="ctr">
             <a:normAutofit/>
           </a:bodyPr>
           <a:lstStyle/>
           <a:p>
-            <a:pPr indent="0" marL="0">
-              <a:buNone/>
-            </a:pPr>
-            <a:r>
-              <a:rPr lang="en-US" sz="1250" dirty="0">
-                <a:solidFill>
-                  <a:srgbClr val="17364A"/>
-                </a:solidFill>
-                <a:latin typeface="Aptos" pitchFamily="34" charset="0"/>
-                <a:ea typeface="Aptos" pitchFamily="34" charset="-122"/>
-                <a:cs typeface="Aptos" pitchFamily="34" charset="-120"/>
-              </a:rPr>
-              <a:t>Review the core ideas, complete the practical exercise, check your understanding, and use the related plays and tools to apply the lesson.</a:t>
-            </a:r>
-            <a:endParaRPr lang="en-US" sz="1250" dirty="0"/>
+            <a:pPr algn="ctr" indent="0" marL="0">
+              <a:buNone/>
+            </a:pPr>
+            <a:r>
+              <a:rPr lang="en-US" sz="1500" b="1" dirty="0">
+                <a:solidFill>
+                  <a:srgbClr val="FFFFFF"/>
+                </a:solidFill>
+                <a:latin typeface="Aptos" pitchFamily="34" charset="0"/>
+                <a:ea typeface="Aptos" pitchFamily="34" charset="-122"/>
+                <a:cs typeface="Aptos" pitchFamily="34" charset="-120"/>
+              </a:rPr>
+              <a:t>Learn</a:t>
+            </a:r>
+            <a:endParaRPr lang="en-US" sz="1500" dirty="0"/>
+          </a:p>
+        </p:txBody>
+      </p:sp>
+      <p:sp>
+        <p:nvSpPr>
+          <p:cNvPr id="15" name="Text 13"/>
+          <p:cNvSpPr/>
+          <p:nvPr/>
+        </p:nvSpPr>
+        <p:spPr>
+          <a:xfrm>
+            <a:off x="8695944" y="3941064"/>
+            <a:ext cx="201168" cy="256032"/>
+          </a:xfrm>
+          <a:prstGeom prst="rect">
+            <a:avLst/>
+          </a:prstGeom>
+          <a:noFill/>
+          <a:ln/>
+        </p:spPr>
+        <p:txBody>
+          <a:bodyPr wrap="square" lIns="0" tIns="0" rIns="0" bIns="0" rtlCol="0" anchor="ctr"/>
+          <a:lstStyle/>
+          <a:p>
+            <a:pPr algn="ctr" indent="0" marL="0">
+              <a:buNone/>
+            </a:pPr>
+            <a:r>
+              <a:rPr lang="en-US" sz="1800" b="1" dirty="0">
+                <a:solidFill>
+                  <a:srgbClr val="0068B7"/>
+                </a:solidFill>
+                <a:latin typeface="Aptos" pitchFamily="34" charset="0"/>
+                <a:ea typeface="Aptos" pitchFamily="34" charset="-122"/>
+                <a:cs typeface="Aptos" pitchFamily="34" charset="-120"/>
+              </a:rPr>
+              <a:t>â†’</a:t>
+            </a:r>
+            <a:endParaRPr lang="en-US" sz="1800" dirty="0"/>
+          </a:p>
+        </p:txBody>
+      </p:sp>
+      <p:sp>
+        <p:nvSpPr>
+          <p:cNvPr id="16" name="Shape 14"/>
+          <p:cNvSpPr/>
+          <p:nvPr/>
+        </p:nvSpPr>
+        <p:spPr>
+          <a:xfrm>
+            <a:off x="8924544" y="3730752"/>
+            <a:ext cx="1033272" cy="749808"/>
+          </a:xfrm>
+          <a:prstGeom prst="roundRect">
+            <a:avLst>
+              <a:gd name="adj" fmla="val 14634"/>
+            </a:avLst>
+          </a:prstGeom>
+          <a:solidFill>
+            <a:srgbClr val="2F8A28"/>
+          </a:solidFill>
+          <a:ln w="12700">
+            <a:solidFill>
+              <a:srgbClr val="2F8A28"/>
+            </a:solidFill>
+            <a:prstDash val="solid"/>
+          </a:ln>
+        </p:spPr>
+      </p:sp>
+      <p:sp>
+        <p:nvSpPr>
+          <p:cNvPr id="17" name="Text 15"/>
+          <p:cNvSpPr/>
+          <p:nvPr/>
+        </p:nvSpPr>
+        <p:spPr>
+          <a:xfrm>
+            <a:off x="8997696" y="3922776"/>
+            <a:ext cx="886968" cy="310896"/>
+          </a:xfrm>
+          <a:prstGeom prst="rect">
+            <a:avLst/>
+          </a:prstGeom>
+          <a:noFill/>
+          <a:ln/>
+        </p:spPr>
+        <p:txBody>
+          <a:bodyPr wrap="square" lIns="0" tIns="0" rIns="0" bIns="0" rtlCol="0" anchor="ctr">
+            <a:normAutofit/>
+          </a:bodyPr>
+          <a:lstStyle/>
+          <a:p>
+            <a:pPr algn="ctr" indent="0" marL="0">
+              <a:buNone/>
+            </a:pPr>
+            <a:r>
+              <a:rPr lang="en-US" sz="1500" b="1" dirty="0">
+                <a:solidFill>
+                  <a:srgbClr val="FFFFFF"/>
+                </a:solidFill>
+                <a:latin typeface="Aptos" pitchFamily="34" charset="0"/>
+                <a:ea typeface="Aptos" pitchFamily="34" charset="-122"/>
+                <a:cs typeface="Aptos" pitchFamily="34" charset="-120"/>
+              </a:rPr>
+              <a:t>Apply</a:t>
+            </a:r>
+            <a:endParaRPr lang="en-US" sz="1500" dirty="0"/>
+          </a:p>
+        </p:txBody>
+      </p:sp>
+      <p:sp>
+        <p:nvSpPr>
+          <p:cNvPr id="18" name="Text 16"/>
+          <p:cNvSpPr/>
+          <p:nvPr/>
+        </p:nvSpPr>
+        <p:spPr>
+          <a:xfrm>
+            <a:off x="9985248" y="3941064"/>
+            <a:ext cx="201168" cy="256032"/>
+          </a:xfrm>
+          <a:prstGeom prst="rect">
+            <a:avLst/>
+          </a:prstGeom>
+          <a:noFill/>
+          <a:ln/>
+        </p:spPr>
+        <p:txBody>
+          <a:bodyPr wrap="square" lIns="0" tIns="0" rIns="0" bIns="0" rtlCol="0" anchor="ctr"/>
+          <a:lstStyle/>
+          <a:p>
+            <a:pPr algn="ctr" indent="0" marL="0">
+              <a:buNone/>
+            </a:pPr>
+            <a:r>
+              <a:rPr lang="en-US" sz="1800" b="1" dirty="0">
+                <a:solidFill>
+                  <a:srgbClr val="0068B7"/>
+                </a:solidFill>
+                <a:latin typeface="Aptos" pitchFamily="34" charset="0"/>
+                <a:ea typeface="Aptos" pitchFamily="34" charset="-122"/>
+                <a:cs typeface="Aptos" pitchFamily="34" charset="-120"/>
+              </a:rPr>
+              <a:t>â†’</a:t>
+            </a:r>
+            <a:endParaRPr lang="en-US" sz="1800" dirty="0"/>
+          </a:p>
+        </p:txBody>
+      </p:sp>
+      <p:sp>
+        <p:nvSpPr>
+          <p:cNvPr id="19" name="Shape 17"/>
+          <p:cNvSpPr/>
+          <p:nvPr/>
+        </p:nvSpPr>
+        <p:spPr>
+          <a:xfrm>
+            <a:off x="10213848" y="3730752"/>
+            <a:ext cx="1033272" cy="749808"/>
+          </a:xfrm>
+          <a:prstGeom prst="roundRect">
+            <a:avLst>
+              <a:gd name="adj" fmla="val 14634"/>
+            </a:avLst>
+          </a:prstGeom>
+          <a:solidFill>
+            <a:srgbClr val="6A4CA3"/>
+          </a:solidFill>
+          <a:ln w="12700">
+            <a:solidFill>
+              <a:srgbClr val="6A4CA3"/>
+            </a:solidFill>
+            <a:prstDash val="solid"/>
+          </a:ln>
+        </p:spPr>
+      </p:sp>
+      <p:sp>
+        <p:nvSpPr>
+          <p:cNvPr id="20" name="Text 18"/>
+          <p:cNvSpPr/>
+          <p:nvPr/>
+        </p:nvSpPr>
+        <p:spPr>
+          <a:xfrm>
+            <a:off x="10287000" y="3922776"/>
+            <a:ext cx="886968" cy="310896"/>
+          </a:xfrm>
+          <a:prstGeom prst="rect">
+            <a:avLst/>
+          </a:prstGeom>
+          <a:noFill/>
+          <a:ln/>
+        </p:spPr>
+        <p:txBody>
+          <a:bodyPr wrap="square" lIns="0" tIns="0" rIns="0" bIns="0" rtlCol="0" anchor="ctr">
+            <a:normAutofit/>
+          </a:bodyPr>
+          <a:lstStyle/>
+          <a:p>
+            <a:pPr algn="ctr" indent="0" marL="0">
+              <a:buNone/>
+            </a:pPr>
+            <a:r>
+              <a:rPr lang="en-US" sz="1500" b="1" dirty="0">
+                <a:solidFill>
+                  <a:srgbClr val="FFFFFF"/>
+                </a:solidFill>
+                <a:latin typeface="Aptos" pitchFamily="34" charset="0"/>
+                <a:ea typeface="Aptos" pitchFamily="34" charset="-122"/>
+                <a:cs typeface="Aptos" pitchFamily="34" charset="-120"/>
+              </a:rPr>
+              <a:t>Document</a:t>
+            </a:r>
+            <a:endParaRPr lang="en-US" sz="1500" dirty="0"/>
           </a:p>
         </p:txBody>
       </p:sp>
@@ -9393,7 +9980,7 @@
                 <a:ea typeface="Aptos" pitchFamily="34" charset="-122"/>
                 <a:cs typeface="Aptos" pitchFamily="34" charset="-120"/>
               </a:rPr>
-              <a:t>© Paula Soper</a:t>
+              <a:t>Â© Paula Soper</a:t>
             </a:r>
             <a:endParaRPr lang="en-US" sz="800" dirty="0"/>
           </a:p>
@@ -9401,7 +9988,46 @@
       </p:sp>
       <p:sp>
         <p:nvSpPr>
-          <p:cNvPr id="7" name="Shape 5"/>
+          <p:cNvPr id="7" name="Text 5"/>
+          <p:cNvSpPr/>
+          <p:nvPr/>
+        </p:nvSpPr>
+        <p:spPr>
+          <a:xfrm>
+            <a:off x="11137392" y="6510528"/>
+            <a:ext cx="411480" cy="201168"/>
+          </a:xfrm>
+          <a:prstGeom prst="rect">
+            <a:avLst/>
+          </a:prstGeom>
+          <a:noFill/>
+          <a:ln/>
+        </p:spPr>
+        <p:txBody>
+          <a:bodyPr wrap="square" lIns="0" tIns="0" rIns="0" bIns="0" rtlCol="0" anchor="ctr"/>
+          <a:lstStyle/>
+          <a:p>
+            <a:pPr algn="r" indent="0" marL="0">
+              <a:buNone/>
+            </a:pPr>
+            <a:r>
+              <a:rPr lang="en-US" sz="900" dirty="0">
+                <a:solidFill>
+                  <a:srgbClr val="5F7181"/>
+                </a:solidFill>
+                <a:latin typeface="Aptos" pitchFamily="34" charset="0"/>
+                <a:ea typeface="Aptos" pitchFamily="34" charset="-122"/>
+                <a:cs typeface="Aptos" pitchFamily="34" charset="-120"/>
+              </a:rPr>
+              <a:t>20</a:t>
+            </a:r>
+            <a:endParaRPr lang="en-US" sz="900" dirty="0"/>
+          </a:p>
+        </p:txBody>
+      </p:sp>
+      <p:sp>
+        <p:nvSpPr>
+          <p:cNvPr id="8" name="Shape 6"/>
           <p:cNvSpPr/>
           <p:nvPr/>
         </p:nvSpPr>
@@ -9426,7 +10052,7 @@
       </p:sp>
       <p:sp>
         <p:nvSpPr>
-          <p:cNvPr id="8" name="Text 6"/>
+          <p:cNvPr id="9" name="Text 7"/>
           <p:cNvSpPr/>
           <p:nvPr/>
         </p:nvSpPr>
@@ -9465,14 +10091,14 @@
       </p:sp>
       <p:sp>
         <p:nvSpPr>
-          <p:cNvPr id="9" name="Text 7"/>
+          <p:cNvPr id="10" name="Text 8"/>
           <p:cNvSpPr/>
           <p:nvPr/>
         </p:nvSpPr>
         <p:spPr>
           <a:xfrm>
             <a:off x="640080" y="621792"/>
-            <a:ext cx="10881360" cy="566928"/>
+            <a:ext cx="10881360" cy="713232"/>
           </a:xfrm>
           <a:prstGeom prst="rect">
             <a:avLst/>
@@ -9490,7 +10116,7 @@
               <a:buNone/>
             </a:pPr>
             <a:r>
-              <a:rPr lang="en-US" sz="2700" b="1" dirty="0">
+              <a:rPr lang="en-US" sz="3400" b="1" dirty="0">
                 <a:solidFill>
                   <a:srgbClr val="003A63"/>
                 </a:solidFill>
@@ -9500,20 +10126,20 @@
               </a:rPr>
               <a:t>Expected Assignment</a:t>
             </a:r>
-            <a:endParaRPr lang="en-US" sz="2700" dirty="0"/>
-          </a:p>
-        </p:txBody>
-      </p:sp>
-      <p:sp>
-        <p:nvSpPr>
-          <p:cNvPr id="10" name="Text 8"/>
-          <p:cNvSpPr/>
-          <p:nvPr/>
-        </p:nvSpPr>
-        <p:spPr>
-          <a:xfrm>
-            <a:off x="868680" y="1417320"/>
-            <a:ext cx="6675120" cy="4434840"/>
+            <a:endParaRPr lang="en-US" sz="3400" dirty="0"/>
+          </a:p>
+        </p:txBody>
+      </p:sp>
+      <p:sp>
+        <p:nvSpPr>
+          <p:cNvPr id="11" name="Text 9"/>
+          <p:cNvSpPr/>
+          <p:nvPr/>
+        </p:nvSpPr>
+        <p:spPr>
+          <a:xfrm>
+            <a:off x="868680" y="1508760"/>
+            <a:ext cx="6537960" cy="4160520"/>
           </a:xfrm>
           <a:prstGeom prst="rect">
             <a:avLst/>
@@ -9528,7 +10154,7 @@
           <a:lstStyle/>
           <a:p>
             <a:r>
-              <a:rPr lang="en-US" sz="1700" dirty="0">
+              <a:rPr lang="en-US" sz="2100" dirty="0">
                 <a:solidFill>
                   <a:srgbClr val="17364A"/>
                 </a:solidFill>
@@ -9538,11 +10164,11 @@
               </a:rPr>
               <a:t>NLP use case description</a:t>
             </a:r>
-            <a:endParaRPr lang="en-US" sz="1700" dirty="0"/>
-          </a:p>
-          <a:p>
-            <a:r>
-              <a:rPr lang="en-US" sz="1700" dirty="0">
+            <a:endParaRPr lang="en-US" sz="2100" dirty="0"/>
+          </a:p>
+          <a:p>
+            <a:r>
+              <a:rPr lang="en-US" sz="2100" dirty="0">
                 <a:solidFill>
                   <a:srgbClr val="17364A"/>
                 </a:solidFill>
@@ -9552,11 +10178,11 @@
               </a:rPr>
               <a:t>NLP evaluation plan</a:t>
             </a:r>
-            <a:endParaRPr lang="en-US" sz="1700" dirty="0"/>
-          </a:p>
-          <a:p>
-            <a:r>
-              <a:rPr lang="en-US" sz="1700" dirty="0">
+            <a:endParaRPr lang="en-US" sz="2100" dirty="0"/>
+          </a:p>
+          <a:p>
+            <a:r>
+              <a:rPr lang="en-US" sz="2100" dirty="0">
                 <a:solidFill>
                   <a:srgbClr val="17364A"/>
                 </a:solidFill>
@@ -9566,27 +10192,13 @@
               </a:rPr>
               <a:t>Human review checklist</a:t>
             </a:r>
-            <a:endParaRPr lang="en-US" sz="1700" dirty="0"/>
-          </a:p>
-          <a:p>
-            <a:r>
-              <a:rPr lang="en-US" sz="1700" dirty="0">
-                <a:solidFill>
-                  <a:srgbClr val="17364A"/>
-                </a:solidFill>
-                <a:latin typeface="Aptos" pitchFamily="34" charset="0"/>
-                <a:ea typeface="Aptos" pitchFamily="34" charset="-122"/>
-                <a:cs typeface="Aptos" pitchFamily="34" charset="-120"/>
-              </a:rPr>
-              <a:t>Source verification and privacy safeguards</a:t>
-            </a:r>
-            <a:endParaRPr lang="en-US" sz="1700" dirty="0"/>
-          </a:p>
-        </p:txBody>
-      </p:sp>
-      <p:sp>
-        <p:nvSpPr>
-          <p:cNvPr id="11" name="Shape 9"/>
+            <a:endParaRPr lang="en-US" sz="2100" dirty="0"/>
+          </a:p>
+        </p:txBody>
+      </p:sp>
+      <p:sp>
+        <p:nvSpPr>
+          <p:cNvPr id="12" name="Shape 10"/>
           <p:cNvSpPr/>
           <p:nvPr/>
         </p:nvSpPr>
@@ -9613,14 +10225,14 @@
       </p:sp>
       <p:sp>
         <p:nvSpPr>
-          <p:cNvPr id="12" name="Text 10"/>
+          <p:cNvPr id="13" name="Text 11"/>
           <p:cNvSpPr/>
           <p:nvPr/>
         </p:nvSpPr>
         <p:spPr>
           <a:xfrm>
             <a:off x="8074152" y="1563624"/>
-            <a:ext cx="2825496" cy="201168"/>
+            <a:ext cx="2825496" cy="256032"/>
           </a:xfrm>
           <a:prstGeom prst="rect">
             <a:avLst/>
@@ -9636,7 +10248,7 @@
               <a:buNone/>
             </a:pPr>
             <a:r>
-              <a:rPr lang="en-US" sz="950" b="1" dirty="0">
+              <a:rPr lang="en-US" sz="1300" b="1" dirty="0">
                 <a:solidFill>
                   <a:srgbClr val="0068B7"/>
                 </a:solidFill>
@@ -9646,20 +10258,20 @@
               </a:rPr>
               <a:t>Key idea</a:t>
             </a:r>
-            <a:endParaRPr lang="en-US" sz="950" dirty="0"/>
-          </a:p>
-        </p:txBody>
-      </p:sp>
-      <p:sp>
-        <p:nvSpPr>
-          <p:cNvPr id="13" name="Text 11"/>
-          <p:cNvSpPr/>
-          <p:nvPr/>
-        </p:nvSpPr>
-        <p:spPr>
-          <a:xfrm>
-            <a:off x="8074152" y="1856232"/>
-            <a:ext cx="2825496" cy="1261872"/>
+            <a:endParaRPr lang="en-US" sz="1300" dirty="0"/>
+          </a:p>
+        </p:txBody>
+      </p:sp>
+      <p:sp>
+        <p:nvSpPr>
+          <p:cNvPr id="14" name="Text 12"/>
+          <p:cNvSpPr/>
+          <p:nvPr/>
+        </p:nvSpPr>
+        <p:spPr>
+          <a:xfrm>
+            <a:off x="8074152" y="1920240"/>
+            <a:ext cx="2825496" cy="1188720"/>
           </a:xfrm>
           <a:prstGeom prst="rect">
             <a:avLst/>
@@ -9677,7 +10289,7 @@
               <a:buNone/>
             </a:pPr>
             <a:r>
-              <a:rPr lang="en-US" sz="1250" dirty="0">
+              <a:rPr lang="en-US" sz="1550" dirty="0">
                 <a:solidFill>
                   <a:srgbClr val="17364A"/>
                 </a:solidFill>
@@ -9687,13 +10299,13 @@
               </a:rPr>
               <a:t>NLP use case description</a:t>
             </a:r>
-            <a:endParaRPr lang="en-US" sz="1250" dirty="0"/>
-          </a:p>
-        </p:txBody>
-      </p:sp>
-      <p:sp>
-        <p:nvSpPr>
-          <p:cNvPr id="14" name="Shape 12"/>
+            <a:endParaRPr lang="en-US" sz="1550" dirty="0"/>
+          </a:p>
+        </p:txBody>
+      </p:sp>
+      <p:sp>
+        <p:nvSpPr>
+          <p:cNvPr id="15" name="Shape 13"/>
           <p:cNvSpPr/>
           <p:nvPr/>
         </p:nvSpPr>
@@ -9720,14 +10332,14 @@
       </p:sp>
       <p:sp>
         <p:nvSpPr>
-          <p:cNvPr id="15" name="Text 13"/>
+          <p:cNvPr id="16" name="Text 14"/>
           <p:cNvSpPr/>
           <p:nvPr/>
         </p:nvSpPr>
         <p:spPr>
           <a:xfrm>
             <a:off x="8074152" y="3666744"/>
-            <a:ext cx="2825496" cy="201168"/>
+            <a:ext cx="2825496" cy="256032"/>
           </a:xfrm>
           <a:prstGeom prst="rect">
             <a:avLst/>
@@ -9743,7 +10355,7 @@
               <a:buNone/>
             </a:pPr>
             <a:r>
-              <a:rPr lang="en-US" sz="950" b="1" dirty="0">
+              <a:rPr lang="en-US" sz="1300" b="1" dirty="0">
                 <a:solidFill>
                   <a:srgbClr val="0068B7"/>
                 </a:solidFill>
@@ -9753,20 +10365,20 @@
               </a:rPr>
               <a:t>Use this for</a:t>
             </a:r>
-            <a:endParaRPr lang="en-US" sz="950" dirty="0"/>
-          </a:p>
-        </p:txBody>
-      </p:sp>
-      <p:sp>
-        <p:nvSpPr>
-          <p:cNvPr id="16" name="Text 14"/>
-          <p:cNvSpPr/>
-          <p:nvPr/>
-        </p:nvSpPr>
-        <p:spPr>
-          <a:xfrm>
-            <a:off x="8074152" y="3959352"/>
-            <a:ext cx="2825496" cy="1170432"/>
+            <a:endParaRPr lang="en-US" sz="1300" dirty="0"/>
+          </a:p>
+        </p:txBody>
+      </p:sp>
+      <p:sp>
+        <p:nvSpPr>
+          <p:cNvPr id="17" name="Text 15"/>
+          <p:cNvSpPr/>
+          <p:nvPr/>
+        </p:nvSpPr>
+        <p:spPr>
+          <a:xfrm>
+            <a:off x="8074152" y="4023360"/>
+            <a:ext cx="2825496" cy="1097280"/>
           </a:xfrm>
           <a:prstGeom prst="rect">
             <a:avLst/>
@@ -9784,7 +10396,7 @@
               <a:buNone/>
             </a:pPr>
             <a:r>
-              <a:rPr lang="en-US" sz="1250" dirty="0">
+              <a:rPr lang="en-US" sz="1550" dirty="0">
                 <a:solidFill>
                   <a:srgbClr val="17364A"/>
                 </a:solidFill>
@@ -9794,7 +10406,7 @@
               </a:rPr>
               <a:t>Connect the concept to public health decisions, safeguards, documentation, or implementation work.</a:t>
             </a:r>
-            <a:endParaRPr lang="en-US" sz="1250" dirty="0"/>
+            <a:endParaRPr lang="en-US" sz="1550" dirty="0"/>
           </a:p>
         </p:txBody>
       </p:sp>
@@ -9991,7 +10603,7 @@
                 <a:ea typeface="Aptos" pitchFamily="34" charset="-122"/>
                 <a:cs typeface="Aptos" pitchFamily="34" charset="-120"/>
               </a:rPr>
-              <a:t>© Paula Soper</a:t>
+              <a:t>Â© Paula Soper</a:t>
             </a:r>
             <a:endParaRPr lang="en-US" sz="800" dirty="0"/>
           </a:p>
@@ -9999,7 +10611,46 @@
       </p:sp>
       <p:sp>
         <p:nvSpPr>
-          <p:cNvPr id="7" name="Shape 5"/>
+          <p:cNvPr id="7" name="Text 5"/>
+          <p:cNvSpPr/>
+          <p:nvPr/>
+        </p:nvSpPr>
+        <p:spPr>
+          <a:xfrm>
+            <a:off x="11137392" y="6510528"/>
+            <a:ext cx="411480" cy="201168"/>
+          </a:xfrm>
+          <a:prstGeom prst="rect">
+            <a:avLst/>
+          </a:prstGeom>
+          <a:noFill/>
+          <a:ln/>
+        </p:spPr>
+        <p:txBody>
+          <a:bodyPr wrap="square" lIns="0" tIns="0" rIns="0" bIns="0" rtlCol="0" anchor="ctr"/>
+          <a:lstStyle/>
+          <a:p>
+            <a:pPr algn="r" indent="0" marL="0">
+              <a:buNone/>
+            </a:pPr>
+            <a:r>
+              <a:rPr lang="en-US" sz="900" dirty="0">
+                <a:solidFill>
+                  <a:srgbClr val="5F7181"/>
+                </a:solidFill>
+                <a:latin typeface="Aptos" pitchFamily="34" charset="0"/>
+                <a:ea typeface="Aptos" pitchFamily="34" charset="-122"/>
+                <a:cs typeface="Aptos" pitchFamily="34" charset="-120"/>
+              </a:rPr>
+              <a:t>21</a:t>
+            </a:r>
+            <a:endParaRPr lang="en-US" sz="900" dirty="0"/>
+          </a:p>
+        </p:txBody>
+      </p:sp>
+      <p:sp>
+        <p:nvSpPr>
+          <p:cNvPr id="8" name="Shape 6"/>
           <p:cNvSpPr/>
           <p:nvPr/>
         </p:nvSpPr>
@@ -10024,7 +10675,7 @@
       </p:sp>
       <p:sp>
         <p:nvSpPr>
-          <p:cNvPr id="8" name="Text 6"/>
+          <p:cNvPr id="9" name="Text 7"/>
           <p:cNvSpPr/>
           <p:nvPr/>
         </p:nvSpPr>
@@ -10063,14 +10714,14 @@
       </p:sp>
       <p:sp>
         <p:nvSpPr>
-          <p:cNvPr id="9" name="Text 7"/>
+          <p:cNvPr id="10" name="Text 8"/>
           <p:cNvSpPr/>
           <p:nvPr/>
         </p:nvSpPr>
         <p:spPr>
           <a:xfrm>
             <a:off x="640080" y="621792"/>
-            <a:ext cx="10881360" cy="566928"/>
+            <a:ext cx="10881360" cy="713232"/>
           </a:xfrm>
           <a:prstGeom prst="rect">
             <a:avLst/>
@@ -10088,7 +10739,7 @@
               <a:buNone/>
             </a:pPr>
             <a:r>
-              <a:rPr lang="en-US" sz="2700" b="1" dirty="0">
+              <a:rPr lang="en-US" sz="3400" b="1" dirty="0">
                 <a:solidFill>
                   <a:srgbClr val="003A63"/>
                 </a:solidFill>
@@ -10098,20 +10749,20 @@
               </a:rPr>
               <a:t>Knowledge Check</a:t>
             </a:r>
-            <a:endParaRPr lang="en-US" sz="2700" dirty="0"/>
-          </a:p>
-        </p:txBody>
-      </p:sp>
-      <p:sp>
-        <p:nvSpPr>
-          <p:cNvPr id="10" name="Text 8"/>
-          <p:cNvSpPr/>
-          <p:nvPr/>
-        </p:nvSpPr>
-        <p:spPr>
-          <a:xfrm>
-            <a:off x="868680" y="1417320"/>
-            <a:ext cx="6675120" cy="4434840"/>
+            <a:endParaRPr lang="en-US" sz="3400" dirty="0"/>
+          </a:p>
+        </p:txBody>
+      </p:sp>
+      <p:sp>
+        <p:nvSpPr>
+          <p:cNvPr id="11" name="Text 9"/>
+          <p:cNvSpPr/>
+          <p:nvPr/>
+        </p:nvSpPr>
+        <p:spPr>
+          <a:xfrm>
+            <a:off x="868680" y="1508760"/>
+            <a:ext cx="6537960" cy="4160520"/>
           </a:xfrm>
           <a:prstGeom prst="rect">
             <a:avLst/>
@@ -10126,7 +10777,7 @@
           <a:lstStyle/>
           <a:p>
             <a:r>
-              <a:rPr lang="en-US" sz="1700" dirty="0">
+              <a:rPr lang="en-US" sz="2100" dirty="0">
                 <a:solidFill>
                   <a:srgbClr val="17364A"/>
                 </a:solidFill>
@@ -10136,11 +10787,11 @@
               </a:rPr>
               <a:t>1. What is NLP?</a:t>
             </a:r>
-            <a:endParaRPr lang="en-US" sz="1700" dirty="0"/>
-          </a:p>
-          <a:p>
-            <a:r>
-              <a:rPr lang="en-US" sz="1700" dirty="0">
+            <a:endParaRPr lang="en-US" sz="2100" dirty="0"/>
+          </a:p>
+          <a:p>
+            <a:r>
+              <a:rPr lang="en-US" sz="2100" dirty="0">
                 <a:solidFill>
                   <a:srgbClr val="17364A"/>
                 </a:solidFill>
@@ -10150,11 +10801,11 @@
               </a:rPr>
               <a:t>2. Which task is an example of information extraction?</a:t>
             </a:r>
-            <a:endParaRPr lang="en-US" sz="1700" dirty="0"/>
-          </a:p>
-          <a:p>
-            <a:r>
-              <a:rPr lang="en-US" sz="1700" dirty="0">
+            <a:endParaRPr lang="en-US" sz="2100" dirty="0"/>
+          </a:p>
+          <a:p>
+            <a:r>
+              <a:rPr lang="en-US" sz="2100" dirty="0">
                 <a:solidFill>
                   <a:srgbClr val="17364A"/>
                 </a:solidFill>
@@ -10164,27 +10815,13 @@
               </a:rPr>
               <a:t>3. Why is source verification important for NLP outputs?</a:t>
             </a:r>
-            <a:endParaRPr lang="en-US" sz="1700" dirty="0"/>
-          </a:p>
-          <a:p>
-            <a:r>
-              <a:rPr lang="en-US" sz="1700" dirty="0">
-                <a:solidFill>
-                  <a:srgbClr val="17364A"/>
-                </a:solidFill>
-                <a:latin typeface="Aptos" pitchFamily="34" charset="0"/>
-                <a:ea typeface="Aptos" pitchFamily="34" charset="-122"/>
-                <a:cs typeface="Aptos" pitchFamily="34" charset="-120"/>
-              </a:rPr>
-              <a:t>4. Which NLP use requires strong safeguards?</a:t>
-            </a:r>
-            <a:endParaRPr lang="en-US" sz="1700" dirty="0"/>
-          </a:p>
-        </p:txBody>
-      </p:sp>
-      <p:sp>
-        <p:nvSpPr>
-          <p:cNvPr id="11" name="Shape 9"/>
+            <a:endParaRPr lang="en-US" sz="2100" dirty="0"/>
+          </a:p>
+        </p:txBody>
+      </p:sp>
+      <p:sp>
+        <p:nvSpPr>
+          <p:cNvPr id="12" name="Shape 10"/>
           <p:cNvSpPr/>
           <p:nvPr/>
         </p:nvSpPr>
@@ -10211,14 +10848,14 @@
       </p:sp>
       <p:sp>
         <p:nvSpPr>
-          <p:cNvPr id="12" name="Text 10"/>
+          <p:cNvPr id="13" name="Text 11"/>
           <p:cNvSpPr/>
           <p:nvPr/>
         </p:nvSpPr>
         <p:spPr>
           <a:xfrm>
             <a:off x="8074152" y="1563624"/>
-            <a:ext cx="2825496" cy="201168"/>
+            <a:ext cx="2825496" cy="256032"/>
           </a:xfrm>
           <a:prstGeom prst="rect">
             <a:avLst/>
@@ -10234,7 +10871,7 @@
               <a:buNone/>
             </a:pPr>
             <a:r>
-              <a:rPr lang="en-US" sz="950" b="1" dirty="0">
+              <a:rPr lang="en-US" sz="1300" b="1" dirty="0">
                 <a:solidFill>
                   <a:srgbClr val="0068B7"/>
                 </a:solidFill>
@@ -10244,20 +10881,20 @@
               </a:rPr>
               <a:t>Key idea</a:t>
             </a:r>
-            <a:endParaRPr lang="en-US" sz="950" dirty="0"/>
-          </a:p>
-        </p:txBody>
-      </p:sp>
-      <p:sp>
-        <p:nvSpPr>
-          <p:cNvPr id="13" name="Text 11"/>
-          <p:cNvSpPr/>
-          <p:nvPr/>
-        </p:nvSpPr>
-        <p:spPr>
-          <a:xfrm>
-            <a:off x="8074152" y="1856232"/>
-            <a:ext cx="2825496" cy="1261872"/>
+            <a:endParaRPr lang="en-US" sz="1300" dirty="0"/>
+          </a:p>
+        </p:txBody>
+      </p:sp>
+      <p:sp>
+        <p:nvSpPr>
+          <p:cNvPr id="14" name="Text 12"/>
+          <p:cNvSpPr/>
+          <p:nvPr/>
+        </p:nvSpPr>
+        <p:spPr>
+          <a:xfrm>
+            <a:off x="8074152" y="1920240"/>
+            <a:ext cx="2825496" cy="1188720"/>
           </a:xfrm>
           <a:prstGeom prst="rect">
             <a:avLst/>
@@ -10275,7 +10912,7 @@
               <a:buNone/>
             </a:pPr>
             <a:r>
-              <a:rPr lang="en-US" sz="1250" dirty="0">
+              <a:rPr lang="en-US" sz="1550" dirty="0">
                 <a:solidFill>
                   <a:srgbClr val="17364A"/>
                 </a:solidFill>
@@ -10285,13 +10922,13 @@
               </a:rPr>
               <a:t>1. What is NLP?</a:t>
             </a:r>
-            <a:endParaRPr lang="en-US" sz="1250" dirty="0"/>
-          </a:p>
-        </p:txBody>
-      </p:sp>
-      <p:sp>
-        <p:nvSpPr>
-          <p:cNvPr id="14" name="Shape 12"/>
+            <a:endParaRPr lang="en-US" sz="1550" dirty="0"/>
+          </a:p>
+        </p:txBody>
+      </p:sp>
+      <p:sp>
+        <p:nvSpPr>
+          <p:cNvPr id="15" name="Shape 13"/>
           <p:cNvSpPr/>
           <p:nvPr/>
         </p:nvSpPr>
@@ -10318,14 +10955,14 @@
       </p:sp>
       <p:sp>
         <p:nvSpPr>
-          <p:cNvPr id="15" name="Text 13"/>
+          <p:cNvPr id="16" name="Text 14"/>
           <p:cNvSpPr/>
           <p:nvPr/>
         </p:nvSpPr>
         <p:spPr>
           <a:xfrm>
             <a:off x="8074152" y="3666744"/>
-            <a:ext cx="2825496" cy="201168"/>
+            <a:ext cx="2825496" cy="256032"/>
           </a:xfrm>
           <a:prstGeom prst="rect">
             <a:avLst/>
@@ -10341,7 +10978,7 @@
               <a:buNone/>
             </a:pPr>
             <a:r>
-              <a:rPr lang="en-US" sz="950" b="1" dirty="0">
+              <a:rPr lang="en-US" sz="1300" b="1" dirty="0">
                 <a:solidFill>
                   <a:srgbClr val="0068B7"/>
                 </a:solidFill>
@@ -10351,20 +10988,20 @@
               </a:rPr>
               <a:t>Use this for</a:t>
             </a:r>
-            <a:endParaRPr lang="en-US" sz="950" dirty="0"/>
-          </a:p>
-        </p:txBody>
-      </p:sp>
-      <p:sp>
-        <p:nvSpPr>
-          <p:cNvPr id="16" name="Text 14"/>
-          <p:cNvSpPr/>
-          <p:nvPr/>
-        </p:nvSpPr>
-        <p:spPr>
-          <a:xfrm>
-            <a:off x="8074152" y="3959352"/>
-            <a:ext cx="2825496" cy="1170432"/>
+            <a:endParaRPr lang="en-US" sz="1300" dirty="0"/>
+          </a:p>
+        </p:txBody>
+      </p:sp>
+      <p:sp>
+        <p:nvSpPr>
+          <p:cNvPr id="17" name="Text 15"/>
+          <p:cNvSpPr/>
+          <p:nvPr/>
+        </p:nvSpPr>
+        <p:spPr>
+          <a:xfrm>
+            <a:off x="8074152" y="4023360"/>
+            <a:ext cx="2825496" cy="1097280"/>
           </a:xfrm>
           <a:prstGeom prst="rect">
             <a:avLst/>
@@ -10382,7 +11019,7 @@
               <a:buNone/>
             </a:pPr>
             <a:r>
-              <a:rPr lang="en-US" sz="1250" dirty="0">
+              <a:rPr lang="en-US" sz="1550" dirty="0">
                 <a:solidFill>
                   <a:srgbClr val="17364A"/>
                 </a:solidFill>
@@ -10392,7 +11029,7 @@
               </a:rPr>
               <a:t>Connect the concept to public health decisions, safeguards, documentation, or implementation work.</a:t>
             </a:r>
-            <a:endParaRPr lang="en-US" sz="1250" dirty="0"/>
+            <a:endParaRPr lang="en-US" sz="1550" dirty="0"/>
           </a:p>
         </p:txBody>
       </p:sp>
@@ -10589,7 +11226,7 @@
                 <a:ea typeface="Aptos" pitchFamily="34" charset="-122"/>
                 <a:cs typeface="Aptos" pitchFamily="34" charset="-120"/>
               </a:rPr>
-              <a:t>© Paula Soper</a:t>
+              <a:t>Â© Paula Soper</a:t>
             </a:r>
             <a:endParaRPr lang="en-US" sz="800" dirty="0"/>
           </a:p>
@@ -10597,7 +11234,46 @@
       </p:sp>
       <p:sp>
         <p:nvSpPr>
-          <p:cNvPr id="7" name="Shape 5"/>
+          <p:cNvPr id="7" name="Text 5"/>
+          <p:cNvSpPr/>
+          <p:nvPr/>
+        </p:nvSpPr>
+        <p:spPr>
+          <a:xfrm>
+            <a:off x="11137392" y="6510528"/>
+            <a:ext cx="411480" cy="201168"/>
+          </a:xfrm>
+          <a:prstGeom prst="rect">
+            <a:avLst/>
+          </a:prstGeom>
+          <a:noFill/>
+          <a:ln/>
+        </p:spPr>
+        <p:txBody>
+          <a:bodyPr wrap="square" lIns="0" tIns="0" rIns="0" bIns="0" rtlCol="0" anchor="ctr"/>
+          <a:lstStyle/>
+          <a:p>
+            <a:pPr algn="r" indent="0" marL="0">
+              <a:buNone/>
+            </a:pPr>
+            <a:r>
+              <a:rPr lang="en-US" sz="900" dirty="0">
+                <a:solidFill>
+                  <a:srgbClr val="5F7181"/>
+                </a:solidFill>
+                <a:latin typeface="Aptos" pitchFamily="34" charset="0"/>
+                <a:ea typeface="Aptos" pitchFamily="34" charset="-122"/>
+                <a:cs typeface="Aptos" pitchFamily="34" charset="-120"/>
+              </a:rPr>
+              <a:t>22</a:t>
+            </a:r>
+            <a:endParaRPr lang="en-US" sz="900" dirty="0"/>
+          </a:p>
+        </p:txBody>
+      </p:sp>
+      <p:sp>
+        <p:nvSpPr>
+          <p:cNvPr id="8" name="Shape 6"/>
           <p:cNvSpPr/>
           <p:nvPr/>
         </p:nvSpPr>
@@ -10622,7 +11298,7 @@
       </p:sp>
       <p:sp>
         <p:nvSpPr>
-          <p:cNvPr id="8" name="Text 6"/>
+          <p:cNvPr id="9" name="Text 7"/>
           <p:cNvSpPr/>
           <p:nvPr/>
         </p:nvSpPr>
@@ -10661,14 +11337,14 @@
       </p:sp>
       <p:sp>
         <p:nvSpPr>
-          <p:cNvPr id="9" name="Text 7"/>
+          <p:cNvPr id="10" name="Text 8"/>
           <p:cNvSpPr/>
           <p:nvPr/>
         </p:nvSpPr>
         <p:spPr>
           <a:xfrm>
             <a:off x="640080" y="621792"/>
-            <a:ext cx="10881360" cy="566928"/>
+            <a:ext cx="10881360" cy="713232"/>
           </a:xfrm>
           <a:prstGeom prst="rect">
             <a:avLst/>
@@ -10686,7 +11362,7 @@
               <a:buNone/>
             </a:pPr>
             <a:r>
-              <a:rPr lang="en-US" sz="2700" b="1" dirty="0">
+              <a:rPr lang="en-US" sz="3400" b="1" dirty="0">
                 <a:solidFill>
                   <a:srgbClr val="003A63"/>
                 </a:solidFill>
@@ -10696,20 +11372,20 @@
               </a:rPr>
               <a:t>References and Resources</a:t>
             </a:r>
-            <a:endParaRPr lang="en-US" sz="2700" dirty="0"/>
-          </a:p>
-        </p:txBody>
-      </p:sp>
-      <p:sp>
-        <p:nvSpPr>
-          <p:cNvPr id="10" name="Text 8"/>
-          <p:cNvSpPr/>
-          <p:nvPr/>
-        </p:nvSpPr>
-        <p:spPr>
-          <a:xfrm>
-            <a:off x="868680" y="1417320"/>
-            <a:ext cx="6675120" cy="4434840"/>
+            <a:endParaRPr lang="en-US" sz="3400" dirty="0"/>
+          </a:p>
+        </p:txBody>
+      </p:sp>
+      <p:sp>
+        <p:nvSpPr>
+          <p:cNvPr id="11" name="Text 9"/>
+          <p:cNvSpPr/>
+          <p:nvPr/>
+        </p:nvSpPr>
+        <p:spPr>
+          <a:xfrm>
+            <a:off x="868680" y="1508760"/>
+            <a:ext cx="6537960" cy="4160520"/>
           </a:xfrm>
           <a:prstGeom prst="rect">
             <a:avLst/>
@@ -10724,7 +11400,7 @@
           <a:lstStyle/>
           <a:p>
             <a:r>
-              <a:rPr lang="en-US" sz="1700" dirty="0">
+              <a:rPr lang="en-US" sz="2100" dirty="0">
                 <a:solidFill>
                   <a:srgbClr val="17364A"/>
                 </a:solidFill>
@@ -10732,13 +11408,13 @@
                 <a:ea typeface="Aptos" pitchFamily="34" charset="-122"/>
                 <a:cs typeface="Aptos" pitchFamily="34" charset="-120"/>
               </a:rPr>
-              <a:t>NIST Artificial Intelligence Risk Management Framework: https://www.nist.gov/itl/ai-risk-management-framework</a:t>
-            </a:r>
-            <a:endParaRPr lang="en-US" sz="1700" dirty="0"/>
-          </a:p>
-          <a:p>
-            <a:r>
-              <a:rPr lang="en-US" sz="1700" dirty="0">
+              <a:t>NIST Artificial Intelligence Risk Management Framework:.</a:t>
+            </a:r>
+            <a:endParaRPr lang="en-US" sz="2100" dirty="0"/>
+          </a:p>
+          <a:p>
+            <a:r>
+              <a:rPr lang="en-US" sz="2100" dirty="0">
                 <a:solidFill>
                   <a:srgbClr val="17364A"/>
                 </a:solidFill>
@@ -10748,11 +11424,11 @@
               </a:rPr>
               <a:t>NIST AI RMF Generative AI Profile:.</a:t>
             </a:r>
-            <a:endParaRPr lang="en-US" sz="1700" dirty="0"/>
-          </a:p>
-          <a:p>
-            <a:r>
-              <a:rPr lang="en-US" sz="1700" dirty="0">
+            <a:endParaRPr lang="en-US" sz="2100" dirty="0"/>
+          </a:p>
+          <a:p>
+            <a:r>
+              <a:rPr lang="en-US" sz="2100" dirty="0">
                 <a:solidFill>
                   <a:srgbClr val="17364A"/>
                 </a:solidFill>
@@ -10762,27 +11438,13 @@
               </a:rPr>
               <a:t>WHO Guidance on Large Multi-Modal Models: https://www.who.int/publications/i/item/9789240084759</a:t>
             </a:r>
-            <a:endParaRPr lang="en-US" sz="1700" dirty="0"/>
-          </a:p>
-          <a:p>
-            <a:r>
-              <a:rPr lang="en-US" sz="1700" dirty="0">
-                <a:solidFill>
-                  <a:srgbClr val="17364A"/>
-                </a:solidFill>
-                <a:latin typeface="Aptos" pitchFamily="34" charset="0"/>
-                <a:ea typeface="Aptos" pitchFamily="34" charset="-122"/>
-                <a:cs typeface="Aptos" pitchFamily="34" charset="-120"/>
-              </a:rPr>
-              <a:t>CDC Public Health Data Strategy: https://www.cdc.gov/public-health-data-strategy/php/about/index.html</a:t>
-            </a:r>
-            <a:endParaRPr lang="en-US" sz="1700" dirty="0"/>
-          </a:p>
-        </p:txBody>
-      </p:sp>
-      <p:sp>
-        <p:nvSpPr>
-          <p:cNvPr id="11" name="Shape 9"/>
+            <a:endParaRPr lang="en-US" sz="2100" dirty="0"/>
+          </a:p>
+        </p:txBody>
+      </p:sp>
+      <p:sp>
+        <p:nvSpPr>
+          <p:cNvPr id="12" name="Shape 10"/>
           <p:cNvSpPr/>
           <p:nvPr/>
         </p:nvSpPr>
@@ -10809,14 +11471,14 @@
       </p:sp>
       <p:sp>
         <p:nvSpPr>
-          <p:cNvPr id="12" name="Text 10"/>
+          <p:cNvPr id="13" name="Text 11"/>
           <p:cNvSpPr/>
           <p:nvPr/>
         </p:nvSpPr>
         <p:spPr>
           <a:xfrm>
             <a:off x="8074152" y="1563624"/>
-            <a:ext cx="2825496" cy="201168"/>
+            <a:ext cx="2825496" cy="256032"/>
           </a:xfrm>
           <a:prstGeom prst="rect">
             <a:avLst/>
@@ -10832,7 +11494,7 @@
               <a:buNone/>
             </a:pPr>
             <a:r>
-              <a:rPr lang="en-US" sz="950" b="1" dirty="0">
+              <a:rPr lang="en-US" sz="1300" b="1" dirty="0">
                 <a:solidFill>
                   <a:srgbClr val="0068B7"/>
                 </a:solidFill>
@@ -10842,20 +11504,20 @@
               </a:rPr>
               <a:t>Key idea</a:t>
             </a:r>
-            <a:endParaRPr lang="en-US" sz="950" dirty="0"/>
-          </a:p>
-        </p:txBody>
-      </p:sp>
-      <p:sp>
-        <p:nvSpPr>
-          <p:cNvPr id="13" name="Text 11"/>
-          <p:cNvSpPr/>
-          <p:nvPr/>
-        </p:nvSpPr>
-        <p:spPr>
-          <a:xfrm>
-            <a:off x="8074152" y="1856232"/>
-            <a:ext cx="2825496" cy="1261872"/>
+            <a:endParaRPr lang="en-US" sz="1300" dirty="0"/>
+          </a:p>
+        </p:txBody>
+      </p:sp>
+      <p:sp>
+        <p:nvSpPr>
+          <p:cNvPr id="14" name="Text 12"/>
+          <p:cNvSpPr/>
+          <p:nvPr/>
+        </p:nvSpPr>
+        <p:spPr>
+          <a:xfrm>
+            <a:off x="8074152" y="1920240"/>
+            <a:ext cx="2825496" cy="1188720"/>
           </a:xfrm>
           <a:prstGeom prst="rect">
             <a:avLst/>
@@ -10873,7 +11535,7 @@
               <a:buNone/>
             </a:pPr>
             <a:r>
-              <a:rPr lang="en-US" sz="1250" dirty="0">
+              <a:rPr lang="en-US" sz="1550" dirty="0">
                 <a:solidFill>
                   <a:srgbClr val="17364A"/>
                 </a:solidFill>
@@ -10881,15 +11543,15 @@
                 <a:ea typeface="Aptos" pitchFamily="34" charset="-122"/>
                 <a:cs typeface="Aptos" pitchFamily="34" charset="-120"/>
               </a:rPr>
-              <a:t>NIST Artificial Intelligence Risk Management Framework: https://www.nist.gov/itl/ai-risk-management-framework</a:t>
-            </a:r>
-            <a:endParaRPr lang="en-US" sz="1250" dirty="0"/>
-          </a:p>
-        </p:txBody>
-      </p:sp>
-      <p:sp>
-        <p:nvSpPr>
-          <p:cNvPr id="14" name="Shape 12"/>
+              <a:t>NIST Artificial Intelligence Risk Management Framework:.</a:t>
+            </a:r>
+            <a:endParaRPr lang="en-US" sz="1550" dirty="0"/>
+          </a:p>
+        </p:txBody>
+      </p:sp>
+      <p:sp>
+        <p:nvSpPr>
+          <p:cNvPr id="15" name="Shape 13"/>
           <p:cNvSpPr/>
           <p:nvPr/>
         </p:nvSpPr>
@@ -10916,14 +11578,14 @@
       </p:sp>
       <p:sp>
         <p:nvSpPr>
-          <p:cNvPr id="15" name="Text 13"/>
+          <p:cNvPr id="16" name="Text 14"/>
           <p:cNvSpPr/>
           <p:nvPr/>
         </p:nvSpPr>
         <p:spPr>
           <a:xfrm>
             <a:off x="8074152" y="3666744"/>
-            <a:ext cx="2825496" cy="201168"/>
+            <a:ext cx="2825496" cy="256032"/>
           </a:xfrm>
           <a:prstGeom prst="rect">
             <a:avLst/>
@@ -10939,7 +11601,7 @@
               <a:buNone/>
             </a:pPr>
             <a:r>
-              <a:rPr lang="en-US" sz="950" b="1" dirty="0">
+              <a:rPr lang="en-US" sz="1300" b="1" dirty="0">
                 <a:solidFill>
                   <a:srgbClr val="0068B7"/>
                 </a:solidFill>
@@ -10949,20 +11611,20 @@
               </a:rPr>
               <a:t>Use this for</a:t>
             </a:r>
-            <a:endParaRPr lang="en-US" sz="950" dirty="0"/>
-          </a:p>
-        </p:txBody>
-      </p:sp>
-      <p:sp>
-        <p:nvSpPr>
-          <p:cNvPr id="16" name="Text 14"/>
-          <p:cNvSpPr/>
-          <p:nvPr/>
-        </p:nvSpPr>
-        <p:spPr>
-          <a:xfrm>
-            <a:off x="8074152" y="3959352"/>
-            <a:ext cx="2825496" cy="1170432"/>
+            <a:endParaRPr lang="en-US" sz="1300" dirty="0"/>
+          </a:p>
+        </p:txBody>
+      </p:sp>
+      <p:sp>
+        <p:nvSpPr>
+          <p:cNvPr id="17" name="Text 15"/>
+          <p:cNvSpPr/>
+          <p:nvPr/>
+        </p:nvSpPr>
+        <p:spPr>
+          <a:xfrm>
+            <a:off x="8074152" y="4023360"/>
+            <a:ext cx="2825496" cy="1097280"/>
           </a:xfrm>
           <a:prstGeom prst="rect">
             <a:avLst/>
@@ -10980,7 +11642,7 @@
               <a:buNone/>
             </a:pPr>
             <a:r>
-              <a:rPr lang="en-US" sz="1250" dirty="0">
+              <a:rPr lang="en-US" sz="1550" dirty="0">
                 <a:solidFill>
                   <a:srgbClr val="17364A"/>
                 </a:solidFill>
@@ -10990,7 +11652,7 @@
               </a:rPr>
               <a:t>Connect the concept to public health decisions, safeguards, documentation, or implementation work.</a:t>
             </a:r>
-            <a:endParaRPr lang="en-US" sz="1250" dirty="0"/>
+            <a:endParaRPr lang="en-US" sz="1550" dirty="0"/>
           </a:p>
         </p:txBody>
       </p:sp>
@@ -11187,7 +11849,7 @@
                 <a:ea typeface="Aptos" pitchFamily="34" charset="-122"/>
                 <a:cs typeface="Aptos" pitchFamily="34" charset="-120"/>
               </a:rPr>
-              <a:t>© Paula Soper</a:t>
+              <a:t>Â© Paula Soper</a:t>
             </a:r>
             <a:endParaRPr lang="en-US" sz="800" dirty="0"/>
           </a:p>
@@ -11201,8 +11863,47 @@
         </p:nvSpPr>
         <p:spPr>
           <a:xfrm>
+            <a:off x="11137392" y="6510528"/>
+            <a:ext cx="411480" cy="201168"/>
+          </a:xfrm>
+          <a:prstGeom prst="rect">
+            <a:avLst/>
+          </a:prstGeom>
+          <a:noFill/>
+          <a:ln/>
+        </p:spPr>
+        <p:txBody>
+          <a:bodyPr wrap="square" lIns="0" tIns="0" rIns="0" bIns="0" rtlCol="0" anchor="ctr"/>
+          <a:lstStyle/>
+          <a:p>
+            <a:pPr algn="r" indent="0" marL="0">
+              <a:buNone/>
+            </a:pPr>
+            <a:r>
+              <a:rPr lang="en-US" sz="900" dirty="0">
+                <a:solidFill>
+                  <a:srgbClr val="5F7181"/>
+                </a:solidFill>
+                <a:latin typeface="Aptos" pitchFamily="34" charset="0"/>
+                <a:ea typeface="Aptos" pitchFamily="34" charset="-122"/>
+                <a:cs typeface="Aptos" pitchFamily="34" charset="-120"/>
+              </a:rPr>
+              <a:t>3</a:t>
+            </a:r>
+            <a:endParaRPr lang="en-US" sz="900" dirty="0"/>
+          </a:p>
+        </p:txBody>
+      </p:sp>
+      <p:sp>
+        <p:nvSpPr>
+          <p:cNvPr id="8" name="Text 6"/>
+          <p:cNvSpPr/>
+          <p:nvPr/>
+        </p:nvSpPr>
+        <p:spPr>
+          <a:xfrm>
             <a:off x="640080" y="658368"/>
-            <a:ext cx="10881360" cy="566928"/>
+            <a:ext cx="10881360" cy="713232"/>
           </a:xfrm>
           <a:prstGeom prst="rect">
             <a:avLst/>
@@ -11220,7 +11921,7 @@
               <a:buNone/>
             </a:pPr>
             <a:r>
-              <a:rPr lang="en-US" sz="2700" b="1" dirty="0">
+              <a:rPr lang="en-US" sz="3400" b="1" dirty="0">
                 <a:solidFill>
                   <a:srgbClr val="003A63"/>
                 </a:solidFill>
@@ -11230,20 +11931,20 @@
               </a:rPr>
               <a:t>How this module connects to the playbook</a:t>
             </a:r>
-            <a:endParaRPr lang="en-US" sz="2700" dirty="0"/>
-          </a:p>
-        </p:txBody>
-      </p:sp>
-      <p:sp>
-        <p:nvSpPr>
-          <p:cNvPr id="8" name="Text 6"/>
-          <p:cNvSpPr/>
-          <p:nvPr/>
-        </p:nvSpPr>
-        <p:spPr>
-          <a:xfrm>
-            <a:off x="868680" y="1417320"/>
-            <a:ext cx="6903720" cy="4480560"/>
+            <a:endParaRPr lang="en-US" sz="3400" dirty="0"/>
+          </a:p>
+        </p:txBody>
+      </p:sp>
+      <p:sp>
+        <p:nvSpPr>
+          <p:cNvPr id="9" name="Text 7"/>
+          <p:cNvSpPr/>
+          <p:nvPr/>
+        </p:nvSpPr>
+        <p:spPr>
+          <a:xfrm>
+            <a:off x="868680" y="1508760"/>
+            <a:ext cx="6812280" cy="3977640"/>
           </a:xfrm>
           <a:prstGeom prst="rect">
             <a:avLst/>
@@ -11258,7 +11959,7 @@
           <a:lstStyle/>
           <a:p>
             <a:r>
-              <a:rPr lang="en-US" sz="1540" dirty="0">
+              <a:rPr lang="en-US" sz="1900" dirty="0">
                 <a:solidFill>
                   <a:srgbClr val="17364A"/>
                 </a:solidFill>
@@ -11266,13 +11967,13 @@
                 <a:ea typeface="Aptos" pitchFamily="34" charset="-122"/>
                 <a:cs typeface="Aptos" pitchFamily="34" charset="-120"/>
               </a:rPr>
-              <a:t>Play 11: Build and Deploy AI Solutions - This lesson informs Play 11 by helping learners connect the lesson topic to build and deploy.</a:t>
-            </a:r>
-            <a:endParaRPr lang="en-US" sz="1540" dirty="0"/>
-          </a:p>
-          <a:p>
-            <a:r>
-              <a:rPr lang="en-US" sz="1540" dirty="0">
+              <a:t>Play 11: Build and Deploy AI Solutions - This lesson informs Play 11 by helping learners connect the lesson.</a:t>
+            </a:r>
+            <a:endParaRPr lang="en-US" sz="1900" dirty="0"/>
+          </a:p>
+          <a:p>
+            <a:r>
+              <a:rPr lang="en-US" sz="1900" dirty="0">
                 <a:solidFill>
                   <a:srgbClr val="17364A"/>
                 </a:solidFill>
@@ -11280,13 +11981,13 @@
                 <a:ea typeface="Aptos" pitchFamily="34" charset="-122"/>
                 <a:cs typeface="Aptos" pitchFamily="34" charset="-120"/>
               </a:rPr>
-              <a:t>Play 2: Readiness Assessment - This lesson informs Play 2 by helping learners connect the lesson topic to readiness assessment work.</a:t>
-            </a:r>
-            <a:endParaRPr lang="en-US" sz="1540" dirty="0"/>
-          </a:p>
-          <a:p>
-            <a:r>
-              <a:rPr lang="en-US" sz="1540" dirty="0">
+              <a:t>Play 2: Readiness Assessment - This lesson informs Play 2 by helping learners connect the lesson topic to.</a:t>
+            </a:r>
+            <a:endParaRPr lang="en-US" sz="1900" dirty="0"/>
+          </a:p>
+          <a:p>
+            <a:r>
+              <a:rPr lang="en-US" sz="1900" dirty="0">
                 <a:solidFill>
                   <a:srgbClr val="17364A"/>
                 </a:solidFill>
@@ -11294,13 +11995,13 @@
                 <a:ea typeface="Aptos" pitchFamily="34" charset="-122"/>
                 <a:cs typeface="Aptos" pitchFamily="34" charset="-120"/>
               </a:rPr>
-              <a:t>Play 7: Prioritize Use Cases - This lesson informs Play 7 by helping learners connect the lesson topic to prioritize use cases work.</a:t>
-            </a:r>
-            <a:endParaRPr lang="en-US" sz="1540" dirty="0"/>
-          </a:p>
-          <a:p>
-            <a:r>
-              <a:rPr lang="en-US" sz="1540" dirty="0">
+              <a:t>Play 7: Prioritize Use Cases - This lesson informs Play 7 by helping learners connect the lesson topic to.</a:t>
+            </a:r>
+            <a:endParaRPr lang="en-US" sz="1900" dirty="0"/>
+          </a:p>
+          <a:p>
+            <a:r>
+              <a:rPr lang="en-US" sz="1900" dirty="0">
                 <a:solidFill>
                   <a:srgbClr val="17364A"/>
                 </a:solidFill>
@@ -11308,15 +12009,15 @@
                 <a:ea typeface="Aptos" pitchFamily="34" charset="-122"/>
                 <a:cs typeface="Aptos" pitchFamily="34" charset="-120"/>
               </a:rPr>
-              <a:t>Play 1: Vision &amp; Guardrails - This lesson informs Play 1 by helping learners connect the lesson topic to vision &amp; guardrails work in.</a:t>
-            </a:r>
-            <a:endParaRPr lang="en-US" sz="1540" dirty="0"/>
-          </a:p>
-        </p:txBody>
-      </p:sp>
-      <p:sp>
-        <p:nvSpPr>
-          <p:cNvPr id="9" name="Shape 7"/>
+              <a:t>Play 1: Vision &amp; Guardrails - This lesson informs Play 1 by helping learners connect the lesson topic to.</a:t>
+            </a:r>
+            <a:endParaRPr lang="en-US" sz="1900" dirty="0"/>
+          </a:p>
+        </p:txBody>
+      </p:sp>
+      <p:sp>
+        <p:nvSpPr>
+          <p:cNvPr id="10" name="Shape 8"/>
           <p:cNvSpPr/>
           <p:nvPr/>
         </p:nvSpPr>
@@ -11343,14 +12044,14 @@
       </p:sp>
       <p:sp>
         <p:nvSpPr>
-          <p:cNvPr id="10" name="Text 8"/>
+          <p:cNvPr id="11" name="Text 9"/>
           <p:cNvSpPr/>
           <p:nvPr/>
         </p:nvSpPr>
         <p:spPr>
           <a:xfrm>
             <a:off x="8211312" y="1563624"/>
-            <a:ext cx="2734056" cy="201168"/>
+            <a:ext cx="2734056" cy="256032"/>
           </a:xfrm>
           <a:prstGeom prst="rect">
             <a:avLst/>
@@ -11366,7 +12067,7 @@
               <a:buNone/>
             </a:pPr>
             <a:r>
-              <a:rPr lang="en-US" sz="950" b="1" dirty="0">
+              <a:rPr lang="en-US" sz="1300" b="1" dirty="0">
                 <a:solidFill>
                   <a:srgbClr val="0068B7"/>
                 </a:solidFill>
@@ -11376,20 +12077,20 @@
               </a:rPr>
               <a:t>Apply the lesson</a:t>
             </a:r>
-            <a:endParaRPr lang="en-US" sz="950" dirty="0"/>
-          </a:p>
-        </p:txBody>
-      </p:sp>
-      <p:sp>
-        <p:nvSpPr>
-          <p:cNvPr id="11" name="Text 9"/>
-          <p:cNvSpPr/>
-          <p:nvPr/>
-        </p:nvSpPr>
-        <p:spPr>
-          <a:xfrm>
-            <a:off x="8211312" y="1856232"/>
-            <a:ext cx="2734056" cy="1536192"/>
+            <a:endParaRPr lang="en-US" sz="1300" dirty="0"/>
+          </a:p>
+        </p:txBody>
+      </p:sp>
+      <p:sp>
+        <p:nvSpPr>
+          <p:cNvPr id="12" name="Text 10"/>
+          <p:cNvSpPr/>
+          <p:nvPr/>
+        </p:nvSpPr>
+        <p:spPr>
+          <a:xfrm>
+            <a:off x="8211312" y="1920240"/>
+            <a:ext cx="2734056" cy="1463040"/>
           </a:xfrm>
           <a:prstGeom prst="rect">
             <a:avLst/>
@@ -11407,7 +12108,7 @@
               <a:buNone/>
             </a:pPr>
             <a:r>
-              <a:rPr lang="en-US" sz="1250" dirty="0">
+              <a:rPr lang="en-US" sz="1550" dirty="0">
                 <a:solidFill>
                   <a:srgbClr val="17364A"/>
                 </a:solidFill>
@@ -11417,32 +12118,32 @@
               </a:rPr>
               <a:t>Use the related plays to identify decisions, participants, timing, approvals, and documentation needed for responsible implementation.</a:t>
             </a:r>
-            <a:endParaRPr lang="en-US" sz="1250" dirty="0"/>
-          </a:p>
-        </p:txBody>
-      </p:sp>
-      <p:sp>
-        <p:nvSpPr>
-          <p:cNvPr id="12" name="Shape 10"/>
-          <p:cNvSpPr/>
-          <p:nvPr/>
-        </p:nvSpPr>
-        <p:spPr>
-          <a:xfrm>
-            <a:off x="8046720" y="3794760"/>
-            <a:ext cx="3063240" cy="1508760"/>
+            <a:endParaRPr lang="en-US" sz="1550" dirty="0"/>
+          </a:p>
+        </p:txBody>
+      </p:sp>
+      <p:sp>
+        <p:nvSpPr>
+          <p:cNvPr id="13" name="Shape 11"/>
+          <p:cNvSpPr/>
+          <p:nvPr/>
+        </p:nvSpPr>
+        <p:spPr>
+          <a:xfrm>
+            <a:off x="7818120" y="3977640"/>
+            <a:ext cx="972312" cy="749808"/>
           </a:xfrm>
           <a:prstGeom prst="roundRect">
             <a:avLst>
-              <a:gd name="adj" fmla="val 7273"/>
+              <a:gd name="adj" fmla="val 14634"/>
             </a:avLst>
           </a:prstGeom>
           <a:solidFill>
-            <a:srgbClr val="FFF4D9"/>
+            <a:srgbClr val="0068B7"/>
           </a:solidFill>
           <a:ln w="12700">
             <a:solidFill>
-              <a:srgbClr val="B9D7E6"/>
+              <a:srgbClr val="0068B7"/>
             </a:solidFill>
             <a:prstDash val="solid"/>
           </a:ln>
@@ -11450,81 +12151,256 @@
       </p:sp>
       <p:sp>
         <p:nvSpPr>
-          <p:cNvPr id="13" name="Text 11"/>
-          <p:cNvSpPr/>
-          <p:nvPr/>
-        </p:nvSpPr>
-        <p:spPr>
-          <a:xfrm>
-            <a:off x="8211312" y="3941064"/>
-            <a:ext cx="2734056" cy="201168"/>
-          </a:xfrm>
-          <a:prstGeom prst="rect">
-            <a:avLst/>
-          </a:prstGeom>
-          <a:noFill/>
-          <a:ln/>
-        </p:spPr>
-        <p:txBody>
-          <a:bodyPr wrap="square" lIns="0" tIns="0" rIns="0" bIns="0" rtlCol="0" anchor="ctr"/>
-          <a:lstStyle/>
-          <a:p>
-            <a:pPr indent="0" marL="0">
-              <a:buNone/>
-            </a:pPr>
-            <a:r>
-              <a:rPr lang="en-US" sz="950" b="1" dirty="0">
-                <a:solidFill>
-                  <a:srgbClr val="0068B7"/>
-                </a:solidFill>
-                <a:latin typeface="Aptos" pitchFamily="34" charset="0"/>
-                <a:ea typeface="Aptos" pitchFamily="34" charset="-122"/>
-                <a:cs typeface="Aptos" pitchFamily="34" charset="-120"/>
-              </a:rPr>
-              <a:t>Keep in mind</a:t>
-            </a:r>
-            <a:endParaRPr lang="en-US" sz="950" dirty="0"/>
-          </a:p>
-        </p:txBody>
-      </p:sp>
-      <p:sp>
-        <p:nvSpPr>
           <p:cNvPr id="14" name="Text 12"/>
           <p:cNvSpPr/>
           <p:nvPr/>
         </p:nvSpPr>
         <p:spPr>
           <a:xfrm>
-            <a:off x="8211312" y="4233672"/>
-            <a:ext cx="2734056" cy="941832"/>
-          </a:xfrm>
-          <a:prstGeom prst="rect">
-            <a:avLst/>
-          </a:prstGeom>
-          <a:noFill/>
-          <a:ln/>
-        </p:spPr>
-        <p:txBody>
-          <a:bodyPr wrap="square" lIns="0" tIns="0" rIns="0" bIns="0" rtlCol="0" anchor="t">
+            <a:off x="7891272" y="4169664"/>
+            <a:ext cx="826008" cy="310896"/>
+          </a:xfrm>
+          <a:prstGeom prst="rect">
+            <a:avLst/>
+          </a:prstGeom>
+          <a:noFill/>
+          <a:ln/>
+        </p:spPr>
+        <p:txBody>
+          <a:bodyPr wrap="square" lIns="0" tIns="0" rIns="0" bIns="0" rtlCol="0" anchor="ctr">
             <a:normAutofit/>
           </a:bodyPr>
           <a:lstStyle/>
           <a:p>
-            <a:pPr indent="0" marL="0">
-              <a:buNone/>
-            </a:pPr>
-            <a:r>
-              <a:rPr lang="en-US" sz="1250" dirty="0">
-                <a:solidFill>
-                  <a:srgbClr val="17364A"/>
-                </a:solidFill>
-                <a:latin typeface="Aptos" pitchFamily="34" charset="0"/>
-                <a:ea typeface="Aptos" pitchFamily="34" charset="-122"/>
-                <a:cs typeface="Aptos" pitchFamily="34" charset="-120"/>
-              </a:rPr>
-              <a:t>The playbook connection helps turn training into agency work, not just individual knowledge.</a:t>
-            </a:r>
-            <a:endParaRPr lang="en-US" sz="1250" dirty="0"/>
+            <a:pPr algn="ctr" indent="0" marL="0">
+              <a:buNone/>
+            </a:pPr>
+            <a:r>
+              <a:rPr lang="en-US" sz="1500" b="1" dirty="0">
+                <a:solidFill>
+                  <a:srgbClr val="FFFFFF"/>
+                </a:solidFill>
+                <a:latin typeface="Aptos" pitchFamily="34" charset="0"/>
+                <a:ea typeface="Aptos" pitchFamily="34" charset="-122"/>
+                <a:cs typeface="Aptos" pitchFamily="34" charset="-120"/>
+              </a:rPr>
+              <a:t>Lesson</a:t>
+            </a:r>
+            <a:endParaRPr lang="en-US" sz="1500" dirty="0"/>
+          </a:p>
+        </p:txBody>
+      </p:sp>
+      <p:sp>
+        <p:nvSpPr>
+          <p:cNvPr id="15" name="Text 13"/>
+          <p:cNvSpPr/>
+          <p:nvPr/>
+        </p:nvSpPr>
+        <p:spPr>
+          <a:xfrm>
+            <a:off x="8817864" y="4187952"/>
+            <a:ext cx="201168" cy="256032"/>
+          </a:xfrm>
+          <a:prstGeom prst="rect">
+            <a:avLst/>
+          </a:prstGeom>
+          <a:noFill/>
+          <a:ln/>
+        </p:spPr>
+        <p:txBody>
+          <a:bodyPr wrap="square" lIns="0" tIns="0" rIns="0" bIns="0" rtlCol="0" anchor="ctr"/>
+          <a:lstStyle/>
+          <a:p>
+            <a:pPr algn="ctr" indent="0" marL="0">
+              <a:buNone/>
+            </a:pPr>
+            <a:r>
+              <a:rPr lang="en-US" sz="1800" b="1" dirty="0">
+                <a:solidFill>
+                  <a:srgbClr val="0068B7"/>
+                </a:solidFill>
+                <a:latin typeface="Aptos" pitchFamily="34" charset="0"/>
+                <a:ea typeface="Aptos" pitchFamily="34" charset="-122"/>
+                <a:cs typeface="Aptos" pitchFamily="34" charset="-120"/>
+              </a:rPr>
+              <a:t>â†’</a:t>
+            </a:r>
+            <a:endParaRPr lang="en-US" sz="1800" dirty="0"/>
+          </a:p>
+        </p:txBody>
+      </p:sp>
+      <p:sp>
+        <p:nvSpPr>
+          <p:cNvPr id="16" name="Shape 14"/>
+          <p:cNvSpPr/>
+          <p:nvPr/>
+        </p:nvSpPr>
+        <p:spPr>
+          <a:xfrm>
+            <a:off x="9046464" y="3977640"/>
+            <a:ext cx="972312" cy="749808"/>
+          </a:xfrm>
+          <a:prstGeom prst="roundRect">
+            <a:avLst>
+              <a:gd name="adj" fmla="val 14634"/>
+            </a:avLst>
+          </a:prstGeom>
+          <a:solidFill>
+            <a:srgbClr val="2F8A28"/>
+          </a:solidFill>
+          <a:ln w="12700">
+            <a:solidFill>
+              <a:srgbClr val="2F8A28"/>
+            </a:solidFill>
+            <a:prstDash val="solid"/>
+          </a:ln>
+        </p:spPr>
+      </p:sp>
+      <p:sp>
+        <p:nvSpPr>
+          <p:cNvPr id="17" name="Text 15"/>
+          <p:cNvSpPr/>
+          <p:nvPr/>
+        </p:nvSpPr>
+        <p:spPr>
+          <a:xfrm>
+            <a:off x="9119616" y="4169664"/>
+            <a:ext cx="826008" cy="310896"/>
+          </a:xfrm>
+          <a:prstGeom prst="rect">
+            <a:avLst/>
+          </a:prstGeom>
+          <a:noFill/>
+          <a:ln/>
+        </p:spPr>
+        <p:txBody>
+          <a:bodyPr wrap="square" lIns="0" tIns="0" rIns="0" bIns="0" rtlCol="0" anchor="ctr">
+            <a:normAutofit/>
+          </a:bodyPr>
+          <a:lstStyle/>
+          <a:p>
+            <a:pPr algn="ctr" indent="0" marL="0">
+              <a:buNone/>
+            </a:pPr>
+            <a:r>
+              <a:rPr lang="en-US" sz="1500" b="1" dirty="0">
+                <a:solidFill>
+                  <a:srgbClr val="FFFFFF"/>
+                </a:solidFill>
+                <a:latin typeface="Aptos" pitchFamily="34" charset="0"/>
+                <a:ea typeface="Aptos" pitchFamily="34" charset="-122"/>
+                <a:cs typeface="Aptos" pitchFamily="34" charset="-120"/>
+              </a:rPr>
+              <a:t>Plays</a:t>
+            </a:r>
+            <a:endParaRPr lang="en-US" sz="1500" dirty="0"/>
+          </a:p>
+        </p:txBody>
+      </p:sp>
+      <p:sp>
+        <p:nvSpPr>
+          <p:cNvPr id="18" name="Text 16"/>
+          <p:cNvSpPr/>
+          <p:nvPr/>
+        </p:nvSpPr>
+        <p:spPr>
+          <a:xfrm>
+            <a:off x="10046208" y="4187952"/>
+            <a:ext cx="201168" cy="256032"/>
+          </a:xfrm>
+          <a:prstGeom prst="rect">
+            <a:avLst/>
+          </a:prstGeom>
+          <a:noFill/>
+          <a:ln/>
+        </p:spPr>
+        <p:txBody>
+          <a:bodyPr wrap="square" lIns="0" tIns="0" rIns="0" bIns="0" rtlCol="0" anchor="ctr"/>
+          <a:lstStyle/>
+          <a:p>
+            <a:pPr algn="ctr" indent="0" marL="0">
+              <a:buNone/>
+            </a:pPr>
+            <a:r>
+              <a:rPr lang="en-US" sz="1800" b="1" dirty="0">
+                <a:solidFill>
+                  <a:srgbClr val="0068B7"/>
+                </a:solidFill>
+                <a:latin typeface="Aptos" pitchFamily="34" charset="0"/>
+                <a:ea typeface="Aptos" pitchFamily="34" charset="-122"/>
+                <a:cs typeface="Aptos" pitchFamily="34" charset="-120"/>
+              </a:rPr>
+              <a:t>â†’</a:t>
+            </a:r>
+            <a:endParaRPr lang="en-US" sz="1800" dirty="0"/>
+          </a:p>
+        </p:txBody>
+      </p:sp>
+      <p:sp>
+        <p:nvSpPr>
+          <p:cNvPr id="19" name="Shape 17"/>
+          <p:cNvSpPr/>
+          <p:nvPr/>
+        </p:nvSpPr>
+        <p:spPr>
+          <a:xfrm>
+            <a:off x="10274808" y="3977640"/>
+            <a:ext cx="972312" cy="749808"/>
+          </a:xfrm>
+          <a:prstGeom prst="roundRect">
+            <a:avLst>
+              <a:gd name="adj" fmla="val 14634"/>
+            </a:avLst>
+          </a:prstGeom>
+          <a:solidFill>
+            <a:srgbClr val="6A4CA3"/>
+          </a:solidFill>
+          <a:ln w="12700">
+            <a:solidFill>
+              <a:srgbClr val="6A4CA3"/>
+            </a:solidFill>
+            <a:prstDash val="solid"/>
+          </a:ln>
+        </p:spPr>
+      </p:sp>
+      <p:sp>
+        <p:nvSpPr>
+          <p:cNvPr id="20" name="Text 18"/>
+          <p:cNvSpPr/>
+          <p:nvPr/>
+        </p:nvSpPr>
+        <p:spPr>
+          <a:xfrm>
+            <a:off x="10347960" y="4169664"/>
+            <a:ext cx="826008" cy="310896"/>
+          </a:xfrm>
+          <a:prstGeom prst="rect">
+            <a:avLst/>
+          </a:prstGeom>
+          <a:noFill/>
+          <a:ln/>
+        </p:spPr>
+        <p:txBody>
+          <a:bodyPr wrap="square" lIns="0" tIns="0" rIns="0" bIns="0" rtlCol="0" anchor="ctr">
+            <a:normAutofit/>
+          </a:bodyPr>
+          <a:lstStyle/>
+          <a:p>
+            <a:pPr algn="ctr" indent="0" marL="0">
+              <a:buNone/>
+            </a:pPr>
+            <a:r>
+              <a:rPr lang="en-US" sz="1500" b="1" dirty="0">
+                <a:solidFill>
+                  <a:srgbClr val="FFFFFF"/>
+                </a:solidFill>
+                <a:latin typeface="Aptos" pitchFamily="34" charset="0"/>
+                <a:ea typeface="Aptos" pitchFamily="34" charset="-122"/>
+                <a:cs typeface="Aptos" pitchFamily="34" charset="-120"/>
+              </a:rPr>
+              <a:t>Action</a:t>
+            </a:r>
+            <a:endParaRPr lang="en-US" sz="1500" dirty="0"/>
           </a:p>
         </p:txBody>
       </p:sp>
@@ -11721,7 +12597,7 @@
                 <a:ea typeface="Aptos" pitchFamily="34" charset="-122"/>
                 <a:cs typeface="Aptos" pitchFamily="34" charset="-120"/>
               </a:rPr>
-              <a:t>© Paula Soper</a:t>
+              <a:t>Â© Paula Soper</a:t>
             </a:r>
             <a:endParaRPr lang="en-US" sz="800" dirty="0"/>
           </a:p>
@@ -11735,8 +12611,47 @@
         </p:nvSpPr>
         <p:spPr>
           <a:xfrm>
+            <a:off x="11137392" y="6510528"/>
+            <a:ext cx="411480" cy="201168"/>
+          </a:xfrm>
+          <a:prstGeom prst="rect">
+            <a:avLst/>
+          </a:prstGeom>
+          <a:noFill/>
+          <a:ln/>
+        </p:spPr>
+        <p:txBody>
+          <a:bodyPr wrap="square" lIns="0" tIns="0" rIns="0" bIns="0" rtlCol="0" anchor="ctr"/>
+          <a:lstStyle/>
+          <a:p>
+            <a:pPr algn="r" indent="0" marL="0">
+              <a:buNone/>
+            </a:pPr>
+            <a:r>
+              <a:rPr lang="en-US" sz="900" dirty="0">
+                <a:solidFill>
+                  <a:srgbClr val="5F7181"/>
+                </a:solidFill>
+                <a:latin typeface="Aptos" pitchFamily="34" charset="0"/>
+                <a:ea typeface="Aptos" pitchFamily="34" charset="-122"/>
+                <a:cs typeface="Aptos" pitchFamily="34" charset="-120"/>
+              </a:rPr>
+              <a:t>4</a:t>
+            </a:r>
+            <a:endParaRPr lang="en-US" sz="900" dirty="0"/>
+          </a:p>
+        </p:txBody>
+      </p:sp>
+      <p:sp>
+        <p:nvSpPr>
+          <p:cNvPr id="8" name="Text 6"/>
+          <p:cNvSpPr/>
+          <p:nvPr/>
+        </p:nvSpPr>
+        <p:spPr>
+          <a:xfrm>
             <a:off x="640080" y="658368"/>
-            <a:ext cx="10881360" cy="566928"/>
+            <a:ext cx="10881360" cy="713232"/>
           </a:xfrm>
           <a:prstGeom prst="rect">
             <a:avLst/>
@@ -11754,7 +12669,7 @@
               <a:buNone/>
             </a:pPr>
             <a:r>
-              <a:rPr lang="en-US" sz="2700" b="1" dirty="0">
+              <a:rPr lang="en-US" sz="3400" b="1" dirty="0">
                 <a:solidFill>
                   <a:srgbClr val="003A63"/>
                 </a:solidFill>
@@ -11764,20 +12679,20 @@
               </a:rPr>
               <a:t>Related toolkit resources</a:t>
             </a:r>
-            <a:endParaRPr lang="en-US" sz="2700" dirty="0"/>
-          </a:p>
-        </p:txBody>
-      </p:sp>
-      <p:sp>
-        <p:nvSpPr>
-          <p:cNvPr id="8" name="Text 6"/>
-          <p:cNvSpPr/>
-          <p:nvPr/>
-        </p:nvSpPr>
-        <p:spPr>
-          <a:xfrm>
-            <a:off x="868680" y="1417320"/>
-            <a:ext cx="6903720" cy="4480560"/>
+            <a:endParaRPr lang="en-US" sz="3400" dirty="0"/>
+          </a:p>
+        </p:txBody>
+      </p:sp>
+      <p:sp>
+        <p:nvSpPr>
+          <p:cNvPr id="9" name="Text 7"/>
+          <p:cNvSpPr/>
+          <p:nvPr/>
+        </p:nvSpPr>
+        <p:spPr>
+          <a:xfrm>
+            <a:off x="868680" y="1508760"/>
+            <a:ext cx="6812280" cy="3977640"/>
           </a:xfrm>
           <a:prstGeom prst="rect">
             <a:avLst/>
@@ -11792,7 +12707,7 @@
           <a:lstStyle/>
           <a:p>
             <a:r>
-              <a:rPr lang="en-US" sz="1460" dirty="0">
+              <a:rPr lang="en-US" sz="1850" dirty="0">
                 <a:solidFill>
                   <a:srgbClr val="17364A"/>
                 </a:solidFill>
@@ -11800,13 +12715,13 @@
                 <a:ea typeface="Aptos" pitchFamily="34" charset="-122"/>
                 <a:cs typeface="Aptos" pitchFamily="34" charset="-120"/>
               </a:rPr>
-              <a:t>Tool 4: AI Policy Landscape Scan (Worksheet) - Use AI Policy Landscape Scan to translate this lesson into a documented public health.</a:t>
-            </a:r>
-            <a:endParaRPr lang="en-US" sz="1460" dirty="0"/>
-          </a:p>
-          <a:p>
-            <a:r>
-              <a:rPr lang="en-US" sz="1460" dirty="0">
+              <a:t>Tool 4: AI Policy Landscape Scan (Worksheet) - Use AI Policy Landscape Scan to translate this lesson into a.</a:t>
+            </a:r>
+            <a:endParaRPr lang="en-US" sz="1850" dirty="0"/>
+          </a:p>
+          <a:p>
+            <a:r>
+              <a:rPr lang="en-US" sz="1850" dirty="0">
                 <a:solidFill>
                   <a:srgbClr val="17364A"/>
                 </a:solidFill>
@@ -11814,13 +12729,13 @@
                 <a:ea typeface="Aptos" pitchFamily="34" charset="-122"/>
                 <a:cs typeface="Aptos" pitchFamily="34" charset="-120"/>
               </a:rPr>
-              <a:t>Tool 5: AI Environmental and Resource Impact Review (Checklist) - Use AI Environmental and Resource Impact Review to translate this.</a:t>
-            </a:r>
-            <a:endParaRPr lang="en-US" sz="1460" dirty="0"/>
-          </a:p>
-          <a:p>
-            <a:r>
-              <a:rPr lang="en-US" sz="1460" dirty="0">
+              <a:t>Tool 5: AI Environmental and Resource Impact Review (Checklist) - Use AI Environmental and Resource Impact.</a:t>
+            </a:r>
+            <a:endParaRPr lang="en-US" sz="1850" dirty="0"/>
+          </a:p>
+          <a:p>
+            <a:r>
+              <a:rPr lang="en-US" sz="1850" dirty="0">
                 <a:solidFill>
                   <a:srgbClr val="17364A"/>
                 </a:solidFill>
@@ -11828,13 +12743,13 @@
                 <a:ea typeface="Aptos" pitchFamily="34" charset="-122"/>
                 <a:cs typeface="Aptos" pitchFamily="34" charset="-120"/>
               </a:rPr>
-              <a:t>Tool 6: Human-Centered AI Decision Rule Checklist (Checklist) - Use Human-Centered AI Decision Rule Checklist to translate this.</a:t>
-            </a:r>
-            <a:endParaRPr lang="en-US" sz="1460" dirty="0"/>
-          </a:p>
-          <a:p>
-            <a:r>
-              <a:rPr lang="en-US" sz="1460" dirty="0">
+              <a:t>Tool 6: Human-Centered AI Decision Rule Checklist (Checklist) - Use Human-Centered AI Decision Rule.</a:t>
+            </a:r>
+            <a:endParaRPr lang="en-US" sz="1850" dirty="0"/>
+          </a:p>
+          <a:p>
+            <a:r>
+              <a:rPr lang="en-US" sz="1850" dirty="0">
                 <a:solidFill>
                   <a:srgbClr val="17364A"/>
                 </a:solidFill>
@@ -11842,29 +12757,15 @@
                 <a:ea typeface="Aptos" pitchFamily="34" charset="-122"/>
                 <a:cs typeface="Aptos" pitchFamily="34" charset="-120"/>
               </a:rPr>
-              <a:t>Tool 8: AI Project Charter (Planning) - Use AI Project Charter to translate this lesson into a documented public health AI planning,.</a:t>
-            </a:r>
-            <a:endParaRPr lang="en-US" sz="1460" dirty="0"/>
-          </a:p>
-          <a:p>
-            <a:r>
-              <a:rPr lang="en-US" sz="1460" dirty="0">
-                <a:solidFill>
-                  <a:srgbClr val="17364A"/>
-                </a:solidFill>
-                <a:latin typeface="Aptos" pitchFamily="34" charset="0"/>
-                <a:ea typeface="Aptos" pitchFamily="34" charset="-122"/>
-                <a:cs typeface="Aptos" pitchFamily="34" charset="-120"/>
-              </a:rPr>
-              <a:t>Tool 9: Data Quality Assessment Checklist (Checklist) - Use this tool to complete or strengthen the practical exercise for the module.</a:t>
-            </a:r>
-            <a:endParaRPr lang="en-US" sz="1460" dirty="0"/>
-          </a:p>
-        </p:txBody>
-      </p:sp>
-      <p:sp>
-        <p:nvSpPr>
-          <p:cNvPr id="9" name="Shape 7"/>
+              <a:t>Tool 8: AI Project Charter (Planning) - Use AI Project Charter to translate this lesson into a documented.</a:t>
+            </a:r>
+            <a:endParaRPr lang="en-US" sz="1850" dirty="0"/>
+          </a:p>
+        </p:txBody>
+      </p:sp>
+      <p:sp>
+        <p:nvSpPr>
+          <p:cNvPr id="10" name="Shape 8"/>
           <p:cNvSpPr/>
           <p:nvPr/>
         </p:nvSpPr>
@@ -11891,14 +12792,14 @@
       </p:sp>
       <p:sp>
         <p:nvSpPr>
-          <p:cNvPr id="10" name="Text 8"/>
+          <p:cNvPr id="11" name="Text 9"/>
           <p:cNvSpPr/>
           <p:nvPr/>
         </p:nvSpPr>
         <p:spPr>
           <a:xfrm>
             <a:off x="8211312" y="1563624"/>
-            <a:ext cx="2734056" cy="201168"/>
+            <a:ext cx="2734056" cy="256032"/>
           </a:xfrm>
           <a:prstGeom prst="rect">
             <a:avLst/>
@@ -11914,7 +12815,7 @@
               <a:buNone/>
             </a:pPr>
             <a:r>
-              <a:rPr lang="en-US" sz="950" b="1" dirty="0">
+              <a:rPr lang="en-US" sz="1300" b="1" dirty="0">
                 <a:solidFill>
                   <a:srgbClr val="0068B7"/>
                 </a:solidFill>
@@ -11924,20 +12825,20 @@
               </a:rPr>
               <a:t>Use the tools</a:t>
             </a:r>
-            <a:endParaRPr lang="en-US" sz="950" dirty="0"/>
-          </a:p>
-        </p:txBody>
-      </p:sp>
-      <p:sp>
-        <p:nvSpPr>
-          <p:cNvPr id="11" name="Text 9"/>
-          <p:cNvSpPr/>
-          <p:nvPr/>
-        </p:nvSpPr>
-        <p:spPr>
-          <a:xfrm>
-            <a:off x="8211312" y="1856232"/>
-            <a:ext cx="2734056" cy="1536192"/>
+            <a:endParaRPr lang="en-US" sz="1300" dirty="0"/>
+          </a:p>
+        </p:txBody>
+      </p:sp>
+      <p:sp>
+        <p:nvSpPr>
+          <p:cNvPr id="12" name="Text 10"/>
+          <p:cNvSpPr/>
+          <p:nvPr/>
+        </p:nvSpPr>
+        <p:spPr>
+          <a:xfrm>
+            <a:off x="8211312" y="1920240"/>
+            <a:ext cx="2734056" cy="1463040"/>
           </a:xfrm>
           <a:prstGeom prst="rect">
             <a:avLst/>
@@ -11955,7 +12856,7 @@
               <a:buNone/>
             </a:pPr>
             <a:r>
-              <a:rPr lang="en-US" sz="1250" dirty="0">
+              <a:rPr lang="en-US" sz="1550" dirty="0">
                 <a:solidFill>
                   <a:srgbClr val="17364A"/>
                 </a:solidFill>
@@ -11965,32 +12866,32 @@
               </a:rPr>
               <a:t>Use linked tools when your department needs a structured worksheet, template, checklist, review process, or documentation artifact.</a:t>
             </a:r>
-            <a:endParaRPr lang="en-US" sz="1250" dirty="0"/>
-          </a:p>
-        </p:txBody>
-      </p:sp>
-      <p:sp>
-        <p:nvSpPr>
-          <p:cNvPr id="12" name="Shape 10"/>
-          <p:cNvSpPr/>
-          <p:nvPr/>
-        </p:nvSpPr>
-        <p:spPr>
-          <a:xfrm>
-            <a:off x="8046720" y="3794760"/>
-            <a:ext cx="3063240" cy="1508760"/>
+            <a:endParaRPr lang="en-US" sz="1550" dirty="0"/>
+          </a:p>
+        </p:txBody>
+      </p:sp>
+      <p:sp>
+        <p:nvSpPr>
+          <p:cNvPr id="13" name="Shape 11"/>
+          <p:cNvSpPr/>
+          <p:nvPr/>
+        </p:nvSpPr>
+        <p:spPr>
+          <a:xfrm>
+            <a:off x="7818120" y="3977640"/>
+            <a:ext cx="972312" cy="749808"/>
           </a:xfrm>
           <a:prstGeom prst="roundRect">
             <a:avLst>
-              <a:gd name="adj" fmla="val 7273"/>
+              <a:gd name="adj" fmla="val 14634"/>
             </a:avLst>
           </a:prstGeom>
           <a:solidFill>
-            <a:srgbClr val="EEF8ED"/>
+            <a:srgbClr val="0068B7"/>
           </a:solidFill>
           <a:ln w="12700">
             <a:solidFill>
-              <a:srgbClr val="B9D7E6"/>
+              <a:srgbClr val="0068B7"/>
             </a:solidFill>
             <a:prstDash val="solid"/>
           </a:ln>
@@ -11998,81 +12899,256 @@
       </p:sp>
       <p:sp>
         <p:nvSpPr>
-          <p:cNvPr id="13" name="Text 11"/>
-          <p:cNvSpPr/>
-          <p:nvPr/>
-        </p:nvSpPr>
-        <p:spPr>
-          <a:xfrm>
-            <a:off x="8211312" y="3941064"/>
-            <a:ext cx="2734056" cy="201168"/>
-          </a:xfrm>
-          <a:prstGeom prst="rect">
-            <a:avLst/>
-          </a:prstGeom>
-          <a:noFill/>
-          <a:ln/>
-        </p:spPr>
-        <p:txBody>
-          <a:bodyPr wrap="square" lIns="0" tIns="0" rIns="0" bIns="0" rtlCol="0" anchor="ctr"/>
-          <a:lstStyle/>
-          <a:p>
-            <a:pPr indent="0" marL="0">
-              <a:buNone/>
-            </a:pPr>
-            <a:r>
-              <a:rPr lang="en-US" sz="950" b="1" dirty="0">
-                <a:solidFill>
-                  <a:srgbClr val="0068B7"/>
-                </a:solidFill>
-                <a:latin typeface="Aptos" pitchFamily="34" charset="0"/>
-                <a:ea typeface="Aptos" pitchFamily="34" charset="-122"/>
-                <a:cs typeface="Aptos" pitchFamily="34" charset="-120"/>
-              </a:rPr>
-              <a:t>Avoid duplication</a:t>
-            </a:r>
-            <a:endParaRPr lang="en-US" sz="950" dirty="0"/>
-          </a:p>
-        </p:txBody>
-      </p:sp>
-      <p:sp>
-        <p:nvSpPr>
           <p:cNvPr id="14" name="Text 12"/>
           <p:cNvSpPr/>
           <p:nvPr/>
         </p:nvSpPr>
         <p:spPr>
           <a:xfrm>
-            <a:off x="8211312" y="4233672"/>
-            <a:ext cx="2734056" cy="941832"/>
-          </a:xfrm>
-          <a:prstGeom prst="rect">
-            <a:avLst/>
-          </a:prstGeom>
-          <a:noFill/>
-          <a:ln/>
-        </p:spPr>
-        <p:txBody>
-          <a:bodyPr wrap="square" lIns="0" tIns="0" rIns="0" bIns="0" rtlCol="0" anchor="t">
+            <a:off x="7891272" y="4169664"/>
+            <a:ext cx="826008" cy="310896"/>
+          </a:xfrm>
+          <a:prstGeom prst="rect">
+            <a:avLst/>
+          </a:prstGeom>
+          <a:noFill/>
+          <a:ln/>
+        </p:spPr>
+        <p:txBody>
+          <a:bodyPr wrap="square" lIns="0" tIns="0" rIns="0" bIns="0" rtlCol="0" anchor="ctr">
             <a:normAutofit/>
           </a:bodyPr>
           <a:lstStyle/>
           <a:p>
-            <a:pPr indent="0" marL="0">
-              <a:buNone/>
-            </a:pPr>
-            <a:r>
-              <a:rPr lang="en-US" sz="1250" dirty="0">
-                <a:solidFill>
-                  <a:srgbClr val="17364A"/>
-                </a:solidFill>
-                <a:latin typeface="Aptos" pitchFamily="34" charset="0"/>
-                <a:ea typeface="Aptos" pitchFamily="34" charset="-122"/>
-                <a:cs typeface="Aptos" pitchFamily="34" charset="-120"/>
-              </a:rPr>
-              <a:t>If your department already has a strong equivalent tool, adapt or use the existing process instead of recreating it.</a:t>
-            </a:r>
-            <a:endParaRPr lang="en-US" sz="1250" dirty="0"/>
+            <a:pPr algn="ctr" indent="0" marL="0">
+              <a:buNone/>
+            </a:pPr>
+            <a:r>
+              <a:rPr lang="en-US" sz="1500" b="1" dirty="0">
+                <a:solidFill>
+                  <a:srgbClr val="FFFFFF"/>
+                </a:solidFill>
+                <a:latin typeface="Aptos" pitchFamily="34" charset="0"/>
+                <a:ea typeface="Aptos" pitchFamily="34" charset="-122"/>
+                <a:cs typeface="Aptos" pitchFamily="34" charset="-120"/>
+              </a:rPr>
+              <a:t>Concept</a:t>
+            </a:r>
+            <a:endParaRPr lang="en-US" sz="1500" dirty="0"/>
+          </a:p>
+        </p:txBody>
+      </p:sp>
+      <p:sp>
+        <p:nvSpPr>
+          <p:cNvPr id="15" name="Text 13"/>
+          <p:cNvSpPr/>
+          <p:nvPr/>
+        </p:nvSpPr>
+        <p:spPr>
+          <a:xfrm>
+            <a:off x="8817864" y="4187952"/>
+            <a:ext cx="201168" cy="256032"/>
+          </a:xfrm>
+          <a:prstGeom prst="rect">
+            <a:avLst/>
+          </a:prstGeom>
+          <a:noFill/>
+          <a:ln/>
+        </p:spPr>
+        <p:txBody>
+          <a:bodyPr wrap="square" lIns="0" tIns="0" rIns="0" bIns="0" rtlCol="0" anchor="ctr"/>
+          <a:lstStyle/>
+          <a:p>
+            <a:pPr algn="ctr" indent="0" marL="0">
+              <a:buNone/>
+            </a:pPr>
+            <a:r>
+              <a:rPr lang="en-US" sz="1800" b="1" dirty="0">
+                <a:solidFill>
+                  <a:srgbClr val="0068B7"/>
+                </a:solidFill>
+                <a:latin typeface="Aptos" pitchFamily="34" charset="0"/>
+                <a:ea typeface="Aptos" pitchFamily="34" charset="-122"/>
+                <a:cs typeface="Aptos" pitchFamily="34" charset="-120"/>
+              </a:rPr>
+              <a:t>â†’</a:t>
+            </a:r>
+            <a:endParaRPr lang="en-US" sz="1800" dirty="0"/>
+          </a:p>
+        </p:txBody>
+      </p:sp>
+      <p:sp>
+        <p:nvSpPr>
+          <p:cNvPr id="16" name="Shape 14"/>
+          <p:cNvSpPr/>
+          <p:nvPr/>
+        </p:nvSpPr>
+        <p:spPr>
+          <a:xfrm>
+            <a:off x="9046464" y="3977640"/>
+            <a:ext cx="972312" cy="749808"/>
+          </a:xfrm>
+          <a:prstGeom prst="roundRect">
+            <a:avLst>
+              <a:gd name="adj" fmla="val 14634"/>
+            </a:avLst>
+          </a:prstGeom>
+          <a:solidFill>
+            <a:srgbClr val="2F8A28"/>
+          </a:solidFill>
+          <a:ln w="12700">
+            <a:solidFill>
+              <a:srgbClr val="2F8A28"/>
+            </a:solidFill>
+            <a:prstDash val="solid"/>
+          </a:ln>
+        </p:spPr>
+      </p:sp>
+      <p:sp>
+        <p:nvSpPr>
+          <p:cNvPr id="17" name="Text 15"/>
+          <p:cNvSpPr/>
+          <p:nvPr/>
+        </p:nvSpPr>
+        <p:spPr>
+          <a:xfrm>
+            <a:off x="9119616" y="4169664"/>
+            <a:ext cx="826008" cy="310896"/>
+          </a:xfrm>
+          <a:prstGeom prst="rect">
+            <a:avLst/>
+          </a:prstGeom>
+          <a:noFill/>
+          <a:ln/>
+        </p:spPr>
+        <p:txBody>
+          <a:bodyPr wrap="square" lIns="0" tIns="0" rIns="0" bIns="0" rtlCol="0" anchor="ctr">
+            <a:normAutofit/>
+          </a:bodyPr>
+          <a:lstStyle/>
+          <a:p>
+            <a:pPr algn="ctr" indent="0" marL="0">
+              <a:buNone/>
+            </a:pPr>
+            <a:r>
+              <a:rPr lang="en-US" sz="1500" b="1" dirty="0">
+                <a:solidFill>
+                  <a:srgbClr val="FFFFFF"/>
+                </a:solidFill>
+                <a:latin typeface="Aptos" pitchFamily="34" charset="0"/>
+                <a:ea typeface="Aptos" pitchFamily="34" charset="-122"/>
+                <a:cs typeface="Aptos" pitchFamily="34" charset="-120"/>
+              </a:rPr>
+              <a:t>Tool</a:t>
+            </a:r>
+            <a:endParaRPr lang="en-US" sz="1500" dirty="0"/>
+          </a:p>
+        </p:txBody>
+      </p:sp>
+      <p:sp>
+        <p:nvSpPr>
+          <p:cNvPr id="18" name="Text 16"/>
+          <p:cNvSpPr/>
+          <p:nvPr/>
+        </p:nvSpPr>
+        <p:spPr>
+          <a:xfrm>
+            <a:off x="10046208" y="4187952"/>
+            <a:ext cx="201168" cy="256032"/>
+          </a:xfrm>
+          <a:prstGeom prst="rect">
+            <a:avLst/>
+          </a:prstGeom>
+          <a:noFill/>
+          <a:ln/>
+        </p:spPr>
+        <p:txBody>
+          <a:bodyPr wrap="square" lIns="0" tIns="0" rIns="0" bIns="0" rtlCol="0" anchor="ctr"/>
+          <a:lstStyle/>
+          <a:p>
+            <a:pPr algn="ctr" indent="0" marL="0">
+              <a:buNone/>
+            </a:pPr>
+            <a:r>
+              <a:rPr lang="en-US" sz="1800" b="1" dirty="0">
+                <a:solidFill>
+                  <a:srgbClr val="0068B7"/>
+                </a:solidFill>
+                <a:latin typeface="Aptos" pitchFamily="34" charset="0"/>
+                <a:ea typeface="Aptos" pitchFamily="34" charset="-122"/>
+                <a:cs typeface="Aptos" pitchFamily="34" charset="-120"/>
+              </a:rPr>
+              <a:t>â†’</a:t>
+            </a:r>
+            <a:endParaRPr lang="en-US" sz="1800" dirty="0"/>
+          </a:p>
+        </p:txBody>
+      </p:sp>
+      <p:sp>
+        <p:nvSpPr>
+          <p:cNvPr id="19" name="Shape 17"/>
+          <p:cNvSpPr/>
+          <p:nvPr/>
+        </p:nvSpPr>
+        <p:spPr>
+          <a:xfrm>
+            <a:off x="10274808" y="3977640"/>
+            <a:ext cx="972312" cy="749808"/>
+          </a:xfrm>
+          <a:prstGeom prst="roundRect">
+            <a:avLst>
+              <a:gd name="adj" fmla="val 14634"/>
+            </a:avLst>
+          </a:prstGeom>
+          <a:solidFill>
+            <a:srgbClr val="D69A2D"/>
+          </a:solidFill>
+          <a:ln w="12700">
+            <a:solidFill>
+              <a:srgbClr val="D69A2D"/>
+            </a:solidFill>
+            <a:prstDash val="solid"/>
+          </a:ln>
+        </p:spPr>
+      </p:sp>
+      <p:sp>
+        <p:nvSpPr>
+          <p:cNvPr id="20" name="Text 18"/>
+          <p:cNvSpPr/>
+          <p:nvPr/>
+        </p:nvSpPr>
+        <p:spPr>
+          <a:xfrm>
+            <a:off x="10347960" y="4169664"/>
+            <a:ext cx="826008" cy="310896"/>
+          </a:xfrm>
+          <a:prstGeom prst="rect">
+            <a:avLst/>
+          </a:prstGeom>
+          <a:noFill/>
+          <a:ln/>
+        </p:spPr>
+        <p:txBody>
+          <a:bodyPr wrap="square" lIns="0" tIns="0" rIns="0" bIns="0" rtlCol="0" anchor="ctr">
+            <a:normAutofit/>
+          </a:bodyPr>
+          <a:lstStyle/>
+          <a:p>
+            <a:pPr algn="ctr" indent="0" marL="0">
+              <a:buNone/>
+            </a:pPr>
+            <a:r>
+              <a:rPr lang="en-US" sz="1500" b="1" dirty="0">
+                <a:solidFill>
+                  <a:srgbClr val="FFFFFF"/>
+                </a:solidFill>
+                <a:latin typeface="Aptos" pitchFamily="34" charset="0"/>
+                <a:ea typeface="Aptos" pitchFamily="34" charset="-122"/>
+                <a:cs typeface="Aptos" pitchFamily="34" charset="-120"/>
+              </a:rPr>
+              <a:t>Artifact</a:t>
+            </a:r>
+            <a:endParaRPr lang="en-US" sz="1500" dirty="0"/>
           </a:p>
         </p:txBody>
       </p:sp>
@@ -12269,7 +13345,7 @@
                 <a:ea typeface="Aptos" pitchFamily="34" charset="-122"/>
                 <a:cs typeface="Aptos" pitchFamily="34" charset="-120"/>
               </a:rPr>
-              <a:t>© Paula Soper</a:t>
+              <a:t>Â© Paula Soper</a:t>
             </a:r>
             <a:endParaRPr lang="en-US" sz="800" dirty="0"/>
           </a:p>
@@ -12277,7 +13353,46 @@
       </p:sp>
       <p:sp>
         <p:nvSpPr>
-          <p:cNvPr id="7" name="Shape 5"/>
+          <p:cNvPr id="7" name="Text 5"/>
+          <p:cNvSpPr/>
+          <p:nvPr/>
+        </p:nvSpPr>
+        <p:spPr>
+          <a:xfrm>
+            <a:off x="11137392" y="6510528"/>
+            <a:ext cx="411480" cy="201168"/>
+          </a:xfrm>
+          <a:prstGeom prst="rect">
+            <a:avLst/>
+          </a:prstGeom>
+          <a:noFill/>
+          <a:ln/>
+        </p:spPr>
+        <p:txBody>
+          <a:bodyPr wrap="square" lIns="0" tIns="0" rIns="0" bIns="0" rtlCol="0" anchor="ctr"/>
+          <a:lstStyle/>
+          <a:p>
+            <a:pPr algn="r" indent="0" marL="0">
+              <a:buNone/>
+            </a:pPr>
+            <a:r>
+              <a:rPr lang="en-US" sz="900" dirty="0">
+                <a:solidFill>
+                  <a:srgbClr val="5F7181"/>
+                </a:solidFill>
+                <a:latin typeface="Aptos" pitchFamily="34" charset="0"/>
+                <a:ea typeface="Aptos" pitchFamily="34" charset="-122"/>
+                <a:cs typeface="Aptos" pitchFamily="34" charset="-120"/>
+              </a:rPr>
+              <a:t>5</a:t>
+            </a:r>
+            <a:endParaRPr lang="en-US" sz="900" dirty="0"/>
+          </a:p>
+        </p:txBody>
+      </p:sp>
+      <p:sp>
+        <p:nvSpPr>
+          <p:cNvPr id="8" name="Shape 6"/>
           <p:cNvSpPr/>
           <p:nvPr/>
         </p:nvSpPr>
@@ -12302,7 +13417,7 @@
       </p:sp>
       <p:sp>
         <p:nvSpPr>
-          <p:cNvPr id="8" name="Text 6"/>
+          <p:cNvPr id="9" name="Text 7"/>
           <p:cNvSpPr/>
           <p:nvPr/>
         </p:nvSpPr>
@@ -12341,14 +13456,14 @@
       </p:sp>
       <p:sp>
         <p:nvSpPr>
-          <p:cNvPr id="9" name="Text 7"/>
+          <p:cNvPr id="10" name="Text 8"/>
           <p:cNvSpPr/>
           <p:nvPr/>
         </p:nvSpPr>
         <p:spPr>
           <a:xfrm>
             <a:off x="640080" y="621792"/>
-            <a:ext cx="10881360" cy="566928"/>
+            <a:ext cx="10881360" cy="713232"/>
           </a:xfrm>
           <a:prstGeom prst="rect">
             <a:avLst/>
@@ -12366,7 +13481,7 @@
               <a:buNone/>
             </a:pPr>
             <a:r>
-              <a:rPr lang="en-US" sz="2700" b="1" dirty="0">
+              <a:rPr lang="en-US" sz="3400" b="1" dirty="0">
                 <a:solidFill>
                   <a:srgbClr val="003A63"/>
                 </a:solidFill>
@@ -12376,20 +13491,20 @@
               </a:rPr>
               <a:t>Learning Objectives</a:t>
             </a:r>
-            <a:endParaRPr lang="en-US" sz="2700" dirty="0"/>
-          </a:p>
-        </p:txBody>
-      </p:sp>
-      <p:sp>
-        <p:nvSpPr>
-          <p:cNvPr id="10" name="Text 8"/>
-          <p:cNvSpPr/>
-          <p:nvPr/>
-        </p:nvSpPr>
-        <p:spPr>
-          <a:xfrm>
-            <a:off x="868680" y="1417320"/>
-            <a:ext cx="6675120" cy="4434840"/>
+            <a:endParaRPr lang="en-US" sz="3400" dirty="0"/>
+          </a:p>
+        </p:txBody>
+      </p:sp>
+      <p:sp>
+        <p:nvSpPr>
+          <p:cNvPr id="11" name="Text 9"/>
+          <p:cNvSpPr/>
+          <p:nvPr/>
+        </p:nvSpPr>
+        <p:spPr>
+          <a:xfrm>
+            <a:off x="868680" y="1508760"/>
+            <a:ext cx="6537960" cy="4160520"/>
           </a:xfrm>
           <a:prstGeom prst="rect">
             <a:avLst/>
@@ -12404,7 +13519,7 @@
           <a:lstStyle/>
           <a:p>
             <a:r>
-              <a:rPr lang="en-US" sz="1700" dirty="0">
+              <a:rPr lang="en-US" sz="2100" dirty="0">
                 <a:solidFill>
                   <a:srgbClr val="17364A"/>
                 </a:solidFill>
@@ -12414,11 +13529,11 @@
               </a:rPr>
               <a:t>Define NLP in plain language and distinguish common NLP tasks.</a:t>
             </a:r>
-            <a:endParaRPr lang="en-US" sz="1700" dirty="0"/>
-          </a:p>
-          <a:p>
-            <a:r>
-              <a:rPr lang="en-US" sz="1700" dirty="0">
+            <a:endParaRPr lang="en-US" sz="2100" dirty="0"/>
+          </a:p>
+          <a:p>
+            <a:r>
+              <a:rPr lang="en-US" sz="2100" dirty="0">
                 <a:solidFill>
                   <a:srgbClr val="17364A"/>
                 </a:solidFill>
@@ -12428,11 +13543,11 @@
               </a:rPr>
               <a:t>Identify public health workflows where NLP may be useful.</a:t>
             </a:r>
-            <a:endParaRPr lang="en-US" sz="1700" dirty="0"/>
-          </a:p>
-          <a:p>
-            <a:r>
-              <a:rPr lang="en-US" sz="1700" dirty="0">
+            <a:endParaRPr lang="en-US" sz="2100" dirty="0"/>
+          </a:p>
+          <a:p>
+            <a:r>
+              <a:rPr lang="en-US" sz="2100" dirty="0">
                 <a:solidFill>
                   <a:srgbClr val="17364A"/>
                 </a:solidFill>
@@ -12442,27 +13557,13 @@
               </a:rPr>
               <a:t>Assess risks related to accuracy, bias, privacy, hallucination, language, and missing context.</a:t>
             </a:r>
-            <a:endParaRPr lang="en-US" sz="1700" dirty="0"/>
-          </a:p>
-          <a:p>
-            <a:r>
-              <a:rPr lang="en-US" sz="1700" dirty="0">
-                <a:solidFill>
-                  <a:srgbClr val="17364A"/>
-                </a:solidFill>
-                <a:latin typeface="Aptos" pitchFamily="34" charset="0"/>
-                <a:ea typeface="Aptos" pitchFamily="34" charset="-122"/>
-                <a:cs typeface="Aptos" pitchFamily="34" charset="-120"/>
-              </a:rPr>
-              <a:t>Define source verification and human review requirements for NLP outputs.</a:t>
-            </a:r>
-            <a:endParaRPr lang="en-US" sz="1700" dirty="0"/>
-          </a:p>
-        </p:txBody>
-      </p:sp>
-      <p:sp>
-        <p:nvSpPr>
-          <p:cNvPr id="11" name="Shape 9"/>
+            <a:endParaRPr lang="en-US" sz="2100" dirty="0"/>
+          </a:p>
+        </p:txBody>
+      </p:sp>
+      <p:sp>
+        <p:nvSpPr>
+          <p:cNvPr id="12" name="Shape 10"/>
           <p:cNvSpPr/>
           <p:nvPr/>
         </p:nvSpPr>
@@ -12489,14 +13590,14 @@
       </p:sp>
       <p:sp>
         <p:nvSpPr>
-          <p:cNvPr id="12" name="Text 10"/>
+          <p:cNvPr id="13" name="Text 11"/>
           <p:cNvSpPr/>
           <p:nvPr/>
         </p:nvSpPr>
         <p:spPr>
           <a:xfrm>
             <a:off x="8074152" y="1563624"/>
-            <a:ext cx="2825496" cy="201168"/>
+            <a:ext cx="2825496" cy="256032"/>
           </a:xfrm>
           <a:prstGeom prst="rect">
             <a:avLst/>
@@ -12512,7 +13613,7 @@
               <a:buNone/>
             </a:pPr>
             <a:r>
-              <a:rPr lang="en-US" sz="950" b="1" dirty="0">
+              <a:rPr lang="en-US" sz="1300" b="1" dirty="0">
                 <a:solidFill>
                   <a:srgbClr val="0068B7"/>
                 </a:solidFill>
@@ -12522,20 +13623,20 @@
               </a:rPr>
               <a:t>Key idea</a:t>
             </a:r>
-            <a:endParaRPr lang="en-US" sz="950" dirty="0"/>
-          </a:p>
-        </p:txBody>
-      </p:sp>
-      <p:sp>
-        <p:nvSpPr>
-          <p:cNvPr id="13" name="Text 11"/>
-          <p:cNvSpPr/>
-          <p:nvPr/>
-        </p:nvSpPr>
-        <p:spPr>
-          <a:xfrm>
-            <a:off x="8074152" y="1856232"/>
-            <a:ext cx="2825496" cy="1261872"/>
+            <a:endParaRPr lang="en-US" sz="1300" dirty="0"/>
+          </a:p>
+        </p:txBody>
+      </p:sp>
+      <p:sp>
+        <p:nvSpPr>
+          <p:cNvPr id="14" name="Text 12"/>
+          <p:cNvSpPr/>
+          <p:nvPr/>
+        </p:nvSpPr>
+        <p:spPr>
+          <a:xfrm>
+            <a:off x="8074152" y="1920240"/>
+            <a:ext cx="2825496" cy="1188720"/>
           </a:xfrm>
           <a:prstGeom prst="rect">
             <a:avLst/>
@@ -12553,7 +13654,7 @@
               <a:buNone/>
             </a:pPr>
             <a:r>
-              <a:rPr lang="en-US" sz="1250" dirty="0">
+              <a:rPr lang="en-US" sz="1550" dirty="0">
                 <a:solidFill>
                   <a:srgbClr val="17364A"/>
                 </a:solidFill>
@@ -12563,13 +13664,13 @@
               </a:rPr>
               <a:t>Define NLP in plain language and distinguish common NLP tasks.</a:t>
             </a:r>
-            <a:endParaRPr lang="en-US" sz="1250" dirty="0"/>
-          </a:p>
-        </p:txBody>
-      </p:sp>
-      <p:sp>
-        <p:nvSpPr>
-          <p:cNvPr id="14" name="Shape 12"/>
+            <a:endParaRPr lang="en-US" sz="1550" dirty="0"/>
+          </a:p>
+        </p:txBody>
+      </p:sp>
+      <p:sp>
+        <p:nvSpPr>
+          <p:cNvPr id="15" name="Shape 13"/>
           <p:cNvSpPr/>
           <p:nvPr/>
         </p:nvSpPr>
@@ -12596,14 +13697,14 @@
       </p:sp>
       <p:sp>
         <p:nvSpPr>
-          <p:cNvPr id="15" name="Text 13"/>
+          <p:cNvPr id="16" name="Text 14"/>
           <p:cNvSpPr/>
           <p:nvPr/>
         </p:nvSpPr>
         <p:spPr>
           <a:xfrm>
             <a:off x="8074152" y="3666744"/>
-            <a:ext cx="2825496" cy="201168"/>
+            <a:ext cx="2825496" cy="256032"/>
           </a:xfrm>
           <a:prstGeom prst="rect">
             <a:avLst/>
@@ -12619,7 +13720,7 @@
               <a:buNone/>
             </a:pPr>
             <a:r>
-              <a:rPr lang="en-US" sz="950" b="1" dirty="0">
+              <a:rPr lang="en-US" sz="1300" b="1" dirty="0">
                 <a:solidFill>
                   <a:srgbClr val="0068B7"/>
                 </a:solidFill>
@@ -12629,20 +13730,20 @@
               </a:rPr>
               <a:t>Use this for</a:t>
             </a:r>
-            <a:endParaRPr lang="en-US" sz="950" dirty="0"/>
-          </a:p>
-        </p:txBody>
-      </p:sp>
-      <p:sp>
-        <p:nvSpPr>
-          <p:cNvPr id="16" name="Text 14"/>
-          <p:cNvSpPr/>
-          <p:nvPr/>
-        </p:nvSpPr>
-        <p:spPr>
-          <a:xfrm>
-            <a:off x="8074152" y="3959352"/>
-            <a:ext cx="2825496" cy="1170432"/>
+            <a:endParaRPr lang="en-US" sz="1300" dirty="0"/>
+          </a:p>
+        </p:txBody>
+      </p:sp>
+      <p:sp>
+        <p:nvSpPr>
+          <p:cNvPr id="17" name="Text 15"/>
+          <p:cNvSpPr/>
+          <p:nvPr/>
+        </p:nvSpPr>
+        <p:spPr>
+          <a:xfrm>
+            <a:off x="8074152" y="4023360"/>
+            <a:ext cx="2825496" cy="1097280"/>
           </a:xfrm>
           <a:prstGeom prst="rect">
             <a:avLst/>
@@ -12660,7 +13761,7 @@
               <a:buNone/>
             </a:pPr>
             <a:r>
-              <a:rPr lang="en-US" sz="1250" dirty="0">
+              <a:rPr lang="en-US" sz="1550" dirty="0">
                 <a:solidFill>
                   <a:srgbClr val="17364A"/>
                 </a:solidFill>
@@ -12670,7 +13771,7 @@
               </a:rPr>
               <a:t>Connect the concept to public health decisions, safeguards, documentation, or implementation work.</a:t>
             </a:r>
-            <a:endParaRPr lang="en-US" sz="1250" dirty="0"/>
+            <a:endParaRPr lang="en-US" sz="1550" dirty="0"/>
           </a:p>
         </p:txBody>
       </p:sp>
@@ -12867,7 +13968,7 @@
                 <a:ea typeface="Aptos" pitchFamily="34" charset="-122"/>
                 <a:cs typeface="Aptos" pitchFamily="34" charset="-120"/>
               </a:rPr>
-              <a:t>© Paula Soper</a:t>
+              <a:t>Â© Paula Soper</a:t>
             </a:r>
             <a:endParaRPr lang="en-US" sz="800" dirty="0"/>
           </a:p>
@@ -12875,7 +13976,46 @@
       </p:sp>
       <p:sp>
         <p:nvSpPr>
-          <p:cNvPr id="7" name="Shape 5"/>
+          <p:cNvPr id="7" name="Text 5"/>
+          <p:cNvSpPr/>
+          <p:nvPr/>
+        </p:nvSpPr>
+        <p:spPr>
+          <a:xfrm>
+            <a:off x="11137392" y="6510528"/>
+            <a:ext cx="411480" cy="201168"/>
+          </a:xfrm>
+          <a:prstGeom prst="rect">
+            <a:avLst/>
+          </a:prstGeom>
+          <a:noFill/>
+          <a:ln/>
+        </p:spPr>
+        <p:txBody>
+          <a:bodyPr wrap="square" lIns="0" tIns="0" rIns="0" bIns="0" rtlCol="0" anchor="ctr"/>
+          <a:lstStyle/>
+          <a:p>
+            <a:pPr algn="r" indent="0" marL="0">
+              <a:buNone/>
+            </a:pPr>
+            <a:r>
+              <a:rPr lang="en-US" sz="900" dirty="0">
+                <a:solidFill>
+                  <a:srgbClr val="5F7181"/>
+                </a:solidFill>
+                <a:latin typeface="Aptos" pitchFamily="34" charset="0"/>
+                <a:ea typeface="Aptos" pitchFamily="34" charset="-122"/>
+                <a:cs typeface="Aptos" pitchFamily="34" charset="-120"/>
+              </a:rPr>
+              <a:t>6</a:t>
+            </a:r>
+            <a:endParaRPr lang="en-US" sz="900" dirty="0"/>
+          </a:p>
+        </p:txBody>
+      </p:sp>
+      <p:sp>
+        <p:nvSpPr>
+          <p:cNvPr id="8" name="Shape 6"/>
           <p:cNvSpPr/>
           <p:nvPr/>
         </p:nvSpPr>
@@ -12900,7 +14040,7 @@
       </p:sp>
       <p:sp>
         <p:nvSpPr>
-          <p:cNvPr id="8" name="Text 6"/>
+          <p:cNvPr id="9" name="Text 7"/>
           <p:cNvSpPr/>
           <p:nvPr/>
         </p:nvSpPr>
@@ -12939,14 +14079,14 @@
       </p:sp>
       <p:sp>
         <p:nvSpPr>
-          <p:cNvPr id="9" name="Text 7"/>
+          <p:cNvPr id="10" name="Text 8"/>
           <p:cNvSpPr/>
           <p:nvPr/>
         </p:nvSpPr>
         <p:spPr>
           <a:xfrm>
             <a:off x="640080" y="621792"/>
-            <a:ext cx="10881360" cy="566928"/>
+            <a:ext cx="10881360" cy="713232"/>
           </a:xfrm>
           <a:prstGeom prst="rect">
             <a:avLst/>
@@ -12964,7 +14104,7 @@
               <a:buNone/>
             </a:pPr>
             <a:r>
-              <a:rPr lang="en-US" sz="2700" b="1" dirty="0">
+              <a:rPr lang="en-US" sz="3400" b="1" dirty="0">
                 <a:solidFill>
                   <a:srgbClr val="003A63"/>
                 </a:solidFill>
@@ -12974,20 +14114,20 @@
               </a:rPr>
               <a:t>Module Overview</a:t>
             </a:r>
-            <a:endParaRPr lang="en-US" sz="2700" dirty="0"/>
-          </a:p>
-        </p:txBody>
-      </p:sp>
-      <p:sp>
-        <p:nvSpPr>
-          <p:cNvPr id="10" name="Text 8"/>
-          <p:cNvSpPr/>
-          <p:nvPr/>
-        </p:nvSpPr>
-        <p:spPr>
-          <a:xfrm>
-            <a:off x="868680" y="1417320"/>
-            <a:ext cx="6675120" cy="4434840"/>
+            <a:endParaRPr lang="en-US" sz="3400" dirty="0"/>
+          </a:p>
+        </p:txBody>
+      </p:sp>
+      <p:sp>
+        <p:nvSpPr>
+          <p:cNvPr id="11" name="Text 9"/>
+          <p:cNvSpPr/>
+          <p:nvPr/>
+        </p:nvSpPr>
+        <p:spPr>
+          <a:xfrm>
+            <a:off x="868680" y="1508760"/>
+            <a:ext cx="6537960" cy="4160520"/>
           </a:xfrm>
           <a:prstGeom prst="rect">
             <a:avLst/>
@@ -13002,7 +14142,7 @@
           <a:lstStyle/>
           <a:p>
             <a:r>
-              <a:rPr lang="en-US" sz="1700" dirty="0">
+              <a:rPr lang="en-US" sz="2100" dirty="0">
                 <a:solidFill>
                   <a:srgbClr val="17364A"/>
                 </a:solidFill>
@@ -13012,11 +14152,11 @@
               </a:rPr>
               <a:t>Natural language processing is a branch of AI that works with human language.</a:t>
             </a:r>
-            <a:endParaRPr lang="en-US" sz="1700" dirty="0"/>
-          </a:p>
-          <a:p>
-            <a:r>
-              <a:rPr lang="en-US" sz="1700" dirty="0">
+            <a:endParaRPr lang="en-US" sz="2100" dirty="0"/>
+          </a:p>
+          <a:p>
+            <a:r>
+              <a:rPr lang="en-US" sz="2100" dirty="0">
                 <a:solidFill>
                   <a:srgbClr val="17364A"/>
                 </a:solidFill>
@@ -13024,13 +14164,13 @@
                 <a:ea typeface="Aptos" pitchFamily="34" charset="-122"/>
                 <a:cs typeface="Aptos" pitchFamily="34" charset="-120"/>
               </a:rPr>
-              <a:t>Public health agencies often hold important information in free-text sources, including clinical notes, case narratives,.</a:t>
-            </a:r>
-            <a:endParaRPr lang="en-US" sz="1700" dirty="0"/>
-          </a:p>
-          <a:p>
-            <a:r>
-              <a:rPr lang="en-US" sz="1700" dirty="0">
+              <a:t>Public health agencies often hold important information in free-text sources, including clinical notes,.</a:t>
+            </a:r>
+            <a:endParaRPr lang="en-US" sz="2100" dirty="0"/>
+          </a:p>
+          <a:p>
+            <a:r>
+              <a:rPr lang="en-US" sz="2100" dirty="0">
                 <a:solidFill>
                   <a:srgbClr val="17364A"/>
                 </a:solidFill>
@@ -13040,13 +14180,13 @@
               </a:rPr>
               <a:t>This module teaches learners how NLP can support public health work and how to evaluate its risks.</a:t>
             </a:r>
-            <a:endParaRPr lang="en-US" sz="1700" dirty="0"/>
-          </a:p>
-        </p:txBody>
-      </p:sp>
-      <p:sp>
-        <p:nvSpPr>
-          <p:cNvPr id="11" name="Shape 9"/>
+            <a:endParaRPr lang="en-US" sz="2100" dirty="0"/>
+          </a:p>
+        </p:txBody>
+      </p:sp>
+      <p:sp>
+        <p:nvSpPr>
+          <p:cNvPr id="12" name="Shape 10"/>
           <p:cNvSpPr/>
           <p:nvPr/>
         </p:nvSpPr>
@@ -13073,14 +14213,14 @@
       </p:sp>
       <p:sp>
         <p:nvSpPr>
-          <p:cNvPr id="12" name="Text 10"/>
+          <p:cNvPr id="13" name="Text 11"/>
           <p:cNvSpPr/>
           <p:nvPr/>
         </p:nvSpPr>
         <p:spPr>
           <a:xfrm>
             <a:off x="8074152" y="1563624"/>
-            <a:ext cx="2825496" cy="201168"/>
+            <a:ext cx="2825496" cy="256032"/>
           </a:xfrm>
           <a:prstGeom prst="rect">
             <a:avLst/>
@@ -13096,7 +14236,7 @@
               <a:buNone/>
             </a:pPr>
             <a:r>
-              <a:rPr lang="en-US" sz="950" b="1" dirty="0">
+              <a:rPr lang="en-US" sz="1300" b="1" dirty="0">
                 <a:solidFill>
                   <a:srgbClr val="0068B7"/>
                 </a:solidFill>
@@ -13106,20 +14246,20 @@
               </a:rPr>
               <a:t>Key idea</a:t>
             </a:r>
-            <a:endParaRPr lang="en-US" sz="950" dirty="0"/>
-          </a:p>
-        </p:txBody>
-      </p:sp>
-      <p:sp>
-        <p:nvSpPr>
-          <p:cNvPr id="13" name="Text 11"/>
-          <p:cNvSpPr/>
-          <p:nvPr/>
-        </p:nvSpPr>
-        <p:spPr>
-          <a:xfrm>
-            <a:off x="8074152" y="1856232"/>
-            <a:ext cx="2825496" cy="1261872"/>
+            <a:endParaRPr lang="en-US" sz="1300" dirty="0"/>
+          </a:p>
+        </p:txBody>
+      </p:sp>
+      <p:sp>
+        <p:nvSpPr>
+          <p:cNvPr id="14" name="Text 12"/>
+          <p:cNvSpPr/>
+          <p:nvPr/>
+        </p:nvSpPr>
+        <p:spPr>
+          <a:xfrm>
+            <a:off x="8074152" y="1920240"/>
+            <a:ext cx="2825496" cy="1188720"/>
           </a:xfrm>
           <a:prstGeom prst="rect">
             <a:avLst/>
@@ -13137,7 +14277,7 @@
               <a:buNone/>
             </a:pPr>
             <a:r>
-              <a:rPr lang="en-US" sz="1250" dirty="0">
+              <a:rPr lang="en-US" sz="1550" dirty="0">
                 <a:solidFill>
                   <a:srgbClr val="17364A"/>
                 </a:solidFill>
@@ -13147,13 +14287,13 @@
               </a:rPr>
               <a:t>Natural language processing is a branch of AI that works with human language.</a:t>
             </a:r>
-            <a:endParaRPr lang="en-US" sz="1250" dirty="0"/>
-          </a:p>
-        </p:txBody>
-      </p:sp>
-      <p:sp>
-        <p:nvSpPr>
-          <p:cNvPr id="14" name="Shape 12"/>
+            <a:endParaRPr lang="en-US" sz="1550" dirty="0"/>
+          </a:p>
+        </p:txBody>
+      </p:sp>
+      <p:sp>
+        <p:nvSpPr>
+          <p:cNvPr id="15" name="Shape 13"/>
           <p:cNvSpPr/>
           <p:nvPr/>
         </p:nvSpPr>
@@ -13180,14 +14320,14 @@
       </p:sp>
       <p:sp>
         <p:nvSpPr>
-          <p:cNvPr id="15" name="Text 13"/>
+          <p:cNvPr id="16" name="Text 14"/>
           <p:cNvSpPr/>
           <p:nvPr/>
         </p:nvSpPr>
         <p:spPr>
           <a:xfrm>
             <a:off x="8074152" y="3666744"/>
-            <a:ext cx="2825496" cy="201168"/>
+            <a:ext cx="2825496" cy="256032"/>
           </a:xfrm>
           <a:prstGeom prst="rect">
             <a:avLst/>
@@ -13203,7 +14343,7 @@
               <a:buNone/>
             </a:pPr>
             <a:r>
-              <a:rPr lang="en-US" sz="950" b="1" dirty="0">
+              <a:rPr lang="en-US" sz="1300" b="1" dirty="0">
                 <a:solidFill>
                   <a:srgbClr val="0068B7"/>
                 </a:solidFill>
@@ -13213,20 +14353,20 @@
               </a:rPr>
               <a:t>Use this for</a:t>
             </a:r>
-            <a:endParaRPr lang="en-US" sz="950" dirty="0"/>
-          </a:p>
-        </p:txBody>
-      </p:sp>
-      <p:sp>
-        <p:nvSpPr>
-          <p:cNvPr id="16" name="Text 14"/>
-          <p:cNvSpPr/>
-          <p:nvPr/>
-        </p:nvSpPr>
-        <p:spPr>
-          <a:xfrm>
-            <a:off x="8074152" y="3959352"/>
-            <a:ext cx="2825496" cy="1170432"/>
+            <a:endParaRPr lang="en-US" sz="1300" dirty="0"/>
+          </a:p>
+        </p:txBody>
+      </p:sp>
+      <p:sp>
+        <p:nvSpPr>
+          <p:cNvPr id="17" name="Text 15"/>
+          <p:cNvSpPr/>
+          <p:nvPr/>
+        </p:nvSpPr>
+        <p:spPr>
+          <a:xfrm>
+            <a:off x="8074152" y="4023360"/>
+            <a:ext cx="2825496" cy="1097280"/>
           </a:xfrm>
           <a:prstGeom prst="rect">
             <a:avLst/>
@@ -13244,7 +14384,7 @@
               <a:buNone/>
             </a:pPr>
             <a:r>
-              <a:rPr lang="en-US" sz="1250" dirty="0">
+              <a:rPr lang="en-US" sz="1550" dirty="0">
                 <a:solidFill>
                   <a:srgbClr val="17364A"/>
                 </a:solidFill>
@@ -13254,7 +14394,7 @@
               </a:rPr>
               <a:t>Connect the concept to public health decisions, safeguards, documentation, or implementation work.</a:t>
             </a:r>
-            <a:endParaRPr lang="en-US" sz="1250" dirty="0"/>
+            <a:endParaRPr lang="en-US" sz="1550" dirty="0"/>
           </a:p>
         </p:txBody>
       </p:sp>
@@ -13451,7 +14591,7 @@
                 <a:ea typeface="Aptos" pitchFamily="34" charset="-122"/>
                 <a:cs typeface="Aptos" pitchFamily="34" charset="-120"/>
               </a:rPr>
-              <a:t>© Paula Soper</a:t>
+              <a:t>Â© Paula Soper</a:t>
             </a:r>
             <a:endParaRPr lang="en-US" sz="800" dirty="0"/>
           </a:p>
@@ -13459,7 +14599,46 @@
       </p:sp>
       <p:sp>
         <p:nvSpPr>
-          <p:cNvPr id="7" name="Shape 5"/>
+          <p:cNvPr id="7" name="Text 5"/>
+          <p:cNvSpPr/>
+          <p:nvPr/>
+        </p:nvSpPr>
+        <p:spPr>
+          <a:xfrm>
+            <a:off x="11137392" y="6510528"/>
+            <a:ext cx="411480" cy="201168"/>
+          </a:xfrm>
+          <a:prstGeom prst="rect">
+            <a:avLst/>
+          </a:prstGeom>
+          <a:noFill/>
+          <a:ln/>
+        </p:spPr>
+        <p:txBody>
+          <a:bodyPr wrap="square" lIns="0" tIns="0" rIns="0" bIns="0" rtlCol="0" anchor="ctr"/>
+          <a:lstStyle/>
+          <a:p>
+            <a:pPr algn="r" indent="0" marL="0">
+              <a:buNone/>
+            </a:pPr>
+            <a:r>
+              <a:rPr lang="en-US" sz="900" dirty="0">
+                <a:solidFill>
+                  <a:srgbClr val="5F7181"/>
+                </a:solidFill>
+                <a:latin typeface="Aptos" pitchFamily="34" charset="0"/>
+                <a:ea typeface="Aptos" pitchFamily="34" charset="-122"/>
+                <a:cs typeface="Aptos" pitchFamily="34" charset="-120"/>
+              </a:rPr>
+              <a:t>7</a:t>
+            </a:r>
+            <a:endParaRPr lang="en-US" sz="900" dirty="0"/>
+          </a:p>
+        </p:txBody>
+      </p:sp>
+      <p:sp>
+        <p:nvSpPr>
+          <p:cNvPr id="8" name="Shape 6"/>
           <p:cNvSpPr/>
           <p:nvPr/>
         </p:nvSpPr>
@@ -13484,7 +14663,7 @@
       </p:sp>
       <p:sp>
         <p:nvSpPr>
-          <p:cNvPr id="8" name="Text 6"/>
+          <p:cNvPr id="9" name="Text 7"/>
           <p:cNvSpPr/>
           <p:nvPr/>
         </p:nvSpPr>
@@ -13523,14 +14702,14 @@
       </p:sp>
       <p:sp>
         <p:nvSpPr>
-          <p:cNvPr id="9" name="Text 7"/>
+          <p:cNvPr id="10" name="Text 8"/>
           <p:cNvSpPr/>
           <p:nvPr/>
         </p:nvSpPr>
         <p:spPr>
           <a:xfrm>
             <a:off x="640080" y="621792"/>
-            <a:ext cx="10881360" cy="566928"/>
+            <a:ext cx="10881360" cy="713232"/>
           </a:xfrm>
           <a:prstGeom prst="rect">
             <a:avLst/>
@@ -13548,7 +14727,7 @@
               <a:buNone/>
             </a:pPr>
             <a:r>
-              <a:rPr lang="en-US" sz="2700" b="1" dirty="0">
+              <a:rPr lang="en-US" sz="3400" b="1" dirty="0">
                 <a:solidFill>
                   <a:srgbClr val="003A63"/>
                 </a:solidFill>
@@ -13558,20 +14737,20 @@
               </a:rPr>
               <a:t>Why This Topic Matters for Public Health AI</a:t>
             </a:r>
-            <a:endParaRPr lang="en-US" sz="2700" dirty="0"/>
-          </a:p>
-        </p:txBody>
-      </p:sp>
-      <p:sp>
-        <p:nvSpPr>
-          <p:cNvPr id="10" name="Text 8"/>
-          <p:cNvSpPr/>
-          <p:nvPr/>
-        </p:nvSpPr>
-        <p:spPr>
-          <a:xfrm>
-            <a:off x="868680" y="1417320"/>
-            <a:ext cx="6675120" cy="4434840"/>
+            <a:endParaRPr lang="en-US" sz="3400" dirty="0"/>
+          </a:p>
+        </p:txBody>
+      </p:sp>
+      <p:sp>
+        <p:nvSpPr>
+          <p:cNvPr id="11" name="Text 9"/>
+          <p:cNvSpPr/>
+          <p:nvPr/>
+        </p:nvSpPr>
+        <p:spPr>
+          <a:xfrm>
+            <a:off x="868680" y="1508760"/>
+            <a:ext cx="6537960" cy="4160520"/>
           </a:xfrm>
           <a:prstGeom prst="rect">
             <a:avLst/>
@@ -13586,7 +14765,7 @@
           <a:lstStyle/>
           <a:p>
             <a:r>
-              <a:rPr lang="en-US" sz="1700" dirty="0">
+              <a:rPr lang="en-US" sz="2100" dirty="0">
                 <a:solidFill>
                   <a:srgbClr val="17364A"/>
                 </a:solidFill>
@@ -13594,13 +14773,13 @@
                 <a:ea typeface="Aptos" pitchFamily="34" charset="-122"/>
                 <a:cs typeface="Aptos" pitchFamily="34" charset="-120"/>
               </a:rPr>
-              <a:t>NLP can reduce burden by helping staff find, organize, classify, extract, translate, or summarize information from large.</a:t>
-            </a:r>
-            <a:endParaRPr lang="en-US" sz="1700" dirty="0"/>
-          </a:p>
-          <a:p>
-            <a:r>
-              <a:rPr lang="en-US" sz="1700" dirty="0">
+              <a:t>NLP can reduce burden by helping staff find, organize, classify, extract, translate, or summarize.</a:t>
+            </a:r>
+            <a:endParaRPr lang="en-US" sz="2100" dirty="0"/>
+          </a:p>
+          <a:p>
+            <a:r>
+              <a:rPr lang="en-US" sz="2100" dirty="0">
                 <a:solidFill>
                   <a:srgbClr val="17364A"/>
                 </a:solidFill>
@@ -13608,13 +14787,13 @@
                 <a:ea typeface="Aptos" pitchFamily="34" charset="-122"/>
                 <a:cs typeface="Aptos" pitchFamily="34" charset="-120"/>
               </a:rPr>
-              <a:t>It can support case investigation, environmental health complaint triage, syndromic surveillance, public inquiry response,.</a:t>
-            </a:r>
-            <a:endParaRPr lang="en-US" sz="1700" dirty="0"/>
-          </a:p>
-          <a:p>
-            <a:r>
-              <a:rPr lang="en-US" sz="1700" dirty="0">
+              <a:t>It can support case investigation, environmental health complaint triage, syndromic surveillance,.</a:t>
+            </a:r>
+            <a:endParaRPr lang="en-US" sz="2100" dirty="0"/>
+          </a:p>
+          <a:p>
+            <a:r>
+              <a:rPr lang="en-US" sz="2100" dirty="0">
                 <a:solidFill>
                   <a:srgbClr val="17364A"/>
                 </a:solidFill>
@@ -13624,27 +14803,13 @@
               </a:rPr>
               <a:t>However, text is often ambiguous, incomplete, sensitive, and context-dependent.</a:t>
             </a:r>
-            <a:endParaRPr lang="en-US" sz="1700" dirty="0"/>
-          </a:p>
-          <a:p>
-            <a:r>
-              <a:rPr lang="en-US" sz="1700" dirty="0">
-                <a:solidFill>
-                  <a:srgbClr val="17364A"/>
-                </a:solidFill>
-                <a:latin typeface="Aptos" pitchFamily="34" charset="0"/>
-                <a:ea typeface="Aptos" pitchFamily="34" charset="-122"/>
-                <a:cs typeface="Aptos" pitchFamily="34" charset="-120"/>
-              </a:rPr>
-              <a:t>NLP outputs should not be treated as facts without review.</a:t>
-            </a:r>
-            <a:endParaRPr lang="en-US" sz="1700" dirty="0"/>
-          </a:p>
-        </p:txBody>
-      </p:sp>
-      <p:sp>
-        <p:nvSpPr>
-          <p:cNvPr id="11" name="Shape 9"/>
+            <a:endParaRPr lang="en-US" sz="2100" dirty="0"/>
+          </a:p>
+        </p:txBody>
+      </p:sp>
+      <p:sp>
+        <p:nvSpPr>
+          <p:cNvPr id="12" name="Shape 10"/>
           <p:cNvSpPr/>
           <p:nvPr/>
         </p:nvSpPr>
@@ -13671,14 +14836,14 @@
       </p:sp>
       <p:sp>
         <p:nvSpPr>
-          <p:cNvPr id="12" name="Text 10"/>
+          <p:cNvPr id="13" name="Text 11"/>
           <p:cNvSpPr/>
           <p:nvPr/>
         </p:nvSpPr>
         <p:spPr>
           <a:xfrm>
             <a:off x="8074152" y="1563624"/>
-            <a:ext cx="2825496" cy="201168"/>
+            <a:ext cx="2825496" cy="256032"/>
           </a:xfrm>
           <a:prstGeom prst="rect">
             <a:avLst/>
@@ -13694,7 +14859,7 @@
               <a:buNone/>
             </a:pPr>
             <a:r>
-              <a:rPr lang="en-US" sz="950" b="1" dirty="0">
+              <a:rPr lang="en-US" sz="1300" b="1" dirty="0">
                 <a:solidFill>
                   <a:srgbClr val="0068B7"/>
                 </a:solidFill>
@@ -13704,20 +14869,20 @@
               </a:rPr>
               <a:t>Key idea</a:t>
             </a:r>
-            <a:endParaRPr lang="en-US" sz="950" dirty="0"/>
-          </a:p>
-        </p:txBody>
-      </p:sp>
-      <p:sp>
-        <p:nvSpPr>
-          <p:cNvPr id="13" name="Text 11"/>
-          <p:cNvSpPr/>
-          <p:nvPr/>
-        </p:nvSpPr>
-        <p:spPr>
-          <a:xfrm>
-            <a:off x="8074152" y="1856232"/>
-            <a:ext cx="2825496" cy="1261872"/>
+            <a:endParaRPr lang="en-US" sz="1300" dirty="0"/>
+          </a:p>
+        </p:txBody>
+      </p:sp>
+      <p:sp>
+        <p:nvSpPr>
+          <p:cNvPr id="14" name="Text 12"/>
+          <p:cNvSpPr/>
+          <p:nvPr/>
+        </p:nvSpPr>
+        <p:spPr>
+          <a:xfrm>
+            <a:off x="8074152" y="1920240"/>
+            <a:ext cx="2825496" cy="1188720"/>
           </a:xfrm>
           <a:prstGeom prst="rect">
             <a:avLst/>
@@ -13735,7 +14900,7 @@
               <a:buNone/>
             </a:pPr>
             <a:r>
-              <a:rPr lang="en-US" sz="1250" dirty="0">
+              <a:rPr lang="en-US" sz="1550" dirty="0">
                 <a:solidFill>
                   <a:srgbClr val="17364A"/>
                 </a:solidFill>
@@ -13743,15 +14908,15 @@
                 <a:ea typeface="Aptos" pitchFamily="34" charset="-122"/>
                 <a:cs typeface="Aptos" pitchFamily="34" charset="-120"/>
               </a:rPr>
-              <a:t>NLP can reduce burden by helping staff find, organize, classify, extract, translate, or summarize information from large.</a:t>
-            </a:r>
-            <a:endParaRPr lang="en-US" sz="1250" dirty="0"/>
-          </a:p>
-        </p:txBody>
-      </p:sp>
-      <p:sp>
-        <p:nvSpPr>
-          <p:cNvPr id="14" name="Shape 12"/>
+              <a:t>NLP can reduce burden by helping staff find, organize, classify, extract, translate, or summarize.</a:t>
+            </a:r>
+            <a:endParaRPr lang="en-US" sz="1550" dirty="0"/>
+          </a:p>
+        </p:txBody>
+      </p:sp>
+      <p:sp>
+        <p:nvSpPr>
+          <p:cNvPr id="15" name="Shape 13"/>
           <p:cNvSpPr/>
           <p:nvPr/>
         </p:nvSpPr>
@@ -13778,14 +14943,14 @@
       </p:sp>
       <p:sp>
         <p:nvSpPr>
-          <p:cNvPr id="15" name="Text 13"/>
+          <p:cNvPr id="16" name="Text 14"/>
           <p:cNvSpPr/>
           <p:nvPr/>
         </p:nvSpPr>
         <p:spPr>
           <a:xfrm>
             <a:off x="8074152" y="3666744"/>
-            <a:ext cx="2825496" cy="201168"/>
+            <a:ext cx="2825496" cy="256032"/>
           </a:xfrm>
           <a:prstGeom prst="rect">
             <a:avLst/>
@@ -13801,7 +14966,7 @@
               <a:buNone/>
             </a:pPr>
             <a:r>
-              <a:rPr lang="en-US" sz="950" b="1" dirty="0">
+              <a:rPr lang="en-US" sz="1300" b="1" dirty="0">
                 <a:solidFill>
                   <a:srgbClr val="0068B7"/>
                 </a:solidFill>
@@ -13811,20 +14976,20 @@
               </a:rPr>
               <a:t>Use this for</a:t>
             </a:r>
-            <a:endParaRPr lang="en-US" sz="950" dirty="0"/>
-          </a:p>
-        </p:txBody>
-      </p:sp>
-      <p:sp>
-        <p:nvSpPr>
-          <p:cNvPr id="16" name="Text 14"/>
-          <p:cNvSpPr/>
-          <p:nvPr/>
-        </p:nvSpPr>
-        <p:spPr>
-          <a:xfrm>
-            <a:off x="8074152" y="3959352"/>
-            <a:ext cx="2825496" cy="1170432"/>
+            <a:endParaRPr lang="en-US" sz="1300" dirty="0"/>
+          </a:p>
+        </p:txBody>
+      </p:sp>
+      <p:sp>
+        <p:nvSpPr>
+          <p:cNvPr id="17" name="Text 15"/>
+          <p:cNvSpPr/>
+          <p:nvPr/>
+        </p:nvSpPr>
+        <p:spPr>
+          <a:xfrm>
+            <a:off x="8074152" y="4023360"/>
+            <a:ext cx="2825496" cy="1097280"/>
           </a:xfrm>
           <a:prstGeom prst="rect">
             <a:avLst/>
@@ -13842,7 +15007,7 @@
               <a:buNone/>
             </a:pPr>
             <a:r>
-              <a:rPr lang="en-US" sz="1250" dirty="0">
+              <a:rPr lang="en-US" sz="1550" dirty="0">
                 <a:solidFill>
                   <a:srgbClr val="17364A"/>
                 </a:solidFill>
@@ -13852,7 +15017,7 @@
               </a:rPr>
               <a:t>Connect the concept to public health decisions, safeguards, documentation, or implementation work.</a:t>
             </a:r>
-            <a:endParaRPr lang="en-US" sz="1250" dirty="0"/>
+            <a:endParaRPr lang="en-US" sz="1550" dirty="0"/>
           </a:p>
         </p:txBody>
       </p:sp>
@@ -14049,7 +15214,7 @@
                 <a:ea typeface="Aptos" pitchFamily="34" charset="-122"/>
                 <a:cs typeface="Aptos" pitchFamily="34" charset="-120"/>
               </a:rPr>
-              <a:t>© Paula Soper</a:t>
+              <a:t>Â© Paula Soper</a:t>
             </a:r>
             <a:endParaRPr lang="en-US" sz="800" dirty="0"/>
           </a:p>
@@ -14057,7 +15222,46 @@
       </p:sp>
       <p:sp>
         <p:nvSpPr>
-          <p:cNvPr id="7" name="Shape 5"/>
+          <p:cNvPr id="7" name="Text 5"/>
+          <p:cNvSpPr/>
+          <p:nvPr/>
+        </p:nvSpPr>
+        <p:spPr>
+          <a:xfrm>
+            <a:off x="11137392" y="6510528"/>
+            <a:ext cx="411480" cy="201168"/>
+          </a:xfrm>
+          <a:prstGeom prst="rect">
+            <a:avLst/>
+          </a:prstGeom>
+          <a:noFill/>
+          <a:ln/>
+        </p:spPr>
+        <p:txBody>
+          <a:bodyPr wrap="square" lIns="0" tIns="0" rIns="0" bIns="0" rtlCol="0" anchor="ctr"/>
+          <a:lstStyle/>
+          <a:p>
+            <a:pPr algn="r" indent="0" marL="0">
+              <a:buNone/>
+            </a:pPr>
+            <a:r>
+              <a:rPr lang="en-US" sz="900" dirty="0">
+                <a:solidFill>
+                  <a:srgbClr val="5F7181"/>
+                </a:solidFill>
+                <a:latin typeface="Aptos" pitchFamily="34" charset="0"/>
+                <a:ea typeface="Aptos" pitchFamily="34" charset="-122"/>
+                <a:cs typeface="Aptos" pitchFamily="34" charset="-120"/>
+              </a:rPr>
+              <a:t>8</a:t>
+            </a:r>
+            <a:endParaRPr lang="en-US" sz="900" dirty="0"/>
+          </a:p>
+        </p:txBody>
+      </p:sp>
+      <p:sp>
+        <p:nvSpPr>
+          <p:cNvPr id="8" name="Shape 6"/>
           <p:cNvSpPr/>
           <p:nvPr/>
         </p:nvSpPr>
@@ -14082,7 +15286,7 @@
       </p:sp>
       <p:sp>
         <p:nvSpPr>
-          <p:cNvPr id="8" name="Text 6"/>
+          <p:cNvPr id="9" name="Text 7"/>
           <p:cNvSpPr/>
           <p:nvPr/>
         </p:nvSpPr>
@@ -14121,14 +15325,14 @@
       </p:sp>
       <p:sp>
         <p:nvSpPr>
-          <p:cNvPr id="9" name="Text 7"/>
+          <p:cNvPr id="10" name="Text 8"/>
           <p:cNvSpPr/>
           <p:nvPr/>
         </p:nvSpPr>
         <p:spPr>
           <a:xfrm>
             <a:off x="640080" y="621792"/>
-            <a:ext cx="10881360" cy="566928"/>
+            <a:ext cx="10881360" cy="713232"/>
           </a:xfrm>
           <a:prstGeom prst="rect">
             <a:avLst/>
@@ -14146,7 +15350,7 @@
               <a:buNone/>
             </a:pPr>
             <a:r>
-              <a:rPr lang="en-US" sz="2700" b="1" dirty="0">
+              <a:rPr lang="en-US" sz="3400" b="1" dirty="0">
                 <a:solidFill>
                   <a:srgbClr val="003A63"/>
                 </a:solidFill>
@@ -14156,20 +15360,20 @@
               </a:rPr>
               <a:t>Core Concepts</a:t>
             </a:r>
-            <a:endParaRPr lang="en-US" sz="2700" dirty="0"/>
-          </a:p>
-        </p:txBody>
-      </p:sp>
-      <p:sp>
-        <p:nvSpPr>
-          <p:cNvPr id="10" name="Text 8"/>
-          <p:cNvSpPr/>
-          <p:nvPr/>
-        </p:nvSpPr>
-        <p:spPr>
-          <a:xfrm>
-            <a:off x="868680" y="1417320"/>
-            <a:ext cx="6675120" cy="4434840"/>
+            <a:endParaRPr lang="en-US" sz="3400" dirty="0"/>
+          </a:p>
+        </p:txBody>
+      </p:sp>
+      <p:sp>
+        <p:nvSpPr>
+          <p:cNvPr id="11" name="Text 9"/>
+          <p:cNvSpPr/>
+          <p:nvPr/>
+        </p:nvSpPr>
+        <p:spPr>
+          <a:xfrm>
+            <a:off x="868680" y="1508760"/>
+            <a:ext cx="6537960" cy="4160520"/>
           </a:xfrm>
           <a:prstGeom prst="rect">
             <a:avLst/>
@@ -14184,7 +15388,7 @@
           <a:lstStyle/>
           <a:p>
             <a:r>
-              <a:rPr lang="en-US" sz="1700" dirty="0">
+              <a:rPr lang="en-US" sz="2100" dirty="0">
                 <a:solidFill>
                   <a:srgbClr val="17364A"/>
                 </a:solidFill>
@@ -14194,11 +15398,11 @@
               </a:rPr>
               <a:t>Natural language processing.</a:t>
             </a:r>
-            <a:endParaRPr lang="en-US" sz="1700" dirty="0"/>
-          </a:p>
-          <a:p>
-            <a:r>
-              <a:rPr lang="en-US" sz="1700" dirty="0">
+            <a:endParaRPr lang="en-US" sz="2100" dirty="0"/>
+          </a:p>
+          <a:p>
+            <a:r>
+              <a:rPr lang="en-US" sz="2100" dirty="0">
                 <a:solidFill>
                   <a:srgbClr val="17364A"/>
                 </a:solidFill>
@@ -14206,13 +15410,13 @@
                 <a:ea typeface="Aptos" pitchFamily="34" charset="-122"/>
                 <a:cs typeface="Aptos" pitchFamily="34" charset="-120"/>
               </a:rPr>
-              <a:t>NLP refers to AI methods that process, analyze, classify, summarize, extract, translate, or generate human language.</a:t>
-            </a:r>
-            <a:endParaRPr lang="en-US" sz="1700" dirty="0"/>
-          </a:p>
-          <a:p>
-            <a:r>
-              <a:rPr lang="en-US" sz="1700" dirty="0">
+              <a:t>NLP refers to AI methods that process, analyze, classify, summarize, extract, translate, or generate.</a:t>
+            </a:r>
+            <a:endParaRPr lang="en-US" sz="2100" dirty="0"/>
+          </a:p>
+          <a:p>
+            <a:r>
+              <a:rPr lang="en-US" sz="2100" dirty="0">
                 <a:solidFill>
                   <a:srgbClr val="17364A"/>
                 </a:solidFill>
@@ -14222,27 +15426,13 @@
               </a:rPr>
               <a:t>It can work with structured prompts, free-text notes, documents, emails, calls, complaints, or reports.</a:t>
             </a:r>
-            <a:endParaRPr lang="en-US" sz="1700" dirty="0"/>
-          </a:p>
-          <a:p>
-            <a:r>
-              <a:rPr lang="en-US" sz="1700" dirty="0">
-                <a:solidFill>
-                  <a:srgbClr val="17364A"/>
-                </a:solidFill>
-                <a:latin typeface="Aptos" pitchFamily="34" charset="0"/>
-                <a:ea typeface="Aptos" pitchFamily="34" charset="-122"/>
-                <a:cs typeface="Aptos" pitchFamily="34" charset="-120"/>
-              </a:rPr>
-              <a:t>Information extraction.</a:t>
-            </a:r>
-            <a:endParaRPr lang="en-US" sz="1700" dirty="0"/>
-          </a:p>
-        </p:txBody>
-      </p:sp>
-      <p:sp>
-        <p:nvSpPr>
-          <p:cNvPr id="11" name="Shape 9"/>
+            <a:endParaRPr lang="en-US" sz="2100" dirty="0"/>
+          </a:p>
+        </p:txBody>
+      </p:sp>
+      <p:sp>
+        <p:nvSpPr>
+          <p:cNvPr id="12" name="Shape 10"/>
           <p:cNvSpPr/>
           <p:nvPr/>
         </p:nvSpPr>
@@ -14269,14 +15459,14 @@
       </p:sp>
       <p:sp>
         <p:nvSpPr>
-          <p:cNvPr id="12" name="Text 10"/>
+          <p:cNvPr id="13" name="Text 11"/>
           <p:cNvSpPr/>
           <p:nvPr/>
         </p:nvSpPr>
         <p:spPr>
           <a:xfrm>
             <a:off x="8074152" y="1563624"/>
-            <a:ext cx="2825496" cy="201168"/>
+            <a:ext cx="2825496" cy="256032"/>
           </a:xfrm>
           <a:prstGeom prst="rect">
             <a:avLst/>
@@ -14292,7 +15482,7 @@
               <a:buNone/>
             </a:pPr>
             <a:r>
-              <a:rPr lang="en-US" sz="950" b="1" dirty="0">
+              <a:rPr lang="en-US" sz="1300" b="1" dirty="0">
                 <a:solidFill>
                   <a:srgbClr val="0068B7"/>
                 </a:solidFill>
@@ -14302,20 +15492,20 @@
               </a:rPr>
               <a:t>Key idea</a:t>
             </a:r>
-            <a:endParaRPr lang="en-US" sz="950" dirty="0"/>
-          </a:p>
-        </p:txBody>
-      </p:sp>
-      <p:sp>
-        <p:nvSpPr>
-          <p:cNvPr id="13" name="Text 11"/>
-          <p:cNvSpPr/>
-          <p:nvPr/>
-        </p:nvSpPr>
-        <p:spPr>
-          <a:xfrm>
-            <a:off x="8074152" y="1856232"/>
-            <a:ext cx="2825496" cy="1261872"/>
+            <a:endParaRPr lang="en-US" sz="1300" dirty="0"/>
+          </a:p>
+        </p:txBody>
+      </p:sp>
+      <p:sp>
+        <p:nvSpPr>
+          <p:cNvPr id="14" name="Text 12"/>
+          <p:cNvSpPr/>
+          <p:nvPr/>
+        </p:nvSpPr>
+        <p:spPr>
+          <a:xfrm>
+            <a:off x="8074152" y="1920240"/>
+            <a:ext cx="2825496" cy="1188720"/>
           </a:xfrm>
           <a:prstGeom prst="rect">
             <a:avLst/>
@@ -14333,7 +15523,7 @@
               <a:buNone/>
             </a:pPr>
             <a:r>
-              <a:rPr lang="en-US" sz="1250" dirty="0">
+              <a:rPr lang="en-US" sz="1550" dirty="0">
                 <a:solidFill>
                   <a:srgbClr val="17364A"/>
                 </a:solidFill>
@@ -14343,13 +15533,13 @@
               </a:rPr>
               <a:t>Natural language processing.</a:t>
             </a:r>
-            <a:endParaRPr lang="en-US" sz="1250" dirty="0"/>
-          </a:p>
-        </p:txBody>
-      </p:sp>
-      <p:sp>
-        <p:nvSpPr>
-          <p:cNvPr id="14" name="Shape 12"/>
+            <a:endParaRPr lang="en-US" sz="1550" dirty="0"/>
+          </a:p>
+        </p:txBody>
+      </p:sp>
+      <p:sp>
+        <p:nvSpPr>
+          <p:cNvPr id="15" name="Shape 13"/>
           <p:cNvSpPr/>
           <p:nvPr/>
         </p:nvSpPr>
@@ -14376,14 +15566,14 @@
       </p:sp>
       <p:sp>
         <p:nvSpPr>
-          <p:cNvPr id="15" name="Text 13"/>
+          <p:cNvPr id="16" name="Text 14"/>
           <p:cNvSpPr/>
           <p:nvPr/>
         </p:nvSpPr>
         <p:spPr>
           <a:xfrm>
             <a:off x="8074152" y="3666744"/>
-            <a:ext cx="2825496" cy="201168"/>
+            <a:ext cx="2825496" cy="256032"/>
           </a:xfrm>
           <a:prstGeom prst="rect">
             <a:avLst/>
@@ -14399,7 +15589,7 @@
               <a:buNone/>
             </a:pPr>
             <a:r>
-              <a:rPr lang="en-US" sz="950" b="1" dirty="0">
+              <a:rPr lang="en-US" sz="1300" b="1" dirty="0">
                 <a:solidFill>
                   <a:srgbClr val="0068B7"/>
                 </a:solidFill>
@@ -14409,20 +15599,20 @@
               </a:rPr>
               <a:t>Use this for</a:t>
             </a:r>
-            <a:endParaRPr lang="en-US" sz="950" dirty="0"/>
-          </a:p>
-        </p:txBody>
-      </p:sp>
-      <p:sp>
-        <p:nvSpPr>
-          <p:cNvPr id="16" name="Text 14"/>
-          <p:cNvSpPr/>
-          <p:nvPr/>
-        </p:nvSpPr>
-        <p:spPr>
-          <a:xfrm>
-            <a:off x="8074152" y="3959352"/>
-            <a:ext cx="2825496" cy="1170432"/>
+            <a:endParaRPr lang="en-US" sz="1300" dirty="0"/>
+          </a:p>
+        </p:txBody>
+      </p:sp>
+      <p:sp>
+        <p:nvSpPr>
+          <p:cNvPr id="17" name="Text 15"/>
+          <p:cNvSpPr/>
+          <p:nvPr/>
+        </p:nvSpPr>
+        <p:spPr>
+          <a:xfrm>
+            <a:off x="8074152" y="4023360"/>
+            <a:ext cx="2825496" cy="1097280"/>
           </a:xfrm>
           <a:prstGeom prst="rect">
             <a:avLst/>
@@ -14440,7 +15630,7 @@
               <a:buNone/>
             </a:pPr>
             <a:r>
-              <a:rPr lang="en-US" sz="1250" dirty="0">
+              <a:rPr lang="en-US" sz="1550" dirty="0">
                 <a:solidFill>
                   <a:srgbClr val="17364A"/>
                 </a:solidFill>
@@ -14450,7 +15640,7 @@
               </a:rPr>
               <a:t>Connect the concept to public health decisions, safeguards, documentation, or implementation work.</a:t>
             </a:r>
-            <a:endParaRPr lang="en-US" sz="1250" dirty="0"/>
+            <a:endParaRPr lang="en-US" sz="1550" dirty="0"/>
           </a:p>
         </p:txBody>
       </p:sp>
@@ -14647,7 +15837,7 @@
                 <a:ea typeface="Aptos" pitchFamily="34" charset="-122"/>
                 <a:cs typeface="Aptos" pitchFamily="34" charset="-120"/>
               </a:rPr>
-              <a:t>© Paula Soper</a:t>
+              <a:t>Â© Paula Soper</a:t>
             </a:r>
             <a:endParaRPr lang="en-US" sz="800" dirty="0"/>
           </a:p>
@@ -14661,8 +15851,47 @@
         </p:nvSpPr>
         <p:spPr>
           <a:xfrm>
+            <a:off x="11137392" y="6510528"/>
+            <a:ext cx="411480" cy="201168"/>
+          </a:xfrm>
+          <a:prstGeom prst="rect">
+            <a:avLst/>
+          </a:prstGeom>
+          <a:noFill/>
+          <a:ln/>
+        </p:spPr>
+        <p:txBody>
+          <a:bodyPr wrap="square" lIns="0" tIns="0" rIns="0" bIns="0" rtlCol="0" anchor="ctr"/>
+          <a:lstStyle/>
+          <a:p>
+            <a:pPr algn="r" indent="0" marL="0">
+              <a:buNone/>
+            </a:pPr>
+            <a:r>
+              <a:rPr lang="en-US" sz="900" dirty="0">
+                <a:solidFill>
+                  <a:srgbClr val="5F7181"/>
+                </a:solidFill>
+                <a:latin typeface="Aptos" pitchFamily="34" charset="0"/>
+                <a:ea typeface="Aptos" pitchFamily="34" charset="-122"/>
+                <a:cs typeface="Aptos" pitchFamily="34" charset="-120"/>
+              </a:rPr>
+              <a:t>9</a:t>
+            </a:r>
+            <a:endParaRPr lang="en-US" sz="900" dirty="0"/>
+          </a:p>
+        </p:txBody>
+      </p:sp>
+      <p:sp>
+        <p:nvSpPr>
+          <p:cNvPr id="8" name="Text 6"/>
+          <p:cNvSpPr/>
+          <p:nvPr/>
+        </p:nvSpPr>
+        <p:spPr>
+          <a:xfrm>
             <a:off x="640080" y="658368"/>
-            <a:ext cx="10881360" cy="566928"/>
+            <a:ext cx="10881360" cy="713232"/>
           </a:xfrm>
           <a:prstGeom prst="rect">
             <a:avLst/>
@@ -14680,7 +15909,7 @@
               <a:buNone/>
             </a:pPr>
             <a:r>
-              <a:rPr lang="en-US" sz="2700" b="1" dirty="0">
+              <a:rPr lang="en-US" sz="3400" b="1" dirty="0">
                 <a:solidFill>
                   <a:srgbClr val="003A63"/>
                 </a:solidFill>
@@ -14690,20 +15919,20 @@
               </a:rPr>
               <a:t>Core Concepts Continued</a:t>
             </a:r>
-            <a:endParaRPr lang="en-US" sz="2700" dirty="0"/>
-          </a:p>
-        </p:txBody>
-      </p:sp>
-      <p:sp>
-        <p:nvSpPr>
-          <p:cNvPr id="8" name="Text 6"/>
-          <p:cNvSpPr/>
-          <p:nvPr/>
-        </p:nvSpPr>
-        <p:spPr>
-          <a:xfrm>
-            <a:off x="868680" y="1417320"/>
-            <a:ext cx="6675120" cy="4434840"/>
+            <a:endParaRPr lang="en-US" sz="3400" dirty="0"/>
+          </a:p>
+        </p:txBody>
+      </p:sp>
+      <p:sp>
+        <p:nvSpPr>
+          <p:cNvPr id="9" name="Text 7"/>
+          <p:cNvSpPr/>
+          <p:nvPr/>
+        </p:nvSpPr>
+        <p:spPr>
+          <a:xfrm>
+            <a:off x="868680" y="1508760"/>
+            <a:ext cx="6537960" cy="4160520"/>
           </a:xfrm>
           <a:prstGeom prst="rect">
             <a:avLst/>
@@ -14718,7 +15947,7 @@
           <a:lstStyle/>
           <a:p>
             <a:r>
-              <a:rPr lang="en-US" sz="1700" dirty="0">
+              <a:rPr lang="en-US" sz="2100" dirty="0">
                 <a:solidFill>
                   <a:srgbClr val="17364A"/>
                 </a:solidFill>
@@ -14728,11 +15957,11 @@
               </a:rPr>
               <a:t>Summarization.</a:t>
             </a:r>
-            <a:endParaRPr lang="en-US" sz="1700" dirty="0"/>
-          </a:p>
-          <a:p>
-            <a:r>
-              <a:rPr lang="en-US" sz="1700" dirty="0">
+            <a:endParaRPr lang="en-US" sz="2100" dirty="0"/>
+          </a:p>
+          <a:p>
+            <a:r>
+              <a:rPr lang="en-US" sz="2100" dirty="0">
                 <a:solidFill>
                   <a:srgbClr val="17364A"/>
                 </a:solidFill>
@@ -14742,11 +15971,11 @@
               </a:rPr>
               <a:t>Summarization creates a shorter version of longer text.</a:t>
             </a:r>
-            <a:endParaRPr lang="en-US" sz="1700" dirty="0"/>
-          </a:p>
-          <a:p>
-            <a:r>
-              <a:rPr lang="en-US" sz="1700" dirty="0">
+            <a:endParaRPr lang="en-US" sz="2100" dirty="0"/>
+          </a:p>
+          <a:p>
+            <a:r>
+              <a:rPr lang="en-US" sz="2100" dirty="0">
                 <a:solidFill>
                   <a:srgbClr val="17364A"/>
                 </a:solidFill>
@@ -14754,29 +15983,15 @@
                 <a:ea typeface="Aptos" pitchFamily="34" charset="-122"/>
                 <a:cs typeface="Aptos" pitchFamily="34" charset="-120"/>
               </a:rPr>
-              <a:t>Public health summarization should preserve uncertainty, cite sources when possible, and avoid adding unsupported claims.</a:t>
-            </a:r>
-            <a:endParaRPr lang="en-US" sz="1700" dirty="0"/>
-          </a:p>
-          <a:p>
-            <a:r>
-              <a:rPr lang="en-US" sz="1700" dirty="0">
-                <a:solidFill>
-                  <a:srgbClr val="17364A"/>
-                </a:solidFill>
-                <a:latin typeface="Aptos" pitchFamily="34" charset="0"/>
-                <a:ea typeface="Aptos" pitchFamily="34" charset="-122"/>
-                <a:cs typeface="Aptos" pitchFamily="34" charset="-120"/>
-              </a:rPr>
-              <a:t>Hallucination.</a:t>
-            </a:r>
-            <a:endParaRPr lang="en-US" sz="1700" dirty="0"/>
-          </a:p>
-        </p:txBody>
-      </p:sp>
-      <p:sp>
-        <p:nvSpPr>
-          <p:cNvPr id="9" name="Shape 7"/>
+              <a:t>Public health summarization should preserve uncertainty, cite sources when possible, and avoid adding.</a:t>
+            </a:r>
+            <a:endParaRPr lang="en-US" sz="2100" dirty="0"/>
+          </a:p>
+        </p:txBody>
+      </p:sp>
+      <p:sp>
+        <p:nvSpPr>
+          <p:cNvPr id="10" name="Shape 8"/>
           <p:cNvSpPr/>
           <p:nvPr/>
         </p:nvSpPr>
@@ -14803,14 +16018,14 @@
       </p:sp>
       <p:sp>
         <p:nvSpPr>
-          <p:cNvPr id="10" name="Text 8"/>
+          <p:cNvPr id="11" name="Text 9"/>
           <p:cNvSpPr/>
           <p:nvPr/>
         </p:nvSpPr>
         <p:spPr>
           <a:xfrm>
             <a:off x="8074152" y="1563624"/>
-            <a:ext cx="2825496" cy="201168"/>
+            <a:ext cx="2825496" cy="256032"/>
           </a:xfrm>
           <a:prstGeom prst="rect">
             <a:avLst/>
@@ -14826,7 +16041,7 @@
               <a:buNone/>
             </a:pPr>
             <a:r>
-              <a:rPr lang="en-US" sz="950" b="1" dirty="0">
+              <a:rPr lang="en-US" sz="1300" b="1" dirty="0">
                 <a:solidFill>
                   <a:srgbClr val="0068B7"/>
                 </a:solidFill>
@@ -14836,20 +16051,20 @@
               </a:rPr>
               <a:t>Key idea</a:t>
             </a:r>
-            <a:endParaRPr lang="en-US" sz="950" dirty="0"/>
-          </a:p>
-        </p:txBody>
-      </p:sp>
-      <p:sp>
-        <p:nvSpPr>
-          <p:cNvPr id="11" name="Text 9"/>
-          <p:cNvSpPr/>
-          <p:nvPr/>
-        </p:nvSpPr>
-        <p:spPr>
-          <a:xfrm>
-            <a:off x="8074152" y="1856232"/>
-            <a:ext cx="2825496" cy="1261872"/>
+            <a:endParaRPr lang="en-US" sz="1300" dirty="0"/>
+          </a:p>
+        </p:txBody>
+      </p:sp>
+      <p:sp>
+        <p:nvSpPr>
+          <p:cNvPr id="12" name="Text 10"/>
+          <p:cNvSpPr/>
+          <p:nvPr/>
+        </p:nvSpPr>
+        <p:spPr>
+          <a:xfrm>
+            <a:off x="8074152" y="1920240"/>
+            <a:ext cx="2825496" cy="1188720"/>
           </a:xfrm>
           <a:prstGeom prst="rect">
             <a:avLst/>
@@ -14867,7 +16082,7 @@
               <a:buNone/>
             </a:pPr>
             <a:r>
-              <a:rPr lang="en-US" sz="1250" dirty="0">
+              <a:rPr lang="en-US" sz="1550" dirty="0">
                 <a:solidFill>
                   <a:srgbClr val="17364A"/>
                 </a:solidFill>
@@ -14877,13 +16092,13 @@
               </a:rPr>
               <a:t>Summarization.</a:t>
             </a:r>
-            <a:endParaRPr lang="en-US" sz="1250" dirty="0"/>
-          </a:p>
-        </p:txBody>
-      </p:sp>
-      <p:sp>
-        <p:nvSpPr>
-          <p:cNvPr id="12" name="Shape 10"/>
+            <a:endParaRPr lang="en-US" sz="1550" dirty="0"/>
+          </a:p>
+        </p:txBody>
+      </p:sp>
+      <p:sp>
+        <p:nvSpPr>
+          <p:cNvPr id="13" name="Shape 11"/>
           <p:cNvSpPr/>
           <p:nvPr/>
         </p:nvSpPr>
@@ -14910,14 +16125,14 @@
       </p:sp>
       <p:sp>
         <p:nvSpPr>
-          <p:cNvPr id="13" name="Text 11"/>
+          <p:cNvPr id="14" name="Text 12"/>
           <p:cNvSpPr/>
           <p:nvPr/>
         </p:nvSpPr>
         <p:spPr>
           <a:xfrm>
             <a:off x="8074152" y="3666744"/>
-            <a:ext cx="2825496" cy="201168"/>
+            <a:ext cx="2825496" cy="256032"/>
           </a:xfrm>
           <a:prstGeom prst="rect">
             <a:avLst/>
@@ -14933,7 +16148,7 @@
               <a:buNone/>
             </a:pPr>
             <a:r>
-              <a:rPr lang="en-US" sz="950" b="1" dirty="0">
+              <a:rPr lang="en-US" sz="1300" b="1" dirty="0">
                 <a:solidFill>
                   <a:srgbClr val="0068B7"/>
                 </a:solidFill>
@@ -14943,20 +16158,20 @@
               </a:rPr>
               <a:t>Use this for</a:t>
             </a:r>
-            <a:endParaRPr lang="en-US" sz="950" dirty="0"/>
-          </a:p>
-        </p:txBody>
-      </p:sp>
-      <p:sp>
-        <p:nvSpPr>
-          <p:cNvPr id="14" name="Text 12"/>
-          <p:cNvSpPr/>
-          <p:nvPr/>
-        </p:nvSpPr>
-        <p:spPr>
-          <a:xfrm>
-            <a:off x="8074152" y="3959352"/>
-            <a:ext cx="2825496" cy="1170432"/>
+            <a:endParaRPr lang="en-US" sz="1300" dirty="0"/>
+          </a:p>
+        </p:txBody>
+      </p:sp>
+      <p:sp>
+        <p:nvSpPr>
+          <p:cNvPr id="15" name="Text 13"/>
+          <p:cNvSpPr/>
+          <p:nvPr/>
+        </p:nvSpPr>
+        <p:spPr>
+          <a:xfrm>
+            <a:off x="8074152" y="4023360"/>
+            <a:ext cx="2825496" cy="1097280"/>
           </a:xfrm>
           <a:prstGeom prst="rect">
             <a:avLst/>
@@ -14974,7 +16189,7 @@
               <a:buNone/>
             </a:pPr>
             <a:r>
-              <a:rPr lang="en-US" sz="1250" dirty="0">
+              <a:rPr lang="en-US" sz="1550" dirty="0">
                 <a:solidFill>
                   <a:srgbClr val="17364A"/>
                 </a:solidFill>
@@ -14984,7 +16199,7 @@
               </a:rPr>
               <a:t>Connect the concept to public health decisions, safeguards, documentation, or implementation work.</a:t>
             </a:r>
-            <a:endParaRPr lang="en-US" sz="1250" dirty="0"/>
+            <a:endParaRPr lang="en-US" sz="1550" dirty="0"/>
           </a:p>
         </p:txBody>
       </p:sp>
